--- a/summary/layout/금융구조도_모음.pptx
+++ b/summary/layout/금융구조도_모음.pptx
@@ -5,7 +5,7 @@
     <p:sldMasterId id="2147483660" r:id="rId1"/>
   </p:sldMasterIdLst>
   <p:notesMasterIdLst>
-    <p:notesMasterId r:id="rId13"/>
+    <p:notesMasterId r:id="rId15"/>
   </p:notesMasterIdLst>
   <p:sldIdLst>
     <p:sldId id="269" r:id="rId2"/>
@@ -19,6 +19,8 @@
     <p:sldId id="280" r:id="rId10"/>
     <p:sldId id="278" r:id="rId11"/>
     <p:sldId id="279" r:id="rId12"/>
+    <p:sldId id="281" r:id="rId13"/>
+    <p:sldId id="282" r:id="rId14"/>
   </p:sldIdLst>
   <p:sldSz cx="9906000" cy="6858000" type="A4"/>
   <p:notesSz cx="6858000" cy="9144000"/>
@@ -207,7 +209,7 @@
           <a:p>
             <a:fld id="{9DBF452A-3CC9-48B1-BC35-638BE28CD87B}" type="datetimeFigureOut">
               <a:rPr lang="ko-KR" altLang="en-US" smtClean="0"/>
-              <a:t>2026-08-21</a:t>
+              <a:t>2026-09-07</a:t>
             </a:fld>
             <a:endParaRPr lang="ko-KR" altLang="en-US"/>
           </a:p>
@@ -605,7 +607,7 @@
           <a:p>
             <a:fld id="{62E3A85F-5A81-4A2C-ADB7-CB9A7B252CB6}" type="datetimeFigureOut">
               <a:rPr lang="ko-KR" altLang="en-US" smtClean="0"/>
-              <a:t>2026-08-21</a:t>
+              <a:t>2026-09-07</a:t>
             </a:fld>
             <a:endParaRPr lang="ko-KR" altLang="en-US"/>
           </a:p>
@@ -775,7 +777,7 @@
           <a:p>
             <a:fld id="{62E3A85F-5A81-4A2C-ADB7-CB9A7B252CB6}" type="datetimeFigureOut">
               <a:rPr lang="ko-KR" altLang="en-US" smtClean="0"/>
-              <a:t>2026-08-21</a:t>
+              <a:t>2026-09-07</a:t>
             </a:fld>
             <a:endParaRPr lang="ko-KR" altLang="en-US"/>
           </a:p>
@@ -955,7 +957,7 @@
           <a:p>
             <a:fld id="{62E3A85F-5A81-4A2C-ADB7-CB9A7B252CB6}" type="datetimeFigureOut">
               <a:rPr lang="ko-KR" altLang="en-US" smtClean="0"/>
-              <a:t>2026-08-21</a:t>
+              <a:t>2026-09-07</a:t>
             </a:fld>
             <a:endParaRPr lang="ko-KR" altLang="en-US"/>
           </a:p>
@@ -1125,7 +1127,7 @@
           <a:p>
             <a:fld id="{62E3A85F-5A81-4A2C-ADB7-CB9A7B252CB6}" type="datetimeFigureOut">
               <a:rPr lang="ko-KR" altLang="en-US" smtClean="0"/>
-              <a:t>2026-08-21</a:t>
+              <a:t>2026-09-07</a:t>
             </a:fld>
             <a:endParaRPr lang="ko-KR" altLang="en-US"/>
           </a:p>
@@ -1369,7 +1371,7 @@
           <a:p>
             <a:fld id="{62E3A85F-5A81-4A2C-ADB7-CB9A7B252CB6}" type="datetimeFigureOut">
               <a:rPr lang="ko-KR" altLang="en-US" smtClean="0"/>
-              <a:t>2026-08-21</a:t>
+              <a:t>2026-09-07</a:t>
             </a:fld>
             <a:endParaRPr lang="ko-KR" altLang="en-US"/>
           </a:p>
@@ -1601,7 +1603,7 @@
           <a:p>
             <a:fld id="{62E3A85F-5A81-4A2C-ADB7-CB9A7B252CB6}" type="datetimeFigureOut">
               <a:rPr lang="ko-KR" altLang="en-US" smtClean="0"/>
-              <a:t>2026-08-21</a:t>
+              <a:t>2026-09-07</a:t>
             </a:fld>
             <a:endParaRPr lang="ko-KR" altLang="en-US"/>
           </a:p>
@@ -1968,7 +1970,7 @@
           <a:p>
             <a:fld id="{62E3A85F-5A81-4A2C-ADB7-CB9A7B252CB6}" type="datetimeFigureOut">
               <a:rPr lang="ko-KR" altLang="en-US" smtClean="0"/>
-              <a:t>2026-08-21</a:t>
+              <a:t>2026-09-07</a:t>
             </a:fld>
             <a:endParaRPr lang="ko-KR" altLang="en-US"/>
           </a:p>
@@ -2086,7 +2088,7 @@
           <a:p>
             <a:fld id="{62E3A85F-5A81-4A2C-ADB7-CB9A7B252CB6}" type="datetimeFigureOut">
               <a:rPr lang="ko-KR" altLang="en-US" smtClean="0"/>
-              <a:t>2026-08-21</a:t>
+              <a:t>2026-09-07</a:t>
             </a:fld>
             <a:endParaRPr lang="ko-KR" altLang="en-US"/>
           </a:p>
@@ -2181,7 +2183,7 @@
           <a:p>
             <a:fld id="{62E3A85F-5A81-4A2C-ADB7-CB9A7B252CB6}" type="datetimeFigureOut">
               <a:rPr lang="ko-KR" altLang="en-US" smtClean="0"/>
-              <a:t>2026-08-21</a:t>
+              <a:t>2026-09-07</a:t>
             </a:fld>
             <a:endParaRPr lang="ko-KR" altLang="en-US"/>
           </a:p>
@@ -2458,7 +2460,7 @@
           <a:p>
             <a:fld id="{62E3A85F-5A81-4A2C-ADB7-CB9A7B252CB6}" type="datetimeFigureOut">
               <a:rPr lang="ko-KR" altLang="en-US" smtClean="0"/>
-              <a:t>2026-08-21</a:t>
+              <a:t>2026-09-07</a:t>
             </a:fld>
             <a:endParaRPr lang="ko-KR" altLang="en-US"/>
           </a:p>
@@ -2715,7 +2717,7 @@
           <a:p>
             <a:fld id="{62E3A85F-5A81-4A2C-ADB7-CB9A7B252CB6}" type="datetimeFigureOut">
               <a:rPr lang="ko-KR" altLang="en-US" smtClean="0"/>
-              <a:t>2026-08-21</a:t>
+              <a:t>2026-09-07</a:t>
             </a:fld>
             <a:endParaRPr lang="ko-KR" altLang="en-US"/>
           </a:p>
@@ -2928,7 +2930,7 @@
           <a:p>
             <a:fld id="{62E3A85F-5A81-4A2C-ADB7-CB9A7B252CB6}" type="datetimeFigureOut">
               <a:rPr lang="ko-KR" altLang="en-US" smtClean="0"/>
-              <a:t>2026-08-21</a:t>
+              <a:t>2026-09-07</a:t>
             </a:fld>
             <a:endParaRPr lang="ko-KR" altLang="en-US"/>
           </a:p>
@@ -10318,6 +10320,8583 @@
     <p:extLst>
       <p:ext uri="{BB962C8B-B14F-4D97-AF65-F5344CB8AC3E}">
         <p14:creationId xmlns:p14="http://schemas.microsoft.com/office/powerpoint/2010/main" val="4281329471"/>
+      </p:ext>
+    </p:extLst>
+  </p:cSld>
+  <p:clrMapOvr>
+    <a:masterClrMapping/>
+  </p:clrMapOvr>
+</p:sld>
+</file>
+
+<file path=ppt/slides/slide12.xml><?xml version="1.0" encoding="utf-8"?>
+<p:sld xmlns:a="http://schemas.openxmlformats.org/drawingml/2006/main" xmlns:r="http://schemas.openxmlformats.org/officeDocument/2006/relationships" xmlns:p="http://schemas.openxmlformats.org/presentationml/2006/main">
+  <p:cSld>
+    <p:spTree>
+      <p:nvGrpSpPr>
+        <p:cNvPr id="1" name=""/>
+        <p:cNvGrpSpPr/>
+        <p:nvPr/>
+      </p:nvGrpSpPr>
+      <p:grpSpPr>
+        <a:xfrm>
+          <a:off x="0" y="0"/>
+          <a:ext cx="0" cy="0"/>
+          <a:chOff x="0" y="0"/>
+          <a:chExt cx="0" cy="0"/>
+        </a:xfrm>
+      </p:grpSpPr>
+      <p:pic>
+        <p:nvPicPr>
+          <p:cNvPr id="36" name="그림 35">
+            <a:extLst>
+              <a:ext uri="{FF2B5EF4-FFF2-40B4-BE49-F238E27FC236}">
+                <a16:creationId xmlns:a16="http://schemas.microsoft.com/office/drawing/2014/main" id="{49F0D632-9C35-4CC7-ABDB-2357C9C418E5}"/>
+              </a:ext>
+            </a:extLst>
+          </p:cNvPr>
+          <p:cNvPicPr>
+            <a:picLocks noChangeAspect="1"/>
+          </p:cNvPicPr>
+          <p:nvPr/>
+        </p:nvPicPr>
+        <p:blipFill>
+          <a:blip r:embed="rId2"/>
+          <a:stretch>
+            <a:fillRect/>
+          </a:stretch>
+        </p:blipFill>
+        <p:spPr>
+          <a:xfrm>
+            <a:off x="224600" y="203200"/>
+            <a:ext cx="1415504" cy="107950"/>
+          </a:xfrm>
+          <a:prstGeom prst="rect">
+            <a:avLst/>
+          </a:prstGeom>
+        </p:spPr>
+      </p:pic>
+      <p:sp>
+        <p:nvSpPr>
+          <p:cNvPr id="29" name="액자 28">
+            <a:extLst>
+              <a:ext uri="{FF2B5EF4-FFF2-40B4-BE49-F238E27FC236}">
+                <a16:creationId xmlns:a16="http://schemas.microsoft.com/office/drawing/2014/main" id="{DD26EF3D-6FEC-4A5D-B47C-2ABBC82E6065}"/>
+              </a:ext>
+            </a:extLst>
+          </p:cNvPr>
+          <p:cNvSpPr/>
+          <p:nvPr/>
+        </p:nvSpPr>
+        <p:spPr>
+          <a:xfrm>
+            <a:off x="108858" y="113933"/>
+            <a:ext cx="9673771" cy="6630135"/>
+          </a:xfrm>
+          <a:prstGeom prst="frame">
+            <a:avLst>
+              <a:gd name="adj1" fmla="val 0"/>
+            </a:avLst>
+          </a:prstGeom>
+        </p:spPr>
+        <p:style>
+          <a:lnRef idx="2">
+            <a:schemeClr val="accent1">
+              <a:shade val="50000"/>
+            </a:schemeClr>
+          </a:lnRef>
+          <a:fillRef idx="1">
+            <a:schemeClr val="accent1"/>
+          </a:fillRef>
+          <a:effectRef idx="0">
+            <a:schemeClr val="accent1"/>
+          </a:effectRef>
+          <a:fontRef idx="minor">
+            <a:schemeClr val="lt1"/>
+          </a:fontRef>
+        </p:style>
+        <p:txBody>
+          <a:bodyPr rtlCol="0" anchor="ctr"/>
+          <a:lstStyle/>
+          <a:p>
+            <a:pPr algn="ctr"/>
+            <a:endParaRPr lang="ko-KR" altLang="en-US">
+              <a:solidFill>
+                <a:schemeClr val="tx1"/>
+              </a:solidFill>
+            </a:endParaRPr>
+          </a:p>
+        </p:txBody>
+      </p:sp>
+      <p:sp>
+        <p:nvSpPr>
+          <p:cNvPr id="2" name="TextBox 1">
+            <a:extLst>
+              <a:ext uri="{FF2B5EF4-FFF2-40B4-BE49-F238E27FC236}">
+                <a16:creationId xmlns:a16="http://schemas.microsoft.com/office/drawing/2014/main" id="{07195E0F-D49C-4C2F-8051-B3237C00DAE3}"/>
+              </a:ext>
+            </a:extLst>
+          </p:cNvPr>
+          <p:cNvSpPr txBox="1"/>
+          <p:nvPr/>
+        </p:nvSpPr>
+        <p:spPr>
+          <a:xfrm>
+            <a:off x="224600" y="400417"/>
+            <a:ext cx="1338828" cy="369332"/>
+          </a:xfrm>
+          <a:prstGeom prst="rect">
+            <a:avLst/>
+          </a:prstGeom>
+          <a:noFill/>
+        </p:spPr>
+        <p:txBody>
+          <a:bodyPr wrap="none" rtlCol="0">
+            <a:spAutoFit/>
+          </a:bodyPr>
+          <a:lstStyle/>
+          <a:p>
+            <a:r>
+              <a:rPr lang="en-US" altLang="ko-KR" dirty="0">
+                <a:latin typeface="피플폰트 Bold" panose="020B0600000101010101" pitchFamily="50" charset="-127"/>
+                <a:ea typeface="피플폰트 Bold" panose="020B0600000101010101" pitchFamily="50" charset="-127"/>
+              </a:rPr>
+              <a:t>12. </a:t>
+            </a:r>
+            <a:r>
+              <a:rPr lang="ko-KR" altLang="en-US" dirty="0">
+                <a:latin typeface="피플폰트 Bold" panose="020B0600000101010101" pitchFamily="50" charset="-127"/>
+                <a:ea typeface="피플폰트 Bold" panose="020B0600000101010101" pitchFamily="50" charset="-127"/>
+              </a:rPr>
+              <a:t>담보대출</a:t>
+            </a:r>
+          </a:p>
+        </p:txBody>
+      </p:sp>
+      <p:sp>
+        <p:nvSpPr>
+          <p:cNvPr id="25" name="직사각형 24">
+            <a:extLst>
+              <a:ext uri="{FF2B5EF4-FFF2-40B4-BE49-F238E27FC236}">
+                <a16:creationId xmlns:a16="http://schemas.microsoft.com/office/drawing/2014/main" id="{CF71F7F5-4544-4150-B0DD-A5731DD2C9EA}"/>
+              </a:ext>
+            </a:extLst>
+          </p:cNvPr>
+          <p:cNvSpPr/>
+          <p:nvPr/>
+        </p:nvSpPr>
+        <p:spPr>
+          <a:xfrm>
+            <a:off x="4848995" y="1926149"/>
+            <a:ext cx="2409326" cy="3978320"/>
+          </a:xfrm>
+          <a:prstGeom prst="rect">
+            <a:avLst/>
+          </a:prstGeom>
+          <a:solidFill>
+            <a:schemeClr val="bg1">
+              <a:lumMod val="95000"/>
+            </a:schemeClr>
+          </a:solidFill>
+          <a:ln>
+            <a:noFill/>
+          </a:ln>
+          <a:effectLst>
+            <a:outerShdw blurRad="50800" dist="38100" dir="5400000" algn="t" rotWithShape="0">
+              <a:prstClr val="black">
+                <a:alpha val="40000"/>
+              </a:prstClr>
+            </a:outerShdw>
+          </a:effectLst>
+        </p:spPr>
+        <p:txBody>
+          <a:bodyPr rtlCol="0" anchor="ctr"/>
+          <a:lstStyle/>
+          <a:p>
+            <a:pPr algn="ctr"/>
+            <a:endParaRPr lang="ko-KR" altLang="en-US"/>
+          </a:p>
+        </p:txBody>
+      </p:sp>
+      <p:sp>
+        <p:nvSpPr>
+          <p:cNvPr id="26" name="TextBox 25">
+            <a:extLst>
+              <a:ext uri="{FF2B5EF4-FFF2-40B4-BE49-F238E27FC236}">
+                <a16:creationId xmlns:a16="http://schemas.microsoft.com/office/drawing/2014/main" id="{ADDC79B9-A5E7-4679-AC9B-F094AC0492C4}"/>
+              </a:ext>
+            </a:extLst>
+          </p:cNvPr>
+          <p:cNvSpPr txBox="1"/>
+          <p:nvPr/>
+        </p:nvSpPr>
+        <p:spPr>
+          <a:xfrm>
+            <a:off x="4918407" y="1952159"/>
+            <a:ext cx="2256402" cy="246221"/>
+          </a:xfrm>
+          <a:prstGeom prst="rect">
+            <a:avLst/>
+          </a:prstGeom>
+          <a:noFill/>
+        </p:spPr>
+        <p:txBody>
+          <a:bodyPr wrap="square">
+            <a:spAutoFit/>
+          </a:bodyPr>
+          <a:lstStyle/>
+          <a:p>
+            <a:pPr algn="ctr">
+              <a:defRPr/>
+            </a:pPr>
+            <a:r>
+              <a:rPr lang="ko-KR" altLang="en-US" sz="1000" b="1" u="sng" dirty="0">
+                <a:latin typeface="피플폰트 Bold"/>
+                <a:ea typeface="피플폰트 Bold"/>
+              </a:rPr>
+              <a:t>8,500억원</a:t>
+            </a:r>
+          </a:p>
+        </p:txBody>
+      </p:sp>
+      <p:graphicFrame>
+        <p:nvGraphicFramePr>
+          <p:cNvPr id="27" name="표 4">
+            <a:extLst>
+              <a:ext uri="{FF2B5EF4-FFF2-40B4-BE49-F238E27FC236}">
+                <a16:creationId xmlns:a16="http://schemas.microsoft.com/office/drawing/2014/main" id="{4B688789-2DF2-4300-A475-30DD0465585E}"/>
+              </a:ext>
+            </a:extLst>
+          </p:cNvPr>
+          <p:cNvGraphicFramePr>
+            <a:graphicFrameLocks noGrp="1"/>
+          </p:cNvGraphicFramePr>
+          <p:nvPr>
+            <p:extLst>
+              <p:ext uri="{D42A27DB-BD31-4B8C-83A1-F6EECF244321}">
+                <p14:modId xmlns:p14="http://schemas.microsoft.com/office/powerpoint/2010/main" val="3038331735"/>
+              </p:ext>
+            </p:extLst>
+          </p:nvPr>
+        </p:nvGraphicFramePr>
+        <p:xfrm>
+          <a:off x="535971" y="2834618"/>
+          <a:ext cx="1915993" cy="695944"/>
+        </p:xfrm>
+        <a:graphic>
+          <a:graphicData uri="http://schemas.openxmlformats.org/drawingml/2006/table">
+            <a:tbl>
+              <a:tblPr firstRow="1" bandRow="1">
+                <a:effectLst>
+                  <a:outerShdw blurRad="50800" dist="38100" dir="2700000" algn="tl" rotWithShape="0">
+                    <a:prstClr val="black">
+                      <a:alpha val="40000"/>
+                    </a:prstClr>
+                  </a:outerShdw>
+                </a:effectLst>
+                <a:tableStyleId>{D03447BB-5D67-496B-8E87-E561075AD55C}</a:tableStyleId>
+              </a:tblPr>
+              <a:tblGrid>
+                <a:gridCol w="1915993">
+                  <a:extLst>
+                    <a:ext uri="{9D8B030D-6E8A-4147-A177-3AD203B41FA5}">
+                      <a16:colId xmlns:a16="http://schemas.microsoft.com/office/drawing/2014/main" val="20000"/>
+                    </a:ext>
+                  </a:extLst>
+                </a:gridCol>
+              </a:tblGrid>
+              <a:tr h="333570">
+                <a:tc>
+                  <a:txBody>
+                    <a:bodyPr/>
+                    <a:lstStyle/>
+                    <a:p>
+                      <a:pPr algn="ctr" latinLnBrk="1">
+                        <a:defRPr/>
+                      </a:pPr>
+                      <a:r>
+                        <a:rPr lang="ko-KR" altLang="en-US" sz="1200" dirty="0">
+                          <a:latin typeface="피플폰트 Bold" panose="020B0600000101010101" pitchFamily="50" charset="-127"/>
+                          <a:ea typeface="피플폰트 Bold" panose="020B0600000101010101" pitchFamily="50" charset="-127"/>
+                        </a:rPr>
+                        <a:t>차주 및 시행사</a:t>
+                      </a:r>
+                    </a:p>
+                  </a:txBody>
+                  <a:tcPr marL="171674" marR="171674" marT="78033" marB="78033" anchor="ctr">
+                    <a:lnL w="28575" cap="flat" cmpd="sng" algn="ctr">
+                      <a:solidFill>
+                        <a:schemeClr val="bg1"/>
+                      </a:solidFill>
+                      <a:prstDash val="solid"/>
+                      <a:round/>
+                      <a:headEnd type="none" w="med" len="med"/>
+                      <a:tailEnd type="none" w="med" len="med"/>
+                    </a:lnL>
+                    <a:lnR w="28575" cap="flat" cmpd="sng" algn="ctr">
+                      <a:solidFill>
+                        <a:schemeClr val="bg1"/>
+                      </a:solidFill>
+                      <a:prstDash val="solid"/>
+                      <a:round/>
+                      <a:headEnd type="none" w="med" len="med"/>
+                      <a:tailEnd type="none" w="med" len="med"/>
+                    </a:lnR>
+                    <a:lnT w="28575" cap="flat" cmpd="sng" algn="ctr">
+                      <a:solidFill>
+                        <a:schemeClr val="bg1"/>
+                      </a:solidFill>
+                      <a:prstDash val="solid"/>
+                      <a:round/>
+                      <a:headEnd type="none" w="med" len="med"/>
+                      <a:tailEnd type="none" w="med" len="med"/>
+                    </a:lnT>
+                    <a:lnB w="28575" cap="flat" cmpd="sng" algn="ctr">
+                      <a:solidFill>
+                        <a:schemeClr val="bg1"/>
+                      </a:solidFill>
+                      <a:prstDash val="solid"/>
+                      <a:round/>
+                      <a:headEnd type="none" w="med" len="med"/>
+                      <a:tailEnd type="none" w="med" len="med"/>
+                    </a:lnB>
+                    <a:solidFill>
+                      <a:srgbClr val="002E56"/>
+                    </a:solidFill>
+                  </a:tcPr>
+                </a:tc>
+                <a:extLst>
+                  <a:ext uri="{0D108BD9-81ED-4DB2-BD59-A6C34878D82A}">
+                    <a16:rowId xmlns:a16="http://schemas.microsoft.com/office/drawing/2014/main" val="10000"/>
+                  </a:ext>
+                </a:extLst>
+              </a:tr>
+              <a:tr h="356998">
+                <a:tc>
+                  <a:txBody>
+                    <a:bodyPr/>
+                    <a:lstStyle/>
+                    <a:p>
+                      <a:pPr algn="ctr" latinLnBrk="1">
+                        <a:defRPr/>
+                      </a:pPr>
+                      <a:r>
+                        <a:rPr lang="ko-KR" altLang="en-US" sz="1400" b="1" dirty="0" err="1">
+                          <a:solidFill>
+                            <a:schemeClr val="tx1"/>
+                          </a:solidFill>
+                          <a:latin typeface="피플폰트 Bold" panose="020B0600000101010101" pitchFamily="50" charset="-127"/>
+                          <a:ea typeface="피플폰트 Bold" panose="020B0600000101010101" pitchFamily="50" charset="-127"/>
+                        </a:rPr>
+                        <a:t>헌인타운개발</a:t>
+                      </a:r>
+                      <a:r>
+                        <a:rPr lang="ko-KR" altLang="en-US" sz="1400" b="1" dirty="0">
+                          <a:solidFill>
+                            <a:schemeClr val="tx1"/>
+                          </a:solidFill>
+                          <a:latin typeface="피플폰트 Bold" panose="020B0600000101010101" pitchFamily="50" charset="-127"/>
+                          <a:ea typeface="피플폰트 Bold" panose="020B0600000101010101" pitchFamily="50" charset="-127"/>
+                        </a:rPr>
+                        <a:t>㈜</a:t>
+                      </a:r>
+                      <a:endParaRPr lang="ko-KR" altLang="en-US" sz="1600" b="1" dirty="0">
+                        <a:solidFill>
+                          <a:schemeClr val="tx1"/>
+                        </a:solidFill>
+                        <a:latin typeface="피플폰트 Bold" panose="020B0600000101010101" pitchFamily="50" charset="-127"/>
+                        <a:ea typeface="피플폰트 Bold" panose="020B0600000101010101" pitchFamily="50" charset="-127"/>
+                      </a:endParaRPr>
+                    </a:p>
+                  </a:txBody>
+                  <a:tcPr marL="0" marR="0" marT="72000" marB="0">
+                    <a:lnL w="28575" cap="flat" cmpd="sng" algn="ctr">
+                      <a:solidFill>
+                        <a:schemeClr val="bg1"/>
+                      </a:solidFill>
+                      <a:prstDash val="solid"/>
+                      <a:round/>
+                      <a:headEnd type="none" w="med" len="med"/>
+                      <a:tailEnd type="none" w="med" len="med"/>
+                    </a:lnL>
+                    <a:lnR w="28575" cap="flat" cmpd="sng" algn="ctr">
+                      <a:solidFill>
+                        <a:schemeClr val="bg1"/>
+                      </a:solidFill>
+                      <a:prstDash val="solid"/>
+                      <a:round/>
+                      <a:headEnd type="none" w="med" len="med"/>
+                      <a:tailEnd type="none" w="med" len="med"/>
+                    </a:lnR>
+                    <a:lnT w="28575" cap="flat" cmpd="sng" algn="ctr">
+                      <a:solidFill>
+                        <a:schemeClr val="bg1"/>
+                      </a:solidFill>
+                      <a:prstDash val="solid"/>
+                      <a:round/>
+                      <a:headEnd type="none" w="med" len="med"/>
+                      <a:tailEnd type="none" w="med" len="med"/>
+                    </a:lnT>
+                    <a:lnB w="28575" cap="flat" cmpd="sng" algn="ctr">
+                      <a:solidFill>
+                        <a:schemeClr val="bg1"/>
+                      </a:solidFill>
+                      <a:prstDash val="solid"/>
+                      <a:round/>
+                      <a:headEnd type="none" w="med" len="med"/>
+                      <a:tailEnd type="none" w="med" len="med"/>
+                    </a:lnB>
+                    <a:solidFill>
+                      <a:srgbClr val="D9D9D9"/>
+                    </a:solidFill>
+                  </a:tcPr>
+                </a:tc>
+                <a:extLst>
+                  <a:ext uri="{0D108BD9-81ED-4DB2-BD59-A6C34878D82A}">
+                    <a16:rowId xmlns:a16="http://schemas.microsoft.com/office/drawing/2014/main" val="10001"/>
+                  </a:ext>
+                </a:extLst>
+              </a:tr>
+            </a:tbl>
+          </a:graphicData>
+        </a:graphic>
+      </p:graphicFrame>
+      <p:graphicFrame>
+        <p:nvGraphicFramePr>
+          <p:cNvPr id="28" name="표 4">
+            <a:extLst>
+              <a:ext uri="{FF2B5EF4-FFF2-40B4-BE49-F238E27FC236}">
+                <a16:creationId xmlns:a16="http://schemas.microsoft.com/office/drawing/2014/main" id="{6BCBD668-9E5A-4965-BBD2-D85388EDD191}"/>
+              </a:ext>
+            </a:extLst>
+          </p:cNvPr>
+          <p:cNvGraphicFramePr>
+            <a:graphicFrameLocks noGrp="1"/>
+          </p:cNvGraphicFramePr>
+          <p:nvPr>
+            <p:extLst>
+              <p:ext uri="{D42A27DB-BD31-4B8C-83A1-F6EECF244321}">
+                <p14:modId xmlns:p14="http://schemas.microsoft.com/office/powerpoint/2010/main" val="1153198990"/>
+              </p:ext>
+            </p:extLst>
+          </p:nvPr>
+        </p:nvGraphicFramePr>
+        <p:xfrm>
+          <a:off x="4981421" y="3998163"/>
+          <a:ext cx="2130374" cy="823844"/>
+        </p:xfrm>
+        <a:graphic>
+          <a:graphicData uri="http://schemas.openxmlformats.org/drawingml/2006/table">
+            <a:tbl>
+              <a:tblPr firstRow="1" bandRow="1">
+                <a:effectLst>
+                  <a:outerShdw blurRad="50800" dist="38100" dir="2700000" algn="tl" rotWithShape="0">
+                    <a:prstClr val="black">
+                      <a:alpha val="40000"/>
+                    </a:prstClr>
+                  </a:outerShdw>
+                </a:effectLst>
+                <a:tableStyleId>{D03447BB-5D67-496B-8E87-E561075AD55C}</a:tableStyleId>
+              </a:tblPr>
+              <a:tblGrid>
+                <a:gridCol w="2130374">
+                  <a:extLst>
+                    <a:ext uri="{9D8B030D-6E8A-4147-A177-3AD203B41FA5}">
+                      <a16:colId xmlns:a16="http://schemas.microsoft.com/office/drawing/2014/main" val="20000"/>
+                    </a:ext>
+                  </a:extLst>
+                </a:gridCol>
+              </a:tblGrid>
+              <a:tr h="0">
+                <a:tc>
+                  <a:txBody>
+                    <a:bodyPr/>
+                    <a:lstStyle/>
+                    <a:p>
+                      <a:pPr algn="ctr" latinLnBrk="1">
+                        <a:defRPr/>
+                      </a:pPr>
+                      <a:r>
+                        <a:rPr lang="en-US" altLang="ko-KR" sz="1000" dirty="0">
+                          <a:latin typeface="피플폰트 Bold" panose="020B0600000101010101" pitchFamily="50" charset="-127"/>
+                          <a:ea typeface="피플폰트 Bold" panose="020B0600000101010101" pitchFamily="50" charset="-127"/>
+                        </a:rPr>
+                        <a:t>Tr. B 3,900억원</a:t>
+                      </a:r>
+                      <a:endParaRPr lang="ko-KR" altLang="en-US" sz="1000" dirty="0">
+                        <a:latin typeface="피플폰트 Bold" panose="020B0600000101010101" pitchFamily="50" charset="-127"/>
+                        <a:ea typeface="피플폰트 Bold" panose="020B0600000101010101" pitchFamily="50" charset="-127"/>
+                      </a:endParaRPr>
+                    </a:p>
+                  </a:txBody>
+                  <a:tcPr marL="152842" marR="152842" marT="76421" marB="76421" anchor="ctr">
+                    <a:lnL w="28575" cap="flat" cmpd="sng" algn="ctr">
+                      <a:solidFill>
+                        <a:schemeClr val="bg1"/>
+                      </a:solidFill>
+                      <a:prstDash val="solid"/>
+                      <a:round/>
+                      <a:headEnd type="none" w="med" len="med"/>
+                      <a:tailEnd type="none" w="med" len="med"/>
+                    </a:lnL>
+                    <a:lnR w="28575" cap="flat" cmpd="sng" algn="ctr">
+                      <a:solidFill>
+                        <a:schemeClr val="bg1"/>
+                      </a:solidFill>
+                      <a:prstDash val="solid"/>
+                      <a:round/>
+                      <a:headEnd type="none" w="med" len="med"/>
+                      <a:tailEnd type="none" w="med" len="med"/>
+                    </a:lnR>
+                    <a:lnT w="28575" cap="flat" cmpd="sng" algn="ctr">
+                      <a:solidFill>
+                        <a:schemeClr val="bg1"/>
+                      </a:solidFill>
+                      <a:prstDash val="solid"/>
+                      <a:round/>
+                      <a:headEnd type="none" w="med" len="med"/>
+                      <a:tailEnd type="none" w="med" len="med"/>
+                    </a:lnT>
+                    <a:lnB w="28575" cap="flat" cmpd="sng" algn="ctr">
+                      <a:solidFill>
+                        <a:schemeClr val="bg1"/>
+                      </a:solidFill>
+                      <a:prstDash val="solid"/>
+                      <a:round/>
+                      <a:headEnd type="none" w="med" len="med"/>
+                      <a:tailEnd type="none" w="med" len="med"/>
+                    </a:lnB>
+                    <a:solidFill>
+                      <a:srgbClr val="08377C"/>
+                    </a:solidFill>
+                  </a:tcPr>
+                </a:tc>
+                <a:extLst>
+                  <a:ext uri="{0D108BD9-81ED-4DB2-BD59-A6C34878D82A}">
+                    <a16:rowId xmlns:a16="http://schemas.microsoft.com/office/drawing/2014/main" val="10000"/>
+                  </a:ext>
+                </a:extLst>
+              </a:tr>
+              <a:tr h="0">
+                <a:tc>
+                  <a:txBody>
+                    <a:bodyPr/>
+                    <a:lstStyle/>
+                    <a:p>
+                      <a:pPr algn="ctr" latinLnBrk="1">
+                        <a:defRPr/>
+                      </a:pPr>
+                      <a:endParaRPr lang="en-US" altLang="ko-KR" sz="1200" b="1" dirty="0">
+                        <a:solidFill>
+                          <a:schemeClr val="tx1"/>
+                        </a:solidFill>
+                        <a:latin typeface="피플폰트 Bold" panose="020B0600000101010101" pitchFamily="50" charset="-127"/>
+                        <a:ea typeface="피플폰트 Bold" panose="020B0600000101010101" pitchFamily="50" charset="-127"/>
+                      </a:endParaRPr>
+                    </a:p>
+                    <a:p>
+                      <a:pPr algn="ctr" latinLnBrk="1">
+                        <a:defRPr/>
+                      </a:pPr>
+                      <a:endParaRPr lang="en-US" altLang="ko-KR" sz="1200" b="1" dirty="0">
+                        <a:solidFill>
+                          <a:schemeClr val="tx1"/>
+                        </a:solidFill>
+                        <a:latin typeface="피플폰트 Bold" panose="020B0600000101010101" pitchFamily="50" charset="-127"/>
+                        <a:ea typeface="피플폰트 Bold" panose="020B0600000101010101" pitchFamily="50" charset="-127"/>
+                      </a:endParaRPr>
+                    </a:p>
+                  </a:txBody>
+                  <a:tcPr marL="152842" marR="152842" marT="76421" marB="76421" anchor="ctr">
+                    <a:lnL w="28575" cap="flat" cmpd="sng" algn="ctr">
+                      <a:solidFill>
+                        <a:schemeClr val="bg1"/>
+                      </a:solidFill>
+                      <a:prstDash val="solid"/>
+                      <a:round/>
+                      <a:headEnd type="none" w="med" len="med"/>
+                      <a:tailEnd type="none" w="med" len="med"/>
+                    </a:lnL>
+                    <a:lnR w="28575" cap="flat" cmpd="sng" algn="ctr">
+                      <a:solidFill>
+                        <a:schemeClr val="bg1"/>
+                      </a:solidFill>
+                      <a:prstDash val="solid"/>
+                      <a:round/>
+                      <a:headEnd type="none" w="med" len="med"/>
+                      <a:tailEnd type="none" w="med" len="med"/>
+                    </a:lnR>
+                    <a:lnT w="28575" cap="flat" cmpd="sng" algn="ctr">
+                      <a:solidFill>
+                        <a:schemeClr val="bg1"/>
+                      </a:solidFill>
+                      <a:prstDash val="solid"/>
+                      <a:round/>
+                      <a:headEnd type="none" w="med" len="med"/>
+                      <a:tailEnd type="none" w="med" len="med"/>
+                    </a:lnT>
+                    <a:lnB w="28575" cap="flat" cmpd="sng" algn="ctr">
+                      <a:solidFill>
+                        <a:schemeClr val="bg1"/>
+                      </a:solidFill>
+                      <a:prstDash val="solid"/>
+                      <a:round/>
+                      <a:headEnd type="none" w="med" len="med"/>
+                      <a:tailEnd type="none" w="med" len="med"/>
+                    </a:lnB>
+                    <a:solidFill>
+                      <a:srgbClr val="D9D9D9"/>
+                    </a:solidFill>
+                  </a:tcPr>
+                </a:tc>
+                <a:extLst>
+                  <a:ext uri="{0D108BD9-81ED-4DB2-BD59-A6C34878D82A}">
+                    <a16:rowId xmlns:a16="http://schemas.microsoft.com/office/drawing/2014/main" val="10001"/>
+                  </a:ext>
+                </a:extLst>
+              </a:tr>
+            </a:tbl>
+          </a:graphicData>
+        </a:graphic>
+      </p:graphicFrame>
+      <p:graphicFrame>
+        <p:nvGraphicFramePr>
+          <p:cNvPr id="30" name="표 4">
+            <a:extLst>
+              <a:ext uri="{FF2B5EF4-FFF2-40B4-BE49-F238E27FC236}">
+                <a16:creationId xmlns:a16="http://schemas.microsoft.com/office/drawing/2014/main" id="{BE6D325E-9B7F-4112-9B60-0DBE193334EF}"/>
+              </a:ext>
+            </a:extLst>
+          </p:cNvPr>
+          <p:cNvGraphicFramePr>
+            <a:graphicFrameLocks noGrp="1"/>
+          </p:cNvGraphicFramePr>
+          <p:nvPr>
+            <p:extLst>
+              <p:ext uri="{D42A27DB-BD31-4B8C-83A1-F6EECF244321}">
+                <p14:modId xmlns:p14="http://schemas.microsoft.com/office/powerpoint/2010/main" val="3944064028"/>
+              </p:ext>
+            </p:extLst>
+          </p:nvPr>
+        </p:nvGraphicFramePr>
+        <p:xfrm>
+          <a:off x="535970" y="3955639"/>
+          <a:ext cx="1915993" cy="952759"/>
+        </p:xfrm>
+        <a:graphic>
+          <a:graphicData uri="http://schemas.openxmlformats.org/drawingml/2006/table">
+            <a:tbl>
+              <a:tblPr firstRow="1" bandRow="1">
+                <a:effectLst>
+                  <a:outerShdw blurRad="50800" dist="38100" dir="2700000" algn="tl" rotWithShape="0">
+                    <a:prstClr val="black">
+                      <a:alpha val="40000"/>
+                    </a:prstClr>
+                  </a:outerShdw>
+                </a:effectLst>
+                <a:tableStyleId>{D03447BB-5D67-496B-8E87-E561075AD55C}</a:tableStyleId>
+              </a:tblPr>
+              <a:tblGrid>
+                <a:gridCol w="1915993">
+                  <a:extLst>
+                    <a:ext uri="{9D8B030D-6E8A-4147-A177-3AD203B41FA5}">
+                      <a16:colId xmlns:a16="http://schemas.microsoft.com/office/drawing/2014/main" val="20000"/>
+                    </a:ext>
+                  </a:extLst>
+                </a:gridCol>
+              </a:tblGrid>
+              <a:tr h="377839">
+                <a:tc>
+                  <a:txBody>
+                    <a:bodyPr/>
+                    <a:lstStyle/>
+                    <a:p>
+                      <a:pPr algn="ctr" latinLnBrk="1">
+                        <a:defRPr/>
+                      </a:pPr>
+                      <a:r>
+                        <a:rPr lang="ko-KR" altLang="en-US" sz="1200" dirty="0" err="1">
+                          <a:latin typeface="피플폰트 Bold" panose="020B0600000101010101" pitchFamily="50" charset="-127"/>
+                          <a:ea typeface="피플폰트 Bold" panose="020B0600000101010101" pitchFamily="50" charset="-127"/>
+                        </a:rPr>
+                        <a:t>신탁사</a:t>
+                      </a:r>
+                      <a:endParaRPr lang="ko-KR" altLang="en-US" sz="1200" dirty="0">
+                        <a:latin typeface="피플폰트 Bold" panose="020B0600000101010101" pitchFamily="50" charset="-127"/>
+                        <a:ea typeface="피플폰트 Bold" panose="020B0600000101010101" pitchFamily="50" charset="-127"/>
+                      </a:endParaRPr>
+                    </a:p>
+                  </a:txBody>
+                  <a:tcPr marL="171674" marR="171674" marT="78033" marB="78033" anchor="ctr">
+                    <a:lnL w="28575" cap="flat" cmpd="sng" algn="ctr">
+                      <a:solidFill>
+                        <a:schemeClr val="bg1"/>
+                      </a:solidFill>
+                      <a:prstDash val="solid"/>
+                      <a:round/>
+                      <a:headEnd type="none" w="med" len="med"/>
+                      <a:tailEnd type="none" w="med" len="med"/>
+                    </a:lnL>
+                    <a:lnR w="28575" cap="flat" cmpd="sng" algn="ctr">
+                      <a:solidFill>
+                        <a:schemeClr val="bg1"/>
+                      </a:solidFill>
+                      <a:prstDash val="solid"/>
+                      <a:round/>
+                      <a:headEnd type="none" w="med" len="med"/>
+                      <a:tailEnd type="none" w="med" len="med"/>
+                    </a:lnR>
+                    <a:lnT w="28575" cap="flat" cmpd="sng" algn="ctr">
+                      <a:solidFill>
+                        <a:schemeClr val="bg1"/>
+                      </a:solidFill>
+                      <a:prstDash val="solid"/>
+                      <a:round/>
+                      <a:headEnd type="none" w="med" len="med"/>
+                      <a:tailEnd type="none" w="med" len="med"/>
+                    </a:lnT>
+                    <a:lnB w="28575" cap="flat" cmpd="sng" algn="ctr">
+                      <a:solidFill>
+                        <a:schemeClr val="bg1"/>
+                      </a:solidFill>
+                      <a:prstDash val="solid"/>
+                      <a:round/>
+                      <a:headEnd type="none" w="med" len="med"/>
+                      <a:tailEnd type="none" w="med" len="med"/>
+                    </a:lnB>
+                    <a:solidFill>
+                      <a:schemeClr val="bg2">
+                        <a:lumMod val="50000"/>
+                      </a:schemeClr>
+                    </a:solidFill>
+                  </a:tcPr>
+                </a:tc>
+                <a:extLst>
+                  <a:ext uri="{0D108BD9-81ED-4DB2-BD59-A6C34878D82A}">
+                    <a16:rowId xmlns:a16="http://schemas.microsoft.com/office/drawing/2014/main" val="10000"/>
+                  </a:ext>
+                </a:extLst>
+              </a:tr>
+              <a:tr h="318104">
+                <a:tc>
+                  <a:txBody>
+                    <a:bodyPr/>
+                    <a:lstStyle/>
+                    <a:p>
+                      <a:pPr algn="ctr" latinLnBrk="1">
+                        <a:defRPr/>
+                      </a:pPr>
+                      <a:r>
+                        <a:rPr lang="ko-KR" altLang="en-US" sz="1100" b="1" dirty="0">
+                          <a:solidFill>
+                            <a:schemeClr val="tx1"/>
+                          </a:solidFill>
+                          <a:latin typeface="피플폰트 Bold" panose="020B0600000101010101" pitchFamily="50" charset="-127"/>
+                          <a:ea typeface="피플폰트 Bold" panose="020B0600000101010101" pitchFamily="50" charset="-127"/>
+                        </a:rPr>
+                        <a:t>한국토지신탁/한국투자부동산신탁/신영부동산신탁/대신자산신탁/코람코자산신탁(처분신탁)</a:t>
+                      </a:r>
+                      <a:endParaRPr lang="ko-KR" altLang="en-US" sz="1200" b="1" dirty="0">
+                        <a:solidFill>
+                          <a:schemeClr val="tx1"/>
+                        </a:solidFill>
+                        <a:latin typeface="피플폰트 Bold" panose="020B0600000101010101" pitchFamily="50" charset="-127"/>
+                        <a:ea typeface="피플폰트 Bold" panose="020B0600000101010101" pitchFamily="50" charset="-127"/>
+                      </a:endParaRPr>
+                    </a:p>
+                  </a:txBody>
+                  <a:tcPr marL="0" marR="0" marT="72000" marB="0">
+                    <a:lnL w="28575" cap="flat" cmpd="sng" algn="ctr">
+                      <a:solidFill>
+                        <a:schemeClr val="bg1"/>
+                      </a:solidFill>
+                      <a:prstDash val="solid"/>
+                      <a:round/>
+                      <a:headEnd type="none" w="med" len="med"/>
+                      <a:tailEnd type="none" w="med" len="med"/>
+                    </a:lnL>
+                    <a:lnR w="28575" cap="flat" cmpd="sng" algn="ctr">
+                      <a:solidFill>
+                        <a:schemeClr val="bg1"/>
+                      </a:solidFill>
+                      <a:prstDash val="solid"/>
+                      <a:round/>
+                      <a:headEnd type="none" w="med" len="med"/>
+                      <a:tailEnd type="none" w="med" len="med"/>
+                    </a:lnR>
+                    <a:lnT w="28575" cap="flat" cmpd="sng" algn="ctr">
+                      <a:solidFill>
+                        <a:schemeClr val="bg1"/>
+                      </a:solidFill>
+                      <a:prstDash val="solid"/>
+                      <a:round/>
+                      <a:headEnd type="none" w="med" len="med"/>
+                      <a:tailEnd type="none" w="med" len="med"/>
+                    </a:lnT>
+                    <a:lnB w="28575" cap="flat" cmpd="sng" algn="ctr">
+                      <a:solidFill>
+                        <a:schemeClr val="bg1"/>
+                      </a:solidFill>
+                      <a:prstDash val="solid"/>
+                      <a:round/>
+                      <a:headEnd type="none" w="med" len="med"/>
+                      <a:tailEnd type="none" w="med" len="med"/>
+                    </a:lnB>
+                    <a:solidFill>
+                      <a:srgbClr val="D9D9D9"/>
+                    </a:solidFill>
+                  </a:tcPr>
+                </a:tc>
+                <a:extLst>
+                  <a:ext uri="{0D108BD9-81ED-4DB2-BD59-A6C34878D82A}">
+                    <a16:rowId xmlns:a16="http://schemas.microsoft.com/office/drawing/2014/main" val="10001"/>
+                  </a:ext>
+                </a:extLst>
+              </a:tr>
+            </a:tbl>
+          </a:graphicData>
+        </a:graphic>
+      </p:graphicFrame>
+      <p:graphicFrame>
+        <p:nvGraphicFramePr>
+          <p:cNvPr id="31" name="표 4">
+            <a:extLst>
+              <a:ext uri="{FF2B5EF4-FFF2-40B4-BE49-F238E27FC236}">
+                <a16:creationId xmlns:a16="http://schemas.microsoft.com/office/drawing/2014/main" id="{EE3C4FB0-ABA6-4AD5-A405-4059513EFDF1}"/>
+              </a:ext>
+            </a:extLst>
+          </p:cNvPr>
+          <p:cNvGraphicFramePr>
+            <a:graphicFrameLocks noGrp="1"/>
+          </p:cNvGraphicFramePr>
+          <p:nvPr>
+            <p:extLst>
+              <p:ext uri="{D42A27DB-BD31-4B8C-83A1-F6EECF244321}">
+                <p14:modId xmlns:p14="http://schemas.microsoft.com/office/powerpoint/2010/main" val="516357637"/>
+              </p:ext>
+            </p:extLst>
+          </p:nvPr>
+        </p:nvGraphicFramePr>
+        <p:xfrm>
+          <a:off x="535971" y="1585314"/>
+          <a:ext cx="1915993" cy="690568"/>
+        </p:xfrm>
+        <a:graphic>
+          <a:graphicData uri="http://schemas.openxmlformats.org/drawingml/2006/table">
+            <a:tbl>
+              <a:tblPr firstRow="1" bandRow="1">
+                <a:effectLst>
+                  <a:outerShdw blurRad="50800" dist="38100" dir="2700000" algn="tl" rotWithShape="0">
+                    <a:prstClr val="black">
+                      <a:alpha val="40000"/>
+                    </a:prstClr>
+                  </a:outerShdw>
+                </a:effectLst>
+                <a:tableStyleId>{D03447BB-5D67-496B-8E87-E561075AD55C}</a:tableStyleId>
+              </a:tblPr>
+              <a:tblGrid>
+                <a:gridCol w="1915993">
+                  <a:extLst>
+                    <a:ext uri="{9D8B030D-6E8A-4147-A177-3AD203B41FA5}">
+                      <a16:colId xmlns:a16="http://schemas.microsoft.com/office/drawing/2014/main" val="20000"/>
+                    </a:ext>
+                  </a:extLst>
+                </a:gridCol>
+              </a:tblGrid>
+              <a:tr h="338946">
+                <a:tc>
+                  <a:txBody>
+                    <a:bodyPr/>
+                    <a:lstStyle/>
+                    <a:p>
+                      <a:pPr algn="ctr" latinLnBrk="1">
+                        <a:defRPr/>
+                      </a:pPr>
+                      <a:r>
+                        <a:rPr lang="ko-KR" altLang="en-US" sz="1200" dirty="0">
+                          <a:latin typeface="피플폰트 Bold" panose="020B0600000101010101" pitchFamily="50" charset="-127"/>
+                          <a:ea typeface="피플폰트 Bold" panose="020B0600000101010101" pitchFamily="50" charset="-127"/>
+                        </a:rPr>
+                        <a:t>시공사</a:t>
+                      </a:r>
+                    </a:p>
+                  </a:txBody>
+                  <a:tcPr marL="171674" marR="171674" marT="78033" marB="78033" anchor="ctr">
+                    <a:lnL w="28575" cap="flat" cmpd="sng" algn="ctr">
+                      <a:solidFill>
+                        <a:schemeClr val="bg1"/>
+                      </a:solidFill>
+                      <a:prstDash val="solid"/>
+                      <a:round/>
+                      <a:headEnd type="none" w="med" len="med"/>
+                      <a:tailEnd type="none" w="med" len="med"/>
+                    </a:lnL>
+                    <a:lnR w="28575" cap="flat" cmpd="sng" algn="ctr">
+                      <a:solidFill>
+                        <a:schemeClr val="bg1"/>
+                      </a:solidFill>
+                      <a:prstDash val="solid"/>
+                      <a:round/>
+                      <a:headEnd type="none" w="med" len="med"/>
+                      <a:tailEnd type="none" w="med" len="med"/>
+                    </a:lnR>
+                    <a:lnT w="28575" cap="flat" cmpd="sng" algn="ctr">
+                      <a:solidFill>
+                        <a:schemeClr val="bg1"/>
+                      </a:solidFill>
+                      <a:prstDash val="solid"/>
+                      <a:round/>
+                      <a:headEnd type="none" w="med" len="med"/>
+                      <a:tailEnd type="none" w="med" len="med"/>
+                    </a:lnT>
+                    <a:lnB w="28575" cap="flat" cmpd="sng" algn="ctr">
+                      <a:solidFill>
+                        <a:schemeClr val="bg1"/>
+                      </a:solidFill>
+                      <a:prstDash val="solid"/>
+                      <a:round/>
+                      <a:headEnd type="none" w="med" len="med"/>
+                      <a:tailEnd type="none" w="med" len="med"/>
+                    </a:lnB>
+                    <a:solidFill>
+                      <a:srgbClr val="0063A1"/>
+                    </a:solidFill>
+                  </a:tcPr>
+                </a:tc>
+                <a:extLst>
+                  <a:ext uri="{0D108BD9-81ED-4DB2-BD59-A6C34878D82A}">
+                    <a16:rowId xmlns:a16="http://schemas.microsoft.com/office/drawing/2014/main" val="10000"/>
+                  </a:ext>
+                </a:extLst>
+              </a:tr>
+              <a:tr h="351622">
+                <a:tc>
+                  <a:txBody>
+                    <a:bodyPr/>
+                    <a:lstStyle/>
+                    <a:p>
+                      <a:pPr algn="ctr" latinLnBrk="1">
+                        <a:defRPr/>
+                      </a:pPr>
+                      <a:r>
+                        <a:rPr lang="en-US" altLang="ko-KR" sz="1400" b="1" dirty="0">
+                          <a:solidFill>
+                            <a:schemeClr val="tx1"/>
+                          </a:solidFill>
+                          <a:latin typeface="피플폰트 Bold" panose="020B0600000101010101" pitchFamily="50" charset="-127"/>
+                          <a:ea typeface="피플폰트 Bold" panose="020B0600000101010101" pitchFamily="50" charset="-127"/>
+                        </a:rPr>
+                        <a:t>롯데건설(주)</a:t>
+                      </a:r>
+                      <a:endParaRPr lang="ko-KR" altLang="en-US" sz="1600" b="1" dirty="0">
+                        <a:solidFill>
+                          <a:schemeClr val="tx1"/>
+                        </a:solidFill>
+                        <a:latin typeface="피플폰트 Bold" panose="020B0600000101010101" pitchFamily="50" charset="-127"/>
+                        <a:ea typeface="피플폰트 Bold" panose="020B0600000101010101" pitchFamily="50" charset="-127"/>
+                      </a:endParaRPr>
+                    </a:p>
+                  </a:txBody>
+                  <a:tcPr marL="0" marR="0" marT="72000" marB="0">
+                    <a:lnL w="28575" cap="flat" cmpd="sng" algn="ctr">
+                      <a:solidFill>
+                        <a:schemeClr val="bg1"/>
+                      </a:solidFill>
+                      <a:prstDash val="solid"/>
+                      <a:round/>
+                      <a:headEnd type="none" w="med" len="med"/>
+                      <a:tailEnd type="none" w="med" len="med"/>
+                    </a:lnL>
+                    <a:lnR w="28575" cap="flat" cmpd="sng" algn="ctr">
+                      <a:solidFill>
+                        <a:schemeClr val="bg1"/>
+                      </a:solidFill>
+                      <a:prstDash val="solid"/>
+                      <a:round/>
+                      <a:headEnd type="none" w="med" len="med"/>
+                      <a:tailEnd type="none" w="med" len="med"/>
+                    </a:lnR>
+                    <a:lnT w="28575" cap="flat" cmpd="sng" algn="ctr">
+                      <a:solidFill>
+                        <a:schemeClr val="bg1"/>
+                      </a:solidFill>
+                      <a:prstDash val="solid"/>
+                      <a:round/>
+                      <a:headEnd type="none" w="med" len="med"/>
+                      <a:tailEnd type="none" w="med" len="med"/>
+                    </a:lnT>
+                    <a:lnB w="28575" cap="flat" cmpd="sng" algn="ctr">
+                      <a:solidFill>
+                        <a:schemeClr val="bg1"/>
+                      </a:solidFill>
+                      <a:prstDash val="solid"/>
+                      <a:round/>
+                      <a:headEnd type="none" w="med" len="med"/>
+                      <a:tailEnd type="none" w="med" len="med"/>
+                    </a:lnB>
+                    <a:solidFill>
+                      <a:srgbClr val="D9D9D9"/>
+                    </a:solidFill>
+                  </a:tcPr>
+                </a:tc>
+                <a:extLst>
+                  <a:ext uri="{0D108BD9-81ED-4DB2-BD59-A6C34878D82A}">
+                    <a16:rowId xmlns:a16="http://schemas.microsoft.com/office/drawing/2014/main" val="10001"/>
+                  </a:ext>
+                </a:extLst>
+              </a:tr>
+            </a:tbl>
+          </a:graphicData>
+        </a:graphic>
+      </p:graphicFrame>
+      <p:graphicFrame>
+        <p:nvGraphicFramePr>
+          <p:cNvPr id="32" name="표 4">
+            <a:extLst>
+              <a:ext uri="{FF2B5EF4-FFF2-40B4-BE49-F238E27FC236}">
+                <a16:creationId xmlns:a16="http://schemas.microsoft.com/office/drawing/2014/main" id="{3BD68498-4803-4E43-8771-E2CD644CE9DC}"/>
+              </a:ext>
+            </a:extLst>
+          </p:cNvPr>
+          <p:cNvGraphicFramePr>
+            <a:graphicFrameLocks noGrp="1"/>
+          </p:cNvGraphicFramePr>
+          <p:nvPr>
+            <p:extLst>
+              <p:ext uri="{D42A27DB-BD31-4B8C-83A1-F6EECF244321}">
+                <p14:modId xmlns:p14="http://schemas.microsoft.com/office/powerpoint/2010/main" val="744025865"/>
+              </p:ext>
+            </p:extLst>
+          </p:nvPr>
+        </p:nvGraphicFramePr>
+        <p:xfrm>
+          <a:off x="4988471" y="2231323"/>
+          <a:ext cx="2130374" cy="1722430"/>
+        </p:xfrm>
+        <a:graphic>
+          <a:graphicData uri="http://schemas.openxmlformats.org/drawingml/2006/table">
+            <a:tbl>
+              <a:tblPr firstRow="1" bandRow="1">
+                <a:effectLst>
+                  <a:outerShdw blurRad="50800" dist="38100" dir="2700000" algn="tl" rotWithShape="0">
+                    <a:prstClr val="black">
+                      <a:alpha val="40000"/>
+                    </a:prstClr>
+                  </a:outerShdw>
+                </a:effectLst>
+                <a:tableStyleId>{D03447BB-5D67-496B-8E87-E561075AD55C}</a:tableStyleId>
+              </a:tblPr>
+              <a:tblGrid>
+                <a:gridCol w="2130374">
+                  <a:extLst>
+                    <a:ext uri="{9D8B030D-6E8A-4147-A177-3AD203B41FA5}">
+                      <a16:colId xmlns:a16="http://schemas.microsoft.com/office/drawing/2014/main" val="20000"/>
+                    </a:ext>
+                  </a:extLst>
+                </a:gridCol>
+              </a:tblGrid>
+              <a:tr h="313822">
+                <a:tc>
+                  <a:txBody>
+                    <a:bodyPr/>
+                    <a:lstStyle/>
+                    <a:p>
+                      <a:pPr algn="ctr" latinLnBrk="1">
+                        <a:defRPr/>
+                      </a:pPr>
+                      <a:r>
+                        <a:rPr lang="en-US" altLang="ko-KR" sz="1000" dirty="0">
+                          <a:latin typeface="피플폰트 Bold" panose="020B0600000101010101" pitchFamily="50" charset="-127"/>
+                          <a:ea typeface="피플폰트 Bold" panose="020B0600000101010101" pitchFamily="50" charset="-127"/>
+                        </a:rPr>
+                        <a:t>Tr. A 3,600억원</a:t>
+                      </a:r>
+                      <a:endParaRPr lang="ko-KR" altLang="en-US" sz="1000" dirty="0">
+                        <a:latin typeface="피플폰트 Bold" panose="020B0600000101010101" pitchFamily="50" charset="-127"/>
+                        <a:ea typeface="피플폰트 Bold" panose="020B0600000101010101" pitchFamily="50" charset="-127"/>
+                      </a:endParaRPr>
+                    </a:p>
+                  </a:txBody>
+                  <a:tcPr marL="152842" marR="152842" marT="76421" marB="76421" anchor="ctr">
+                    <a:lnL w="28575" cap="flat" cmpd="sng" algn="ctr">
+                      <a:solidFill>
+                        <a:schemeClr val="bg1"/>
+                      </a:solidFill>
+                      <a:prstDash val="solid"/>
+                      <a:round/>
+                      <a:headEnd type="none" w="med" len="med"/>
+                      <a:tailEnd type="none" w="med" len="med"/>
+                    </a:lnL>
+                    <a:lnR w="28575" cap="flat" cmpd="sng" algn="ctr">
+                      <a:solidFill>
+                        <a:schemeClr val="bg1"/>
+                      </a:solidFill>
+                      <a:prstDash val="solid"/>
+                      <a:round/>
+                      <a:headEnd type="none" w="med" len="med"/>
+                      <a:tailEnd type="none" w="med" len="med"/>
+                    </a:lnR>
+                    <a:lnT w="28575" cap="flat" cmpd="sng" algn="ctr">
+                      <a:solidFill>
+                        <a:schemeClr val="bg1"/>
+                      </a:solidFill>
+                      <a:prstDash val="solid"/>
+                      <a:round/>
+                      <a:headEnd type="none" w="med" len="med"/>
+                      <a:tailEnd type="none" w="med" len="med"/>
+                    </a:lnT>
+                    <a:lnB w="28575" cap="flat" cmpd="sng" algn="ctr">
+                      <a:solidFill>
+                        <a:schemeClr val="bg1"/>
+                      </a:solidFill>
+                      <a:prstDash val="solid"/>
+                      <a:round/>
+                      <a:headEnd type="none" w="med" len="med"/>
+                      <a:tailEnd type="none" w="med" len="med"/>
+                    </a:lnB>
+                    <a:solidFill>
+                      <a:srgbClr val="08377C"/>
+                    </a:solidFill>
+                  </a:tcPr>
+                </a:tc>
+                <a:extLst>
+                  <a:ext uri="{0D108BD9-81ED-4DB2-BD59-A6C34878D82A}">
+                    <a16:rowId xmlns:a16="http://schemas.microsoft.com/office/drawing/2014/main" val="10000"/>
+                  </a:ext>
+                </a:extLst>
+              </a:tr>
+              <a:tr h="1408608">
+                <a:tc>
+                  <a:txBody>
+                    <a:bodyPr/>
+                    <a:lstStyle/>
+                    <a:p>
+                      <a:pPr algn="ctr" latinLnBrk="1">
+                        <a:defRPr/>
+                      </a:pPr>
+                      <a:r>
+                        <a:rPr lang="ko-KR" altLang="en-US" sz="1100" b="1" dirty="0">
+                          <a:solidFill>
+                            <a:schemeClr val="tx1"/>
+                          </a:solidFill>
+                          <a:latin typeface="피플폰트 Bold" panose="020B0600000101010101" pitchFamily="50" charset="-127"/>
+                          <a:ea typeface="피플폰트 Bold" panose="020B0600000101010101" pitchFamily="50" charset="-127"/>
+                        </a:rPr>
+                        <a:t>기타 </a:t>
+                      </a:r>
+                      <a:r>
+                        <a:rPr lang="en-US" altLang="ko-KR" sz="1100" b="1" dirty="0" err="1">
+                          <a:solidFill>
+                            <a:schemeClr val="tx1"/>
+                          </a:solidFill>
+                          <a:latin typeface="피플폰트 Bold" panose="020B0600000101010101" pitchFamily="50" charset="-127"/>
+                          <a:ea typeface="피플폰트 Bold" panose="020B0600000101010101" pitchFamily="50" charset="-127"/>
+                        </a:rPr>
+                        <a:t>Tr.A</a:t>
+                      </a:r>
+                      <a:r>
+                        <a:rPr lang="en-US" altLang="ko-KR" sz="1100" b="1" dirty="0">
+                          <a:solidFill>
+                            <a:schemeClr val="tx1"/>
+                          </a:solidFill>
+                          <a:latin typeface="피플폰트 Bold" panose="020B0600000101010101" pitchFamily="50" charset="-127"/>
+                          <a:ea typeface="피플폰트 Bold" panose="020B0600000101010101" pitchFamily="50" charset="-127"/>
+                        </a:rPr>
+                        <a:t> </a:t>
+                      </a:r>
+                      <a:r>
+                        <a:rPr lang="en-US" altLang="ko-KR" sz="1100" b="1" dirty="0" err="1">
+                          <a:solidFill>
+                            <a:schemeClr val="tx1"/>
+                          </a:solidFill>
+                          <a:latin typeface="피플폰트 Bold" panose="020B0600000101010101" pitchFamily="50" charset="-127"/>
+                          <a:ea typeface="피플폰트 Bold" panose="020B0600000101010101" pitchFamily="50" charset="-127"/>
+                        </a:rPr>
+                        <a:t>대주</a:t>
+                      </a:r>
+                      <a:endParaRPr lang="en-US" altLang="ko-KR" sz="1100" b="1" dirty="0">
+                        <a:solidFill>
+                          <a:schemeClr val="tx1"/>
+                        </a:solidFill>
+                        <a:latin typeface="피플폰트 Bold" panose="020B0600000101010101" pitchFamily="50" charset="-127"/>
+                        <a:ea typeface="피플폰트 Bold" panose="020B0600000101010101" pitchFamily="50" charset="-127"/>
+                      </a:endParaRPr>
+                    </a:p>
+                    <a:p>
+                      <a:pPr algn="ctr" latinLnBrk="1">
+                        <a:defRPr/>
+                      </a:pPr>
+                      <a:endParaRPr lang="en-US" altLang="ko-KR" sz="1100" b="1" dirty="0">
+                        <a:solidFill>
+                          <a:schemeClr val="tx1"/>
+                        </a:solidFill>
+                        <a:latin typeface="피플폰트 Bold" panose="020B0600000101010101" pitchFamily="50" charset="-127"/>
+                        <a:ea typeface="피플폰트 Bold" panose="020B0600000101010101" pitchFamily="50" charset="-127"/>
+                      </a:endParaRPr>
+                    </a:p>
+                    <a:p>
+                      <a:pPr algn="ctr" latinLnBrk="1">
+                        <a:defRPr/>
+                      </a:pPr>
+                      <a:endParaRPr lang="en-US" altLang="ko-KR" sz="1100" b="1" dirty="0">
+                        <a:solidFill>
+                          <a:schemeClr val="tx1"/>
+                        </a:solidFill>
+                        <a:latin typeface="피플폰트 Bold" panose="020B0600000101010101" pitchFamily="50" charset="-127"/>
+                        <a:ea typeface="피플폰트 Bold" panose="020B0600000101010101" pitchFamily="50" charset="-127"/>
+                      </a:endParaRPr>
+                    </a:p>
+                    <a:p>
+                      <a:pPr algn="ctr" latinLnBrk="1">
+                        <a:defRPr/>
+                      </a:pPr>
+                      <a:endParaRPr lang="en-US" altLang="ko-KR" sz="1100" b="1" dirty="0">
+                        <a:solidFill>
+                          <a:schemeClr val="tx1"/>
+                        </a:solidFill>
+                        <a:latin typeface="피플폰트 Bold" panose="020B0600000101010101" pitchFamily="50" charset="-127"/>
+                        <a:ea typeface="피플폰트 Bold" panose="020B0600000101010101" pitchFamily="50" charset="-127"/>
+                      </a:endParaRPr>
+                    </a:p>
+                    <a:p>
+                      <a:pPr algn="ctr" latinLnBrk="1">
+                        <a:defRPr/>
+                      </a:pPr>
+                      <a:endParaRPr lang="en-US" altLang="ko-KR" sz="1100" b="1" dirty="0">
+                        <a:solidFill>
+                          <a:schemeClr val="tx1"/>
+                        </a:solidFill>
+                        <a:latin typeface="피플폰트 Bold" panose="020B0600000101010101" pitchFamily="50" charset="-127"/>
+                        <a:ea typeface="피플폰트 Bold" panose="020B0600000101010101" pitchFamily="50" charset="-127"/>
+                      </a:endParaRPr>
+                    </a:p>
+                  </a:txBody>
+                  <a:tcPr marL="152842" marR="152842" marT="76421" marB="76421" anchor="ctr">
+                    <a:lnL w="28575" cap="flat" cmpd="sng" algn="ctr">
+                      <a:solidFill>
+                        <a:schemeClr val="bg1"/>
+                      </a:solidFill>
+                      <a:prstDash val="solid"/>
+                      <a:round/>
+                      <a:headEnd type="none" w="med" len="med"/>
+                      <a:tailEnd type="none" w="med" len="med"/>
+                    </a:lnL>
+                    <a:lnR w="28575" cap="flat" cmpd="sng" algn="ctr">
+                      <a:solidFill>
+                        <a:schemeClr val="bg1"/>
+                      </a:solidFill>
+                      <a:prstDash val="solid"/>
+                      <a:round/>
+                      <a:headEnd type="none" w="med" len="med"/>
+                      <a:tailEnd type="none" w="med" len="med"/>
+                    </a:lnR>
+                    <a:lnT w="28575" cap="flat" cmpd="sng" algn="ctr">
+                      <a:solidFill>
+                        <a:schemeClr val="bg1"/>
+                      </a:solidFill>
+                      <a:prstDash val="solid"/>
+                      <a:round/>
+                      <a:headEnd type="none" w="med" len="med"/>
+                      <a:tailEnd type="none" w="med" len="med"/>
+                    </a:lnT>
+                    <a:lnB w="28575" cap="flat" cmpd="sng" algn="ctr">
+                      <a:solidFill>
+                        <a:schemeClr val="bg1"/>
+                      </a:solidFill>
+                      <a:prstDash val="solid"/>
+                      <a:round/>
+                      <a:headEnd type="none" w="med" len="med"/>
+                      <a:tailEnd type="none" w="med" len="med"/>
+                    </a:lnB>
+                    <a:solidFill>
+                      <a:srgbClr val="D9D9D9"/>
+                    </a:solidFill>
+                  </a:tcPr>
+                </a:tc>
+                <a:extLst>
+                  <a:ext uri="{0D108BD9-81ED-4DB2-BD59-A6C34878D82A}">
+                    <a16:rowId xmlns:a16="http://schemas.microsoft.com/office/drawing/2014/main" val="10001"/>
+                  </a:ext>
+                </a:extLst>
+              </a:tr>
+            </a:tbl>
+          </a:graphicData>
+        </a:graphic>
+      </p:graphicFrame>
+      <p:cxnSp>
+        <p:nvCxnSpPr>
+          <p:cNvPr id="33" name="직선 화살표 연결선 32">
+            <a:extLst>
+              <a:ext uri="{FF2B5EF4-FFF2-40B4-BE49-F238E27FC236}">
+                <a16:creationId xmlns:a16="http://schemas.microsoft.com/office/drawing/2014/main" id="{67EC5812-6E16-459E-B01C-7F78D1267ED8}"/>
+              </a:ext>
+            </a:extLst>
+          </p:cNvPr>
+          <p:cNvCxnSpPr>
+            <a:cxnSpLocks/>
+            <a:stCxn id="27" idx="0"/>
+            <a:endCxn id="31" idx="2"/>
+          </p:cNvCxnSpPr>
+          <p:nvPr/>
+        </p:nvCxnSpPr>
+        <p:spPr>
+          <a:xfrm flipV="1">
+            <a:off x="1493967" y="2275882"/>
+            <a:ext cx="0" cy="558736"/>
+          </a:xfrm>
+          <a:prstGeom prst="straightConnector1">
+            <a:avLst/>
+          </a:prstGeom>
+          <a:solidFill>
+            <a:schemeClr val="accent1"/>
+          </a:solidFill>
+          <a:ln w="19050" cap="flat" cmpd="sng" algn="ctr">
+            <a:solidFill>
+              <a:schemeClr val="tx1"/>
+            </a:solidFill>
+            <a:prstDash val="solid"/>
+            <a:round/>
+            <a:headEnd type="triangle" w="sm" len="sm"/>
+            <a:tailEnd type="triangle" w="sm" len="sm"/>
+          </a:ln>
+          <a:effectLst/>
+        </p:spPr>
+      </p:cxnSp>
+      <p:cxnSp>
+        <p:nvCxnSpPr>
+          <p:cNvPr id="34" name="직선 화살표 연결선 33">
+            <a:extLst>
+              <a:ext uri="{FF2B5EF4-FFF2-40B4-BE49-F238E27FC236}">
+                <a16:creationId xmlns:a16="http://schemas.microsoft.com/office/drawing/2014/main" id="{1EA478BE-1A3D-4E95-BDC4-9AB6558549C2}"/>
+              </a:ext>
+            </a:extLst>
+          </p:cNvPr>
+          <p:cNvCxnSpPr>
+            <a:cxnSpLocks/>
+          </p:cNvCxnSpPr>
+          <p:nvPr/>
+        </p:nvCxnSpPr>
+        <p:spPr>
+          <a:xfrm flipH="1">
+            <a:off x="2547895" y="3158465"/>
+            <a:ext cx="2213450" cy="0"/>
+          </a:xfrm>
+          <a:prstGeom prst="straightConnector1">
+            <a:avLst/>
+          </a:prstGeom>
+          <a:solidFill>
+            <a:schemeClr val="accent1"/>
+          </a:solidFill>
+          <a:ln w="19050" cap="flat" cmpd="sng" algn="ctr">
+            <a:solidFill>
+              <a:schemeClr val="tx1"/>
+            </a:solidFill>
+            <a:prstDash val="solid"/>
+            <a:round/>
+            <a:headEnd type="triangle" w="sm" len="sm"/>
+            <a:tailEnd type="none" w="sm" len="sm"/>
+          </a:ln>
+          <a:effectLst/>
+        </p:spPr>
+      </p:cxnSp>
+      <p:cxnSp>
+        <p:nvCxnSpPr>
+          <p:cNvPr id="35" name="직선 화살표 연결선 34">
+            <a:extLst>
+              <a:ext uri="{FF2B5EF4-FFF2-40B4-BE49-F238E27FC236}">
+                <a16:creationId xmlns:a16="http://schemas.microsoft.com/office/drawing/2014/main" id="{5188603E-5686-4FA6-BEDC-3BADB7F32E7A}"/>
+              </a:ext>
+            </a:extLst>
+          </p:cNvPr>
+          <p:cNvCxnSpPr>
+            <a:cxnSpLocks/>
+            <a:stCxn id="30" idx="0"/>
+            <a:endCxn id="27" idx="2"/>
+          </p:cNvCxnSpPr>
+          <p:nvPr/>
+        </p:nvCxnSpPr>
+        <p:spPr>
+          <a:xfrm flipV="1">
+            <a:off x="1493966" y="3530562"/>
+            <a:ext cx="1" cy="425077"/>
+          </a:xfrm>
+          <a:prstGeom prst="straightConnector1">
+            <a:avLst/>
+          </a:prstGeom>
+          <a:solidFill>
+            <a:schemeClr val="accent1"/>
+          </a:solidFill>
+          <a:ln w="19050" cap="flat" cmpd="sng" algn="ctr">
+            <a:solidFill>
+              <a:schemeClr val="tx1"/>
+            </a:solidFill>
+            <a:prstDash val="solid"/>
+            <a:round/>
+            <a:headEnd type="triangle" w="sm" len="sm"/>
+            <a:tailEnd type="triangle" w="sm" len="sm"/>
+          </a:ln>
+          <a:effectLst/>
+        </p:spPr>
+      </p:cxnSp>
+      <p:sp>
+        <p:nvSpPr>
+          <p:cNvPr id="50" name="텍스트 개체 틀 2">
+            <a:extLst>
+              <a:ext uri="{FF2B5EF4-FFF2-40B4-BE49-F238E27FC236}">
+                <a16:creationId xmlns:a16="http://schemas.microsoft.com/office/drawing/2014/main" id="{FA23A891-80E5-4EAE-9AC1-6F7EC7A9FF98}"/>
+              </a:ext>
+            </a:extLst>
+          </p:cNvPr>
+          <p:cNvSpPr txBox="1">
+            <a:spLocks/>
+          </p:cNvSpPr>
+          <p:nvPr/>
+        </p:nvSpPr>
+        <p:spPr>
+          <a:xfrm>
+            <a:off x="1351246" y="2509113"/>
+            <a:ext cx="1060169" cy="169662"/>
+          </a:xfrm>
+          <a:prstGeom prst="rect">
+            <a:avLst/>
+          </a:prstGeom>
+        </p:spPr>
+        <p:txBody>
+          <a:bodyPr vert="horz" wrap="square" lIns="0" tIns="0" rIns="0" bIns="0" rtlCol="0" anchor="ctr">
+            <a:spAutoFit/>
+          </a:bodyPr>
+          <a:lstStyle>
+            <a:lvl1pPr marL="0" indent="0" algn="l" defTabSz="914400" rtl="0" eaLnBrk="1" latinLnBrk="1" hangingPunct="1">
+              <a:lnSpc>
+                <a:spcPct val="90000"/>
+              </a:lnSpc>
+              <a:spcBef>
+                <a:spcPts val="1000"/>
+              </a:spcBef>
+              <a:buFont typeface="Arial" panose="020B0604020202020204" pitchFamily="34" charset="0"/>
+              <a:buNone/>
+              <a:defRPr sz="1200" kern="1200">
+                <a:solidFill>
+                  <a:schemeClr val="tx1"/>
+                </a:solidFill>
+                <a:latin typeface="AppleSDGothicNeoM00" panose="02000503000000000000" pitchFamily="2" charset="-127"/>
+                <a:ea typeface="AppleSDGothicNeoM00" panose="02000503000000000000" pitchFamily="2" charset="-127"/>
+                <a:cs typeface="+mn-cs"/>
+              </a:defRPr>
+            </a:lvl1pPr>
+            <a:lvl2pPr marL="685800" indent="-228600" algn="l" defTabSz="914400" rtl="0" eaLnBrk="1" latinLnBrk="1" hangingPunct="1">
+              <a:lnSpc>
+                <a:spcPct val="90000"/>
+              </a:lnSpc>
+              <a:spcBef>
+                <a:spcPts val="500"/>
+              </a:spcBef>
+              <a:buFont typeface="Arial" panose="020B0604020202020204" pitchFamily="34" charset="0"/>
+              <a:buChar char="•"/>
+              <a:defRPr sz="2400" kern="1200">
+                <a:solidFill>
+                  <a:schemeClr val="tx1"/>
+                </a:solidFill>
+                <a:latin typeface="+mn-lt"/>
+                <a:ea typeface="+mn-ea"/>
+                <a:cs typeface="+mn-cs"/>
+              </a:defRPr>
+            </a:lvl2pPr>
+            <a:lvl3pPr marL="1143000" indent="-228600" algn="l" defTabSz="914400" rtl="0" eaLnBrk="1" latinLnBrk="1" hangingPunct="1">
+              <a:lnSpc>
+                <a:spcPct val="90000"/>
+              </a:lnSpc>
+              <a:spcBef>
+                <a:spcPts val="500"/>
+              </a:spcBef>
+              <a:buFont typeface="Arial" panose="020B0604020202020204" pitchFamily="34" charset="0"/>
+              <a:buChar char="•"/>
+              <a:defRPr sz="2000" kern="1200">
+                <a:solidFill>
+                  <a:schemeClr val="tx1"/>
+                </a:solidFill>
+                <a:latin typeface="+mn-lt"/>
+                <a:ea typeface="+mn-ea"/>
+                <a:cs typeface="+mn-cs"/>
+              </a:defRPr>
+            </a:lvl3pPr>
+            <a:lvl4pPr marL="1600200" indent="-228600" algn="l" defTabSz="914400" rtl="0" eaLnBrk="1" latinLnBrk="1" hangingPunct="1">
+              <a:lnSpc>
+                <a:spcPct val="90000"/>
+              </a:lnSpc>
+              <a:spcBef>
+                <a:spcPts val="500"/>
+              </a:spcBef>
+              <a:buFont typeface="Arial" panose="020B0604020202020204" pitchFamily="34" charset="0"/>
+              <a:buChar char="•"/>
+              <a:defRPr sz="1800" kern="1200">
+                <a:solidFill>
+                  <a:schemeClr val="tx1"/>
+                </a:solidFill>
+                <a:latin typeface="+mn-lt"/>
+                <a:ea typeface="+mn-ea"/>
+                <a:cs typeface="+mn-cs"/>
+              </a:defRPr>
+            </a:lvl4pPr>
+            <a:lvl5pPr marL="2057400" indent="-228600" algn="l" defTabSz="914400" rtl="0" eaLnBrk="1" latinLnBrk="1" hangingPunct="1">
+              <a:lnSpc>
+                <a:spcPct val="90000"/>
+              </a:lnSpc>
+              <a:spcBef>
+                <a:spcPts val="500"/>
+              </a:spcBef>
+              <a:buFont typeface="Arial" panose="020B0604020202020204" pitchFamily="34" charset="0"/>
+              <a:buChar char="•"/>
+              <a:defRPr sz="1800" kern="1200">
+                <a:solidFill>
+                  <a:schemeClr val="tx1"/>
+                </a:solidFill>
+                <a:latin typeface="+mn-lt"/>
+                <a:ea typeface="+mn-ea"/>
+                <a:cs typeface="+mn-cs"/>
+              </a:defRPr>
+            </a:lvl5pPr>
+            <a:lvl6pPr marL="2514600" indent="-228600" algn="l" defTabSz="914400" rtl="0" eaLnBrk="1" latinLnBrk="1" hangingPunct="1">
+              <a:lnSpc>
+                <a:spcPct val="90000"/>
+              </a:lnSpc>
+              <a:spcBef>
+                <a:spcPts val="500"/>
+              </a:spcBef>
+              <a:buFont typeface="Arial" panose="020B0604020202020204" pitchFamily="34" charset="0"/>
+              <a:buChar char="•"/>
+              <a:defRPr sz="1800" kern="1200">
+                <a:solidFill>
+                  <a:schemeClr val="tx1"/>
+                </a:solidFill>
+                <a:latin typeface="+mn-lt"/>
+                <a:ea typeface="+mn-ea"/>
+                <a:cs typeface="+mn-cs"/>
+              </a:defRPr>
+            </a:lvl6pPr>
+            <a:lvl7pPr marL="2971800" indent="-228600" algn="l" defTabSz="914400" rtl="0" eaLnBrk="1" latinLnBrk="1" hangingPunct="1">
+              <a:lnSpc>
+                <a:spcPct val="90000"/>
+              </a:lnSpc>
+              <a:spcBef>
+                <a:spcPts val="500"/>
+              </a:spcBef>
+              <a:buFont typeface="Arial" panose="020B0604020202020204" pitchFamily="34" charset="0"/>
+              <a:buChar char="•"/>
+              <a:defRPr sz="1800" kern="1200">
+                <a:solidFill>
+                  <a:schemeClr val="tx1"/>
+                </a:solidFill>
+                <a:latin typeface="+mn-lt"/>
+                <a:ea typeface="+mn-ea"/>
+                <a:cs typeface="+mn-cs"/>
+              </a:defRPr>
+            </a:lvl7pPr>
+            <a:lvl8pPr marL="3429000" indent="-228600" algn="l" defTabSz="914400" rtl="0" eaLnBrk="1" latinLnBrk="1" hangingPunct="1">
+              <a:lnSpc>
+                <a:spcPct val="90000"/>
+              </a:lnSpc>
+              <a:spcBef>
+                <a:spcPts val="500"/>
+              </a:spcBef>
+              <a:buFont typeface="Arial" panose="020B0604020202020204" pitchFamily="34" charset="0"/>
+              <a:buChar char="•"/>
+              <a:defRPr sz="1800" kern="1200">
+                <a:solidFill>
+                  <a:schemeClr val="tx1"/>
+                </a:solidFill>
+                <a:latin typeface="+mn-lt"/>
+                <a:ea typeface="+mn-ea"/>
+                <a:cs typeface="+mn-cs"/>
+              </a:defRPr>
+            </a:lvl8pPr>
+            <a:lvl9pPr marL="3886200" indent="-228600" algn="l" defTabSz="914400" rtl="0" eaLnBrk="1" latinLnBrk="1" hangingPunct="1">
+              <a:lnSpc>
+                <a:spcPct val="90000"/>
+              </a:lnSpc>
+              <a:spcBef>
+                <a:spcPts val="500"/>
+              </a:spcBef>
+              <a:buFont typeface="Arial" panose="020B0604020202020204" pitchFamily="34" charset="0"/>
+              <a:buChar char="•"/>
+              <a:defRPr sz="1800" kern="1200">
+                <a:solidFill>
+                  <a:schemeClr val="tx1"/>
+                </a:solidFill>
+                <a:latin typeface="+mn-lt"/>
+                <a:ea typeface="+mn-ea"/>
+                <a:cs typeface="+mn-cs"/>
+              </a:defRPr>
+            </a:lvl9pPr>
+          </a:lstStyle>
+          <a:p>
+            <a:pPr algn="ctr">
+              <a:lnSpc>
+                <a:spcPct val="130000"/>
+              </a:lnSpc>
+              <a:spcBef>
+                <a:spcPts val="0"/>
+              </a:spcBef>
+            </a:pPr>
+            <a:r>
+              <a:rPr lang="ko-KR" altLang="en-US" sz="900" dirty="0">
+                <a:latin typeface="피플폰트 Bold" panose="020B0600000101010101" pitchFamily="50" charset="-127"/>
+                <a:ea typeface="피플폰트 Bold" panose="020B0600000101010101" pitchFamily="50" charset="-127"/>
+              </a:rPr>
+              <a:t>공사도급계약</a:t>
+            </a:r>
+            <a:endParaRPr lang="en-US" altLang="ko-KR" sz="900" dirty="0">
+              <a:latin typeface="피플폰트 Bold" panose="020B0600000101010101" pitchFamily="50" charset="-127"/>
+              <a:ea typeface="피플폰트 Bold" panose="020B0600000101010101" pitchFamily="50" charset="-127"/>
+            </a:endParaRPr>
+          </a:p>
+        </p:txBody>
+      </p:sp>
+      <p:sp>
+        <p:nvSpPr>
+          <p:cNvPr id="57" name="텍스트 개체 틀 2">
+            <a:extLst>
+              <a:ext uri="{FF2B5EF4-FFF2-40B4-BE49-F238E27FC236}">
+                <a16:creationId xmlns:a16="http://schemas.microsoft.com/office/drawing/2014/main" id="{E576456D-3998-470E-B4AB-41641D789195}"/>
+              </a:ext>
+            </a:extLst>
+          </p:cNvPr>
+          <p:cNvSpPr txBox="1">
+            <a:spLocks/>
+          </p:cNvSpPr>
+          <p:nvPr/>
+        </p:nvSpPr>
+        <p:spPr>
+          <a:xfrm>
+            <a:off x="3120395" y="2967198"/>
+            <a:ext cx="1060169" cy="169662"/>
+          </a:xfrm>
+          <a:prstGeom prst="rect">
+            <a:avLst/>
+          </a:prstGeom>
+        </p:spPr>
+        <p:txBody>
+          <a:bodyPr vert="horz" wrap="square" lIns="0" tIns="0" rIns="0" bIns="0" rtlCol="0" anchor="ctr">
+            <a:spAutoFit/>
+          </a:bodyPr>
+          <a:lstStyle>
+            <a:lvl1pPr marL="0" indent="0" algn="l" defTabSz="914400" rtl="0" eaLnBrk="1" latinLnBrk="1" hangingPunct="1">
+              <a:lnSpc>
+                <a:spcPct val="90000"/>
+              </a:lnSpc>
+              <a:spcBef>
+                <a:spcPts val="1000"/>
+              </a:spcBef>
+              <a:buFont typeface="Arial" panose="020B0604020202020204" pitchFamily="34" charset="0"/>
+              <a:buNone/>
+              <a:defRPr sz="1200" kern="1200">
+                <a:solidFill>
+                  <a:schemeClr val="tx1"/>
+                </a:solidFill>
+                <a:latin typeface="AppleSDGothicNeoM00" panose="02000503000000000000" pitchFamily="2" charset="-127"/>
+                <a:ea typeface="AppleSDGothicNeoM00" panose="02000503000000000000" pitchFamily="2" charset="-127"/>
+                <a:cs typeface="+mn-cs"/>
+              </a:defRPr>
+            </a:lvl1pPr>
+            <a:lvl2pPr marL="685800" indent="-228600" algn="l" defTabSz="914400" rtl="0" eaLnBrk="1" latinLnBrk="1" hangingPunct="1">
+              <a:lnSpc>
+                <a:spcPct val="90000"/>
+              </a:lnSpc>
+              <a:spcBef>
+                <a:spcPts val="500"/>
+              </a:spcBef>
+              <a:buFont typeface="Arial" panose="020B0604020202020204" pitchFamily="34" charset="0"/>
+              <a:buChar char="•"/>
+              <a:defRPr sz="2400" kern="1200">
+                <a:solidFill>
+                  <a:schemeClr val="tx1"/>
+                </a:solidFill>
+                <a:latin typeface="+mn-lt"/>
+                <a:ea typeface="+mn-ea"/>
+                <a:cs typeface="+mn-cs"/>
+              </a:defRPr>
+            </a:lvl2pPr>
+            <a:lvl3pPr marL="1143000" indent="-228600" algn="l" defTabSz="914400" rtl="0" eaLnBrk="1" latinLnBrk="1" hangingPunct="1">
+              <a:lnSpc>
+                <a:spcPct val="90000"/>
+              </a:lnSpc>
+              <a:spcBef>
+                <a:spcPts val="500"/>
+              </a:spcBef>
+              <a:buFont typeface="Arial" panose="020B0604020202020204" pitchFamily="34" charset="0"/>
+              <a:buChar char="•"/>
+              <a:defRPr sz="2000" kern="1200">
+                <a:solidFill>
+                  <a:schemeClr val="tx1"/>
+                </a:solidFill>
+                <a:latin typeface="+mn-lt"/>
+                <a:ea typeface="+mn-ea"/>
+                <a:cs typeface="+mn-cs"/>
+              </a:defRPr>
+            </a:lvl3pPr>
+            <a:lvl4pPr marL="1600200" indent="-228600" algn="l" defTabSz="914400" rtl="0" eaLnBrk="1" latinLnBrk="1" hangingPunct="1">
+              <a:lnSpc>
+                <a:spcPct val="90000"/>
+              </a:lnSpc>
+              <a:spcBef>
+                <a:spcPts val="500"/>
+              </a:spcBef>
+              <a:buFont typeface="Arial" panose="020B0604020202020204" pitchFamily="34" charset="0"/>
+              <a:buChar char="•"/>
+              <a:defRPr sz="1800" kern="1200">
+                <a:solidFill>
+                  <a:schemeClr val="tx1"/>
+                </a:solidFill>
+                <a:latin typeface="+mn-lt"/>
+                <a:ea typeface="+mn-ea"/>
+                <a:cs typeface="+mn-cs"/>
+              </a:defRPr>
+            </a:lvl4pPr>
+            <a:lvl5pPr marL="2057400" indent="-228600" algn="l" defTabSz="914400" rtl="0" eaLnBrk="1" latinLnBrk="1" hangingPunct="1">
+              <a:lnSpc>
+                <a:spcPct val="90000"/>
+              </a:lnSpc>
+              <a:spcBef>
+                <a:spcPts val="500"/>
+              </a:spcBef>
+              <a:buFont typeface="Arial" panose="020B0604020202020204" pitchFamily="34" charset="0"/>
+              <a:buChar char="•"/>
+              <a:defRPr sz="1800" kern="1200">
+                <a:solidFill>
+                  <a:schemeClr val="tx1"/>
+                </a:solidFill>
+                <a:latin typeface="+mn-lt"/>
+                <a:ea typeface="+mn-ea"/>
+                <a:cs typeface="+mn-cs"/>
+              </a:defRPr>
+            </a:lvl5pPr>
+            <a:lvl6pPr marL="2514600" indent="-228600" algn="l" defTabSz="914400" rtl="0" eaLnBrk="1" latinLnBrk="1" hangingPunct="1">
+              <a:lnSpc>
+                <a:spcPct val="90000"/>
+              </a:lnSpc>
+              <a:spcBef>
+                <a:spcPts val="500"/>
+              </a:spcBef>
+              <a:buFont typeface="Arial" panose="020B0604020202020204" pitchFamily="34" charset="0"/>
+              <a:buChar char="•"/>
+              <a:defRPr sz="1800" kern="1200">
+                <a:solidFill>
+                  <a:schemeClr val="tx1"/>
+                </a:solidFill>
+                <a:latin typeface="+mn-lt"/>
+                <a:ea typeface="+mn-ea"/>
+                <a:cs typeface="+mn-cs"/>
+              </a:defRPr>
+            </a:lvl6pPr>
+            <a:lvl7pPr marL="2971800" indent="-228600" algn="l" defTabSz="914400" rtl="0" eaLnBrk="1" latinLnBrk="1" hangingPunct="1">
+              <a:lnSpc>
+                <a:spcPct val="90000"/>
+              </a:lnSpc>
+              <a:spcBef>
+                <a:spcPts val="500"/>
+              </a:spcBef>
+              <a:buFont typeface="Arial" panose="020B0604020202020204" pitchFamily="34" charset="0"/>
+              <a:buChar char="•"/>
+              <a:defRPr sz="1800" kern="1200">
+                <a:solidFill>
+                  <a:schemeClr val="tx1"/>
+                </a:solidFill>
+                <a:latin typeface="+mn-lt"/>
+                <a:ea typeface="+mn-ea"/>
+                <a:cs typeface="+mn-cs"/>
+              </a:defRPr>
+            </a:lvl7pPr>
+            <a:lvl8pPr marL="3429000" indent="-228600" algn="l" defTabSz="914400" rtl="0" eaLnBrk="1" latinLnBrk="1" hangingPunct="1">
+              <a:lnSpc>
+                <a:spcPct val="90000"/>
+              </a:lnSpc>
+              <a:spcBef>
+                <a:spcPts val="500"/>
+              </a:spcBef>
+              <a:buFont typeface="Arial" panose="020B0604020202020204" pitchFamily="34" charset="0"/>
+              <a:buChar char="•"/>
+              <a:defRPr sz="1800" kern="1200">
+                <a:solidFill>
+                  <a:schemeClr val="tx1"/>
+                </a:solidFill>
+                <a:latin typeface="+mn-lt"/>
+                <a:ea typeface="+mn-ea"/>
+                <a:cs typeface="+mn-cs"/>
+              </a:defRPr>
+            </a:lvl8pPr>
+            <a:lvl9pPr marL="3886200" indent="-228600" algn="l" defTabSz="914400" rtl="0" eaLnBrk="1" latinLnBrk="1" hangingPunct="1">
+              <a:lnSpc>
+                <a:spcPct val="90000"/>
+              </a:lnSpc>
+              <a:spcBef>
+                <a:spcPts val="500"/>
+              </a:spcBef>
+              <a:buFont typeface="Arial" panose="020B0604020202020204" pitchFamily="34" charset="0"/>
+              <a:buChar char="•"/>
+              <a:defRPr sz="1800" kern="1200">
+                <a:solidFill>
+                  <a:schemeClr val="tx1"/>
+                </a:solidFill>
+                <a:latin typeface="+mn-lt"/>
+                <a:ea typeface="+mn-ea"/>
+                <a:cs typeface="+mn-cs"/>
+              </a:defRPr>
+            </a:lvl9pPr>
+          </a:lstStyle>
+          <a:p>
+            <a:pPr algn="ctr">
+              <a:lnSpc>
+                <a:spcPct val="130000"/>
+              </a:lnSpc>
+              <a:spcBef>
+                <a:spcPts val="0"/>
+              </a:spcBef>
+            </a:pPr>
+            <a:r>
+              <a:rPr lang="ko-KR" altLang="en-US" sz="900" dirty="0">
+                <a:latin typeface="피플폰트 Bold" panose="020B0600000101010101" pitchFamily="50" charset="-127"/>
+                <a:ea typeface="피플폰트 Bold" panose="020B0600000101010101" pitchFamily="50" charset="-127"/>
+              </a:rPr>
+              <a:t>PF 대출약정</a:t>
+            </a:r>
+            <a:endParaRPr lang="en-US" altLang="ko-KR" sz="900" dirty="0">
+              <a:latin typeface="피플폰트 Bold" panose="020B0600000101010101" pitchFamily="50" charset="-127"/>
+              <a:ea typeface="피플폰트 Bold" panose="020B0600000101010101" pitchFamily="50" charset="-127"/>
+            </a:endParaRPr>
+          </a:p>
+        </p:txBody>
+      </p:sp>
+      <p:sp>
+        <p:nvSpPr>
+          <p:cNvPr id="59" name="텍스트 개체 틀 2">
+            <a:extLst>
+              <a:ext uri="{FF2B5EF4-FFF2-40B4-BE49-F238E27FC236}">
+                <a16:creationId xmlns:a16="http://schemas.microsoft.com/office/drawing/2014/main" id="{5BA6795C-C83E-47BC-B39F-E53164B2B35D}"/>
+              </a:ext>
+            </a:extLst>
+          </p:cNvPr>
+          <p:cNvSpPr txBox="1">
+            <a:spLocks/>
+          </p:cNvSpPr>
+          <p:nvPr/>
+        </p:nvSpPr>
+        <p:spPr>
+          <a:xfrm>
+            <a:off x="1351246" y="3656448"/>
+            <a:ext cx="1060169" cy="169662"/>
+          </a:xfrm>
+          <a:prstGeom prst="rect">
+            <a:avLst/>
+          </a:prstGeom>
+        </p:spPr>
+        <p:txBody>
+          <a:bodyPr vert="horz" wrap="square" lIns="0" tIns="0" rIns="0" bIns="0" rtlCol="0" anchor="ctr">
+            <a:spAutoFit/>
+          </a:bodyPr>
+          <a:lstStyle>
+            <a:lvl1pPr marL="0" indent="0" algn="l" defTabSz="914400" rtl="0" eaLnBrk="1" latinLnBrk="1" hangingPunct="1">
+              <a:lnSpc>
+                <a:spcPct val="90000"/>
+              </a:lnSpc>
+              <a:spcBef>
+                <a:spcPts val="1000"/>
+              </a:spcBef>
+              <a:buFont typeface="Arial" panose="020B0604020202020204" pitchFamily="34" charset="0"/>
+              <a:buNone/>
+              <a:defRPr sz="1200" kern="1200">
+                <a:solidFill>
+                  <a:schemeClr val="tx1"/>
+                </a:solidFill>
+                <a:latin typeface="AppleSDGothicNeoM00" panose="02000503000000000000" pitchFamily="2" charset="-127"/>
+                <a:ea typeface="AppleSDGothicNeoM00" panose="02000503000000000000" pitchFamily="2" charset="-127"/>
+                <a:cs typeface="+mn-cs"/>
+              </a:defRPr>
+            </a:lvl1pPr>
+            <a:lvl2pPr marL="685800" indent="-228600" algn="l" defTabSz="914400" rtl="0" eaLnBrk="1" latinLnBrk="1" hangingPunct="1">
+              <a:lnSpc>
+                <a:spcPct val="90000"/>
+              </a:lnSpc>
+              <a:spcBef>
+                <a:spcPts val="500"/>
+              </a:spcBef>
+              <a:buFont typeface="Arial" panose="020B0604020202020204" pitchFamily="34" charset="0"/>
+              <a:buChar char="•"/>
+              <a:defRPr sz="2400" kern="1200">
+                <a:solidFill>
+                  <a:schemeClr val="tx1"/>
+                </a:solidFill>
+                <a:latin typeface="+mn-lt"/>
+                <a:ea typeface="+mn-ea"/>
+                <a:cs typeface="+mn-cs"/>
+              </a:defRPr>
+            </a:lvl2pPr>
+            <a:lvl3pPr marL="1143000" indent="-228600" algn="l" defTabSz="914400" rtl="0" eaLnBrk="1" latinLnBrk="1" hangingPunct="1">
+              <a:lnSpc>
+                <a:spcPct val="90000"/>
+              </a:lnSpc>
+              <a:spcBef>
+                <a:spcPts val="500"/>
+              </a:spcBef>
+              <a:buFont typeface="Arial" panose="020B0604020202020204" pitchFamily="34" charset="0"/>
+              <a:buChar char="•"/>
+              <a:defRPr sz="2000" kern="1200">
+                <a:solidFill>
+                  <a:schemeClr val="tx1"/>
+                </a:solidFill>
+                <a:latin typeface="+mn-lt"/>
+                <a:ea typeface="+mn-ea"/>
+                <a:cs typeface="+mn-cs"/>
+              </a:defRPr>
+            </a:lvl3pPr>
+            <a:lvl4pPr marL="1600200" indent="-228600" algn="l" defTabSz="914400" rtl="0" eaLnBrk="1" latinLnBrk="1" hangingPunct="1">
+              <a:lnSpc>
+                <a:spcPct val="90000"/>
+              </a:lnSpc>
+              <a:spcBef>
+                <a:spcPts val="500"/>
+              </a:spcBef>
+              <a:buFont typeface="Arial" panose="020B0604020202020204" pitchFamily="34" charset="0"/>
+              <a:buChar char="•"/>
+              <a:defRPr sz="1800" kern="1200">
+                <a:solidFill>
+                  <a:schemeClr val="tx1"/>
+                </a:solidFill>
+                <a:latin typeface="+mn-lt"/>
+                <a:ea typeface="+mn-ea"/>
+                <a:cs typeface="+mn-cs"/>
+              </a:defRPr>
+            </a:lvl4pPr>
+            <a:lvl5pPr marL="2057400" indent="-228600" algn="l" defTabSz="914400" rtl="0" eaLnBrk="1" latinLnBrk="1" hangingPunct="1">
+              <a:lnSpc>
+                <a:spcPct val="90000"/>
+              </a:lnSpc>
+              <a:spcBef>
+                <a:spcPts val="500"/>
+              </a:spcBef>
+              <a:buFont typeface="Arial" panose="020B0604020202020204" pitchFamily="34" charset="0"/>
+              <a:buChar char="•"/>
+              <a:defRPr sz="1800" kern="1200">
+                <a:solidFill>
+                  <a:schemeClr val="tx1"/>
+                </a:solidFill>
+                <a:latin typeface="+mn-lt"/>
+                <a:ea typeface="+mn-ea"/>
+                <a:cs typeface="+mn-cs"/>
+              </a:defRPr>
+            </a:lvl5pPr>
+            <a:lvl6pPr marL="2514600" indent="-228600" algn="l" defTabSz="914400" rtl="0" eaLnBrk="1" latinLnBrk="1" hangingPunct="1">
+              <a:lnSpc>
+                <a:spcPct val="90000"/>
+              </a:lnSpc>
+              <a:spcBef>
+                <a:spcPts val="500"/>
+              </a:spcBef>
+              <a:buFont typeface="Arial" panose="020B0604020202020204" pitchFamily="34" charset="0"/>
+              <a:buChar char="•"/>
+              <a:defRPr sz="1800" kern="1200">
+                <a:solidFill>
+                  <a:schemeClr val="tx1"/>
+                </a:solidFill>
+                <a:latin typeface="+mn-lt"/>
+                <a:ea typeface="+mn-ea"/>
+                <a:cs typeface="+mn-cs"/>
+              </a:defRPr>
+            </a:lvl6pPr>
+            <a:lvl7pPr marL="2971800" indent="-228600" algn="l" defTabSz="914400" rtl="0" eaLnBrk="1" latinLnBrk="1" hangingPunct="1">
+              <a:lnSpc>
+                <a:spcPct val="90000"/>
+              </a:lnSpc>
+              <a:spcBef>
+                <a:spcPts val="500"/>
+              </a:spcBef>
+              <a:buFont typeface="Arial" panose="020B0604020202020204" pitchFamily="34" charset="0"/>
+              <a:buChar char="•"/>
+              <a:defRPr sz="1800" kern="1200">
+                <a:solidFill>
+                  <a:schemeClr val="tx1"/>
+                </a:solidFill>
+                <a:latin typeface="+mn-lt"/>
+                <a:ea typeface="+mn-ea"/>
+                <a:cs typeface="+mn-cs"/>
+              </a:defRPr>
+            </a:lvl7pPr>
+            <a:lvl8pPr marL="3429000" indent="-228600" algn="l" defTabSz="914400" rtl="0" eaLnBrk="1" latinLnBrk="1" hangingPunct="1">
+              <a:lnSpc>
+                <a:spcPct val="90000"/>
+              </a:lnSpc>
+              <a:spcBef>
+                <a:spcPts val="500"/>
+              </a:spcBef>
+              <a:buFont typeface="Arial" panose="020B0604020202020204" pitchFamily="34" charset="0"/>
+              <a:buChar char="•"/>
+              <a:defRPr sz="1800" kern="1200">
+                <a:solidFill>
+                  <a:schemeClr val="tx1"/>
+                </a:solidFill>
+                <a:latin typeface="+mn-lt"/>
+                <a:ea typeface="+mn-ea"/>
+                <a:cs typeface="+mn-cs"/>
+              </a:defRPr>
+            </a:lvl8pPr>
+            <a:lvl9pPr marL="3886200" indent="-228600" algn="l" defTabSz="914400" rtl="0" eaLnBrk="1" latinLnBrk="1" hangingPunct="1">
+              <a:lnSpc>
+                <a:spcPct val="90000"/>
+              </a:lnSpc>
+              <a:spcBef>
+                <a:spcPts val="500"/>
+              </a:spcBef>
+              <a:buFont typeface="Arial" panose="020B0604020202020204" pitchFamily="34" charset="0"/>
+              <a:buChar char="•"/>
+              <a:defRPr sz="1800" kern="1200">
+                <a:solidFill>
+                  <a:schemeClr val="tx1"/>
+                </a:solidFill>
+                <a:latin typeface="+mn-lt"/>
+                <a:ea typeface="+mn-ea"/>
+                <a:cs typeface="+mn-cs"/>
+              </a:defRPr>
+            </a:lvl9pPr>
+          </a:lstStyle>
+          <a:p>
+            <a:pPr algn="ctr">
+              <a:lnSpc>
+                <a:spcPct val="130000"/>
+              </a:lnSpc>
+              <a:spcBef>
+                <a:spcPts val="0"/>
+              </a:spcBef>
+            </a:pPr>
+            <a:r>
+              <a:rPr lang="ko-KR" altLang="en-US" sz="900" dirty="0">
+                <a:latin typeface="피플폰트 Bold" panose="020B0600000101010101" pitchFamily="50" charset="-127"/>
+                <a:ea typeface="피플폰트 Bold" panose="020B0600000101010101" pitchFamily="50" charset="-127"/>
+              </a:rPr>
+              <a:t>부동산신탁</a:t>
+            </a:r>
+            <a:endParaRPr lang="en-US" altLang="ko-KR" sz="900" dirty="0">
+              <a:latin typeface="피플폰트 Bold" panose="020B0600000101010101" pitchFamily="50" charset="-127"/>
+              <a:ea typeface="피플폰트 Bold" panose="020B0600000101010101" pitchFamily="50" charset="-127"/>
+            </a:endParaRPr>
+          </a:p>
+        </p:txBody>
+      </p:sp>
+      <p:graphicFrame>
+        <p:nvGraphicFramePr>
+          <p:cNvPr id="60" name="표 4">
+            <a:extLst>
+              <a:ext uri="{FF2B5EF4-FFF2-40B4-BE49-F238E27FC236}">
+                <a16:creationId xmlns:a16="http://schemas.microsoft.com/office/drawing/2014/main" id="{040A2AA4-0CD0-4BEA-9B38-EBEBC9DBF669}"/>
+              </a:ext>
+            </a:extLst>
+          </p:cNvPr>
+          <p:cNvGraphicFramePr>
+            <a:graphicFrameLocks noGrp="1"/>
+          </p:cNvGraphicFramePr>
+          <p:nvPr>
+            <p:extLst>
+              <p:ext uri="{D42A27DB-BD31-4B8C-83A1-F6EECF244321}">
+                <p14:modId xmlns:p14="http://schemas.microsoft.com/office/powerpoint/2010/main" val="2086026496"/>
+              </p:ext>
+            </p:extLst>
+          </p:nvPr>
+        </p:nvGraphicFramePr>
+        <p:xfrm>
+          <a:off x="5097579" y="2670935"/>
+          <a:ext cx="1960205" cy="335202"/>
+        </p:xfrm>
+        <a:graphic>
+          <a:graphicData uri="http://schemas.openxmlformats.org/drawingml/2006/table">
+            <a:tbl>
+              <a:tblPr firstRow="1" bandRow="1">
+                <a:effectLst>
+                  <a:outerShdw blurRad="50800" dist="38100" dir="2700000" algn="tl" rotWithShape="0">
+                    <a:prstClr val="black">
+                      <a:alpha val="40000"/>
+                    </a:prstClr>
+                  </a:outerShdw>
+                </a:effectLst>
+                <a:tableStyleId>{D03447BB-5D67-496B-8E87-E561075AD55C}</a:tableStyleId>
+              </a:tblPr>
+              <a:tblGrid>
+                <a:gridCol w="1960205">
+                  <a:extLst>
+                    <a:ext uri="{9D8B030D-6E8A-4147-A177-3AD203B41FA5}">
+                      <a16:colId xmlns:a16="http://schemas.microsoft.com/office/drawing/2014/main" val="20000"/>
+                    </a:ext>
+                  </a:extLst>
+                </a:gridCol>
+              </a:tblGrid>
+              <a:tr h="335202">
+                <a:tc>
+                  <a:txBody>
+                    <a:bodyPr/>
+                    <a:lstStyle/>
+                    <a:p>
+                      <a:pPr algn="ctr" latinLnBrk="1">
+                        <a:defRPr/>
+                      </a:pPr>
+                      <a:r>
+                        <a:rPr lang="ko-KR" altLang="en-US" sz="1200" b="1" dirty="0">
+                          <a:solidFill>
+                            <a:schemeClr val="tx1"/>
+                          </a:solidFill>
+                          <a:latin typeface="피플폰트 Bold" panose="020B0600000101010101" pitchFamily="50" charset="-127"/>
+                          <a:ea typeface="피플폰트 Bold" panose="020B0600000101010101" pitchFamily="50" charset="-127"/>
+                        </a:rPr>
+                        <a:t>기타 </a:t>
+                      </a:r>
+                      <a:r>
+                        <a:rPr lang="ko-KR" altLang="en-US" sz="1200" b="1" dirty="0" err="1">
+                          <a:solidFill>
+                            <a:schemeClr val="tx1"/>
+                          </a:solidFill>
+                          <a:latin typeface="피플폰트 Bold" panose="020B0600000101010101" pitchFamily="50" charset="-127"/>
+                          <a:ea typeface="피플폰트 Bold" panose="020B0600000101010101" pitchFamily="50" charset="-127"/>
+                        </a:rPr>
+                        <a:t>Tr</a:t>
+                      </a:r>
+                      <a:r>
+                        <a:rPr lang="ko-KR" altLang="en-US" sz="1200" b="1" dirty="0">
+                          <a:solidFill>
+                            <a:schemeClr val="tx1"/>
+                          </a:solidFill>
+                          <a:latin typeface="피플폰트 Bold" panose="020B0600000101010101" pitchFamily="50" charset="-127"/>
+                          <a:ea typeface="피플폰트 Bold" panose="020B0600000101010101" pitchFamily="50" charset="-127"/>
+                        </a:rPr>
+                        <a:t>.</a:t>
+                      </a:r>
+                      <a:r>
+                        <a:rPr lang="en-US" altLang="ko-KR" sz="1200" b="1" dirty="0">
+                          <a:solidFill>
+                            <a:schemeClr val="tx1"/>
+                          </a:solidFill>
+                          <a:latin typeface="피플폰트 Bold" panose="020B0600000101010101" pitchFamily="50" charset="-127"/>
+                          <a:ea typeface="피플폰트 Bold" panose="020B0600000101010101" pitchFamily="50" charset="-127"/>
+                        </a:rPr>
+                        <a:t>A</a:t>
+                      </a:r>
+                      <a:r>
+                        <a:rPr lang="ko-KR" altLang="en-US" sz="1200" b="1" dirty="0">
+                          <a:solidFill>
+                            <a:schemeClr val="tx1"/>
+                          </a:solidFill>
+                          <a:latin typeface="피플폰트 Bold" panose="020B0600000101010101" pitchFamily="50" charset="-127"/>
+                          <a:ea typeface="피플폰트 Bold" panose="020B0600000101010101" pitchFamily="50" charset="-127"/>
+                        </a:rPr>
+                        <a:t> 대주</a:t>
+                      </a:r>
+                    </a:p>
+                  </a:txBody>
+                  <a:tcPr marL="0" marR="0" marT="72000" marB="0">
+                    <a:lnL w="28575" cap="flat" cmpd="sng" algn="ctr">
+                      <a:solidFill>
+                        <a:schemeClr val="bg1"/>
+                      </a:solidFill>
+                      <a:prstDash val="solid"/>
+                      <a:round/>
+                      <a:headEnd type="none" w="med" len="med"/>
+                      <a:tailEnd type="none" w="med" len="med"/>
+                    </a:lnL>
+                    <a:lnR w="28575" cap="flat" cmpd="sng" algn="ctr">
+                      <a:solidFill>
+                        <a:schemeClr val="bg1"/>
+                      </a:solidFill>
+                      <a:prstDash val="solid"/>
+                      <a:round/>
+                      <a:headEnd type="none" w="med" len="med"/>
+                      <a:tailEnd type="none" w="med" len="med"/>
+                    </a:lnR>
+                    <a:lnT w="28575" cap="flat" cmpd="sng" algn="ctr">
+                      <a:solidFill>
+                        <a:schemeClr val="bg1"/>
+                      </a:solidFill>
+                      <a:prstDash val="solid"/>
+                      <a:round/>
+                      <a:headEnd type="none" w="med" len="med"/>
+                      <a:tailEnd type="none" w="med" len="med"/>
+                    </a:lnT>
+                    <a:lnB w="28575" cap="flat" cmpd="sng" algn="ctr">
+                      <a:solidFill>
+                        <a:schemeClr val="bg1"/>
+                      </a:solidFill>
+                      <a:prstDash val="solid"/>
+                      <a:round/>
+                      <a:headEnd type="none" w="med" len="med"/>
+                      <a:tailEnd type="none" w="med" len="med"/>
+                    </a:lnB>
+                    <a:solidFill>
+                      <a:srgbClr val="D9D9D9"/>
+                    </a:solidFill>
+                  </a:tcPr>
+                </a:tc>
+                <a:extLst>
+                  <a:ext uri="{0D108BD9-81ED-4DB2-BD59-A6C34878D82A}">
+                    <a16:rowId xmlns:a16="http://schemas.microsoft.com/office/drawing/2014/main" val="10001"/>
+                  </a:ext>
+                </a:extLst>
+              </a:tr>
+            </a:tbl>
+          </a:graphicData>
+        </a:graphic>
+      </p:graphicFrame>
+      <p:graphicFrame>
+        <p:nvGraphicFramePr>
+          <p:cNvPr id="61" name="표 4">
+            <a:extLst>
+              <a:ext uri="{FF2B5EF4-FFF2-40B4-BE49-F238E27FC236}">
+                <a16:creationId xmlns:a16="http://schemas.microsoft.com/office/drawing/2014/main" id="{EF9A4B08-F378-4D68-91A1-D9AFAD5C79A5}"/>
+              </a:ext>
+            </a:extLst>
+          </p:cNvPr>
+          <p:cNvGraphicFramePr>
+            <a:graphicFrameLocks noGrp="1"/>
+          </p:cNvGraphicFramePr>
+          <p:nvPr>
+            <p:extLst>
+              <p:ext uri="{D42A27DB-BD31-4B8C-83A1-F6EECF244321}">
+                <p14:modId xmlns:p14="http://schemas.microsoft.com/office/powerpoint/2010/main" val="757532527"/>
+              </p:ext>
+            </p:extLst>
+          </p:nvPr>
+        </p:nvGraphicFramePr>
+        <p:xfrm>
+          <a:off x="4981421" y="4957736"/>
+          <a:ext cx="2130374" cy="823844"/>
+        </p:xfrm>
+        <a:graphic>
+          <a:graphicData uri="http://schemas.openxmlformats.org/drawingml/2006/table">
+            <a:tbl>
+              <a:tblPr firstRow="1" bandRow="1">
+                <a:effectLst>
+                  <a:outerShdw blurRad="50800" dist="38100" dir="2700000" algn="tl" rotWithShape="0">
+                    <a:prstClr val="black">
+                      <a:alpha val="40000"/>
+                    </a:prstClr>
+                  </a:outerShdw>
+                </a:effectLst>
+                <a:tableStyleId>{D03447BB-5D67-496B-8E87-E561075AD55C}</a:tableStyleId>
+              </a:tblPr>
+              <a:tblGrid>
+                <a:gridCol w="2130374">
+                  <a:extLst>
+                    <a:ext uri="{9D8B030D-6E8A-4147-A177-3AD203B41FA5}">
+                      <a16:colId xmlns:a16="http://schemas.microsoft.com/office/drawing/2014/main" val="20000"/>
+                    </a:ext>
+                  </a:extLst>
+                </a:gridCol>
+              </a:tblGrid>
+              <a:tr h="0">
+                <a:tc>
+                  <a:txBody>
+                    <a:bodyPr/>
+                    <a:lstStyle/>
+                    <a:p>
+                      <a:pPr algn="ctr" latinLnBrk="1">
+                        <a:defRPr/>
+                      </a:pPr>
+                      <a:r>
+                        <a:rPr lang="en-US" altLang="ko-KR" sz="1000" dirty="0">
+                          <a:latin typeface="피플폰트 Bold" panose="020B0600000101010101" pitchFamily="50" charset="-127"/>
+                          <a:ea typeface="피플폰트 Bold" panose="020B0600000101010101" pitchFamily="50" charset="-127"/>
+                        </a:rPr>
+                        <a:t>Tr. C 1,000억원</a:t>
+                      </a:r>
+                      <a:endParaRPr lang="ko-KR" altLang="en-US" sz="1000" dirty="0">
+                        <a:latin typeface="피플폰트 Bold" panose="020B0600000101010101" pitchFamily="50" charset="-127"/>
+                        <a:ea typeface="피플폰트 Bold" panose="020B0600000101010101" pitchFamily="50" charset="-127"/>
+                      </a:endParaRPr>
+                    </a:p>
+                  </a:txBody>
+                  <a:tcPr marL="152842" marR="152842" marT="76421" marB="76421" anchor="ctr">
+                    <a:lnL w="28575" cap="flat" cmpd="sng" algn="ctr">
+                      <a:solidFill>
+                        <a:schemeClr val="bg1"/>
+                      </a:solidFill>
+                      <a:prstDash val="solid"/>
+                      <a:round/>
+                      <a:headEnd type="none" w="med" len="med"/>
+                      <a:tailEnd type="none" w="med" len="med"/>
+                    </a:lnL>
+                    <a:lnR w="28575" cap="flat" cmpd="sng" algn="ctr">
+                      <a:solidFill>
+                        <a:schemeClr val="bg1"/>
+                      </a:solidFill>
+                      <a:prstDash val="solid"/>
+                      <a:round/>
+                      <a:headEnd type="none" w="med" len="med"/>
+                      <a:tailEnd type="none" w="med" len="med"/>
+                    </a:lnR>
+                    <a:lnT w="28575" cap="flat" cmpd="sng" algn="ctr">
+                      <a:solidFill>
+                        <a:schemeClr val="bg1"/>
+                      </a:solidFill>
+                      <a:prstDash val="solid"/>
+                      <a:round/>
+                      <a:headEnd type="none" w="med" len="med"/>
+                      <a:tailEnd type="none" w="med" len="med"/>
+                    </a:lnT>
+                    <a:lnB w="28575" cap="flat" cmpd="sng" algn="ctr">
+                      <a:solidFill>
+                        <a:schemeClr val="bg1"/>
+                      </a:solidFill>
+                      <a:prstDash val="solid"/>
+                      <a:round/>
+                      <a:headEnd type="none" w="med" len="med"/>
+                      <a:tailEnd type="none" w="med" len="med"/>
+                    </a:lnB>
+                    <a:solidFill>
+                      <a:srgbClr val="08377C"/>
+                    </a:solidFill>
+                  </a:tcPr>
+                </a:tc>
+                <a:extLst>
+                  <a:ext uri="{0D108BD9-81ED-4DB2-BD59-A6C34878D82A}">
+                    <a16:rowId xmlns:a16="http://schemas.microsoft.com/office/drawing/2014/main" val="10000"/>
+                  </a:ext>
+                </a:extLst>
+              </a:tr>
+              <a:tr h="0">
+                <a:tc>
+                  <a:txBody>
+                    <a:bodyPr/>
+                    <a:lstStyle/>
+                    <a:p>
+                      <a:pPr algn="ctr" latinLnBrk="1">
+                        <a:defRPr/>
+                      </a:pPr>
+                      <a:endParaRPr lang="en-US" altLang="ko-KR" sz="1200" b="1" dirty="0">
+                        <a:solidFill>
+                          <a:schemeClr val="tx1"/>
+                        </a:solidFill>
+                        <a:latin typeface="피플폰트 Bold" panose="020B0600000101010101" pitchFamily="50" charset="-127"/>
+                        <a:ea typeface="피플폰트 Bold" panose="020B0600000101010101" pitchFamily="50" charset="-127"/>
+                      </a:endParaRPr>
+                    </a:p>
+                    <a:p>
+                      <a:pPr algn="ctr" latinLnBrk="1">
+                        <a:defRPr/>
+                      </a:pPr>
+                      <a:endParaRPr lang="en-US" altLang="ko-KR" sz="1200" b="1" dirty="0">
+                        <a:solidFill>
+                          <a:schemeClr val="tx1"/>
+                        </a:solidFill>
+                        <a:latin typeface="피플폰트 Bold" panose="020B0600000101010101" pitchFamily="50" charset="-127"/>
+                        <a:ea typeface="피플폰트 Bold" panose="020B0600000101010101" pitchFamily="50" charset="-127"/>
+                      </a:endParaRPr>
+                    </a:p>
+                  </a:txBody>
+                  <a:tcPr marL="152842" marR="152842" marT="76421" marB="76421" anchor="ctr">
+                    <a:lnL w="28575" cap="flat" cmpd="sng" algn="ctr">
+                      <a:solidFill>
+                        <a:schemeClr val="bg1"/>
+                      </a:solidFill>
+                      <a:prstDash val="solid"/>
+                      <a:round/>
+                      <a:headEnd type="none" w="med" len="med"/>
+                      <a:tailEnd type="none" w="med" len="med"/>
+                    </a:lnL>
+                    <a:lnR w="28575" cap="flat" cmpd="sng" algn="ctr">
+                      <a:solidFill>
+                        <a:schemeClr val="bg1"/>
+                      </a:solidFill>
+                      <a:prstDash val="solid"/>
+                      <a:round/>
+                      <a:headEnd type="none" w="med" len="med"/>
+                      <a:tailEnd type="none" w="med" len="med"/>
+                    </a:lnR>
+                    <a:lnT w="28575" cap="flat" cmpd="sng" algn="ctr">
+                      <a:solidFill>
+                        <a:schemeClr val="bg1"/>
+                      </a:solidFill>
+                      <a:prstDash val="solid"/>
+                      <a:round/>
+                      <a:headEnd type="none" w="med" len="med"/>
+                      <a:tailEnd type="none" w="med" len="med"/>
+                    </a:lnT>
+                    <a:lnB w="28575" cap="flat" cmpd="sng" algn="ctr">
+                      <a:solidFill>
+                        <a:schemeClr val="bg1"/>
+                      </a:solidFill>
+                      <a:prstDash val="solid"/>
+                      <a:round/>
+                      <a:headEnd type="none" w="med" len="med"/>
+                      <a:tailEnd type="none" w="med" len="med"/>
+                    </a:lnB>
+                    <a:solidFill>
+                      <a:srgbClr val="D9D9D9"/>
+                    </a:solidFill>
+                  </a:tcPr>
+                </a:tc>
+                <a:extLst>
+                  <a:ext uri="{0D108BD9-81ED-4DB2-BD59-A6C34878D82A}">
+                    <a16:rowId xmlns:a16="http://schemas.microsoft.com/office/drawing/2014/main" val="10001"/>
+                  </a:ext>
+                </a:extLst>
+              </a:tr>
+            </a:tbl>
+          </a:graphicData>
+        </a:graphic>
+      </p:graphicFrame>
+      <p:graphicFrame>
+        <p:nvGraphicFramePr>
+          <p:cNvPr id="62" name="표 4">
+            <a:extLst>
+              <a:ext uri="{FF2B5EF4-FFF2-40B4-BE49-F238E27FC236}">
+                <a16:creationId xmlns:a16="http://schemas.microsoft.com/office/drawing/2014/main" id="{8BAEA511-6617-4EEB-A5EA-F4A383E1FBC0}"/>
+              </a:ext>
+            </a:extLst>
+          </p:cNvPr>
+          <p:cNvGraphicFramePr>
+            <a:graphicFrameLocks noGrp="1"/>
+          </p:cNvGraphicFramePr>
+          <p:nvPr>
+            <p:extLst>
+              <p:ext uri="{D42A27DB-BD31-4B8C-83A1-F6EECF244321}">
+                <p14:modId xmlns:p14="http://schemas.microsoft.com/office/powerpoint/2010/main" val="4215641623"/>
+              </p:ext>
+            </p:extLst>
+          </p:nvPr>
+        </p:nvGraphicFramePr>
+        <p:xfrm>
+          <a:off x="5097579" y="5353860"/>
+          <a:ext cx="1960205" cy="335202"/>
+        </p:xfrm>
+        <a:graphic>
+          <a:graphicData uri="http://schemas.openxmlformats.org/drawingml/2006/table">
+            <a:tbl>
+              <a:tblPr firstRow="1" bandRow="1">
+                <a:effectLst>
+                  <a:outerShdw blurRad="50800" dist="38100" dir="2700000" algn="tl" rotWithShape="0">
+                    <a:prstClr val="black">
+                      <a:alpha val="40000"/>
+                    </a:prstClr>
+                  </a:outerShdw>
+                </a:effectLst>
+                <a:tableStyleId>{D03447BB-5D67-496B-8E87-E561075AD55C}</a:tableStyleId>
+              </a:tblPr>
+              <a:tblGrid>
+                <a:gridCol w="1960205">
+                  <a:extLst>
+                    <a:ext uri="{9D8B030D-6E8A-4147-A177-3AD203B41FA5}">
+                      <a16:colId xmlns:a16="http://schemas.microsoft.com/office/drawing/2014/main" val="20000"/>
+                    </a:ext>
+                  </a:extLst>
+                </a:gridCol>
+              </a:tblGrid>
+              <a:tr h="335202">
+                <a:tc>
+                  <a:txBody>
+                    <a:bodyPr/>
+                    <a:lstStyle/>
+                    <a:p>
+                      <a:pPr algn="ctr" latinLnBrk="1">
+                        <a:defRPr/>
+                      </a:pPr>
+                      <a:r>
+                        <a:rPr lang="ko-KR" altLang="en-US" sz="1200" b="1" dirty="0" err="1">
+                          <a:solidFill>
+                            <a:schemeClr val="tx1"/>
+                          </a:solidFill>
+                          <a:latin typeface="피플폰트 Bold" panose="020B0600000101010101" pitchFamily="50" charset="-127"/>
+                          <a:ea typeface="피플폰트 Bold" panose="020B0600000101010101" pitchFamily="50" charset="-127"/>
+                        </a:rPr>
+                        <a:t>Tr</a:t>
+                      </a:r>
+                      <a:r>
+                        <a:rPr lang="ko-KR" altLang="en-US" sz="1200" b="1" dirty="0">
+                          <a:solidFill>
+                            <a:schemeClr val="tx1"/>
+                          </a:solidFill>
+                          <a:latin typeface="피플폰트 Bold" panose="020B0600000101010101" pitchFamily="50" charset="-127"/>
+                          <a:ea typeface="피플폰트 Bold" panose="020B0600000101010101" pitchFamily="50" charset="-127"/>
+                        </a:rPr>
+                        <a:t>.</a:t>
+                      </a:r>
+                      <a:r>
+                        <a:rPr lang="en-US" altLang="ko-KR" sz="1200" b="1" dirty="0">
+                          <a:solidFill>
+                            <a:schemeClr val="tx1"/>
+                          </a:solidFill>
+                          <a:latin typeface="피플폰트 Bold" panose="020B0600000101010101" pitchFamily="50" charset="-127"/>
+                          <a:ea typeface="피플폰트 Bold" panose="020B0600000101010101" pitchFamily="50" charset="-127"/>
+                        </a:rPr>
+                        <a:t>C</a:t>
+                      </a:r>
+                      <a:r>
+                        <a:rPr lang="ko-KR" altLang="en-US" sz="1200" b="1" dirty="0">
+                          <a:solidFill>
+                            <a:schemeClr val="tx1"/>
+                          </a:solidFill>
+                          <a:latin typeface="피플폰트 Bold" panose="020B0600000101010101" pitchFamily="50" charset="-127"/>
+                          <a:ea typeface="피플폰트 Bold" panose="020B0600000101010101" pitchFamily="50" charset="-127"/>
+                        </a:rPr>
+                        <a:t> 대주</a:t>
+                      </a:r>
+                    </a:p>
+                  </a:txBody>
+                  <a:tcPr marL="0" marR="0" marT="72000" marB="0">
+                    <a:lnL w="28575" cap="flat" cmpd="sng" algn="ctr">
+                      <a:solidFill>
+                        <a:schemeClr val="bg1"/>
+                      </a:solidFill>
+                      <a:prstDash val="solid"/>
+                      <a:round/>
+                      <a:headEnd type="none" w="med" len="med"/>
+                      <a:tailEnd type="none" w="med" len="med"/>
+                    </a:lnL>
+                    <a:lnR w="28575" cap="flat" cmpd="sng" algn="ctr">
+                      <a:solidFill>
+                        <a:schemeClr val="bg1"/>
+                      </a:solidFill>
+                      <a:prstDash val="solid"/>
+                      <a:round/>
+                      <a:headEnd type="none" w="med" len="med"/>
+                      <a:tailEnd type="none" w="med" len="med"/>
+                    </a:lnR>
+                    <a:lnT w="28575" cap="flat" cmpd="sng" algn="ctr">
+                      <a:solidFill>
+                        <a:schemeClr val="bg1"/>
+                      </a:solidFill>
+                      <a:prstDash val="solid"/>
+                      <a:round/>
+                      <a:headEnd type="none" w="med" len="med"/>
+                      <a:tailEnd type="none" w="med" len="med"/>
+                    </a:lnT>
+                    <a:lnB w="28575" cap="flat" cmpd="sng" algn="ctr">
+                      <a:solidFill>
+                        <a:schemeClr val="bg1"/>
+                      </a:solidFill>
+                      <a:prstDash val="solid"/>
+                      <a:round/>
+                      <a:headEnd type="none" w="med" len="med"/>
+                      <a:tailEnd type="none" w="med" len="med"/>
+                    </a:lnB>
+                    <a:solidFill>
+                      <a:srgbClr val="D9D9D9"/>
+                    </a:solidFill>
+                  </a:tcPr>
+                </a:tc>
+                <a:extLst>
+                  <a:ext uri="{0D108BD9-81ED-4DB2-BD59-A6C34878D82A}">
+                    <a16:rowId xmlns:a16="http://schemas.microsoft.com/office/drawing/2014/main" val="10001"/>
+                  </a:ext>
+                </a:extLst>
+              </a:tr>
+            </a:tbl>
+          </a:graphicData>
+        </a:graphic>
+      </p:graphicFrame>
+      <p:sp>
+        <p:nvSpPr>
+          <p:cNvPr id="63" name="직사각형 62">
+            <a:extLst>
+              <a:ext uri="{FF2B5EF4-FFF2-40B4-BE49-F238E27FC236}">
+                <a16:creationId xmlns:a16="http://schemas.microsoft.com/office/drawing/2014/main" id="{0795D27B-1871-413C-AF47-DA248EE19C30}"/>
+              </a:ext>
+            </a:extLst>
+          </p:cNvPr>
+          <p:cNvSpPr/>
+          <p:nvPr/>
+        </p:nvSpPr>
+        <p:spPr>
+          <a:xfrm>
+            <a:off x="5051661" y="3091463"/>
+            <a:ext cx="4459310" cy="743427"/>
+          </a:xfrm>
+          <a:prstGeom prst="rect">
+            <a:avLst/>
+          </a:prstGeom>
+          <a:solidFill>
+            <a:schemeClr val="bg1">
+              <a:lumMod val="95000"/>
+              <a:alpha val="74000"/>
+            </a:schemeClr>
+          </a:solidFill>
+          <a:ln w="12700">
+            <a:solidFill>
+              <a:srgbClr val="C00000"/>
+            </a:solidFill>
+            <a:prstDash val="sysDash"/>
+          </a:ln>
+        </p:spPr>
+        <p:style>
+          <a:lnRef idx="2">
+            <a:schemeClr val="accent1">
+              <a:shade val="50000"/>
+            </a:schemeClr>
+          </a:lnRef>
+          <a:fillRef idx="1">
+            <a:schemeClr val="accent1"/>
+          </a:fillRef>
+          <a:effectRef idx="0">
+            <a:schemeClr val="accent1"/>
+          </a:effectRef>
+          <a:fontRef idx="minor">
+            <a:schemeClr val="lt1"/>
+          </a:fontRef>
+        </p:style>
+        <p:txBody>
+          <a:bodyPr wrap="square" rtlCol="0" anchor="ctr">
+            <a:noAutofit/>
+          </a:bodyPr>
+          <a:lstStyle/>
+          <a:p>
+            <a:pPr algn="ctr"/>
+            <a:endParaRPr lang="ko-KR" altLang="en-US"/>
+          </a:p>
+        </p:txBody>
+      </p:sp>
+      <p:graphicFrame>
+        <p:nvGraphicFramePr>
+          <p:cNvPr id="64" name="표 4">
+            <a:extLst>
+              <a:ext uri="{FF2B5EF4-FFF2-40B4-BE49-F238E27FC236}">
+                <a16:creationId xmlns:a16="http://schemas.microsoft.com/office/drawing/2014/main" id="{7B5E06FA-08FB-41DD-8BA7-5661032BB977}"/>
+              </a:ext>
+            </a:extLst>
+          </p:cNvPr>
+          <p:cNvGraphicFramePr>
+            <a:graphicFrameLocks noGrp="1"/>
+          </p:cNvGraphicFramePr>
+          <p:nvPr>
+            <p:extLst>
+              <p:ext uri="{D42A27DB-BD31-4B8C-83A1-F6EECF244321}">
+                <p14:modId xmlns:p14="http://schemas.microsoft.com/office/powerpoint/2010/main" val="3559462401"/>
+              </p:ext>
+            </p:extLst>
+          </p:nvPr>
+        </p:nvGraphicFramePr>
+        <p:xfrm>
+          <a:off x="5097580" y="3181842"/>
+          <a:ext cx="1960205" cy="589312"/>
+        </p:xfrm>
+        <a:graphic>
+          <a:graphicData uri="http://schemas.openxmlformats.org/drawingml/2006/table">
+            <a:tbl>
+              <a:tblPr firstRow="1" bandRow="1">
+                <a:effectLst>
+                  <a:outerShdw blurRad="50800" dist="38100" dir="2700000" algn="tl" rotWithShape="0">
+                    <a:prstClr val="black">
+                      <a:alpha val="40000"/>
+                    </a:prstClr>
+                  </a:outerShdw>
+                </a:effectLst>
+                <a:tableStyleId>{D03447BB-5D67-496B-8E87-E561075AD55C}</a:tableStyleId>
+              </a:tblPr>
+              <a:tblGrid>
+                <a:gridCol w="1960205">
+                  <a:extLst>
+                    <a:ext uri="{9D8B030D-6E8A-4147-A177-3AD203B41FA5}">
+                      <a16:colId xmlns:a16="http://schemas.microsoft.com/office/drawing/2014/main" val="20000"/>
+                    </a:ext>
+                  </a:extLst>
+                </a:gridCol>
+              </a:tblGrid>
+              <a:tr h="264508">
+                <a:tc>
+                  <a:txBody>
+                    <a:bodyPr/>
+                    <a:lstStyle/>
+                    <a:p>
+                      <a:pPr algn="ctr" latinLnBrk="1">
+                        <a:defRPr/>
+                      </a:pPr>
+                      <a:r>
+                        <a:rPr lang="ko-KR" altLang="en-US" sz="1100" dirty="0">
+                          <a:latin typeface="피플폰트 Bold" panose="020B0600000101010101" pitchFamily="50" charset="-127"/>
+                          <a:ea typeface="피플폰트 Bold" panose="020B0600000101010101" pitchFamily="50" charset="-127"/>
+                        </a:rPr>
+                        <a:t>신규 유동화 SPC</a:t>
+                      </a:r>
+                    </a:p>
+                  </a:txBody>
+                  <a:tcPr marL="127016" marR="127016" marT="63508" marB="63508" anchor="ctr">
+                    <a:lnL w="28575" cap="flat" cmpd="sng" algn="ctr">
+                      <a:solidFill>
+                        <a:schemeClr val="bg1"/>
+                      </a:solidFill>
+                      <a:prstDash val="solid"/>
+                      <a:round/>
+                      <a:headEnd type="none" w="med" len="med"/>
+                      <a:tailEnd type="none" w="med" len="med"/>
+                    </a:lnL>
+                    <a:lnR w="28575" cap="flat" cmpd="sng" algn="ctr">
+                      <a:solidFill>
+                        <a:schemeClr val="bg1"/>
+                      </a:solidFill>
+                      <a:prstDash val="solid"/>
+                      <a:round/>
+                      <a:headEnd type="none" w="med" len="med"/>
+                      <a:tailEnd type="none" w="med" len="med"/>
+                    </a:lnR>
+                    <a:lnT w="28575" cap="flat" cmpd="sng" algn="ctr">
+                      <a:solidFill>
+                        <a:schemeClr val="bg1"/>
+                      </a:solidFill>
+                      <a:prstDash val="solid"/>
+                      <a:round/>
+                      <a:headEnd type="none" w="med" len="med"/>
+                      <a:tailEnd type="none" w="med" len="med"/>
+                    </a:lnT>
+                    <a:lnB w="28575" cap="flat" cmpd="sng" algn="ctr">
+                      <a:solidFill>
+                        <a:schemeClr val="bg1"/>
+                      </a:solidFill>
+                      <a:prstDash val="solid"/>
+                      <a:round/>
+                      <a:headEnd type="none" w="med" len="med"/>
+                      <a:tailEnd type="none" w="med" len="med"/>
+                    </a:lnB>
+                    <a:solidFill>
+                      <a:srgbClr val="C00000"/>
+                    </a:solidFill>
+                  </a:tcPr>
+                </a:tc>
+                <a:extLst>
+                  <a:ext uri="{0D108BD9-81ED-4DB2-BD59-A6C34878D82A}">
+                    <a16:rowId xmlns:a16="http://schemas.microsoft.com/office/drawing/2014/main" val="10000"/>
+                  </a:ext>
+                </a:extLst>
+              </a:tr>
+              <a:tr h="279416">
+                <a:tc>
+                  <a:txBody>
+                    <a:bodyPr/>
+                    <a:lstStyle/>
+                    <a:p>
+                      <a:pPr algn="ctr" latinLnBrk="1">
+                        <a:defRPr/>
+                      </a:pPr>
+                      <a:r>
+                        <a:rPr lang="en-US" altLang="ko-KR" sz="1100" b="1" dirty="0">
+                          <a:solidFill>
+                            <a:schemeClr val="tx1"/>
+                          </a:solidFill>
+                          <a:latin typeface="피플폰트 Bold" panose="020B0600000101010101" pitchFamily="50" charset="-127"/>
+                          <a:ea typeface="피플폰트 Bold" panose="020B0600000101010101" pitchFamily="50" charset="-127"/>
+                        </a:rPr>
+                        <a:t>T.B.D. [*억 원]</a:t>
+                      </a:r>
+                    </a:p>
+                  </a:txBody>
+                  <a:tcPr marL="127016" marR="127016" marT="63508" marB="63508" anchor="ctr">
+                    <a:lnL w="28575" cap="flat" cmpd="sng" algn="ctr">
+                      <a:solidFill>
+                        <a:schemeClr val="bg1"/>
+                      </a:solidFill>
+                      <a:prstDash val="solid"/>
+                      <a:round/>
+                      <a:headEnd type="none" w="med" len="med"/>
+                      <a:tailEnd type="none" w="med" len="med"/>
+                    </a:lnL>
+                    <a:lnR w="28575" cap="flat" cmpd="sng" algn="ctr">
+                      <a:solidFill>
+                        <a:schemeClr val="bg1"/>
+                      </a:solidFill>
+                      <a:prstDash val="solid"/>
+                      <a:round/>
+                      <a:headEnd type="none" w="med" len="med"/>
+                      <a:tailEnd type="none" w="med" len="med"/>
+                    </a:lnR>
+                    <a:lnT w="28575" cap="flat" cmpd="sng" algn="ctr">
+                      <a:solidFill>
+                        <a:schemeClr val="bg1"/>
+                      </a:solidFill>
+                      <a:prstDash val="solid"/>
+                      <a:round/>
+                      <a:headEnd type="none" w="med" len="med"/>
+                      <a:tailEnd type="none" w="med" len="med"/>
+                    </a:lnT>
+                    <a:lnB w="28575" cap="flat" cmpd="sng" algn="ctr">
+                      <a:solidFill>
+                        <a:schemeClr val="bg1"/>
+                      </a:solidFill>
+                      <a:prstDash val="solid"/>
+                      <a:round/>
+                      <a:headEnd type="none" w="med" len="med"/>
+                      <a:tailEnd type="none" w="med" len="med"/>
+                    </a:lnB>
+                    <a:solidFill>
+                      <a:srgbClr val="D9D9D9"/>
+                    </a:solidFill>
+                  </a:tcPr>
+                </a:tc>
+                <a:extLst>
+                  <a:ext uri="{0D108BD9-81ED-4DB2-BD59-A6C34878D82A}">
+                    <a16:rowId xmlns:a16="http://schemas.microsoft.com/office/drawing/2014/main" val="10001"/>
+                  </a:ext>
+                </a:extLst>
+              </a:tr>
+            </a:tbl>
+          </a:graphicData>
+        </a:graphic>
+      </p:graphicFrame>
+      <p:graphicFrame>
+        <p:nvGraphicFramePr>
+          <p:cNvPr id="65" name="표 4">
+            <a:extLst>
+              <a:ext uri="{FF2B5EF4-FFF2-40B4-BE49-F238E27FC236}">
+                <a16:creationId xmlns:a16="http://schemas.microsoft.com/office/drawing/2014/main" id="{2709E1B2-C28D-4B46-9DC1-19E37FD3D678}"/>
+              </a:ext>
+            </a:extLst>
+          </p:cNvPr>
+          <p:cNvGraphicFramePr>
+            <a:graphicFrameLocks noGrp="1"/>
+          </p:cNvGraphicFramePr>
+          <p:nvPr>
+            <p:extLst>
+              <p:ext uri="{D42A27DB-BD31-4B8C-83A1-F6EECF244321}">
+                <p14:modId xmlns:p14="http://schemas.microsoft.com/office/powerpoint/2010/main" val="2126500077"/>
+              </p:ext>
+            </p:extLst>
+          </p:nvPr>
+        </p:nvGraphicFramePr>
+        <p:xfrm>
+          <a:off x="8148590" y="3181841"/>
+          <a:ext cx="1217353" cy="589312"/>
+        </p:xfrm>
+        <a:graphic>
+          <a:graphicData uri="http://schemas.openxmlformats.org/drawingml/2006/table">
+            <a:tbl>
+              <a:tblPr firstRow="1" bandRow="1">
+                <a:effectLst>
+                  <a:outerShdw blurRad="50800" dist="38100" dir="2700000" algn="tl" rotWithShape="0">
+                    <a:prstClr val="black">
+                      <a:alpha val="40000"/>
+                    </a:prstClr>
+                  </a:outerShdw>
+                </a:effectLst>
+                <a:tableStyleId>{D03447BB-5D67-496B-8E87-E561075AD55C}</a:tableStyleId>
+              </a:tblPr>
+              <a:tblGrid>
+                <a:gridCol w="1217353">
+                  <a:extLst>
+                    <a:ext uri="{9D8B030D-6E8A-4147-A177-3AD203B41FA5}">
+                      <a16:colId xmlns:a16="http://schemas.microsoft.com/office/drawing/2014/main" val="20000"/>
+                    </a:ext>
+                  </a:extLst>
+                </a:gridCol>
+              </a:tblGrid>
+              <a:tr h="256270">
+                <a:tc>
+                  <a:txBody>
+                    <a:bodyPr/>
+                    <a:lstStyle/>
+                    <a:p>
+                      <a:pPr marL="0" algn="ctr" defTabSz="914400" rtl="0" eaLnBrk="1" latinLnBrk="1" hangingPunct="1">
+                        <a:defRPr/>
+                      </a:pPr>
+                      <a:r>
+                        <a:rPr lang="ko-KR" altLang="en-US" sz="1100" b="1" kern="1200" dirty="0">
+                          <a:solidFill>
+                            <a:schemeClr val="lt1"/>
+                          </a:solidFill>
+                          <a:latin typeface="피플폰트 Bold" panose="020B0600000101010101" pitchFamily="50" charset="-127"/>
+                          <a:ea typeface="피플폰트 Bold" panose="020B0600000101010101" pitchFamily="50" charset="-127"/>
+                          <a:cs typeface="+mn-cs"/>
+                        </a:rPr>
+                        <a:t>사채권자</a:t>
+                      </a:r>
+                    </a:p>
+                  </a:txBody>
+                  <a:tcPr marL="127016" marR="127016" marT="63508" marB="63508" anchor="ctr">
+                    <a:lnL w="28575" cap="flat" cmpd="sng" algn="ctr">
+                      <a:solidFill>
+                        <a:schemeClr val="bg1"/>
+                      </a:solidFill>
+                      <a:prstDash val="solid"/>
+                      <a:round/>
+                      <a:headEnd type="none" w="med" len="med"/>
+                      <a:tailEnd type="none" w="med" len="med"/>
+                    </a:lnL>
+                    <a:lnR w="28575" cap="flat" cmpd="sng" algn="ctr">
+                      <a:solidFill>
+                        <a:schemeClr val="bg1"/>
+                      </a:solidFill>
+                      <a:prstDash val="solid"/>
+                      <a:round/>
+                      <a:headEnd type="none" w="med" len="med"/>
+                      <a:tailEnd type="none" w="med" len="med"/>
+                    </a:lnR>
+                    <a:lnT w="28575" cap="flat" cmpd="sng" algn="ctr">
+                      <a:solidFill>
+                        <a:schemeClr val="bg1"/>
+                      </a:solidFill>
+                      <a:prstDash val="solid"/>
+                      <a:round/>
+                      <a:headEnd type="none" w="med" len="med"/>
+                      <a:tailEnd type="none" w="med" len="med"/>
+                    </a:lnT>
+                    <a:lnB w="28575" cap="flat" cmpd="sng" algn="ctr">
+                      <a:solidFill>
+                        <a:schemeClr val="bg1"/>
+                      </a:solidFill>
+                      <a:prstDash val="solid"/>
+                      <a:round/>
+                      <a:headEnd type="none" w="med" len="med"/>
+                      <a:tailEnd type="none" w="med" len="med"/>
+                    </a:lnB>
+                    <a:solidFill>
+                      <a:srgbClr val="C00000"/>
+                    </a:solidFill>
+                  </a:tcPr>
+                </a:tc>
+                <a:extLst>
+                  <a:ext uri="{0D108BD9-81ED-4DB2-BD59-A6C34878D82A}">
+                    <a16:rowId xmlns:a16="http://schemas.microsoft.com/office/drawing/2014/main" val="10000"/>
+                  </a:ext>
+                </a:extLst>
+              </a:tr>
+              <a:tr h="287649">
+                <a:tc>
+                  <a:txBody>
+                    <a:bodyPr/>
+                    <a:lstStyle/>
+                    <a:p>
+                      <a:pPr marL="0" algn="ctr" defTabSz="914400" rtl="0" eaLnBrk="1" latinLnBrk="1" hangingPunct="1">
+                        <a:defRPr/>
+                      </a:pPr>
+                      <a:r>
+                        <a:rPr lang="en-US" altLang="ko-KR" sz="1100" b="1" kern="1200" dirty="0">
+                          <a:solidFill>
+                            <a:schemeClr val="tx1"/>
+                          </a:solidFill>
+                          <a:latin typeface="피플폰트 Bold" panose="020B0600000101010101" pitchFamily="50" charset="-127"/>
+                          <a:ea typeface="피플폰트 Bold" panose="020B0600000101010101" pitchFamily="50" charset="-127"/>
+                          <a:cs typeface="+mn-cs"/>
+                        </a:rPr>
+                        <a:t>T.B.D. [*억 원]</a:t>
+                      </a:r>
+                    </a:p>
+                  </a:txBody>
+                  <a:tcPr marL="127016" marR="127016" marT="63508" marB="63508" anchor="ctr">
+                    <a:lnL w="28575" cap="flat" cmpd="sng" algn="ctr">
+                      <a:solidFill>
+                        <a:schemeClr val="bg1"/>
+                      </a:solidFill>
+                      <a:prstDash val="solid"/>
+                      <a:round/>
+                      <a:headEnd type="none" w="med" len="med"/>
+                      <a:tailEnd type="none" w="med" len="med"/>
+                    </a:lnL>
+                    <a:lnR w="28575" cap="flat" cmpd="sng" algn="ctr">
+                      <a:solidFill>
+                        <a:schemeClr val="bg1"/>
+                      </a:solidFill>
+                      <a:prstDash val="solid"/>
+                      <a:round/>
+                      <a:headEnd type="none" w="med" len="med"/>
+                      <a:tailEnd type="none" w="med" len="med"/>
+                    </a:lnR>
+                    <a:lnT w="28575" cap="flat" cmpd="sng" algn="ctr">
+                      <a:solidFill>
+                        <a:schemeClr val="bg1"/>
+                      </a:solidFill>
+                      <a:prstDash val="solid"/>
+                      <a:round/>
+                      <a:headEnd type="none" w="med" len="med"/>
+                      <a:tailEnd type="none" w="med" len="med"/>
+                    </a:lnT>
+                    <a:lnB w="28575" cap="flat" cmpd="sng" algn="ctr">
+                      <a:solidFill>
+                        <a:schemeClr val="bg1"/>
+                      </a:solidFill>
+                      <a:prstDash val="solid"/>
+                      <a:round/>
+                      <a:headEnd type="none" w="med" len="med"/>
+                      <a:tailEnd type="none" w="med" len="med"/>
+                    </a:lnB>
+                    <a:solidFill>
+                      <a:schemeClr val="accent4">
+                        <a:lumMod val="60000"/>
+                        <a:lumOff val="40000"/>
+                      </a:schemeClr>
+                    </a:solidFill>
+                  </a:tcPr>
+                </a:tc>
+                <a:extLst>
+                  <a:ext uri="{0D108BD9-81ED-4DB2-BD59-A6C34878D82A}">
+                    <a16:rowId xmlns:a16="http://schemas.microsoft.com/office/drawing/2014/main" val="10001"/>
+                  </a:ext>
+                </a:extLst>
+              </a:tr>
+            </a:tbl>
+          </a:graphicData>
+        </a:graphic>
+      </p:graphicFrame>
+      <p:cxnSp>
+        <p:nvCxnSpPr>
+          <p:cNvPr id="66" name="직선 화살표 연결선 65">
+            <a:extLst>
+              <a:ext uri="{FF2B5EF4-FFF2-40B4-BE49-F238E27FC236}">
+                <a16:creationId xmlns:a16="http://schemas.microsoft.com/office/drawing/2014/main" id="{3F665270-0C8C-4854-AAB1-EA6CDDADE706}"/>
+              </a:ext>
+            </a:extLst>
+          </p:cNvPr>
+          <p:cNvCxnSpPr>
+            <a:cxnSpLocks/>
+            <a:stCxn id="65" idx="1"/>
+            <a:endCxn id="64" idx="3"/>
+          </p:cNvCxnSpPr>
+          <p:nvPr/>
+        </p:nvCxnSpPr>
+        <p:spPr>
+          <a:xfrm flipH="1">
+            <a:off x="7057785" y="3476497"/>
+            <a:ext cx="1090805" cy="1"/>
+          </a:xfrm>
+          <a:prstGeom prst="straightConnector1">
+            <a:avLst/>
+          </a:prstGeom>
+          <a:solidFill>
+            <a:schemeClr val="accent1"/>
+          </a:solidFill>
+          <a:ln w="19050" cap="flat" cmpd="sng" algn="ctr">
+            <a:solidFill>
+              <a:schemeClr val="tx1"/>
+            </a:solidFill>
+            <a:prstDash val="solid"/>
+            <a:round/>
+            <a:headEnd type="triangle" w="sm" len="sm"/>
+            <a:tailEnd type="triangle" w="sm" len="sm"/>
+          </a:ln>
+          <a:effectLst/>
+        </p:spPr>
+      </p:cxnSp>
+      <p:sp>
+        <p:nvSpPr>
+          <p:cNvPr id="67" name="텍스트 개체 틀 2">
+            <a:extLst>
+              <a:ext uri="{FF2B5EF4-FFF2-40B4-BE49-F238E27FC236}">
+                <a16:creationId xmlns:a16="http://schemas.microsoft.com/office/drawing/2014/main" id="{85386CA8-E9E5-4D4D-B4D6-6CA950D66E25}"/>
+              </a:ext>
+            </a:extLst>
+          </p:cNvPr>
+          <p:cNvSpPr txBox="1">
+            <a:spLocks/>
+          </p:cNvSpPr>
+          <p:nvPr/>
+        </p:nvSpPr>
+        <p:spPr>
+          <a:xfrm>
+            <a:off x="7073103" y="3288320"/>
+            <a:ext cx="1060169" cy="349711"/>
+          </a:xfrm>
+          <a:prstGeom prst="rect">
+            <a:avLst/>
+          </a:prstGeom>
+        </p:spPr>
+        <p:txBody>
+          <a:bodyPr vert="horz" wrap="square" lIns="0" tIns="0" rIns="0" bIns="0" rtlCol="0" anchor="ctr">
+            <a:spAutoFit/>
+          </a:bodyPr>
+          <a:lstStyle>
+            <a:lvl1pPr marL="0" indent="0" algn="l" defTabSz="914400" rtl="0" eaLnBrk="1" latinLnBrk="1" hangingPunct="1">
+              <a:lnSpc>
+                <a:spcPct val="90000"/>
+              </a:lnSpc>
+              <a:spcBef>
+                <a:spcPts val="1000"/>
+              </a:spcBef>
+              <a:buFont typeface="Arial" panose="020B0604020202020204" pitchFamily="34" charset="0"/>
+              <a:buNone/>
+              <a:defRPr sz="1200" kern="1200">
+                <a:solidFill>
+                  <a:schemeClr val="tx1"/>
+                </a:solidFill>
+                <a:latin typeface="AppleSDGothicNeoM00" panose="02000503000000000000" pitchFamily="2" charset="-127"/>
+                <a:ea typeface="AppleSDGothicNeoM00" panose="02000503000000000000" pitchFamily="2" charset="-127"/>
+                <a:cs typeface="+mn-cs"/>
+              </a:defRPr>
+            </a:lvl1pPr>
+            <a:lvl2pPr marL="685800" indent="-228600" algn="l" defTabSz="914400" rtl="0" eaLnBrk="1" latinLnBrk="1" hangingPunct="1">
+              <a:lnSpc>
+                <a:spcPct val="90000"/>
+              </a:lnSpc>
+              <a:spcBef>
+                <a:spcPts val="500"/>
+              </a:spcBef>
+              <a:buFont typeface="Arial" panose="020B0604020202020204" pitchFamily="34" charset="0"/>
+              <a:buChar char="•"/>
+              <a:defRPr sz="2400" kern="1200">
+                <a:solidFill>
+                  <a:schemeClr val="tx1"/>
+                </a:solidFill>
+                <a:latin typeface="+mn-lt"/>
+                <a:ea typeface="+mn-ea"/>
+                <a:cs typeface="+mn-cs"/>
+              </a:defRPr>
+            </a:lvl2pPr>
+            <a:lvl3pPr marL="1143000" indent="-228600" algn="l" defTabSz="914400" rtl="0" eaLnBrk="1" latinLnBrk="1" hangingPunct="1">
+              <a:lnSpc>
+                <a:spcPct val="90000"/>
+              </a:lnSpc>
+              <a:spcBef>
+                <a:spcPts val="500"/>
+              </a:spcBef>
+              <a:buFont typeface="Arial" panose="020B0604020202020204" pitchFamily="34" charset="0"/>
+              <a:buChar char="•"/>
+              <a:defRPr sz="2000" kern="1200">
+                <a:solidFill>
+                  <a:schemeClr val="tx1"/>
+                </a:solidFill>
+                <a:latin typeface="+mn-lt"/>
+                <a:ea typeface="+mn-ea"/>
+                <a:cs typeface="+mn-cs"/>
+              </a:defRPr>
+            </a:lvl3pPr>
+            <a:lvl4pPr marL="1600200" indent="-228600" algn="l" defTabSz="914400" rtl="0" eaLnBrk="1" latinLnBrk="1" hangingPunct="1">
+              <a:lnSpc>
+                <a:spcPct val="90000"/>
+              </a:lnSpc>
+              <a:spcBef>
+                <a:spcPts val="500"/>
+              </a:spcBef>
+              <a:buFont typeface="Arial" panose="020B0604020202020204" pitchFamily="34" charset="0"/>
+              <a:buChar char="•"/>
+              <a:defRPr sz="1800" kern="1200">
+                <a:solidFill>
+                  <a:schemeClr val="tx1"/>
+                </a:solidFill>
+                <a:latin typeface="+mn-lt"/>
+                <a:ea typeface="+mn-ea"/>
+                <a:cs typeface="+mn-cs"/>
+              </a:defRPr>
+            </a:lvl4pPr>
+            <a:lvl5pPr marL="2057400" indent="-228600" algn="l" defTabSz="914400" rtl="0" eaLnBrk="1" latinLnBrk="1" hangingPunct="1">
+              <a:lnSpc>
+                <a:spcPct val="90000"/>
+              </a:lnSpc>
+              <a:spcBef>
+                <a:spcPts val="500"/>
+              </a:spcBef>
+              <a:buFont typeface="Arial" panose="020B0604020202020204" pitchFamily="34" charset="0"/>
+              <a:buChar char="•"/>
+              <a:defRPr sz="1800" kern="1200">
+                <a:solidFill>
+                  <a:schemeClr val="tx1"/>
+                </a:solidFill>
+                <a:latin typeface="+mn-lt"/>
+                <a:ea typeface="+mn-ea"/>
+                <a:cs typeface="+mn-cs"/>
+              </a:defRPr>
+            </a:lvl5pPr>
+            <a:lvl6pPr marL="2514600" indent="-228600" algn="l" defTabSz="914400" rtl="0" eaLnBrk="1" latinLnBrk="1" hangingPunct="1">
+              <a:lnSpc>
+                <a:spcPct val="90000"/>
+              </a:lnSpc>
+              <a:spcBef>
+                <a:spcPts val="500"/>
+              </a:spcBef>
+              <a:buFont typeface="Arial" panose="020B0604020202020204" pitchFamily="34" charset="0"/>
+              <a:buChar char="•"/>
+              <a:defRPr sz="1800" kern="1200">
+                <a:solidFill>
+                  <a:schemeClr val="tx1"/>
+                </a:solidFill>
+                <a:latin typeface="+mn-lt"/>
+                <a:ea typeface="+mn-ea"/>
+                <a:cs typeface="+mn-cs"/>
+              </a:defRPr>
+            </a:lvl6pPr>
+            <a:lvl7pPr marL="2971800" indent="-228600" algn="l" defTabSz="914400" rtl="0" eaLnBrk="1" latinLnBrk="1" hangingPunct="1">
+              <a:lnSpc>
+                <a:spcPct val="90000"/>
+              </a:lnSpc>
+              <a:spcBef>
+                <a:spcPts val="500"/>
+              </a:spcBef>
+              <a:buFont typeface="Arial" panose="020B0604020202020204" pitchFamily="34" charset="0"/>
+              <a:buChar char="•"/>
+              <a:defRPr sz="1800" kern="1200">
+                <a:solidFill>
+                  <a:schemeClr val="tx1"/>
+                </a:solidFill>
+                <a:latin typeface="+mn-lt"/>
+                <a:ea typeface="+mn-ea"/>
+                <a:cs typeface="+mn-cs"/>
+              </a:defRPr>
+            </a:lvl7pPr>
+            <a:lvl8pPr marL="3429000" indent="-228600" algn="l" defTabSz="914400" rtl="0" eaLnBrk="1" latinLnBrk="1" hangingPunct="1">
+              <a:lnSpc>
+                <a:spcPct val="90000"/>
+              </a:lnSpc>
+              <a:spcBef>
+                <a:spcPts val="500"/>
+              </a:spcBef>
+              <a:buFont typeface="Arial" panose="020B0604020202020204" pitchFamily="34" charset="0"/>
+              <a:buChar char="•"/>
+              <a:defRPr sz="1800" kern="1200">
+                <a:solidFill>
+                  <a:schemeClr val="tx1"/>
+                </a:solidFill>
+                <a:latin typeface="+mn-lt"/>
+                <a:ea typeface="+mn-ea"/>
+                <a:cs typeface="+mn-cs"/>
+              </a:defRPr>
+            </a:lvl8pPr>
+            <a:lvl9pPr marL="3886200" indent="-228600" algn="l" defTabSz="914400" rtl="0" eaLnBrk="1" latinLnBrk="1" hangingPunct="1">
+              <a:lnSpc>
+                <a:spcPct val="90000"/>
+              </a:lnSpc>
+              <a:spcBef>
+                <a:spcPts val="500"/>
+              </a:spcBef>
+              <a:buFont typeface="Arial" panose="020B0604020202020204" pitchFamily="34" charset="0"/>
+              <a:buChar char="•"/>
+              <a:defRPr sz="1800" kern="1200">
+                <a:solidFill>
+                  <a:schemeClr val="tx1"/>
+                </a:solidFill>
+                <a:latin typeface="+mn-lt"/>
+                <a:ea typeface="+mn-ea"/>
+                <a:cs typeface="+mn-cs"/>
+              </a:defRPr>
+            </a:lvl9pPr>
+          </a:lstStyle>
+          <a:p>
+            <a:pPr algn="ctr">
+              <a:lnSpc>
+                <a:spcPct val="130000"/>
+              </a:lnSpc>
+              <a:spcBef>
+                <a:spcPts val="0"/>
+              </a:spcBef>
+            </a:pPr>
+            <a:r>
+              <a:rPr lang="ko-KR" altLang="en-US" sz="900" dirty="0">
+                <a:latin typeface="피플폰트 Bold" panose="020B0600000101010101" pitchFamily="50" charset="-127"/>
+                <a:ea typeface="피플폰트 Bold" panose="020B0600000101010101" pitchFamily="50" charset="-127"/>
+              </a:rPr>
+              <a:t>사모사채</a:t>
+            </a:r>
+            <a:endParaRPr lang="en-US" altLang="ko-KR" sz="900" dirty="0">
+              <a:latin typeface="피플폰트 Bold" panose="020B0600000101010101" pitchFamily="50" charset="-127"/>
+              <a:ea typeface="피플폰트 Bold" panose="020B0600000101010101" pitchFamily="50" charset="-127"/>
+            </a:endParaRPr>
+          </a:p>
+          <a:p>
+            <a:pPr algn="ctr">
+              <a:lnSpc>
+                <a:spcPct val="130000"/>
+              </a:lnSpc>
+              <a:spcBef>
+                <a:spcPts val="0"/>
+              </a:spcBef>
+            </a:pPr>
+            <a:r>
+              <a:rPr lang="ko-KR" altLang="en-US" sz="900" dirty="0">
+                <a:latin typeface="피플폰트 Bold" panose="020B0600000101010101" pitchFamily="50" charset="-127"/>
+                <a:ea typeface="피플폰트 Bold" panose="020B0600000101010101" pitchFamily="50" charset="-127"/>
+              </a:rPr>
+              <a:t> 발행/인수</a:t>
+            </a:r>
+            <a:endParaRPr lang="en-US" altLang="ko-KR" sz="900" dirty="0">
+              <a:latin typeface="피플폰트 Bold" panose="020B0600000101010101" pitchFamily="50" charset="-127"/>
+              <a:ea typeface="피플폰트 Bold" panose="020B0600000101010101" pitchFamily="50" charset="-127"/>
+            </a:endParaRPr>
+          </a:p>
+        </p:txBody>
+      </p:sp>
+      <p:graphicFrame>
+        <p:nvGraphicFramePr>
+          <p:cNvPr id="68" name="표 4">
+            <a:extLst>
+              <a:ext uri="{FF2B5EF4-FFF2-40B4-BE49-F238E27FC236}">
+                <a16:creationId xmlns:a16="http://schemas.microsoft.com/office/drawing/2014/main" id="{107F3B78-D265-4694-A5C4-286DE926496F}"/>
+              </a:ext>
+            </a:extLst>
+          </p:cNvPr>
+          <p:cNvGraphicFramePr>
+            <a:graphicFrameLocks noGrp="1"/>
+          </p:cNvGraphicFramePr>
+          <p:nvPr>
+            <p:extLst>
+              <p:ext uri="{D42A27DB-BD31-4B8C-83A1-F6EECF244321}">
+                <p14:modId xmlns:p14="http://schemas.microsoft.com/office/powerpoint/2010/main" val="604386401"/>
+              </p:ext>
+            </p:extLst>
+          </p:nvPr>
+        </p:nvGraphicFramePr>
+        <p:xfrm>
+          <a:off x="5097579" y="4387069"/>
+          <a:ext cx="1960205" cy="335202"/>
+        </p:xfrm>
+        <a:graphic>
+          <a:graphicData uri="http://schemas.openxmlformats.org/drawingml/2006/table">
+            <a:tbl>
+              <a:tblPr firstRow="1" bandRow="1">
+                <a:effectLst>
+                  <a:outerShdw blurRad="50800" dist="38100" dir="2700000" algn="tl" rotWithShape="0">
+                    <a:prstClr val="black">
+                      <a:alpha val="40000"/>
+                    </a:prstClr>
+                  </a:outerShdw>
+                </a:effectLst>
+                <a:tableStyleId>{D03447BB-5D67-496B-8E87-E561075AD55C}</a:tableStyleId>
+              </a:tblPr>
+              <a:tblGrid>
+                <a:gridCol w="1960205">
+                  <a:extLst>
+                    <a:ext uri="{9D8B030D-6E8A-4147-A177-3AD203B41FA5}">
+                      <a16:colId xmlns:a16="http://schemas.microsoft.com/office/drawing/2014/main" val="20000"/>
+                    </a:ext>
+                  </a:extLst>
+                </a:gridCol>
+              </a:tblGrid>
+              <a:tr h="335202">
+                <a:tc>
+                  <a:txBody>
+                    <a:bodyPr/>
+                    <a:lstStyle/>
+                    <a:p>
+                      <a:pPr algn="ctr" latinLnBrk="1">
+                        <a:defRPr/>
+                      </a:pPr>
+                      <a:r>
+                        <a:rPr lang="ko-KR" altLang="en-US" sz="1200" b="1" dirty="0">
+                          <a:solidFill>
+                            <a:schemeClr val="tx1"/>
+                          </a:solidFill>
+                          <a:latin typeface="피플폰트 Bold" panose="020B0600000101010101" pitchFamily="50" charset="-127"/>
+                          <a:ea typeface="피플폰트 Bold" panose="020B0600000101010101" pitchFamily="50" charset="-127"/>
+                        </a:rPr>
+                        <a:t>기타 </a:t>
+                      </a:r>
+                      <a:r>
+                        <a:rPr lang="ko-KR" altLang="en-US" sz="1200" b="1" dirty="0" err="1">
+                          <a:solidFill>
+                            <a:schemeClr val="tx1"/>
+                          </a:solidFill>
+                          <a:latin typeface="피플폰트 Bold" panose="020B0600000101010101" pitchFamily="50" charset="-127"/>
+                          <a:ea typeface="피플폰트 Bold" panose="020B0600000101010101" pitchFamily="50" charset="-127"/>
+                        </a:rPr>
+                        <a:t>Tr</a:t>
+                      </a:r>
+                      <a:r>
+                        <a:rPr lang="ko-KR" altLang="en-US" sz="1200" b="1" dirty="0">
+                          <a:solidFill>
+                            <a:schemeClr val="tx1"/>
+                          </a:solidFill>
+                          <a:latin typeface="피플폰트 Bold" panose="020B0600000101010101" pitchFamily="50" charset="-127"/>
+                          <a:ea typeface="피플폰트 Bold" panose="020B0600000101010101" pitchFamily="50" charset="-127"/>
+                        </a:rPr>
+                        <a:t>.</a:t>
+                      </a:r>
+                      <a:r>
+                        <a:rPr lang="en-US" altLang="ko-KR" sz="1200" b="1" dirty="0">
+                          <a:solidFill>
+                            <a:schemeClr val="tx1"/>
+                          </a:solidFill>
+                          <a:latin typeface="피플폰트 Bold" panose="020B0600000101010101" pitchFamily="50" charset="-127"/>
+                          <a:ea typeface="피플폰트 Bold" panose="020B0600000101010101" pitchFamily="50" charset="-127"/>
+                        </a:rPr>
+                        <a:t>B</a:t>
+                      </a:r>
+                      <a:r>
+                        <a:rPr lang="ko-KR" altLang="en-US" sz="1200" b="1" dirty="0">
+                          <a:solidFill>
+                            <a:schemeClr val="tx1"/>
+                          </a:solidFill>
+                          <a:latin typeface="피플폰트 Bold" panose="020B0600000101010101" pitchFamily="50" charset="-127"/>
+                          <a:ea typeface="피플폰트 Bold" panose="020B0600000101010101" pitchFamily="50" charset="-127"/>
+                        </a:rPr>
+                        <a:t> 대주</a:t>
+                      </a:r>
+                    </a:p>
+                  </a:txBody>
+                  <a:tcPr marL="0" marR="0" marT="72000" marB="0">
+                    <a:lnL w="28575" cap="flat" cmpd="sng" algn="ctr">
+                      <a:solidFill>
+                        <a:schemeClr val="bg1"/>
+                      </a:solidFill>
+                      <a:prstDash val="solid"/>
+                      <a:round/>
+                      <a:headEnd type="none" w="med" len="med"/>
+                      <a:tailEnd type="none" w="med" len="med"/>
+                    </a:lnL>
+                    <a:lnR w="28575" cap="flat" cmpd="sng" algn="ctr">
+                      <a:solidFill>
+                        <a:schemeClr val="bg1"/>
+                      </a:solidFill>
+                      <a:prstDash val="solid"/>
+                      <a:round/>
+                      <a:headEnd type="none" w="med" len="med"/>
+                      <a:tailEnd type="none" w="med" len="med"/>
+                    </a:lnR>
+                    <a:lnT w="28575" cap="flat" cmpd="sng" algn="ctr">
+                      <a:solidFill>
+                        <a:schemeClr val="bg1"/>
+                      </a:solidFill>
+                      <a:prstDash val="solid"/>
+                      <a:round/>
+                      <a:headEnd type="none" w="med" len="med"/>
+                      <a:tailEnd type="none" w="med" len="med"/>
+                    </a:lnT>
+                    <a:lnB w="28575" cap="flat" cmpd="sng" algn="ctr">
+                      <a:solidFill>
+                        <a:schemeClr val="bg1"/>
+                      </a:solidFill>
+                      <a:prstDash val="solid"/>
+                      <a:round/>
+                      <a:headEnd type="none" w="med" len="med"/>
+                      <a:tailEnd type="none" w="med" len="med"/>
+                    </a:lnB>
+                    <a:solidFill>
+                      <a:srgbClr val="D9D9D9"/>
+                    </a:solidFill>
+                  </a:tcPr>
+                </a:tc>
+                <a:extLst>
+                  <a:ext uri="{0D108BD9-81ED-4DB2-BD59-A6C34878D82A}">
+                    <a16:rowId xmlns:a16="http://schemas.microsoft.com/office/drawing/2014/main" val="10001"/>
+                  </a:ext>
+                </a:extLst>
+              </a:tr>
+            </a:tbl>
+          </a:graphicData>
+        </a:graphic>
+      </p:graphicFrame>
+      <p:cxnSp>
+        <p:nvCxnSpPr>
+          <p:cNvPr id="69" name="연결선: 꺾임 68">
+            <a:extLst>
+              <a:ext uri="{FF2B5EF4-FFF2-40B4-BE49-F238E27FC236}">
+                <a16:creationId xmlns:a16="http://schemas.microsoft.com/office/drawing/2014/main" id="{5DD51625-F2B2-4654-9852-2D1E56E191E8}"/>
+              </a:ext>
+            </a:extLst>
+          </p:cNvPr>
+          <p:cNvCxnSpPr>
+            <a:cxnSpLocks/>
+            <a:stCxn id="31" idx="0"/>
+            <a:endCxn id="25" idx="0"/>
+          </p:cNvCxnSpPr>
+          <p:nvPr/>
+        </p:nvCxnSpPr>
+        <p:spPr>
+          <a:xfrm rot="16200000" flipH="1">
+            <a:off x="3603394" y="-524114"/>
+            <a:ext cx="340835" cy="4559691"/>
+          </a:xfrm>
+          <a:prstGeom prst="bentConnector3">
+            <a:avLst>
+              <a:gd name="adj1" fmla="val -67071"/>
+            </a:avLst>
+          </a:prstGeom>
+          <a:solidFill>
+            <a:schemeClr val="accent1"/>
+          </a:solidFill>
+          <a:ln w="19050" cap="flat" cmpd="sng" algn="ctr">
+            <a:solidFill>
+              <a:schemeClr val="tx1"/>
+            </a:solidFill>
+            <a:prstDash val="solid"/>
+            <a:round/>
+            <a:headEnd type="triangle" w="sm" len="sm"/>
+            <a:tailEnd type="triangle" w="sm" len="sm"/>
+          </a:ln>
+          <a:effectLst/>
+        </p:spPr>
+      </p:cxnSp>
+      <p:sp>
+        <p:nvSpPr>
+          <p:cNvPr id="70" name="텍스트 개체 틀 2">
+            <a:extLst>
+              <a:ext uri="{FF2B5EF4-FFF2-40B4-BE49-F238E27FC236}">
+                <a16:creationId xmlns:a16="http://schemas.microsoft.com/office/drawing/2014/main" id="{1566B842-1B00-483C-8699-B14A9566BD04}"/>
+              </a:ext>
+            </a:extLst>
+          </p:cNvPr>
+          <p:cNvSpPr txBox="1">
+            <a:spLocks/>
+          </p:cNvSpPr>
+          <p:nvPr/>
+        </p:nvSpPr>
+        <p:spPr>
+          <a:xfrm>
+            <a:off x="2680421" y="1150749"/>
+            <a:ext cx="1940116" cy="169662"/>
+          </a:xfrm>
+          <a:prstGeom prst="rect">
+            <a:avLst/>
+          </a:prstGeom>
+        </p:spPr>
+        <p:txBody>
+          <a:bodyPr vert="horz" wrap="square" lIns="0" tIns="0" rIns="0" bIns="0" rtlCol="0" anchor="ctr">
+            <a:spAutoFit/>
+          </a:bodyPr>
+          <a:lstStyle>
+            <a:lvl1pPr marL="0" indent="0" algn="l" defTabSz="914400" rtl="0" eaLnBrk="1" latinLnBrk="1" hangingPunct="1">
+              <a:lnSpc>
+                <a:spcPct val="90000"/>
+              </a:lnSpc>
+              <a:spcBef>
+                <a:spcPts val="1000"/>
+              </a:spcBef>
+              <a:buFont typeface="Arial" panose="020B0604020202020204" pitchFamily="34" charset="0"/>
+              <a:buNone/>
+              <a:defRPr sz="1200" kern="1200">
+                <a:solidFill>
+                  <a:schemeClr val="tx1"/>
+                </a:solidFill>
+                <a:latin typeface="AppleSDGothicNeoM00" panose="02000503000000000000" pitchFamily="2" charset="-127"/>
+                <a:ea typeface="AppleSDGothicNeoM00" panose="02000503000000000000" pitchFamily="2" charset="-127"/>
+                <a:cs typeface="+mn-cs"/>
+              </a:defRPr>
+            </a:lvl1pPr>
+            <a:lvl2pPr marL="685800" indent="-228600" algn="l" defTabSz="914400" rtl="0" eaLnBrk="1" latinLnBrk="1" hangingPunct="1">
+              <a:lnSpc>
+                <a:spcPct val="90000"/>
+              </a:lnSpc>
+              <a:spcBef>
+                <a:spcPts val="500"/>
+              </a:spcBef>
+              <a:buFont typeface="Arial" panose="020B0604020202020204" pitchFamily="34" charset="0"/>
+              <a:buChar char="•"/>
+              <a:defRPr sz="2400" kern="1200">
+                <a:solidFill>
+                  <a:schemeClr val="tx1"/>
+                </a:solidFill>
+                <a:latin typeface="+mn-lt"/>
+                <a:ea typeface="+mn-ea"/>
+                <a:cs typeface="+mn-cs"/>
+              </a:defRPr>
+            </a:lvl2pPr>
+            <a:lvl3pPr marL="1143000" indent="-228600" algn="l" defTabSz="914400" rtl="0" eaLnBrk="1" latinLnBrk="1" hangingPunct="1">
+              <a:lnSpc>
+                <a:spcPct val="90000"/>
+              </a:lnSpc>
+              <a:spcBef>
+                <a:spcPts val="500"/>
+              </a:spcBef>
+              <a:buFont typeface="Arial" panose="020B0604020202020204" pitchFamily="34" charset="0"/>
+              <a:buChar char="•"/>
+              <a:defRPr sz="2000" kern="1200">
+                <a:solidFill>
+                  <a:schemeClr val="tx1"/>
+                </a:solidFill>
+                <a:latin typeface="+mn-lt"/>
+                <a:ea typeface="+mn-ea"/>
+                <a:cs typeface="+mn-cs"/>
+              </a:defRPr>
+            </a:lvl3pPr>
+            <a:lvl4pPr marL="1600200" indent="-228600" algn="l" defTabSz="914400" rtl="0" eaLnBrk="1" latinLnBrk="1" hangingPunct="1">
+              <a:lnSpc>
+                <a:spcPct val="90000"/>
+              </a:lnSpc>
+              <a:spcBef>
+                <a:spcPts val="500"/>
+              </a:spcBef>
+              <a:buFont typeface="Arial" panose="020B0604020202020204" pitchFamily="34" charset="0"/>
+              <a:buChar char="•"/>
+              <a:defRPr sz="1800" kern="1200">
+                <a:solidFill>
+                  <a:schemeClr val="tx1"/>
+                </a:solidFill>
+                <a:latin typeface="+mn-lt"/>
+                <a:ea typeface="+mn-ea"/>
+                <a:cs typeface="+mn-cs"/>
+              </a:defRPr>
+            </a:lvl4pPr>
+            <a:lvl5pPr marL="2057400" indent="-228600" algn="l" defTabSz="914400" rtl="0" eaLnBrk="1" latinLnBrk="1" hangingPunct="1">
+              <a:lnSpc>
+                <a:spcPct val="90000"/>
+              </a:lnSpc>
+              <a:spcBef>
+                <a:spcPts val="500"/>
+              </a:spcBef>
+              <a:buFont typeface="Arial" panose="020B0604020202020204" pitchFamily="34" charset="0"/>
+              <a:buChar char="•"/>
+              <a:defRPr sz="1800" kern="1200">
+                <a:solidFill>
+                  <a:schemeClr val="tx1"/>
+                </a:solidFill>
+                <a:latin typeface="+mn-lt"/>
+                <a:ea typeface="+mn-ea"/>
+                <a:cs typeface="+mn-cs"/>
+              </a:defRPr>
+            </a:lvl5pPr>
+            <a:lvl6pPr marL="2514600" indent="-228600" algn="l" defTabSz="914400" rtl="0" eaLnBrk="1" latinLnBrk="1" hangingPunct="1">
+              <a:lnSpc>
+                <a:spcPct val="90000"/>
+              </a:lnSpc>
+              <a:spcBef>
+                <a:spcPts val="500"/>
+              </a:spcBef>
+              <a:buFont typeface="Arial" panose="020B0604020202020204" pitchFamily="34" charset="0"/>
+              <a:buChar char="•"/>
+              <a:defRPr sz="1800" kern="1200">
+                <a:solidFill>
+                  <a:schemeClr val="tx1"/>
+                </a:solidFill>
+                <a:latin typeface="+mn-lt"/>
+                <a:ea typeface="+mn-ea"/>
+                <a:cs typeface="+mn-cs"/>
+              </a:defRPr>
+            </a:lvl6pPr>
+            <a:lvl7pPr marL="2971800" indent="-228600" algn="l" defTabSz="914400" rtl="0" eaLnBrk="1" latinLnBrk="1" hangingPunct="1">
+              <a:lnSpc>
+                <a:spcPct val="90000"/>
+              </a:lnSpc>
+              <a:spcBef>
+                <a:spcPts val="500"/>
+              </a:spcBef>
+              <a:buFont typeface="Arial" panose="020B0604020202020204" pitchFamily="34" charset="0"/>
+              <a:buChar char="•"/>
+              <a:defRPr sz="1800" kern="1200">
+                <a:solidFill>
+                  <a:schemeClr val="tx1"/>
+                </a:solidFill>
+                <a:latin typeface="+mn-lt"/>
+                <a:ea typeface="+mn-ea"/>
+                <a:cs typeface="+mn-cs"/>
+              </a:defRPr>
+            </a:lvl7pPr>
+            <a:lvl8pPr marL="3429000" indent="-228600" algn="l" defTabSz="914400" rtl="0" eaLnBrk="1" latinLnBrk="1" hangingPunct="1">
+              <a:lnSpc>
+                <a:spcPct val="90000"/>
+              </a:lnSpc>
+              <a:spcBef>
+                <a:spcPts val="500"/>
+              </a:spcBef>
+              <a:buFont typeface="Arial" panose="020B0604020202020204" pitchFamily="34" charset="0"/>
+              <a:buChar char="•"/>
+              <a:defRPr sz="1800" kern="1200">
+                <a:solidFill>
+                  <a:schemeClr val="tx1"/>
+                </a:solidFill>
+                <a:latin typeface="+mn-lt"/>
+                <a:ea typeface="+mn-ea"/>
+                <a:cs typeface="+mn-cs"/>
+              </a:defRPr>
+            </a:lvl8pPr>
+            <a:lvl9pPr marL="3886200" indent="-228600" algn="l" defTabSz="914400" rtl="0" eaLnBrk="1" latinLnBrk="1" hangingPunct="1">
+              <a:lnSpc>
+                <a:spcPct val="90000"/>
+              </a:lnSpc>
+              <a:spcBef>
+                <a:spcPts val="500"/>
+              </a:spcBef>
+              <a:buFont typeface="Arial" panose="020B0604020202020204" pitchFamily="34" charset="0"/>
+              <a:buChar char="•"/>
+              <a:defRPr sz="1800" kern="1200">
+                <a:solidFill>
+                  <a:schemeClr val="tx1"/>
+                </a:solidFill>
+                <a:latin typeface="+mn-lt"/>
+                <a:ea typeface="+mn-ea"/>
+                <a:cs typeface="+mn-cs"/>
+              </a:defRPr>
+            </a:lvl9pPr>
+          </a:lstStyle>
+          <a:p>
+            <a:pPr algn="ctr">
+              <a:lnSpc>
+                <a:spcPct val="130000"/>
+              </a:lnSpc>
+              <a:spcBef>
+                <a:spcPts val="0"/>
+              </a:spcBef>
+            </a:pPr>
+            <a:r>
+              <a:rPr lang="ko-KR" altLang="en-US" sz="900" dirty="0" err="1">
+                <a:latin typeface="피플폰트 Bold" panose="020B0600000101010101" pitchFamily="50" charset="-127"/>
+                <a:ea typeface="피플폰트 Bold" panose="020B0600000101010101" pitchFamily="50" charset="-127"/>
+              </a:rPr>
+              <a:t>책임준공확약</a:t>
+            </a:r>
+            <a:r>
+              <a:rPr lang="en-US" altLang="ko-KR" sz="900" dirty="0">
+                <a:latin typeface="피플폰트 Bold" panose="020B0600000101010101" pitchFamily="50" charset="-127"/>
+                <a:ea typeface="피플폰트 Bold" panose="020B0600000101010101" pitchFamily="50" charset="-127"/>
+              </a:rPr>
+              <a:t> / </a:t>
+            </a:r>
+            <a:r>
+              <a:rPr lang="ko-KR" altLang="en-US" sz="900" dirty="0">
+                <a:latin typeface="피플폰트 Bold" panose="020B0600000101010101" pitchFamily="50" charset="-127"/>
+                <a:ea typeface="피플폰트 Bold" panose="020B0600000101010101" pitchFamily="50" charset="-127"/>
+              </a:rPr>
+              <a:t>책임분양확약</a:t>
+            </a:r>
+            <a:endParaRPr lang="en-US" altLang="ko-KR" sz="900" dirty="0">
+              <a:latin typeface="피플폰트 Bold" panose="020B0600000101010101" pitchFamily="50" charset="-127"/>
+              <a:ea typeface="피플폰트 Bold" panose="020B0600000101010101" pitchFamily="50" charset="-127"/>
+            </a:endParaRPr>
+          </a:p>
+        </p:txBody>
+      </p:sp>
+      <p:graphicFrame>
+        <p:nvGraphicFramePr>
+          <p:cNvPr id="71" name="표 4">
+            <a:extLst>
+              <a:ext uri="{FF2B5EF4-FFF2-40B4-BE49-F238E27FC236}">
+                <a16:creationId xmlns:a16="http://schemas.microsoft.com/office/drawing/2014/main" id="{3F304EB7-DF0C-41D2-A81E-5895A6DA1068}"/>
+              </a:ext>
+            </a:extLst>
+          </p:cNvPr>
+          <p:cNvGraphicFramePr>
+            <a:graphicFrameLocks noGrp="1"/>
+          </p:cNvGraphicFramePr>
+          <p:nvPr>
+            <p:extLst>
+              <p:ext uri="{D42A27DB-BD31-4B8C-83A1-F6EECF244321}">
+                <p14:modId xmlns:p14="http://schemas.microsoft.com/office/powerpoint/2010/main" val="301159807"/>
+              </p:ext>
+            </p:extLst>
+          </p:nvPr>
+        </p:nvGraphicFramePr>
+        <p:xfrm>
+          <a:off x="535970" y="5037927"/>
+          <a:ext cx="1915993" cy="695944"/>
+        </p:xfrm>
+        <a:graphic>
+          <a:graphicData uri="http://schemas.openxmlformats.org/drawingml/2006/table">
+            <a:tbl>
+              <a:tblPr firstRow="1" bandRow="1">
+                <a:effectLst>
+                  <a:outerShdw blurRad="50800" dist="38100" dir="2700000" algn="tl" rotWithShape="0">
+                    <a:prstClr val="black">
+                      <a:alpha val="40000"/>
+                    </a:prstClr>
+                  </a:outerShdw>
+                </a:effectLst>
+                <a:tableStyleId>{D03447BB-5D67-496B-8E87-E561075AD55C}</a:tableStyleId>
+              </a:tblPr>
+              <a:tblGrid>
+                <a:gridCol w="1915993">
+                  <a:extLst>
+                    <a:ext uri="{9D8B030D-6E8A-4147-A177-3AD203B41FA5}">
+                      <a16:colId xmlns:a16="http://schemas.microsoft.com/office/drawing/2014/main" val="20000"/>
+                    </a:ext>
+                  </a:extLst>
+                </a:gridCol>
+              </a:tblGrid>
+              <a:tr h="333570">
+                <a:tc>
+                  <a:txBody>
+                    <a:bodyPr/>
+                    <a:lstStyle/>
+                    <a:p>
+                      <a:pPr algn="ctr" latinLnBrk="1">
+                        <a:defRPr/>
+                      </a:pPr>
+                      <a:r>
+                        <a:rPr lang="ko-KR" altLang="en-US" sz="1200" dirty="0">
+                          <a:latin typeface="피플폰트 Bold" panose="020B0600000101010101" pitchFamily="50" charset="-127"/>
+                          <a:ea typeface="피플폰트 Bold" panose="020B0600000101010101" pitchFamily="50" charset="-127"/>
+                        </a:rPr>
+                        <a:t>물상보증인</a:t>
+                      </a:r>
+                      <a:r>
+                        <a:rPr lang="en-US" altLang="ko-KR" sz="1200" dirty="0">
+                          <a:latin typeface="피플폰트 Bold" panose="020B0600000101010101" pitchFamily="50" charset="-127"/>
+                          <a:ea typeface="피플폰트 Bold" panose="020B0600000101010101" pitchFamily="50" charset="-127"/>
+                        </a:rPr>
+                        <a:t>/</a:t>
+                      </a:r>
+                      <a:r>
+                        <a:rPr lang="ko-KR" altLang="en-US" sz="1200" dirty="0">
+                          <a:latin typeface="피플폰트 Bold" panose="020B0600000101010101" pitchFamily="50" charset="-127"/>
+                          <a:ea typeface="피플폰트 Bold" panose="020B0600000101010101" pitchFamily="50" charset="-127"/>
+                        </a:rPr>
+                        <a:t>연대보증인</a:t>
+                      </a:r>
+                    </a:p>
+                  </a:txBody>
+                  <a:tcPr marL="171674" marR="171674" marT="78033" marB="78033" anchor="ctr">
+                    <a:lnL w="28575" cap="flat" cmpd="sng" algn="ctr">
+                      <a:solidFill>
+                        <a:schemeClr val="bg1"/>
+                      </a:solidFill>
+                      <a:prstDash val="solid"/>
+                      <a:round/>
+                      <a:headEnd type="none" w="med" len="med"/>
+                      <a:tailEnd type="none" w="med" len="med"/>
+                    </a:lnL>
+                    <a:lnR w="28575" cap="flat" cmpd="sng" algn="ctr">
+                      <a:solidFill>
+                        <a:schemeClr val="bg1"/>
+                      </a:solidFill>
+                      <a:prstDash val="solid"/>
+                      <a:round/>
+                      <a:headEnd type="none" w="med" len="med"/>
+                      <a:tailEnd type="none" w="med" len="med"/>
+                    </a:lnR>
+                    <a:lnT w="28575" cap="flat" cmpd="sng" algn="ctr">
+                      <a:solidFill>
+                        <a:schemeClr val="bg1"/>
+                      </a:solidFill>
+                      <a:prstDash val="solid"/>
+                      <a:round/>
+                      <a:headEnd type="none" w="med" len="med"/>
+                      <a:tailEnd type="none" w="med" len="med"/>
+                    </a:lnT>
+                    <a:lnB w="28575" cap="flat" cmpd="sng" algn="ctr">
+                      <a:solidFill>
+                        <a:schemeClr val="bg1"/>
+                      </a:solidFill>
+                      <a:prstDash val="solid"/>
+                      <a:round/>
+                      <a:headEnd type="none" w="med" len="med"/>
+                      <a:tailEnd type="none" w="med" len="med"/>
+                    </a:lnB>
+                    <a:solidFill>
+                      <a:schemeClr val="tx1">
+                        <a:lumMod val="65000"/>
+                        <a:lumOff val="35000"/>
+                      </a:schemeClr>
+                    </a:solidFill>
+                  </a:tcPr>
+                </a:tc>
+                <a:extLst>
+                  <a:ext uri="{0D108BD9-81ED-4DB2-BD59-A6C34878D82A}">
+                    <a16:rowId xmlns:a16="http://schemas.microsoft.com/office/drawing/2014/main" val="10000"/>
+                  </a:ext>
+                </a:extLst>
+              </a:tr>
+              <a:tr h="356998">
+                <a:tc>
+                  <a:txBody>
+                    <a:bodyPr/>
+                    <a:lstStyle/>
+                    <a:p>
+                      <a:pPr algn="ctr" latinLnBrk="1">
+                        <a:defRPr/>
+                      </a:pPr>
+                      <a:r>
+                        <a:rPr lang="ko-KR" altLang="en-US" sz="1400" b="1" dirty="0">
+                          <a:solidFill>
+                            <a:schemeClr val="tx1"/>
+                          </a:solidFill>
+                          <a:latin typeface="피플폰트 Bold" panose="020B0600000101010101" pitchFamily="50" charset="-127"/>
+                          <a:ea typeface="피플폰트 Bold" panose="020B0600000101010101" pitchFamily="50" charset="-127"/>
+                        </a:rPr>
+                        <a:t>㈜</a:t>
+                      </a:r>
+                      <a:r>
+                        <a:rPr lang="ko-KR" altLang="en-US" sz="1400" b="1" dirty="0" err="1">
+                          <a:solidFill>
+                            <a:schemeClr val="tx1"/>
+                          </a:solidFill>
+                          <a:latin typeface="피플폰트 Bold" panose="020B0600000101010101" pitchFamily="50" charset="-127"/>
+                          <a:ea typeface="피플폰트 Bold" panose="020B0600000101010101" pitchFamily="50" charset="-127"/>
+                        </a:rPr>
+                        <a:t>어퍼하우스헌인</a:t>
+                      </a:r>
+                      <a:endParaRPr lang="ko-KR" altLang="en-US" sz="1600" b="1" dirty="0">
+                        <a:solidFill>
+                          <a:schemeClr val="tx1"/>
+                        </a:solidFill>
+                        <a:latin typeface="피플폰트 Bold" panose="020B0600000101010101" pitchFamily="50" charset="-127"/>
+                        <a:ea typeface="피플폰트 Bold" panose="020B0600000101010101" pitchFamily="50" charset="-127"/>
+                      </a:endParaRPr>
+                    </a:p>
+                  </a:txBody>
+                  <a:tcPr marL="0" marR="0" marT="72000" marB="0">
+                    <a:lnL w="28575" cap="flat" cmpd="sng" algn="ctr">
+                      <a:solidFill>
+                        <a:schemeClr val="bg1"/>
+                      </a:solidFill>
+                      <a:prstDash val="solid"/>
+                      <a:round/>
+                      <a:headEnd type="none" w="med" len="med"/>
+                      <a:tailEnd type="none" w="med" len="med"/>
+                    </a:lnL>
+                    <a:lnR w="28575" cap="flat" cmpd="sng" algn="ctr">
+                      <a:solidFill>
+                        <a:schemeClr val="bg1"/>
+                      </a:solidFill>
+                      <a:prstDash val="solid"/>
+                      <a:round/>
+                      <a:headEnd type="none" w="med" len="med"/>
+                      <a:tailEnd type="none" w="med" len="med"/>
+                    </a:lnR>
+                    <a:lnT w="28575" cap="flat" cmpd="sng" algn="ctr">
+                      <a:solidFill>
+                        <a:schemeClr val="bg1"/>
+                      </a:solidFill>
+                      <a:prstDash val="solid"/>
+                      <a:round/>
+                      <a:headEnd type="none" w="med" len="med"/>
+                      <a:tailEnd type="none" w="med" len="med"/>
+                    </a:lnT>
+                    <a:lnB w="28575" cap="flat" cmpd="sng" algn="ctr">
+                      <a:solidFill>
+                        <a:schemeClr val="bg1"/>
+                      </a:solidFill>
+                      <a:prstDash val="solid"/>
+                      <a:round/>
+                      <a:headEnd type="none" w="med" len="med"/>
+                      <a:tailEnd type="none" w="med" len="med"/>
+                    </a:lnB>
+                    <a:solidFill>
+                      <a:srgbClr val="D9D9D9"/>
+                    </a:solidFill>
+                  </a:tcPr>
+                </a:tc>
+                <a:extLst>
+                  <a:ext uri="{0D108BD9-81ED-4DB2-BD59-A6C34878D82A}">
+                    <a16:rowId xmlns:a16="http://schemas.microsoft.com/office/drawing/2014/main" val="10001"/>
+                  </a:ext>
+                </a:extLst>
+              </a:tr>
+            </a:tbl>
+          </a:graphicData>
+        </a:graphic>
+      </p:graphicFrame>
+      <p:cxnSp>
+        <p:nvCxnSpPr>
+          <p:cNvPr id="72" name="직선 화살표 연결선 71">
+            <a:extLst>
+              <a:ext uri="{FF2B5EF4-FFF2-40B4-BE49-F238E27FC236}">
+                <a16:creationId xmlns:a16="http://schemas.microsoft.com/office/drawing/2014/main" id="{95E48A0B-6016-4A91-ADDC-9D2AAA21D48B}"/>
+              </a:ext>
+            </a:extLst>
+          </p:cNvPr>
+          <p:cNvCxnSpPr>
+            <a:cxnSpLocks/>
+          </p:cNvCxnSpPr>
+          <p:nvPr/>
+        </p:nvCxnSpPr>
+        <p:spPr>
+          <a:xfrm flipH="1">
+            <a:off x="2547895" y="5353860"/>
+            <a:ext cx="2213450" cy="0"/>
+          </a:xfrm>
+          <a:prstGeom prst="straightConnector1">
+            <a:avLst/>
+          </a:prstGeom>
+          <a:solidFill>
+            <a:schemeClr val="accent1"/>
+          </a:solidFill>
+          <a:ln w="19050" cap="flat" cmpd="sng" algn="ctr">
+            <a:solidFill>
+              <a:schemeClr val="tx1"/>
+            </a:solidFill>
+            <a:prstDash val="solid"/>
+            <a:round/>
+            <a:headEnd type="triangle" w="sm" len="sm"/>
+            <a:tailEnd type="none" w="sm" len="sm"/>
+          </a:ln>
+          <a:effectLst/>
+        </p:spPr>
+      </p:cxnSp>
+      <p:sp>
+        <p:nvSpPr>
+          <p:cNvPr id="73" name="텍스트 개체 틀 2">
+            <a:extLst>
+              <a:ext uri="{FF2B5EF4-FFF2-40B4-BE49-F238E27FC236}">
+                <a16:creationId xmlns:a16="http://schemas.microsoft.com/office/drawing/2014/main" id="{7D4CE51C-5A02-43BF-AFAF-46C86D05611B}"/>
+              </a:ext>
+            </a:extLst>
+          </p:cNvPr>
+          <p:cNvSpPr txBox="1">
+            <a:spLocks/>
+          </p:cNvSpPr>
+          <p:nvPr/>
+        </p:nvSpPr>
+        <p:spPr>
+          <a:xfrm>
+            <a:off x="3120395" y="5149344"/>
+            <a:ext cx="1060169" cy="169662"/>
+          </a:xfrm>
+          <a:prstGeom prst="rect">
+            <a:avLst/>
+          </a:prstGeom>
+        </p:spPr>
+        <p:txBody>
+          <a:bodyPr vert="horz" wrap="square" lIns="0" tIns="0" rIns="0" bIns="0" rtlCol="0" anchor="ctr">
+            <a:spAutoFit/>
+          </a:bodyPr>
+          <a:lstStyle>
+            <a:lvl1pPr marL="0" indent="0" algn="l" defTabSz="914400" rtl="0" eaLnBrk="1" latinLnBrk="1" hangingPunct="1">
+              <a:lnSpc>
+                <a:spcPct val="90000"/>
+              </a:lnSpc>
+              <a:spcBef>
+                <a:spcPts val="1000"/>
+              </a:spcBef>
+              <a:buFont typeface="Arial" panose="020B0604020202020204" pitchFamily="34" charset="0"/>
+              <a:buNone/>
+              <a:defRPr sz="1200" kern="1200">
+                <a:solidFill>
+                  <a:schemeClr val="tx1"/>
+                </a:solidFill>
+                <a:latin typeface="AppleSDGothicNeoM00" panose="02000503000000000000" pitchFamily="2" charset="-127"/>
+                <a:ea typeface="AppleSDGothicNeoM00" panose="02000503000000000000" pitchFamily="2" charset="-127"/>
+                <a:cs typeface="+mn-cs"/>
+              </a:defRPr>
+            </a:lvl1pPr>
+            <a:lvl2pPr marL="685800" indent="-228600" algn="l" defTabSz="914400" rtl="0" eaLnBrk="1" latinLnBrk="1" hangingPunct="1">
+              <a:lnSpc>
+                <a:spcPct val="90000"/>
+              </a:lnSpc>
+              <a:spcBef>
+                <a:spcPts val="500"/>
+              </a:spcBef>
+              <a:buFont typeface="Arial" panose="020B0604020202020204" pitchFamily="34" charset="0"/>
+              <a:buChar char="•"/>
+              <a:defRPr sz="2400" kern="1200">
+                <a:solidFill>
+                  <a:schemeClr val="tx1"/>
+                </a:solidFill>
+                <a:latin typeface="+mn-lt"/>
+                <a:ea typeface="+mn-ea"/>
+                <a:cs typeface="+mn-cs"/>
+              </a:defRPr>
+            </a:lvl2pPr>
+            <a:lvl3pPr marL="1143000" indent="-228600" algn="l" defTabSz="914400" rtl="0" eaLnBrk="1" latinLnBrk="1" hangingPunct="1">
+              <a:lnSpc>
+                <a:spcPct val="90000"/>
+              </a:lnSpc>
+              <a:spcBef>
+                <a:spcPts val="500"/>
+              </a:spcBef>
+              <a:buFont typeface="Arial" panose="020B0604020202020204" pitchFamily="34" charset="0"/>
+              <a:buChar char="•"/>
+              <a:defRPr sz="2000" kern="1200">
+                <a:solidFill>
+                  <a:schemeClr val="tx1"/>
+                </a:solidFill>
+                <a:latin typeface="+mn-lt"/>
+                <a:ea typeface="+mn-ea"/>
+                <a:cs typeface="+mn-cs"/>
+              </a:defRPr>
+            </a:lvl3pPr>
+            <a:lvl4pPr marL="1600200" indent="-228600" algn="l" defTabSz="914400" rtl="0" eaLnBrk="1" latinLnBrk="1" hangingPunct="1">
+              <a:lnSpc>
+                <a:spcPct val="90000"/>
+              </a:lnSpc>
+              <a:spcBef>
+                <a:spcPts val="500"/>
+              </a:spcBef>
+              <a:buFont typeface="Arial" panose="020B0604020202020204" pitchFamily="34" charset="0"/>
+              <a:buChar char="•"/>
+              <a:defRPr sz="1800" kern="1200">
+                <a:solidFill>
+                  <a:schemeClr val="tx1"/>
+                </a:solidFill>
+                <a:latin typeface="+mn-lt"/>
+                <a:ea typeface="+mn-ea"/>
+                <a:cs typeface="+mn-cs"/>
+              </a:defRPr>
+            </a:lvl4pPr>
+            <a:lvl5pPr marL="2057400" indent="-228600" algn="l" defTabSz="914400" rtl="0" eaLnBrk="1" latinLnBrk="1" hangingPunct="1">
+              <a:lnSpc>
+                <a:spcPct val="90000"/>
+              </a:lnSpc>
+              <a:spcBef>
+                <a:spcPts val="500"/>
+              </a:spcBef>
+              <a:buFont typeface="Arial" panose="020B0604020202020204" pitchFamily="34" charset="0"/>
+              <a:buChar char="•"/>
+              <a:defRPr sz="1800" kern="1200">
+                <a:solidFill>
+                  <a:schemeClr val="tx1"/>
+                </a:solidFill>
+                <a:latin typeface="+mn-lt"/>
+                <a:ea typeface="+mn-ea"/>
+                <a:cs typeface="+mn-cs"/>
+              </a:defRPr>
+            </a:lvl5pPr>
+            <a:lvl6pPr marL="2514600" indent="-228600" algn="l" defTabSz="914400" rtl="0" eaLnBrk="1" latinLnBrk="1" hangingPunct="1">
+              <a:lnSpc>
+                <a:spcPct val="90000"/>
+              </a:lnSpc>
+              <a:spcBef>
+                <a:spcPts val="500"/>
+              </a:spcBef>
+              <a:buFont typeface="Arial" panose="020B0604020202020204" pitchFamily="34" charset="0"/>
+              <a:buChar char="•"/>
+              <a:defRPr sz="1800" kern="1200">
+                <a:solidFill>
+                  <a:schemeClr val="tx1"/>
+                </a:solidFill>
+                <a:latin typeface="+mn-lt"/>
+                <a:ea typeface="+mn-ea"/>
+                <a:cs typeface="+mn-cs"/>
+              </a:defRPr>
+            </a:lvl6pPr>
+            <a:lvl7pPr marL="2971800" indent="-228600" algn="l" defTabSz="914400" rtl="0" eaLnBrk="1" latinLnBrk="1" hangingPunct="1">
+              <a:lnSpc>
+                <a:spcPct val="90000"/>
+              </a:lnSpc>
+              <a:spcBef>
+                <a:spcPts val="500"/>
+              </a:spcBef>
+              <a:buFont typeface="Arial" panose="020B0604020202020204" pitchFamily="34" charset="0"/>
+              <a:buChar char="•"/>
+              <a:defRPr sz="1800" kern="1200">
+                <a:solidFill>
+                  <a:schemeClr val="tx1"/>
+                </a:solidFill>
+                <a:latin typeface="+mn-lt"/>
+                <a:ea typeface="+mn-ea"/>
+                <a:cs typeface="+mn-cs"/>
+              </a:defRPr>
+            </a:lvl7pPr>
+            <a:lvl8pPr marL="3429000" indent="-228600" algn="l" defTabSz="914400" rtl="0" eaLnBrk="1" latinLnBrk="1" hangingPunct="1">
+              <a:lnSpc>
+                <a:spcPct val="90000"/>
+              </a:lnSpc>
+              <a:spcBef>
+                <a:spcPts val="500"/>
+              </a:spcBef>
+              <a:buFont typeface="Arial" panose="020B0604020202020204" pitchFamily="34" charset="0"/>
+              <a:buChar char="•"/>
+              <a:defRPr sz="1800" kern="1200">
+                <a:solidFill>
+                  <a:schemeClr val="tx1"/>
+                </a:solidFill>
+                <a:latin typeface="+mn-lt"/>
+                <a:ea typeface="+mn-ea"/>
+                <a:cs typeface="+mn-cs"/>
+              </a:defRPr>
+            </a:lvl8pPr>
+            <a:lvl9pPr marL="3886200" indent="-228600" algn="l" defTabSz="914400" rtl="0" eaLnBrk="1" latinLnBrk="1" hangingPunct="1">
+              <a:lnSpc>
+                <a:spcPct val="90000"/>
+              </a:lnSpc>
+              <a:spcBef>
+                <a:spcPts val="500"/>
+              </a:spcBef>
+              <a:buFont typeface="Arial" panose="020B0604020202020204" pitchFamily="34" charset="0"/>
+              <a:buChar char="•"/>
+              <a:defRPr sz="1800" kern="1200">
+                <a:solidFill>
+                  <a:schemeClr val="tx1"/>
+                </a:solidFill>
+                <a:latin typeface="+mn-lt"/>
+                <a:ea typeface="+mn-ea"/>
+                <a:cs typeface="+mn-cs"/>
+              </a:defRPr>
+            </a:lvl9pPr>
+          </a:lstStyle>
+          <a:p>
+            <a:pPr algn="ctr">
+              <a:lnSpc>
+                <a:spcPct val="130000"/>
+              </a:lnSpc>
+              <a:spcBef>
+                <a:spcPts val="0"/>
+              </a:spcBef>
+            </a:pPr>
+            <a:r>
+              <a:rPr lang="ko-KR" altLang="en-US" sz="900">
+                <a:latin typeface="피플폰트 Bold" panose="020B0600000101010101" pitchFamily="50" charset="-127"/>
+                <a:ea typeface="피플폰트 Bold" panose="020B0600000101010101" pitchFamily="50" charset="-127"/>
+              </a:rPr>
+              <a:t>담보제공</a:t>
+            </a:r>
+            <a:r>
+              <a:rPr lang="en-US" altLang="ko-KR" sz="900" dirty="0">
+                <a:latin typeface="피플폰트 Bold" panose="020B0600000101010101" pitchFamily="50" charset="-127"/>
+                <a:ea typeface="피플폰트 Bold" panose="020B0600000101010101" pitchFamily="50" charset="-127"/>
+              </a:rPr>
+              <a:t>/</a:t>
+            </a:r>
+            <a:r>
+              <a:rPr lang="ko-KR" altLang="en-US" sz="900" dirty="0">
+                <a:latin typeface="피플폰트 Bold" panose="020B0600000101010101" pitchFamily="50" charset="-127"/>
+                <a:ea typeface="피플폰트 Bold" panose="020B0600000101010101" pitchFamily="50" charset="-127"/>
+              </a:rPr>
+              <a:t>연대보증</a:t>
+            </a:r>
+            <a:endParaRPr lang="en-US" altLang="ko-KR" sz="900" dirty="0">
+              <a:latin typeface="피플폰트 Bold" panose="020B0600000101010101" pitchFamily="50" charset="-127"/>
+              <a:ea typeface="피플폰트 Bold" panose="020B0600000101010101" pitchFamily="50" charset="-127"/>
+            </a:endParaRPr>
+          </a:p>
+        </p:txBody>
+      </p:sp>
+    </p:spTree>
+    <p:extLst>
+      <p:ext uri="{BB962C8B-B14F-4D97-AF65-F5344CB8AC3E}">
+        <p14:creationId xmlns:p14="http://schemas.microsoft.com/office/powerpoint/2010/main" val="2721011472"/>
+      </p:ext>
+    </p:extLst>
+  </p:cSld>
+  <p:clrMapOvr>
+    <a:masterClrMapping/>
+  </p:clrMapOvr>
+</p:sld>
+</file>
+
+<file path=ppt/slides/slide13.xml><?xml version="1.0" encoding="utf-8"?>
+<p:sld xmlns:a="http://schemas.openxmlformats.org/drawingml/2006/main" xmlns:r="http://schemas.openxmlformats.org/officeDocument/2006/relationships" xmlns:p="http://schemas.openxmlformats.org/presentationml/2006/main">
+  <p:cSld>
+    <p:spTree>
+      <p:nvGrpSpPr>
+        <p:cNvPr id="1" name=""/>
+        <p:cNvGrpSpPr/>
+        <p:nvPr/>
+      </p:nvGrpSpPr>
+      <p:grpSpPr>
+        <a:xfrm>
+          <a:off x="0" y="0"/>
+          <a:ext cx="0" cy="0"/>
+          <a:chOff x="0" y="0"/>
+          <a:chExt cx="0" cy="0"/>
+        </a:xfrm>
+      </p:grpSpPr>
+      <p:pic>
+        <p:nvPicPr>
+          <p:cNvPr id="36" name="그림 35">
+            <a:extLst>
+              <a:ext uri="{FF2B5EF4-FFF2-40B4-BE49-F238E27FC236}">
+                <a16:creationId xmlns:a16="http://schemas.microsoft.com/office/drawing/2014/main" id="{49F0D632-9C35-4CC7-ABDB-2357C9C418E5}"/>
+              </a:ext>
+            </a:extLst>
+          </p:cNvPr>
+          <p:cNvPicPr>
+            <a:picLocks noChangeAspect="1"/>
+          </p:cNvPicPr>
+          <p:nvPr/>
+        </p:nvPicPr>
+        <p:blipFill>
+          <a:blip r:embed="rId2"/>
+          <a:stretch>
+            <a:fillRect/>
+          </a:stretch>
+        </p:blipFill>
+        <p:spPr>
+          <a:xfrm>
+            <a:off x="224600" y="203200"/>
+            <a:ext cx="1415504" cy="107950"/>
+          </a:xfrm>
+          <a:prstGeom prst="rect">
+            <a:avLst/>
+          </a:prstGeom>
+        </p:spPr>
+      </p:pic>
+      <p:sp>
+        <p:nvSpPr>
+          <p:cNvPr id="29" name="액자 28">
+            <a:extLst>
+              <a:ext uri="{FF2B5EF4-FFF2-40B4-BE49-F238E27FC236}">
+                <a16:creationId xmlns:a16="http://schemas.microsoft.com/office/drawing/2014/main" id="{DD26EF3D-6FEC-4A5D-B47C-2ABBC82E6065}"/>
+              </a:ext>
+            </a:extLst>
+          </p:cNvPr>
+          <p:cNvSpPr/>
+          <p:nvPr/>
+        </p:nvSpPr>
+        <p:spPr>
+          <a:xfrm>
+            <a:off x="108858" y="113933"/>
+            <a:ext cx="9673771" cy="6630135"/>
+          </a:xfrm>
+          <a:prstGeom prst="frame">
+            <a:avLst>
+              <a:gd name="adj1" fmla="val 0"/>
+            </a:avLst>
+          </a:prstGeom>
+        </p:spPr>
+        <p:style>
+          <a:lnRef idx="2">
+            <a:schemeClr val="accent1">
+              <a:shade val="50000"/>
+            </a:schemeClr>
+          </a:lnRef>
+          <a:fillRef idx="1">
+            <a:schemeClr val="accent1"/>
+          </a:fillRef>
+          <a:effectRef idx="0">
+            <a:schemeClr val="accent1"/>
+          </a:effectRef>
+          <a:fontRef idx="minor">
+            <a:schemeClr val="lt1"/>
+          </a:fontRef>
+        </p:style>
+        <p:txBody>
+          <a:bodyPr rtlCol="0" anchor="ctr"/>
+          <a:lstStyle/>
+          <a:p>
+            <a:pPr algn="ctr"/>
+            <a:endParaRPr lang="ko-KR" altLang="en-US">
+              <a:solidFill>
+                <a:schemeClr val="tx1"/>
+              </a:solidFill>
+            </a:endParaRPr>
+          </a:p>
+        </p:txBody>
+      </p:sp>
+      <p:sp>
+        <p:nvSpPr>
+          <p:cNvPr id="2" name="TextBox 1">
+            <a:extLst>
+              <a:ext uri="{FF2B5EF4-FFF2-40B4-BE49-F238E27FC236}">
+                <a16:creationId xmlns:a16="http://schemas.microsoft.com/office/drawing/2014/main" id="{07195E0F-D49C-4C2F-8051-B3237C00DAE3}"/>
+              </a:ext>
+            </a:extLst>
+          </p:cNvPr>
+          <p:cNvSpPr txBox="1"/>
+          <p:nvPr/>
+        </p:nvSpPr>
+        <p:spPr>
+          <a:xfrm>
+            <a:off x="224600" y="400417"/>
+            <a:ext cx="1338828" cy="369332"/>
+          </a:xfrm>
+          <a:prstGeom prst="rect">
+            <a:avLst/>
+          </a:prstGeom>
+          <a:noFill/>
+        </p:spPr>
+        <p:txBody>
+          <a:bodyPr wrap="none" rtlCol="0">
+            <a:spAutoFit/>
+          </a:bodyPr>
+          <a:lstStyle/>
+          <a:p>
+            <a:r>
+              <a:rPr lang="en-US" altLang="ko-KR" dirty="0">
+                <a:latin typeface="피플폰트 Bold" panose="020B0600000101010101" pitchFamily="50" charset="-127"/>
+                <a:ea typeface="피플폰트 Bold" panose="020B0600000101010101" pitchFamily="50" charset="-127"/>
+              </a:rPr>
+              <a:t>12. </a:t>
+            </a:r>
+            <a:r>
+              <a:rPr lang="ko-KR" altLang="en-US" dirty="0">
+                <a:latin typeface="피플폰트 Bold" panose="020B0600000101010101" pitchFamily="50" charset="-127"/>
+                <a:ea typeface="피플폰트 Bold" panose="020B0600000101010101" pitchFamily="50" charset="-127"/>
+              </a:rPr>
+              <a:t>담보대출</a:t>
+            </a:r>
+          </a:p>
+        </p:txBody>
+      </p:sp>
+      <p:sp>
+        <p:nvSpPr>
+          <p:cNvPr id="25" name="직사각형 24">
+            <a:extLst>
+              <a:ext uri="{FF2B5EF4-FFF2-40B4-BE49-F238E27FC236}">
+                <a16:creationId xmlns:a16="http://schemas.microsoft.com/office/drawing/2014/main" id="{CF71F7F5-4544-4150-B0DD-A5731DD2C9EA}"/>
+              </a:ext>
+            </a:extLst>
+          </p:cNvPr>
+          <p:cNvSpPr/>
+          <p:nvPr/>
+        </p:nvSpPr>
+        <p:spPr>
+          <a:xfrm>
+            <a:off x="4550174" y="1535649"/>
+            <a:ext cx="2409326" cy="4554005"/>
+          </a:xfrm>
+          <a:prstGeom prst="rect">
+            <a:avLst/>
+          </a:prstGeom>
+          <a:solidFill>
+            <a:schemeClr val="bg1">
+              <a:lumMod val="95000"/>
+            </a:schemeClr>
+          </a:solidFill>
+          <a:ln>
+            <a:noFill/>
+          </a:ln>
+          <a:effectLst>
+            <a:outerShdw blurRad="50800" dist="38100" dir="5400000" algn="t" rotWithShape="0">
+              <a:prstClr val="black">
+                <a:alpha val="40000"/>
+              </a:prstClr>
+            </a:outerShdw>
+          </a:effectLst>
+        </p:spPr>
+        <p:txBody>
+          <a:bodyPr rtlCol="0" anchor="ctr"/>
+          <a:lstStyle/>
+          <a:p>
+            <a:pPr algn="ctr"/>
+            <a:endParaRPr lang="ko-KR" altLang="en-US"/>
+          </a:p>
+        </p:txBody>
+      </p:sp>
+      <p:sp>
+        <p:nvSpPr>
+          <p:cNvPr id="26" name="TextBox 25">
+            <a:extLst>
+              <a:ext uri="{FF2B5EF4-FFF2-40B4-BE49-F238E27FC236}">
+                <a16:creationId xmlns:a16="http://schemas.microsoft.com/office/drawing/2014/main" id="{ADDC79B9-A5E7-4679-AC9B-F094AC0492C4}"/>
+              </a:ext>
+            </a:extLst>
+          </p:cNvPr>
+          <p:cNvSpPr txBox="1"/>
+          <p:nvPr/>
+        </p:nvSpPr>
+        <p:spPr>
+          <a:xfrm>
+            <a:off x="4654321" y="1600321"/>
+            <a:ext cx="2256402" cy="246221"/>
+          </a:xfrm>
+          <a:prstGeom prst="rect">
+            <a:avLst/>
+          </a:prstGeom>
+          <a:noFill/>
+        </p:spPr>
+        <p:txBody>
+          <a:bodyPr wrap="square">
+            <a:spAutoFit/>
+          </a:bodyPr>
+          <a:lstStyle/>
+          <a:p>
+            <a:pPr algn="ctr">
+              <a:defRPr/>
+            </a:pPr>
+            <a:r>
+              <a:rPr lang="ko-KR" altLang="en-US" sz="1000" b="1" u="sng" dirty="0">
+                <a:latin typeface="피플폰트 Bold"/>
+                <a:ea typeface="피플폰트 Bold"/>
+              </a:rPr>
+              <a:t>8,500억원</a:t>
+            </a:r>
+          </a:p>
+        </p:txBody>
+      </p:sp>
+      <p:graphicFrame>
+        <p:nvGraphicFramePr>
+          <p:cNvPr id="27" name="표 4">
+            <a:extLst>
+              <a:ext uri="{FF2B5EF4-FFF2-40B4-BE49-F238E27FC236}">
+                <a16:creationId xmlns:a16="http://schemas.microsoft.com/office/drawing/2014/main" id="{4B688789-2DF2-4300-A475-30DD0465585E}"/>
+              </a:ext>
+            </a:extLst>
+          </p:cNvPr>
+          <p:cNvGraphicFramePr>
+            <a:graphicFrameLocks noGrp="1"/>
+          </p:cNvGraphicFramePr>
+          <p:nvPr>
+            <p:extLst>
+              <p:ext uri="{D42A27DB-BD31-4B8C-83A1-F6EECF244321}">
+                <p14:modId xmlns:p14="http://schemas.microsoft.com/office/powerpoint/2010/main" val="4132630228"/>
+              </p:ext>
+            </p:extLst>
+          </p:nvPr>
+        </p:nvGraphicFramePr>
+        <p:xfrm>
+          <a:off x="868434" y="2615900"/>
+          <a:ext cx="1915993" cy="679289"/>
+        </p:xfrm>
+        <a:graphic>
+          <a:graphicData uri="http://schemas.openxmlformats.org/drawingml/2006/table">
+            <a:tbl>
+              <a:tblPr firstRow="1" bandRow="1">
+                <a:effectLst>
+                  <a:outerShdw blurRad="50800" dist="38100" dir="2700000" algn="tl" rotWithShape="0">
+                    <a:prstClr val="black">
+                      <a:alpha val="40000"/>
+                    </a:prstClr>
+                  </a:outerShdw>
+                </a:effectLst>
+                <a:tableStyleId>{D03447BB-5D67-496B-8E87-E561075AD55C}</a:tableStyleId>
+              </a:tblPr>
+              <a:tblGrid>
+                <a:gridCol w="1915993">
+                  <a:extLst>
+                    <a:ext uri="{9D8B030D-6E8A-4147-A177-3AD203B41FA5}">
+                      <a16:colId xmlns:a16="http://schemas.microsoft.com/office/drawing/2014/main" val="20000"/>
+                    </a:ext>
+                  </a:extLst>
+                </a:gridCol>
+              </a:tblGrid>
+              <a:tr h="323133">
+                <a:tc>
+                  <a:txBody>
+                    <a:bodyPr/>
+                    <a:lstStyle/>
+                    <a:p>
+                      <a:pPr algn="ctr" latinLnBrk="1">
+                        <a:defRPr/>
+                      </a:pPr>
+                      <a:r>
+                        <a:rPr lang="ko-KR" altLang="en-US" sz="1200" dirty="0">
+                          <a:latin typeface="피플폰트 Bold" panose="020B0600000101010101" pitchFamily="50" charset="-127"/>
+                          <a:ea typeface="피플폰트 Bold" panose="020B0600000101010101" pitchFamily="50" charset="-127"/>
+                        </a:rPr>
+                        <a:t>차주 및 시행사</a:t>
+                      </a:r>
+                    </a:p>
+                  </a:txBody>
+                  <a:tcPr marL="171674" marR="171674" marT="78033" marB="78033" anchor="ctr">
+                    <a:lnL w="28575" cap="flat" cmpd="sng" algn="ctr">
+                      <a:solidFill>
+                        <a:schemeClr val="bg1"/>
+                      </a:solidFill>
+                      <a:prstDash val="solid"/>
+                      <a:round/>
+                      <a:headEnd type="none" w="med" len="med"/>
+                      <a:tailEnd type="none" w="med" len="med"/>
+                    </a:lnL>
+                    <a:lnR w="28575" cap="flat" cmpd="sng" algn="ctr">
+                      <a:solidFill>
+                        <a:schemeClr val="bg1"/>
+                      </a:solidFill>
+                      <a:prstDash val="solid"/>
+                      <a:round/>
+                      <a:headEnd type="none" w="med" len="med"/>
+                      <a:tailEnd type="none" w="med" len="med"/>
+                    </a:lnR>
+                    <a:lnT w="28575" cap="flat" cmpd="sng" algn="ctr">
+                      <a:solidFill>
+                        <a:schemeClr val="bg1"/>
+                      </a:solidFill>
+                      <a:prstDash val="solid"/>
+                      <a:round/>
+                      <a:headEnd type="none" w="med" len="med"/>
+                      <a:tailEnd type="none" w="med" len="med"/>
+                    </a:lnT>
+                    <a:lnB w="28575" cap="flat" cmpd="sng" algn="ctr">
+                      <a:solidFill>
+                        <a:schemeClr val="bg1"/>
+                      </a:solidFill>
+                      <a:prstDash val="solid"/>
+                      <a:round/>
+                      <a:headEnd type="none" w="med" len="med"/>
+                      <a:tailEnd type="none" w="med" len="med"/>
+                    </a:lnB>
+                    <a:solidFill>
+                      <a:srgbClr val="002E56"/>
+                    </a:solidFill>
+                  </a:tcPr>
+                </a:tc>
+                <a:extLst>
+                  <a:ext uri="{0D108BD9-81ED-4DB2-BD59-A6C34878D82A}">
+                    <a16:rowId xmlns:a16="http://schemas.microsoft.com/office/drawing/2014/main" val="10000"/>
+                  </a:ext>
+                </a:extLst>
+              </a:tr>
+              <a:tr h="340343">
+                <a:tc>
+                  <a:txBody>
+                    <a:bodyPr/>
+                    <a:lstStyle/>
+                    <a:p>
+                      <a:pPr algn="ctr" latinLnBrk="1">
+                        <a:defRPr/>
+                      </a:pPr>
+                      <a:r>
+                        <a:rPr lang="ko-KR" altLang="en-US" sz="1400" b="1" dirty="0" err="1">
+                          <a:solidFill>
+                            <a:schemeClr val="tx1"/>
+                          </a:solidFill>
+                          <a:latin typeface="피플폰트 Bold" panose="020B0600000101010101" pitchFamily="50" charset="-127"/>
+                          <a:ea typeface="피플폰트 Bold" panose="020B0600000101010101" pitchFamily="50" charset="-127"/>
+                        </a:rPr>
+                        <a:t>헌인타운개발</a:t>
+                      </a:r>
+                      <a:r>
+                        <a:rPr lang="ko-KR" altLang="en-US" sz="1400" b="1" dirty="0">
+                          <a:solidFill>
+                            <a:schemeClr val="tx1"/>
+                          </a:solidFill>
+                          <a:latin typeface="피플폰트 Bold" panose="020B0600000101010101" pitchFamily="50" charset="-127"/>
+                          <a:ea typeface="피플폰트 Bold" panose="020B0600000101010101" pitchFamily="50" charset="-127"/>
+                        </a:rPr>
+                        <a:t>㈜</a:t>
+                      </a:r>
+                      <a:endParaRPr lang="ko-KR" altLang="en-US" sz="1600" b="1" dirty="0">
+                        <a:solidFill>
+                          <a:schemeClr val="tx1"/>
+                        </a:solidFill>
+                        <a:latin typeface="피플폰트 Bold" panose="020B0600000101010101" pitchFamily="50" charset="-127"/>
+                        <a:ea typeface="피플폰트 Bold" panose="020B0600000101010101" pitchFamily="50" charset="-127"/>
+                      </a:endParaRPr>
+                    </a:p>
+                  </a:txBody>
+                  <a:tcPr marL="0" marR="0" marT="72000" marB="0">
+                    <a:lnL w="28575" cap="flat" cmpd="sng" algn="ctr">
+                      <a:solidFill>
+                        <a:schemeClr val="bg1"/>
+                      </a:solidFill>
+                      <a:prstDash val="solid"/>
+                      <a:round/>
+                      <a:headEnd type="none" w="med" len="med"/>
+                      <a:tailEnd type="none" w="med" len="med"/>
+                    </a:lnL>
+                    <a:lnR w="28575" cap="flat" cmpd="sng" algn="ctr">
+                      <a:solidFill>
+                        <a:schemeClr val="bg1"/>
+                      </a:solidFill>
+                      <a:prstDash val="solid"/>
+                      <a:round/>
+                      <a:headEnd type="none" w="med" len="med"/>
+                      <a:tailEnd type="none" w="med" len="med"/>
+                    </a:lnR>
+                    <a:lnT w="28575" cap="flat" cmpd="sng" algn="ctr">
+                      <a:solidFill>
+                        <a:schemeClr val="bg1"/>
+                      </a:solidFill>
+                      <a:prstDash val="solid"/>
+                      <a:round/>
+                      <a:headEnd type="none" w="med" len="med"/>
+                      <a:tailEnd type="none" w="med" len="med"/>
+                    </a:lnT>
+                    <a:lnB w="28575" cap="flat" cmpd="sng" algn="ctr">
+                      <a:solidFill>
+                        <a:schemeClr val="bg1"/>
+                      </a:solidFill>
+                      <a:prstDash val="solid"/>
+                      <a:round/>
+                      <a:headEnd type="none" w="med" len="med"/>
+                      <a:tailEnd type="none" w="med" len="med"/>
+                    </a:lnB>
+                    <a:solidFill>
+                      <a:srgbClr val="D9D9D9"/>
+                    </a:solidFill>
+                  </a:tcPr>
+                </a:tc>
+                <a:extLst>
+                  <a:ext uri="{0D108BD9-81ED-4DB2-BD59-A6C34878D82A}">
+                    <a16:rowId xmlns:a16="http://schemas.microsoft.com/office/drawing/2014/main" val="10001"/>
+                  </a:ext>
+                </a:extLst>
+              </a:tr>
+            </a:tbl>
+          </a:graphicData>
+        </a:graphic>
+      </p:graphicFrame>
+      <p:graphicFrame>
+        <p:nvGraphicFramePr>
+          <p:cNvPr id="28" name="표 4">
+            <a:extLst>
+              <a:ext uri="{FF2B5EF4-FFF2-40B4-BE49-F238E27FC236}">
+                <a16:creationId xmlns:a16="http://schemas.microsoft.com/office/drawing/2014/main" id="{6BCBD668-9E5A-4965-BBD2-D85388EDD191}"/>
+              </a:ext>
+            </a:extLst>
+          </p:cNvPr>
+          <p:cNvGraphicFramePr>
+            <a:graphicFrameLocks noGrp="1"/>
+          </p:cNvGraphicFramePr>
+          <p:nvPr>
+            <p:extLst>
+              <p:ext uri="{D42A27DB-BD31-4B8C-83A1-F6EECF244321}">
+                <p14:modId xmlns:p14="http://schemas.microsoft.com/office/powerpoint/2010/main" val="1229042450"/>
+              </p:ext>
+            </p:extLst>
+          </p:nvPr>
+        </p:nvGraphicFramePr>
+        <p:xfrm>
+          <a:off x="4689649" y="3974510"/>
+          <a:ext cx="2130374" cy="944914"/>
+        </p:xfrm>
+        <a:graphic>
+          <a:graphicData uri="http://schemas.openxmlformats.org/drawingml/2006/table">
+            <a:tbl>
+              <a:tblPr firstRow="1" bandRow="1">
+                <a:effectLst>
+                  <a:outerShdw blurRad="50800" dist="38100" dir="2700000" algn="tl" rotWithShape="0">
+                    <a:prstClr val="black">
+                      <a:alpha val="40000"/>
+                    </a:prstClr>
+                  </a:outerShdw>
+                </a:effectLst>
+                <a:tableStyleId>{D03447BB-5D67-496B-8E87-E561075AD55C}</a:tableStyleId>
+              </a:tblPr>
+              <a:tblGrid>
+                <a:gridCol w="2130374">
+                  <a:extLst>
+                    <a:ext uri="{9D8B030D-6E8A-4147-A177-3AD203B41FA5}">
+                      <a16:colId xmlns:a16="http://schemas.microsoft.com/office/drawing/2014/main" val="20000"/>
+                    </a:ext>
+                  </a:extLst>
+                </a:gridCol>
+              </a:tblGrid>
+              <a:tr h="350099">
+                <a:tc>
+                  <a:txBody>
+                    <a:bodyPr/>
+                    <a:lstStyle/>
+                    <a:p>
+                      <a:pPr algn="ctr" latinLnBrk="1">
+                        <a:defRPr/>
+                      </a:pPr>
+                      <a:r>
+                        <a:rPr lang="en-US" altLang="ko-KR" sz="1000" dirty="0">
+                          <a:latin typeface="피플폰트 Bold" panose="020B0600000101010101" pitchFamily="50" charset="-127"/>
+                          <a:ea typeface="피플폰트 Bold" panose="020B0600000101010101" pitchFamily="50" charset="-127"/>
+                        </a:rPr>
+                        <a:t>Tr. B 3,900억원</a:t>
+                      </a:r>
+                      <a:endParaRPr lang="ko-KR" altLang="en-US" sz="1000" dirty="0">
+                        <a:latin typeface="피플폰트 Bold" panose="020B0600000101010101" pitchFamily="50" charset="-127"/>
+                        <a:ea typeface="피플폰트 Bold" panose="020B0600000101010101" pitchFamily="50" charset="-127"/>
+                      </a:endParaRPr>
+                    </a:p>
+                  </a:txBody>
+                  <a:tcPr marL="152842" marR="152842" marT="76421" marB="76421" anchor="ctr">
+                    <a:lnL w="28575" cap="flat" cmpd="sng" algn="ctr">
+                      <a:solidFill>
+                        <a:schemeClr val="bg1"/>
+                      </a:solidFill>
+                      <a:prstDash val="solid"/>
+                      <a:round/>
+                      <a:headEnd type="none" w="med" len="med"/>
+                      <a:tailEnd type="none" w="med" len="med"/>
+                    </a:lnL>
+                    <a:lnR w="28575" cap="flat" cmpd="sng" algn="ctr">
+                      <a:solidFill>
+                        <a:schemeClr val="bg1"/>
+                      </a:solidFill>
+                      <a:prstDash val="solid"/>
+                      <a:round/>
+                      <a:headEnd type="none" w="med" len="med"/>
+                      <a:tailEnd type="none" w="med" len="med"/>
+                    </a:lnR>
+                    <a:lnT w="28575" cap="flat" cmpd="sng" algn="ctr">
+                      <a:solidFill>
+                        <a:schemeClr val="bg1"/>
+                      </a:solidFill>
+                      <a:prstDash val="solid"/>
+                      <a:round/>
+                      <a:headEnd type="none" w="med" len="med"/>
+                      <a:tailEnd type="none" w="med" len="med"/>
+                    </a:lnT>
+                    <a:lnB w="28575" cap="flat" cmpd="sng" algn="ctr">
+                      <a:solidFill>
+                        <a:schemeClr val="bg1"/>
+                      </a:solidFill>
+                      <a:prstDash val="solid"/>
+                      <a:round/>
+                      <a:headEnd type="none" w="med" len="med"/>
+                      <a:tailEnd type="none" w="med" len="med"/>
+                    </a:lnB>
+                    <a:solidFill>
+                      <a:srgbClr val="08377C"/>
+                    </a:solidFill>
+                  </a:tcPr>
+                </a:tc>
+                <a:extLst>
+                  <a:ext uri="{0D108BD9-81ED-4DB2-BD59-A6C34878D82A}">
+                    <a16:rowId xmlns:a16="http://schemas.microsoft.com/office/drawing/2014/main" val="10000"/>
+                  </a:ext>
+                </a:extLst>
+              </a:tr>
+              <a:tr h="594815">
+                <a:tc>
+                  <a:txBody>
+                    <a:bodyPr/>
+                    <a:lstStyle/>
+                    <a:p>
+                      <a:pPr algn="ctr" latinLnBrk="1">
+                        <a:defRPr/>
+                      </a:pPr>
+                      <a:endParaRPr lang="en-US" altLang="ko-KR" sz="1200" b="1" dirty="0">
+                        <a:solidFill>
+                          <a:schemeClr val="tx1"/>
+                        </a:solidFill>
+                        <a:latin typeface="피플폰트 Bold" panose="020B0600000101010101" pitchFamily="50" charset="-127"/>
+                        <a:ea typeface="피플폰트 Bold" panose="020B0600000101010101" pitchFamily="50" charset="-127"/>
+                      </a:endParaRPr>
+                    </a:p>
+                    <a:p>
+                      <a:pPr algn="ctr" latinLnBrk="1">
+                        <a:defRPr/>
+                      </a:pPr>
+                      <a:endParaRPr lang="en-US" altLang="ko-KR" sz="1200" b="1" dirty="0">
+                        <a:solidFill>
+                          <a:schemeClr val="tx1"/>
+                        </a:solidFill>
+                        <a:latin typeface="피플폰트 Bold" panose="020B0600000101010101" pitchFamily="50" charset="-127"/>
+                        <a:ea typeface="피플폰트 Bold" panose="020B0600000101010101" pitchFamily="50" charset="-127"/>
+                      </a:endParaRPr>
+                    </a:p>
+                  </a:txBody>
+                  <a:tcPr marL="152842" marR="152842" marT="76421" marB="76421" anchor="ctr">
+                    <a:lnL w="28575" cap="flat" cmpd="sng" algn="ctr">
+                      <a:solidFill>
+                        <a:schemeClr val="bg1"/>
+                      </a:solidFill>
+                      <a:prstDash val="solid"/>
+                      <a:round/>
+                      <a:headEnd type="none" w="med" len="med"/>
+                      <a:tailEnd type="none" w="med" len="med"/>
+                    </a:lnL>
+                    <a:lnR w="28575" cap="flat" cmpd="sng" algn="ctr">
+                      <a:solidFill>
+                        <a:schemeClr val="bg1"/>
+                      </a:solidFill>
+                      <a:prstDash val="solid"/>
+                      <a:round/>
+                      <a:headEnd type="none" w="med" len="med"/>
+                      <a:tailEnd type="none" w="med" len="med"/>
+                    </a:lnR>
+                    <a:lnT w="28575" cap="flat" cmpd="sng" algn="ctr">
+                      <a:solidFill>
+                        <a:schemeClr val="bg1"/>
+                      </a:solidFill>
+                      <a:prstDash val="solid"/>
+                      <a:round/>
+                      <a:headEnd type="none" w="med" len="med"/>
+                      <a:tailEnd type="none" w="med" len="med"/>
+                    </a:lnT>
+                    <a:lnB w="28575" cap="flat" cmpd="sng" algn="ctr">
+                      <a:solidFill>
+                        <a:schemeClr val="bg1"/>
+                      </a:solidFill>
+                      <a:prstDash val="solid"/>
+                      <a:round/>
+                      <a:headEnd type="none" w="med" len="med"/>
+                      <a:tailEnd type="none" w="med" len="med"/>
+                    </a:lnB>
+                    <a:solidFill>
+                      <a:srgbClr val="D9D9D9"/>
+                    </a:solidFill>
+                  </a:tcPr>
+                </a:tc>
+                <a:extLst>
+                  <a:ext uri="{0D108BD9-81ED-4DB2-BD59-A6C34878D82A}">
+                    <a16:rowId xmlns:a16="http://schemas.microsoft.com/office/drawing/2014/main" val="10001"/>
+                  </a:ext>
+                </a:extLst>
+              </a:tr>
+            </a:tbl>
+          </a:graphicData>
+        </a:graphic>
+      </p:graphicFrame>
+      <p:graphicFrame>
+        <p:nvGraphicFramePr>
+          <p:cNvPr id="30" name="표 4">
+            <a:extLst>
+              <a:ext uri="{FF2B5EF4-FFF2-40B4-BE49-F238E27FC236}">
+                <a16:creationId xmlns:a16="http://schemas.microsoft.com/office/drawing/2014/main" id="{BE6D325E-9B7F-4112-9B60-0DBE193334EF}"/>
+              </a:ext>
+            </a:extLst>
+          </p:cNvPr>
+          <p:cNvGraphicFramePr>
+            <a:graphicFrameLocks noGrp="1"/>
+          </p:cNvGraphicFramePr>
+          <p:nvPr>
+            <p:extLst>
+              <p:ext uri="{D42A27DB-BD31-4B8C-83A1-F6EECF244321}">
+                <p14:modId xmlns:p14="http://schemas.microsoft.com/office/powerpoint/2010/main" val="2803067562"/>
+              </p:ext>
+            </p:extLst>
+          </p:nvPr>
+        </p:nvGraphicFramePr>
+        <p:xfrm>
+          <a:off x="865213" y="3727936"/>
+          <a:ext cx="1915993" cy="1487047"/>
+        </p:xfrm>
+        <a:graphic>
+          <a:graphicData uri="http://schemas.openxmlformats.org/drawingml/2006/table">
+            <a:tbl>
+              <a:tblPr firstRow="1" bandRow="1">
+                <a:effectLst>
+                  <a:outerShdw blurRad="50800" dist="38100" dir="2700000" algn="tl" rotWithShape="0">
+                    <a:prstClr val="black">
+                      <a:alpha val="40000"/>
+                    </a:prstClr>
+                  </a:outerShdw>
+                </a:effectLst>
+                <a:tableStyleId>{D03447BB-5D67-496B-8E87-E561075AD55C}</a:tableStyleId>
+              </a:tblPr>
+              <a:tblGrid>
+                <a:gridCol w="1915993">
+                  <a:extLst>
+                    <a:ext uri="{9D8B030D-6E8A-4147-A177-3AD203B41FA5}">
+                      <a16:colId xmlns:a16="http://schemas.microsoft.com/office/drawing/2014/main" val="20000"/>
+                    </a:ext>
+                  </a:extLst>
+                </a:gridCol>
+              </a:tblGrid>
+              <a:tr h="273205">
+                <a:tc>
+                  <a:txBody>
+                    <a:bodyPr/>
+                    <a:lstStyle/>
+                    <a:p>
+                      <a:pPr algn="ctr" latinLnBrk="1">
+                        <a:defRPr/>
+                      </a:pPr>
+                      <a:r>
+                        <a:rPr lang="ko-KR" altLang="en-US" sz="1200" dirty="0" err="1">
+                          <a:latin typeface="피플폰트 Bold" panose="020B0600000101010101" pitchFamily="50" charset="-127"/>
+                          <a:ea typeface="피플폰트 Bold" panose="020B0600000101010101" pitchFamily="50" charset="-127"/>
+                        </a:rPr>
+                        <a:t>신탁사</a:t>
+                      </a:r>
+                      <a:r>
+                        <a:rPr lang="ko-KR" altLang="en-US" sz="1200" dirty="0">
+                          <a:latin typeface="피플폰트 Bold" panose="020B0600000101010101" pitchFamily="50" charset="-127"/>
+                          <a:ea typeface="피플폰트 Bold" panose="020B0600000101010101" pitchFamily="50" charset="-127"/>
+                        </a:rPr>
+                        <a:t> </a:t>
+                      </a:r>
+                    </a:p>
+                  </a:txBody>
+                  <a:tcPr marL="171674" marR="171674" marT="78033" marB="78033" anchor="ctr">
+                    <a:lnL w="28575" cap="flat" cmpd="sng" algn="ctr">
+                      <a:solidFill>
+                        <a:schemeClr val="bg1"/>
+                      </a:solidFill>
+                      <a:prstDash val="solid"/>
+                      <a:round/>
+                      <a:headEnd type="none" w="med" len="med"/>
+                      <a:tailEnd type="none" w="med" len="med"/>
+                    </a:lnL>
+                    <a:lnR w="28575" cap="flat" cmpd="sng" algn="ctr">
+                      <a:solidFill>
+                        <a:schemeClr val="bg1"/>
+                      </a:solidFill>
+                      <a:prstDash val="solid"/>
+                      <a:round/>
+                      <a:headEnd type="none" w="med" len="med"/>
+                      <a:tailEnd type="none" w="med" len="med"/>
+                    </a:lnR>
+                    <a:lnT w="28575" cap="flat" cmpd="sng" algn="ctr">
+                      <a:solidFill>
+                        <a:schemeClr val="bg1"/>
+                      </a:solidFill>
+                      <a:prstDash val="solid"/>
+                      <a:round/>
+                      <a:headEnd type="none" w="med" len="med"/>
+                      <a:tailEnd type="none" w="med" len="med"/>
+                    </a:lnT>
+                    <a:lnB w="28575" cap="flat" cmpd="sng" algn="ctr">
+                      <a:solidFill>
+                        <a:schemeClr val="bg1"/>
+                      </a:solidFill>
+                      <a:prstDash val="solid"/>
+                      <a:round/>
+                      <a:headEnd type="none" w="med" len="med"/>
+                      <a:tailEnd type="none" w="med" len="med"/>
+                    </a:lnB>
+                    <a:solidFill>
+                      <a:schemeClr val="bg2">
+                        <a:lumMod val="50000"/>
+                      </a:schemeClr>
+                    </a:solidFill>
+                  </a:tcPr>
+                </a:tc>
+                <a:extLst>
+                  <a:ext uri="{0D108BD9-81ED-4DB2-BD59-A6C34878D82A}">
+                    <a16:rowId xmlns:a16="http://schemas.microsoft.com/office/drawing/2014/main" val="10000"/>
+                  </a:ext>
+                </a:extLst>
+              </a:tr>
+              <a:tr h="1148101">
+                <a:tc>
+                  <a:txBody>
+                    <a:bodyPr/>
+                    <a:lstStyle/>
+                    <a:p>
+                      <a:pPr algn="ctr" latinLnBrk="1">
+                        <a:defRPr/>
+                      </a:pPr>
+                      <a:endParaRPr lang="ko-KR" altLang="en-US" sz="1200" b="1" dirty="0">
+                        <a:solidFill>
+                          <a:schemeClr val="tx1"/>
+                        </a:solidFill>
+                        <a:latin typeface="피플폰트 Bold" panose="020B0600000101010101" pitchFamily="50" charset="-127"/>
+                        <a:ea typeface="피플폰트 Bold" panose="020B0600000101010101" pitchFamily="50" charset="-127"/>
+                      </a:endParaRPr>
+                    </a:p>
+                  </a:txBody>
+                  <a:tcPr marL="0" marR="0" marT="72000" marB="0">
+                    <a:lnL w="28575" cap="flat" cmpd="sng" algn="ctr">
+                      <a:solidFill>
+                        <a:schemeClr val="bg1"/>
+                      </a:solidFill>
+                      <a:prstDash val="solid"/>
+                      <a:round/>
+                      <a:headEnd type="none" w="med" len="med"/>
+                      <a:tailEnd type="none" w="med" len="med"/>
+                    </a:lnL>
+                    <a:lnR w="28575" cap="flat" cmpd="sng" algn="ctr">
+                      <a:solidFill>
+                        <a:schemeClr val="bg1"/>
+                      </a:solidFill>
+                      <a:prstDash val="solid"/>
+                      <a:round/>
+                      <a:headEnd type="none" w="med" len="med"/>
+                      <a:tailEnd type="none" w="med" len="med"/>
+                    </a:lnR>
+                    <a:lnT w="28575" cap="flat" cmpd="sng" algn="ctr">
+                      <a:solidFill>
+                        <a:schemeClr val="bg1"/>
+                      </a:solidFill>
+                      <a:prstDash val="solid"/>
+                      <a:round/>
+                      <a:headEnd type="none" w="med" len="med"/>
+                      <a:tailEnd type="none" w="med" len="med"/>
+                    </a:lnT>
+                    <a:lnB w="28575" cap="flat" cmpd="sng" algn="ctr">
+                      <a:solidFill>
+                        <a:schemeClr val="bg1"/>
+                      </a:solidFill>
+                      <a:prstDash val="solid"/>
+                      <a:round/>
+                      <a:headEnd type="none" w="med" len="med"/>
+                      <a:tailEnd type="none" w="med" len="med"/>
+                    </a:lnB>
+                    <a:solidFill>
+                      <a:srgbClr val="D9D9D9"/>
+                    </a:solidFill>
+                  </a:tcPr>
+                </a:tc>
+                <a:extLst>
+                  <a:ext uri="{0D108BD9-81ED-4DB2-BD59-A6C34878D82A}">
+                    <a16:rowId xmlns:a16="http://schemas.microsoft.com/office/drawing/2014/main" val="10001"/>
+                  </a:ext>
+                </a:extLst>
+              </a:tr>
+            </a:tbl>
+          </a:graphicData>
+        </a:graphic>
+      </p:graphicFrame>
+      <p:graphicFrame>
+        <p:nvGraphicFramePr>
+          <p:cNvPr id="31" name="표 4">
+            <a:extLst>
+              <a:ext uri="{FF2B5EF4-FFF2-40B4-BE49-F238E27FC236}">
+                <a16:creationId xmlns:a16="http://schemas.microsoft.com/office/drawing/2014/main" id="{EE3C4FB0-ABA6-4AD5-A405-4059513EFDF1}"/>
+              </a:ext>
+            </a:extLst>
+          </p:cNvPr>
+          <p:cNvGraphicFramePr>
+            <a:graphicFrameLocks noGrp="1"/>
+          </p:cNvGraphicFramePr>
+          <p:nvPr>
+            <p:extLst>
+              <p:ext uri="{D42A27DB-BD31-4B8C-83A1-F6EECF244321}">
+                <p14:modId xmlns:p14="http://schemas.microsoft.com/office/powerpoint/2010/main" val="823023813"/>
+              </p:ext>
+            </p:extLst>
+          </p:nvPr>
+        </p:nvGraphicFramePr>
+        <p:xfrm>
+          <a:off x="868434" y="1519403"/>
+          <a:ext cx="1915993" cy="663750"/>
+        </p:xfrm>
+        <a:graphic>
+          <a:graphicData uri="http://schemas.openxmlformats.org/drawingml/2006/table">
+            <a:tbl>
+              <a:tblPr firstRow="1" bandRow="1">
+                <a:effectLst>
+                  <a:outerShdw blurRad="50800" dist="38100" dir="2700000" algn="tl" rotWithShape="0">
+                    <a:prstClr val="black">
+                      <a:alpha val="40000"/>
+                    </a:prstClr>
+                  </a:outerShdw>
+                </a:effectLst>
+                <a:tableStyleId>{D03447BB-5D67-496B-8E87-E561075AD55C}</a:tableStyleId>
+              </a:tblPr>
+              <a:tblGrid>
+                <a:gridCol w="1915993">
+                  <a:extLst>
+                    <a:ext uri="{9D8B030D-6E8A-4147-A177-3AD203B41FA5}">
+                      <a16:colId xmlns:a16="http://schemas.microsoft.com/office/drawing/2014/main" val="20000"/>
+                    </a:ext>
+                  </a:extLst>
+                </a:gridCol>
+              </a:tblGrid>
+              <a:tr h="0">
+                <a:tc>
+                  <a:txBody>
+                    <a:bodyPr/>
+                    <a:lstStyle/>
+                    <a:p>
+                      <a:pPr algn="ctr" latinLnBrk="1">
+                        <a:defRPr/>
+                      </a:pPr>
+                      <a:r>
+                        <a:rPr lang="ko-KR" altLang="en-US" sz="1200" dirty="0">
+                          <a:latin typeface="피플폰트 Bold" panose="020B0600000101010101" pitchFamily="50" charset="-127"/>
+                          <a:ea typeface="피플폰트 Bold" panose="020B0600000101010101" pitchFamily="50" charset="-127"/>
+                        </a:rPr>
+                        <a:t>시공사</a:t>
+                      </a:r>
+                    </a:p>
+                  </a:txBody>
+                  <a:tcPr marL="171674" marR="171674" marT="78033" marB="78033" anchor="ctr">
+                    <a:lnL w="28575" cap="flat" cmpd="sng" algn="ctr">
+                      <a:solidFill>
+                        <a:schemeClr val="bg1"/>
+                      </a:solidFill>
+                      <a:prstDash val="solid"/>
+                      <a:round/>
+                      <a:headEnd type="none" w="med" len="med"/>
+                      <a:tailEnd type="none" w="med" len="med"/>
+                    </a:lnL>
+                    <a:lnR w="28575" cap="flat" cmpd="sng" algn="ctr">
+                      <a:solidFill>
+                        <a:schemeClr val="bg1"/>
+                      </a:solidFill>
+                      <a:prstDash val="solid"/>
+                      <a:round/>
+                      <a:headEnd type="none" w="med" len="med"/>
+                      <a:tailEnd type="none" w="med" len="med"/>
+                    </a:lnR>
+                    <a:lnT w="28575" cap="flat" cmpd="sng" algn="ctr">
+                      <a:solidFill>
+                        <a:schemeClr val="bg1"/>
+                      </a:solidFill>
+                      <a:prstDash val="solid"/>
+                      <a:round/>
+                      <a:headEnd type="none" w="med" len="med"/>
+                      <a:tailEnd type="none" w="med" len="med"/>
+                    </a:lnT>
+                    <a:lnB w="28575" cap="flat" cmpd="sng" algn="ctr">
+                      <a:solidFill>
+                        <a:schemeClr val="bg1"/>
+                      </a:solidFill>
+                      <a:prstDash val="solid"/>
+                      <a:round/>
+                      <a:headEnd type="none" w="med" len="med"/>
+                      <a:tailEnd type="none" w="med" len="med"/>
+                    </a:lnB>
+                    <a:solidFill>
+                      <a:srgbClr val="0063A1"/>
+                    </a:solidFill>
+                  </a:tcPr>
+                </a:tc>
+                <a:extLst>
+                  <a:ext uri="{0D108BD9-81ED-4DB2-BD59-A6C34878D82A}">
+                    <a16:rowId xmlns:a16="http://schemas.microsoft.com/office/drawing/2014/main" val="10000"/>
+                  </a:ext>
+                </a:extLst>
+              </a:tr>
+              <a:tr h="324804">
+                <a:tc>
+                  <a:txBody>
+                    <a:bodyPr/>
+                    <a:lstStyle/>
+                    <a:p>
+                      <a:pPr algn="ctr" latinLnBrk="1">
+                        <a:defRPr/>
+                      </a:pPr>
+                      <a:r>
+                        <a:rPr lang="en-US" altLang="ko-KR" sz="1400" b="1" dirty="0">
+                          <a:solidFill>
+                            <a:schemeClr val="tx1"/>
+                          </a:solidFill>
+                          <a:latin typeface="피플폰트 Bold" panose="020B0600000101010101" pitchFamily="50" charset="-127"/>
+                          <a:ea typeface="피플폰트 Bold" panose="020B0600000101010101" pitchFamily="50" charset="-127"/>
+                        </a:rPr>
+                        <a:t>롯데건설(주)</a:t>
+                      </a:r>
+                      <a:endParaRPr lang="ko-KR" altLang="en-US" sz="1600" b="1" dirty="0">
+                        <a:solidFill>
+                          <a:schemeClr val="tx1"/>
+                        </a:solidFill>
+                        <a:latin typeface="피플폰트 Bold" panose="020B0600000101010101" pitchFamily="50" charset="-127"/>
+                        <a:ea typeface="피플폰트 Bold" panose="020B0600000101010101" pitchFamily="50" charset="-127"/>
+                      </a:endParaRPr>
+                    </a:p>
+                  </a:txBody>
+                  <a:tcPr marL="0" marR="0" marT="72000" marB="0">
+                    <a:lnL w="28575" cap="flat" cmpd="sng" algn="ctr">
+                      <a:solidFill>
+                        <a:schemeClr val="bg1"/>
+                      </a:solidFill>
+                      <a:prstDash val="solid"/>
+                      <a:round/>
+                      <a:headEnd type="none" w="med" len="med"/>
+                      <a:tailEnd type="none" w="med" len="med"/>
+                    </a:lnL>
+                    <a:lnR w="28575" cap="flat" cmpd="sng" algn="ctr">
+                      <a:solidFill>
+                        <a:schemeClr val="bg1"/>
+                      </a:solidFill>
+                      <a:prstDash val="solid"/>
+                      <a:round/>
+                      <a:headEnd type="none" w="med" len="med"/>
+                      <a:tailEnd type="none" w="med" len="med"/>
+                    </a:lnR>
+                    <a:lnT w="28575" cap="flat" cmpd="sng" algn="ctr">
+                      <a:solidFill>
+                        <a:schemeClr val="bg1"/>
+                      </a:solidFill>
+                      <a:prstDash val="solid"/>
+                      <a:round/>
+                      <a:headEnd type="none" w="med" len="med"/>
+                      <a:tailEnd type="none" w="med" len="med"/>
+                    </a:lnT>
+                    <a:lnB w="28575" cap="flat" cmpd="sng" algn="ctr">
+                      <a:solidFill>
+                        <a:schemeClr val="bg1"/>
+                      </a:solidFill>
+                      <a:prstDash val="solid"/>
+                      <a:round/>
+                      <a:headEnd type="none" w="med" len="med"/>
+                      <a:tailEnd type="none" w="med" len="med"/>
+                    </a:lnB>
+                    <a:solidFill>
+                      <a:srgbClr val="D9D9D9"/>
+                    </a:solidFill>
+                  </a:tcPr>
+                </a:tc>
+                <a:extLst>
+                  <a:ext uri="{0D108BD9-81ED-4DB2-BD59-A6C34878D82A}">
+                    <a16:rowId xmlns:a16="http://schemas.microsoft.com/office/drawing/2014/main" val="10001"/>
+                  </a:ext>
+                </a:extLst>
+              </a:tr>
+            </a:tbl>
+          </a:graphicData>
+        </a:graphic>
+      </p:graphicFrame>
+      <p:graphicFrame>
+        <p:nvGraphicFramePr>
+          <p:cNvPr id="32" name="표 4">
+            <a:extLst>
+              <a:ext uri="{FF2B5EF4-FFF2-40B4-BE49-F238E27FC236}">
+                <a16:creationId xmlns:a16="http://schemas.microsoft.com/office/drawing/2014/main" id="{3BD68498-4803-4E43-8771-E2CD644CE9DC}"/>
+              </a:ext>
+            </a:extLst>
+          </p:cNvPr>
+          <p:cNvGraphicFramePr>
+            <a:graphicFrameLocks noGrp="1"/>
+          </p:cNvGraphicFramePr>
+          <p:nvPr>
+            <p:extLst>
+              <p:ext uri="{D42A27DB-BD31-4B8C-83A1-F6EECF244321}">
+                <p14:modId xmlns:p14="http://schemas.microsoft.com/office/powerpoint/2010/main" val="3708061441"/>
+              </p:ext>
+            </p:extLst>
+          </p:nvPr>
+        </p:nvGraphicFramePr>
+        <p:xfrm>
+          <a:off x="4732177" y="1844409"/>
+          <a:ext cx="2076868" cy="1950087"/>
+        </p:xfrm>
+        <a:graphic>
+          <a:graphicData uri="http://schemas.openxmlformats.org/drawingml/2006/table">
+            <a:tbl>
+              <a:tblPr firstRow="1" bandRow="1">
+                <a:effectLst>
+                  <a:outerShdw blurRad="50800" dist="38100" dir="2700000" algn="tl" rotWithShape="0">
+                    <a:prstClr val="black">
+                      <a:alpha val="40000"/>
+                    </a:prstClr>
+                  </a:outerShdw>
+                </a:effectLst>
+                <a:tableStyleId>{D03447BB-5D67-496B-8E87-E561075AD55C}</a:tableStyleId>
+              </a:tblPr>
+              <a:tblGrid>
+                <a:gridCol w="2076868">
+                  <a:extLst>
+                    <a:ext uri="{9D8B030D-6E8A-4147-A177-3AD203B41FA5}">
+                      <a16:colId xmlns:a16="http://schemas.microsoft.com/office/drawing/2014/main" val="20000"/>
+                    </a:ext>
+                  </a:extLst>
+                </a:gridCol>
+              </a:tblGrid>
+              <a:tr h="307935">
+                <a:tc>
+                  <a:txBody>
+                    <a:bodyPr/>
+                    <a:lstStyle/>
+                    <a:p>
+                      <a:pPr algn="ctr" latinLnBrk="1">
+                        <a:defRPr/>
+                      </a:pPr>
+                      <a:r>
+                        <a:rPr lang="en-US" altLang="ko-KR" sz="1000" dirty="0">
+                          <a:latin typeface="피플폰트 Bold" panose="020B0600000101010101" pitchFamily="50" charset="-127"/>
+                          <a:ea typeface="피플폰트 Bold" panose="020B0600000101010101" pitchFamily="50" charset="-127"/>
+                        </a:rPr>
+                        <a:t>Tr. A 3,600억원</a:t>
+                      </a:r>
+                      <a:endParaRPr lang="ko-KR" altLang="en-US" sz="1000" dirty="0">
+                        <a:latin typeface="피플폰트 Bold" panose="020B0600000101010101" pitchFamily="50" charset="-127"/>
+                        <a:ea typeface="피플폰트 Bold" panose="020B0600000101010101" pitchFamily="50" charset="-127"/>
+                      </a:endParaRPr>
+                    </a:p>
+                  </a:txBody>
+                  <a:tcPr marL="152842" marR="152842" marT="76421" marB="76421" anchor="ctr">
+                    <a:lnL w="28575" cap="flat" cmpd="sng" algn="ctr">
+                      <a:solidFill>
+                        <a:schemeClr val="bg1"/>
+                      </a:solidFill>
+                      <a:prstDash val="solid"/>
+                      <a:round/>
+                      <a:headEnd type="none" w="med" len="med"/>
+                      <a:tailEnd type="none" w="med" len="med"/>
+                    </a:lnL>
+                    <a:lnR w="28575" cap="flat" cmpd="sng" algn="ctr">
+                      <a:solidFill>
+                        <a:schemeClr val="bg1"/>
+                      </a:solidFill>
+                      <a:prstDash val="solid"/>
+                      <a:round/>
+                      <a:headEnd type="none" w="med" len="med"/>
+                      <a:tailEnd type="none" w="med" len="med"/>
+                    </a:lnR>
+                    <a:lnT w="28575" cap="flat" cmpd="sng" algn="ctr">
+                      <a:solidFill>
+                        <a:schemeClr val="bg1"/>
+                      </a:solidFill>
+                      <a:prstDash val="solid"/>
+                      <a:round/>
+                      <a:headEnd type="none" w="med" len="med"/>
+                      <a:tailEnd type="none" w="med" len="med"/>
+                    </a:lnT>
+                    <a:lnB w="28575" cap="flat" cmpd="sng" algn="ctr">
+                      <a:solidFill>
+                        <a:schemeClr val="bg1"/>
+                      </a:solidFill>
+                      <a:prstDash val="solid"/>
+                      <a:round/>
+                      <a:headEnd type="none" w="med" len="med"/>
+                      <a:tailEnd type="none" w="med" len="med"/>
+                    </a:lnB>
+                    <a:solidFill>
+                      <a:srgbClr val="08377C"/>
+                    </a:solidFill>
+                  </a:tcPr>
+                </a:tc>
+                <a:extLst>
+                  <a:ext uri="{0D108BD9-81ED-4DB2-BD59-A6C34878D82A}">
+                    <a16:rowId xmlns:a16="http://schemas.microsoft.com/office/drawing/2014/main" val="10000"/>
+                  </a:ext>
+                </a:extLst>
+              </a:tr>
+              <a:tr h="1642152">
+                <a:tc>
+                  <a:txBody>
+                    <a:bodyPr/>
+                    <a:lstStyle/>
+                    <a:p>
+                      <a:pPr algn="ctr" latinLnBrk="1">
+                        <a:defRPr/>
+                      </a:pPr>
+                      <a:endParaRPr lang="en-US" altLang="ko-KR" sz="1100" b="1" dirty="0">
+                        <a:solidFill>
+                          <a:schemeClr val="tx1"/>
+                        </a:solidFill>
+                        <a:latin typeface="피플폰트 Bold" panose="020B0600000101010101" pitchFamily="50" charset="-127"/>
+                        <a:ea typeface="피플폰트 Bold" panose="020B0600000101010101" pitchFamily="50" charset="-127"/>
+                      </a:endParaRPr>
+                    </a:p>
+                    <a:p>
+                      <a:pPr algn="ctr" latinLnBrk="1">
+                        <a:defRPr/>
+                      </a:pPr>
+                      <a:endParaRPr lang="en-US" altLang="ko-KR" sz="1100" b="1" dirty="0">
+                        <a:solidFill>
+                          <a:schemeClr val="tx1"/>
+                        </a:solidFill>
+                        <a:latin typeface="피플폰트 Bold" panose="020B0600000101010101" pitchFamily="50" charset="-127"/>
+                        <a:ea typeface="피플폰트 Bold" panose="020B0600000101010101" pitchFamily="50" charset="-127"/>
+                      </a:endParaRPr>
+                    </a:p>
+                    <a:p>
+                      <a:pPr algn="ctr" latinLnBrk="1">
+                        <a:defRPr/>
+                      </a:pPr>
+                      <a:endParaRPr lang="en-US" altLang="ko-KR" sz="1100" b="1" dirty="0">
+                        <a:solidFill>
+                          <a:schemeClr val="tx1"/>
+                        </a:solidFill>
+                        <a:latin typeface="피플폰트 Bold" panose="020B0600000101010101" pitchFamily="50" charset="-127"/>
+                        <a:ea typeface="피플폰트 Bold" panose="020B0600000101010101" pitchFamily="50" charset="-127"/>
+                      </a:endParaRPr>
+                    </a:p>
+                    <a:p>
+                      <a:pPr algn="ctr" latinLnBrk="1">
+                        <a:defRPr/>
+                      </a:pPr>
+                      <a:endParaRPr lang="en-US" altLang="ko-KR" sz="1100" b="1" dirty="0">
+                        <a:solidFill>
+                          <a:schemeClr val="tx1"/>
+                        </a:solidFill>
+                        <a:latin typeface="피플폰트 Bold" panose="020B0600000101010101" pitchFamily="50" charset="-127"/>
+                        <a:ea typeface="피플폰트 Bold" panose="020B0600000101010101" pitchFamily="50" charset="-127"/>
+                      </a:endParaRPr>
+                    </a:p>
+                  </a:txBody>
+                  <a:tcPr marL="152842" marR="152842" marT="76421" marB="76421" anchor="ctr">
+                    <a:lnL w="28575" cap="flat" cmpd="sng" algn="ctr">
+                      <a:solidFill>
+                        <a:schemeClr val="bg1"/>
+                      </a:solidFill>
+                      <a:prstDash val="solid"/>
+                      <a:round/>
+                      <a:headEnd type="none" w="med" len="med"/>
+                      <a:tailEnd type="none" w="med" len="med"/>
+                    </a:lnL>
+                    <a:lnR w="28575" cap="flat" cmpd="sng" algn="ctr">
+                      <a:solidFill>
+                        <a:schemeClr val="bg1"/>
+                      </a:solidFill>
+                      <a:prstDash val="solid"/>
+                      <a:round/>
+                      <a:headEnd type="none" w="med" len="med"/>
+                      <a:tailEnd type="none" w="med" len="med"/>
+                    </a:lnR>
+                    <a:lnT w="28575" cap="flat" cmpd="sng" algn="ctr">
+                      <a:solidFill>
+                        <a:schemeClr val="bg1"/>
+                      </a:solidFill>
+                      <a:prstDash val="solid"/>
+                      <a:round/>
+                      <a:headEnd type="none" w="med" len="med"/>
+                      <a:tailEnd type="none" w="med" len="med"/>
+                    </a:lnT>
+                    <a:lnB w="28575" cap="flat" cmpd="sng" algn="ctr">
+                      <a:solidFill>
+                        <a:schemeClr val="bg1"/>
+                      </a:solidFill>
+                      <a:prstDash val="solid"/>
+                      <a:round/>
+                      <a:headEnd type="none" w="med" len="med"/>
+                      <a:tailEnd type="none" w="med" len="med"/>
+                    </a:lnB>
+                    <a:solidFill>
+                      <a:srgbClr val="D9D9D9"/>
+                    </a:solidFill>
+                  </a:tcPr>
+                </a:tc>
+                <a:extLst>
+                  <a:ext uri="{0D108BD9-81ED-4DB2-BD59-A6C34878D82A}">
+                    <a16:rowId xmlns:a16="http://schemas.microsoft.com/office/drawing/2014/main" val="10001"/>
+                  </a:ext>
+                </a:extLst>
+              </a:tr>
+            </a:tbl>
+          </a:graphicData>
+        </a:graphic>
+      </p:graphicFrame>
+      <p:cxnSp>
+        <p:nvCxnSpPr>
+          <p:cNvPr id="33" name="직선 화살표 연결선 32">
+            <a:extLst>
+              <a:ext uri="{FF2B5EF4-FFF2-40B4-BE49-F238E27FC236}">
+                <a16:creationId xmlns:a16="http://schemas.microsoft.com/office/drawing/2014/main" id="{67EC5812-6E16-459E-B01C-7F78D1267ED8}"/>
+              </a:ext>
+            </a:extLst>
+          </p:cNvPr>
+          <p:cNvCxnSpPr>
+            <a:cxnSpLocks/>
+            <a:stCxn id="27" idx="0"/>
+            <a:endCxn id="31" idx="2"/>
+          </p:cNvCxnSpPr>
+          <p:nvPr/>
+        </p:nvCxnSpPr>
+        <p:spPr>
+          <a:xfrm flipV="1">
+            <a:off x="1826430" y="2183153"/>
+            <a:ext cx="0" cy="432747"/>
+          </a:xfrm>
+          <a:prstGeom prst="straightConnector1">
+            <a:avLst/>
+          </a:prstGeom>
+          <a:solidFill>
+            <a:schemeClr val="accent1"/>
+          </a:solidFill>
+          <a:ln w="19050" cap="flat" cmpd="sng" algn="ctr">
+            <a:solidFill>
+              <a:schemeClr val="tx1"/>
+            </a:solidFill>
+            <a:prstDash val="solid"/>
+            <a:round/>
+            <a:headEnd type="triangle" w="sm" len="sm"/>
+            <a:tailEnd type="triangle" w="sm" len="sm"/>
+          </a:ln>
+          <a:effectLst/>
+        </p:spPr>
+      </p:cxnSp>
+      <p:cxnSp>
+        <p:nvCxnSpPr>
+          <p:cNvPr id="34" name="직선 화살표 연결선 33">
+            <a:extLst>
+              <a:ext uri="{FF2B5EF4-FFF2-40B4-BE49-F238E27FC236}">
+                <a16:creationId xmlns:a16="http://schemas.microsoft.com/office/drawing/2014/main" id="{1EA478BE-1A3D-4E95-BDC4-9AB6558549C2}"/>
+              </a:ext>
+            </a:extLst>
+          </p:cNvPr>
+          <p:cNvCxnSpPr>
+            <a:cxnSpLocks/>
+          </p:cNvCxnSpPr>
+          <p:nvPr/>
+        </p:nvCxnSpPr>
+        <p:spPr>
+          <a:xfrm flipH="1">
+            <a:off x="2900891" y="3052895"/>
+            <a:ext cx="1586442" cy="0"/>
+          </a:xfrm>
+          <a:prstGeom prst="straightConnector1">
+            <a:avLst/>
+          </a:prstGeom>
+          <a:solidFill>
+            <a:schemeClr val="accent1"/>
+          </a:solidFill>
+          <a:ln w="19050" cap="flat" cmpd="sng" algn="ctr">
+            <a:solidFill>
+              <a:schemeClr val="tx1"/>
+            </a:solidFill>
+            <a:prstDash val="solid"/>
+            <a:round/>
+            <a:headEnd type="triangle" w="sm" len="sm"/>
+            <a:tailEnd type="none" w="sm" len="sm"/>
+          </a:ln>
+          <a:effectLst/>
+        </p:spPr>
+      </p:cxnSp>
+      <p:sp>
+        <p:nvSpPr>
+          <p:cNvPr id="50" name="텍스트 개체 틀 2">
+            <a:extLst>
+              <a:ext uri="{FF2B5EF4-FFF2-40B4-BE49-F238E27FC236}">
+                <a16:creationId xmlns:a16="http://schemas.microsoft.com/office/drawing/2014/main" id="{FA23A891-80E5-4EAE-9AC1-6F7EC7A9FF98}"/>
+              </a:ext>
+            </a:extLst>
+          </p:cNvPr>
+          <p:cNvSpPr txBox="1">
+            <a:spLocks/>
+          </p:cNvSpPr>
+          <p:nvPr/>
+        </p:nvSpPr>
+        <p:spPr>
+          <a:xfrm>
+            <a:off x="1775654" y="2325693"/>
+            <a:ext cx="1060169" cy="169662"/>
+          </a:xfrm>
+          <a:prstGeom prst="rect">
+            <a:avLst/>
+          </a:prstGeom>
+        </p:spPr>
+        <p:txBody>
+          <a:bodyPr vert="horz" wrap="square" lIns="0" tIns="0" rIns="0" bIns="0" rtlCol="0" anchor="ctr">
+            <a:spAutoFit/>
+          </a:bodyPr>
+          <a:lstStyle>
+            <a:lvl1pPr marL="0" indent="0" algn="l" defTabSz="914400" rtl="0" eaLnBrk="1" latinLnBrk="1" hangingPunct="1">
+              <a:lnSpc>
+                <a:spcPct val="90000"/>
+              </a:lnSpc>
+              <a:spcBef>
+                <a:spcPts val="1000"/>
+              </a:spcBef>
+              <a:buFont typeface="Arial" panose="020B0604020202020204" pitchFamily="34" charset="0"/>
+              <a:buNone/>
+              <a:defRPr sz="1200" kern="1200">
+                <a:solidFill>
+                  <a:schemeClr val="tx1"/>
+                </a:solidFill>
+                <a:latin typeface="AppleSDGothicNeoM00" panose="02000503000000000000" pitchFamily="2" charset="-127"/>
+                <a:ea typeface="AppleSDGothicNeoM00" panose="02000503000000000000" pitchFamily="2" charset="-127"/>
+                <a:cs typeface="+mn-cs"/>
+              </a:defRPr>
+            </a:lvl1pPr>
+            <a:lvl2pPr marL="685800" indent="-228600" algn="l" defTabSz="914400" rtl="0" eaLnBrk="1" latinLnBrk="1" hangingPunct="1">
+              <a:lnSpc>
+                <a:spcPct val="90000"/>
+              </a:lnSpc>
+              <a:spcBef>
+                <a:spcPts val="500"/>
+              </a:spcBef>
+              <a:buFont typeface="Arial" panose="020B0604020202020204" pitchFamily="34" charset="0"/>
+              <a:buChar char="•"/>
+              <a:defRPr sz="2400" kern="1200">
+                <a:solidFill>
+                  <a:schemeClr val="tx1"/>
+                </a:solidFill>
+                <a:latin typeface="+mn-lt"/>
+                <a:ea typeface="+mn-ea"/>
+                <a:cs typeface="+mn-cs"/>
+              </a:defRPr>
+            </a:lvl2pPr>
+            <a:lvl3pPr marL="1143000" indent="-228600" algn="l" defTabSz="914400" rtl="0" eaLnBrk="1" latinLnBrk="1" hangingPunct="1">
+              <a:lnSpc>
+                <a:spcPct val="90000"/>
+              </a:lnSpc>
+              <a:spcBef>
+                <a:spcPts val="500"/>
+              </a:spcBef>
+              <a:buFont typeface="Arial" panose="020B0604020202020204" pitchFamily="34" charset="0"/>
+              <a:buChar char="•"/>
+              <a:defRPr sz="2000" kern="1200">
+                <a:solidFill>
+                  <a:schemeClr val="tx1"/>
+                </a:solidFill>
+                <a:latin typeface="+mn-lt"/>
+                <a:ea typeface="+mn-ea"/>
+                <a:cs typeface="+mn-cs"/>
+              </a:defRPr>
+            </a:lvl3pPr>
+            <a:lvl4pPr marL="1600200" indent="-228600" algn="l" defTabSz="914400" rtl="0" eaLnBrk="1" latinLnBrk="1" hangingPunct="1">
+              <a:lnSpc>
+                <a:spcPct val="90000"/>
+              </a:lnSpc>
+              <a:spcBef>
+                <a:spcPts val="500"/>
+              </a:spcBef>
+              <a:buFont typeface="Arial" panose="020B0604020202020204" pitchFamily="34" charset="0"/>
+              <a:buChar char="•"/>
+              <a:defRPr sz="1800" kern="1200">
+                <a:solidFill>
+                  <a:schemeClr val="tx1"/>
+                </a:solidFill>
+                <a:latin typeface="+mn-lt"/>
+                <a:ea typeface="+mn-ea"/>
+                <a:cs typeface="+mn-cs"/>
+              </a:defRPr>
+            </a:lvl4pPr>
+            <a:lvl5pPr marL="2057400" indent="-228600" algn="l" defTabSz="914400" rtl="0" eaLnBrk="1" latinLnBrk="1" hangingPunct="1">
+              <a:lnSpc>
+                <a:spcPct val="90000"/>
+              </a:lnSpc>
+              <a:spcBef>
+                <a:spcPts val="500"/>
+              </a:spcBef>
+              <a:buFont typeface="Arial" panose="020B0604020202020204" pitchFamily="34" charset="0"/>
+              <a:buChar char="•"/>
+              <a:defRPr sz="1800" kern="1200">
+                <a:solidFill>
+                  <a:schemeClr val="tx1"/>
+                </a:solidFill>
+                <a:latin typeface="+mn-lt"/>
+                <a:ea typeface="+mn-ea"/>
+                <a:cs typeface="+mn-cs"/>
+              </a:defRPr>
+            </a:lvl5pPr>
+            <a:lvl6pPr marL="2514600" indent="-228600" algn="l" defTabSz="914400" rtl="0" eaLnBrk="1" latinLnBrk="1" hangingPunct="1">
+              <a:lnSpc>
+                <a:spcPct val="90000"/>
+              </a:lnSpc>
+              <a:spcBef>
+                <a:spcPts val="500"/>
+              </a:spcBef>
+              <a:buFont typeface="Arial" panose="020B0604020202020204" pitchFamily="34" charset="0"/>
+              <a:buChar char="•"/>
+              <a:defRPr sz="1800" kern="1200">
+                <a:solidFill>
+                  <a:schemeClr val="tx1"/>
+                </a:solidFill>
+                <a:latin typeface="+mn-lt"/>
+                <a:ea typeface="+mn-ea"/>
+                <a:cs typeface="+mn-cs"/>
+              </a:defRPr>
+            </a:lvl6pPr>
+            <a:lvl7pPr marL="2971800" indent="-228600" algn="l" defTabSz="914400" rtl="0" eaLnBrk="1" latinLnBrk="1" hangingPunct="1">
+              <a:lnSpc>
+                <a:spcPct val="90000"/>
+              </a:lnSpc>
+              <a:spcBef>
+                <a:spcPts val="500"/>
+              </a:spcBef>
+              <a:buFont typeface="Arial" panose="020B0604020202020204" pitchFamily="34" charset="0"/>
+              <a:buChar char="•"/>
+              <a:defRPr sz="1800" kern="1200">
+                <a:solidFill>
+                  <a:schemeClr val="tx1"/>
+                </a:solidFill>
+                <a:latin typeface="+mn-lt"/>
+                <a:ea typeface="+mn-ea"/>
+                <a:cs typeface="+mn-cs"/>
+              </a:defRPr>
+            </a:lvl7pPr>
+            <a:lvl8pPr marL="3429000" indent="-228600" algn="l" defTabSz="914400" rtl="0" eaLnBrk="1" latinLnBrk="1" hangingPunct="1">
+              <a:lnSpc>
+                <a:spcPct val="90000"/>
+              </a:lnSpc>
+              <a:spcBef>
+                <a:spcPts val="500"/>
+              </a:spcBef>
+              <a:buFont typeface="Arial" panose="020B0604020202020204" pitchFamily="34" charset="0"/>
+              <a:buChar char="•"/>
+              <a:defRPr sz="1800" kern="1200">
+                <a:solidFill>
+                  <a:schemeClr val="tx1"/>
+                </a:solidFill>
+                <a:latin typeface="+mn-lt"/>
+                <a:ea typeface="+mn-ea"/>
+                <a:cs typeface="+mn-cs"/>
+              </a:defRPr>
+            </a:lvl8pPr>
+            <a:lvl9pPr marL="3886200" indent="-228600" algn="l" defTabSz="914400" rtl="0" eaLnBrk="1" latinLnBrk="1" hangingPunct="1">
+              <a:lnSpc>
+                <a:spcPct val="90000"/>
+              </a:lnSpc>
+              <a:spcBef>
+                <a:spcPts val="500"/>
+              </a:spcBef>
+              <a:buFont typeface="Arial" panose="020B0604020202020204" pitchFamily="34" charset="0"/>
+              <a:buChar char="•"/>
+              <a:defRPr sz="1800" kern="1200">
+                <a:solidFill>
+                  <a:schemeClr val="tx1"/>
+                </a:solidFill>
+                <a:latin typeface="+mn-lt"/>
+                <a:ea typeface="+mn-ea"/>
+                <a:cs typeface="+mn-cs"/>
+              </a:defRPr>
+            </a:lvl9pPr>
+          </a:lstStyle>
+          <a:p>
+            <a:pPr algn="ctr">
+              <a:lnSpc>
+                <a:spcPct val="130000"/>
+              </a:lnSpc>
+              <a:spcBef>
+                <a:spcPts val="0"/>
+              </a:spcBef>
+            </a:pPr>
+            <a:r>
+              <a:rPr lang="ko-KR" altLang="en-US" sz="900" dirty="0">
+                <a:latin typeface="피플폰트 Bold" panose="020B0600000101010101" pitchFamily="50" charset="-127"/>
+                <a:ea typeface="피플폰트 Bold" panose="020B0600000101010101" pitchFamily="50" charset="-127"/>
+              </a:rPr>
+              <a:t>공사도급계약</a:t>
+            </a:r>
+            <a:endParaRPr lang="en-US" altLang="ko-KR" sz="900" dirty="0">
+              <a:latin typeface="피플폰트 Bold" panose="020B0600000101010101" pitchFamily="50" charset="-127"/>
+              <a:ea typeface="피플폰트 Bold" panose="020B0600000101010101" pitchFamily="50" charset="-127"/>
+            </a:endParaRPr>
+          </a:p>
+        </p:txBody>
+      </p:sp>
+      <p:sp>
+        <p:nvSpPr>
+          <p:cNvPr id="57" name="텍스트 개체 틀 2">
+            <a:extLst>
+              <a:ext uri="{FF2B5EF4-FFF2-40B4-BE49-F238E27FC236}">
+                <a16:creationId xmlns:a16="http://schemas.microsoft.com/office/drawing/2014/main" id="{E576456D-3998-470E-B4AB-41641D789195}"/>
+              </a:ext>
+            </a:extLst>
+          </p:cNvPr>
+          <p:cNvSpPr txBox="1">
+            <a:spLocks/>
+          </p:cNvSpPr>
+          <p:nvPr/>
+        </p:nvSpPr>
+        <p:spPr>
+          <a:xfrm>
+            <a:off x="3212333" y="2852783"/>
+            <a:ext cx="1060169" cy="169662"/>
+          </a:xfrm>
+          <a:prstGeom prst="rect">
+            <a:avLst/>
+          </a:prstGeom>
+        </p:spPr>
+        <p:txBody>
+          <a:bodyPr vert="horz" wrap="square" lIns="0" tIns="0" rIns="0" bIns="0" rtlCol="0" anchor="ctr">
+            <a:spAutoFit/>
+          </a:bodyPr>
+          <a:lstStyle>
+            <a:lvl1pPr marL="0" indent="0" algn="l" defTabSz="914400" rtl="0" eaLnBrk="1" latinLnBrk="1" hangingPunct="1">
+              <a:lnSpc>
+                <a:spcPct val="90000"/>
+              </a:lnSpc>
+              <a:spcBef>
+                <a:spcPts val="1000"/>
+              </a:spcBef>
+              <a:buFont typeface="Arial" panose="020B0604020202020204" pitchFamily="34" charset="0"/>
+              <a:buNone/>
+              <a:defRPr sz="1200" kern="1200">
+                <a:solidFill>
+                  <a:schemeClr val="tx1"/>
+                </a:solidFill>
+                <a:latin typeface="AppleSDGothicNeoM00" panose="02000503000000000000" pitchFamily="2" charset="-127"/>
+                <a:ea typeface="AppleSDGothicNeoM00" panose="02000503000000000000" pitchFamily="2" charset="-127"/>
+                <a:cs typeface="+mn-cs"/>
+              </a:defRPr>
+            </a:lvl1pPr>
+            <a:lvl2pPr marL="685800" indent="-228600" algn="l" defTabSz="914400" rtl="0" eaLnBrk="1" latinLnBrk="1" hangingPunct="1">
+              <a:lnSpc>
+                <a:spcPct val="90000"/>
+              </a:lnSpc>
+              <a:spcBef>
+                <a:spcPts val="500"/>
+              </a:spcBef>
+              <a:buFont typeface="Arial" panose="020B0604020202020204" pitchFamily="34" charset="0"/>
+              <a:buChar char="•"/>
+              <a:defRPr sz="2400" kern="1200">
+                <a:solidFill>
+                  <a:schemeClr val="tx1"/>
+                </a:solidFill>
+                <a:latin typeface="+mn-lt"/>
+                <a:ea typeface="+mn-ea"/>
+                <a:cs typeface="+mn-cs"/>
+              </a:defRPr>
+            </a:lvl2pPr>
+            <a:lvl3pPr marL="1143000" indent="-228600" algn="l" defTabSz="914400" rtl="0" eaLnBrk="1" latinLnBrk="1" hangingPunct="1">
+              <a:lnSpc>
+                <a:spcPct val="90000"/>
+              </a:lnSpc>
+              <a:spcBef>
+                <a:spcPts val="500"/>
+              </a:spcBef>
+              <a:buFont typeface="Arial" panose="020B0604020202020204" pitchFamily="34" charset="0"/>
+              <a:buChar char="•"/>
+              <a:defRPr sz="2000" kern="1200">
+                <a:solidFill>
+                  <a:schemeClr val="tx1"/>
+                </a:solidFill>
+                <a:latin typeface="+mn-lt"/>
+                <a:ea typeface="+mn-ea"/>
+                <a:cs typeface="+mn-cs"/>
+              </a:defRPr>
+            </a:lvl3pPr>
+            <a:lvl4pPr marL="1600200" indent="-228600" algn="l" defTabSz="914400" rtl="0" eaLnBrk="1" latinLnBrk="1" hangingPunct="1">
+              <a:lnSpc>
+                <a:spcPct val="90000"/>
+              </a:lnSpc>
+              <a:spcBef>
+                <a:spcPts val="500"/>
+              </a:spcBef>
+              <a:buFont typeface="Arial" panose="020B0604020202020204" pitchFamily="34" charset="0"/>
+              <a:buChar char="•"/>
+              <a:defRPr sz="1800" kern="1200">
+                <a:solidFill>
+                  <a:schemeClr val="tx1"/>
+                </a:solidFill>
+                <a:latin typeface="+mn-lt"/>
+                <a:ea typeface="+mn-ea"/>
+                <a:cs typeface="+mn-cs"/>
+              </a:defRPr>
+            </a:lvl4pPr>
+            <a:lvl5pPr marL="2057400" indent="-228600" algn="l" defTabSz="914400" rtl="0" eaLnBrk="1" latinLnBrk="1" hangingPunct="1">
+              <a:lnSpc>
+                <a:spcPct val="90000"/>
+              </a:lnSpc>
+              <a:spcBef>
+                <a:spcPts val="500"/>
+              </a:spcBef>
+              <a:buFont typeface="Arial" panose="020B0604020202020204" pitchFamily="34" charset="0"/>
+              <a:buChar char="•"/>
+              <a:defRPr sz="1800" kern="1200">
+                <a:solidFill>
+                  <a:schemeClr val="tx1"/>
+                </a:solidFill>
+                <a:latin typeface="+mn-lt"/>
+                <a:ea typeface="+mn-ea"/>
+                <a:cs typeface="+mn-cs"/>
+              </a:defRPr>
+            </a:lvl5pPr>
+            <a:lvl6pPr marL="2514600" indent="-228600" algn="l" defTabSz="914400" rtl="0" eaLnBrk="1" latinLnBrk="1" hangingPunct="1">
+              <a:lnSpc>
+                <a:spcPct val="90000"/>
+              </a:lnSpc>
+              <a:spcBef>
+                <a:spcPts val="500"/>
+              </a:spcBef>
+              <a:buFont typeface="Arial" panose="020B0604020202020204" pitchFamily="34" charset="0"/>
+              <a:buChar char="•"/>
+              <a:defRPr sz="1800" kern="1200">
+                <a:solidFill>
+                  <a:schemeClr val="tx1"/>
+                </a:solidFill>
+                <a:latin typeface="+mn-lt"/>
+                <a:ea typeface="+mn-ea"/>
+                <a:cs typeface="+mn-cs"/>
+              </a:defRPr>
+            </a:lvl6pPr>
+            <a:lvl7pPr marL="2971800" indent="-228600" algn="l" defTabSz="914400" rtl="0" eaLnBrk="1" latinLnBrk="1" hangingPunct="1">
+              <a:lnSpc>
+                <a:spcPct val="90000"/>
+              </a:lnSpc>
+              <a:spcBef>
+                <a:spcPts val="500"/>
+              </a:spcBef>
+              <a:buFont typeface="Arial" panose="020B0604020202020204" pitchFamily="34" charset="0"/>
+              <a:buChar char="•"/>
+              <a:defRPr sz="1800" kern="1200">
+                <a:solidFill>
+                  <a:schemeClr val="tx1"/>
+                </a:solidFill>
+                <a:latin typeface="+mn-lt"/>
+                <a:ea typeface="+mn-ea"/>
+                <a:cs typeface="+mn-cs"/>
+              </a:defRPr>
+            </a:lvl7pPr>
+            <a:lvl8pPr marL="3429000" indent="-228600" algn="l" defTabSz="914400" rtl="0" eaLnBrk="1" latinLnBrk="1" hangingPunct="1">
+              <a:lnSpc>
+                <a:spcPct val="90000"/>
+              </a:lnSpc>
+              <a:spcBef>
+                <a:spcPts val="500"/>
+              </a:spcBef>
+              <a:buFont typeface="Arial" panose="020B0604020202020204" pitchFamily="34" charset="0"/>
+              <a:buChar char="•"/>
+              <a:defRPr sz="1800" kern="1200">
+                <a:solidFill>
+                  <a:schemeClr val="tx1"/>
+                </a:solidFill>
+                <a:latin typeface="+mn-lt"/>
+                <a:ea typeface="+mn-ea"/>
+                <a:cs typeface="+mn-cs"/>
+              </a:defRPr>
+            </a:lvl8pPr>
+            <a:lvl9pPr marL="3886200" indent="-228600" algn="l" defTabSz="914400" rtl="0" eaLnBrk="1" latinLnBrk="1" hangingPunct="1">
+              <a:lnSpc>
+                <a:spcPct val="90000"/>
+              </a:lnSpc>
+              <a:spcBef>
+                <a:spcPts val="500"/>
+              </a:spcBef>
+              <a:buFont typeface="Arial" panose="020B0604020202020204" pitchFamily="34" charset="0"/>
+              <a:buChar char="•"/>
+              <a:defRPr sz="1800" kern="1200">
+                <a:solidFill>
+                  <a:schemeClr val="tx1"/>
+                </a:solidFill>
+                <a:latin typeface="+mn-lt"/>
+                <a:ea typeface="+mn-ea"/>
+                <a:cs typeface="+mn-cs"/>
+              </a:defRPr>
+            </a:lvl9pPr>
+          </a:lstStyle>
+          <a:p>
+            <a:pPr algn="ctr">
+              <a:lnSpc>
+                <a:spcPct val="130000"/>
+              </a:lnSpc>
+              <a:spcBef>
+                <a:spcPts val="0"/>
+              </a:spcBef>
+            </a:pPr>
+            <a:r>
+              <a:rPr lang="ko-KR" altLang="en-US" sz="900" dirty="0">
+                <a:latin typeface="피플폰트 Bold" panose="020B0600000101010101" pitchFamily="50" charset="-127"/>
+                <a:ea typeface="피플폰트 Bold" panose="020B0600000101010101" pitchFamily="50" charset="-127"/>
+              </a:rPr>
+              <a:t>PF 대출약정</a:t>
+            </a:r>
+            <a:endParaRPr lang="en-US" altLang="ko-KR" sz="900" dirty="0">
+              <a:latin typeface="피플폰트 Bold" panose="020B0600000101010101" pitchFamily="50" charset="-127"/>
+              <a:ea typeface="피플폰트 Bold" panose="020B0600000101010101" pitchFamily="50" charset="-127"/>
+            </a:endParaRPr>
+          </a:p>
+        </p:txBody>
+      </p:sp>
+      <p:sp>
+        <p:nvSpPr>
+          <p:cNvPr id="59" name="텍스트 개체 틀 2">
+            <a:extLst>
+              <a:ext uri="{FF2B5EF4-FFF2-40B4-BE49-F238E27FC236}">
+                <a16:creationId xmlns:a16="http://schemas.microsoft.com/office/drawing/2014/main" id="{5BA6795C-C83E-47BC-B39F-E53164B2B35D}"/>
+              </a:ext>
+            </a:extLst>
+          </p:cNvPr>
+          <p:cNvSpPr txBox="1">
+            <a:spLocks/>
+          </p:cNvSpPr>
+          <p:nvPr/>
+        </p:nvSpPr>
+        <p:spPr>
+          <a:xfrm>
+            <a:off x="1724126" y="3429221"/>
+            <a:ext cx="1060169" cy="169662"/>
+          </a:xfrm>
+          <a:prstGeom prst="rect">
+            <a:avLst/>
+          </a:prstGeom>
+        </p:spPr>
+        <p:txBody>
+          <a:bodyPr vert="horz" wrap="square" lIns="0" tIns="0" rIns="0" bIns="0" rtlCol="0" anchor="ctr">
+            <a:spAutoFit/>
+          </a:bodyPr>
+          <a:lstStyle>
+            <a:lvl1pPr marL="0" indent="0" algn="l" defTabSz="914400" rtl="0" eaLnBrk="1" latinLnBrk="1" hangingPunct="1">
+              <a:lnSpc>
+                <a:spcPct val="90000"/>
+              </a:lnSpc>
+              <a:spcBef>
+                <a:spcPts val="1000"/>
+              </a:spcBef>
+              <a:buFont typeface="Arial" panose="020B0604020202020204" pitchFamily="34" charset="0"/>
+              <a:buNone/>
+              <a:defRPr sz="1200" kern="1200">
+                <a:solidFill>
+                  <a:schemeClr val="tx1"/>
+                </a:solidFill>
+                <a:latin typeface="AppleSDGothicNeoM00" panose="02000503000000000000" pitchFamily="2" charset="-127"/>
+                <a:ea typeface="AppleSDGothicNeoM00" panose="02000503000000000000" pitchFamily="2" charset="-127"/>
+                <a:cs typeface="+mn-cs"/>
+              </a:defRPr>
+            </a:lvl1pPr>
+            <a:lvl2pPr marL="685800" indent="-228600" algn="l" defTabSz="914400" rtl="0" eaLnBrk="1" latinLnBrk="1" hangingPunct="1">
+              <a:lnSpc>
+                <a:spcPct val="90000"/>
+              </a:lnSpc>
+              <a:spcBef>
+                <a:spcPts val="500"/>
+              </a:spcBef>
+              <a:buFont typeface="Arial" panose="020B0604020202020204" pitchFamily="34" charset="0"/>
+              <a:buChar char="•"/>
+              <a:defRPr sz="2400" kern="1200">
+                <a:solidFill>
+                  <a:schemeClr val="tx1"/>
+                </a:solidFill>
+                <a:latin typeface="+mn-lt"/>
+                <a:ea typeface="+mn-ea"/>
+                <a:cs typeface="+mn-cs"/>
+              </a:defRPr>
+            </a:lvl2pPr>
+            <a:lvl3pPr marL="1143000" indent="-228600" algn="l" defTabSz="914400" rtl="0" eaLnBrk="1" latinLnBrk="1" hangingPunct="1">
+              <a:lnSpc>
+                <a:spcPct val="90000"/>
+              </a:lnSpc>
+              <a:spcBef>
+                <a:spcPts val="500"/>
+              </a:spcBef>
+              <a:buFont typeface="Arial" panose="020B0604020202020204" pitchFamily="34" charset="0"/>
+              <a:buChar char="•"/>
+              <a:defRPr sz="2000" kern="1200">
+                <a:solidFill>
+                  <a:schemeClr val="tx1"/>
+                </a:solidFill>
+                <a:latin typeface="+mn-lt"/>
+                <a:ea typeface="+mn-ea"/>
+                <a:cs typeface="+mn-cs"/>
+              </a:defRPr>
+            </a:lvl3pPr>
+            <a:lvl4pPr marL="1600200" indent="-228600" algn="l" defTabSz="914400" rtl="0" eaLnBrk="1" latinLnBrk="1" hangingPunct="1">
+              <a:lnSpc>
+                <a:spcPct val="90000"/>
+              </a:lnSpc>
+              <a:spcBef>
+                <a:spcPts val="500"/>
+              </a:spcBef>
+              <a:buFont typeface="Arial" panose="020B0604020202020204" pitchFamily="34" charset="0"/>
+              <a:buChar char="•"/>
+              <a:defRPr sz="1800" kern="1200">
+                <a:solidFill>
+                  <a:schemeClr val="tx1"/>
+                </a:solidFill>
+                <a:latin typeface="+mn-lt"/>
+                <a:ea typeface="+mn-ea"/>
+                <a:cs typeface="+mn-cs"/>
+              </a:defRPr>
+            </a:lvl4pPr>
+            <a:lvl5pPr marL="2057400" indent="-228600" algn="l" defTabSz="914400" rtl="0" eaLnBrk="1" latinLnBrk="1" hangingPunct="1">
+              <a:lnSpc>
+                <a:spcPct val="90000"/>
+              </a:lnSpc>
+              <a:spcBef>
+                <a:spcPts val="500"/>
+              </a:spcBef>
+              <a:buFont typeface="Arial" panose="020B0604020202020204" pitchFamily="34" charset="0"/>
+              <a:buChar char="•"/>
+              <a:defRPr sz="1800" kern="1200">
+                <a:solidFill>
+                  <a:schemeClr val="tx1"/>
+                </a:solidFill>
+                <a:latin typeface="+mn-lt"/>
+                <a:ea typeface="+mn-ea"/>
+                <a:cs typeface="+mn-cs"/>
+              </a:defRPr>
+            </a:lvl5pPr>
+            <a:lvl6pPr marL="2514600" indent="-228600" algn="l" defTabSz="914400" rtl="0" eaLnBrk="1" latinLnBrk="1" hangingPunct="1">
+              <a:lnSpc>
+                <a:spcPct val="90000"/>
+              </a:lnSpc>
+              <a:spcBef>
+                <a:spcPts val="500"/>
+              </a:spcBef>
+              <a:buFont typeface="Arial" panose="020B0604020202020204" pitchFamily="34" charset="0"/>
+              <a:buChar char="•"/>
+              <a:defRPr sz="1800" kern="1200">
+                <a:solidFill>
+                  <a:schemeClr val="tx1"/>
+                </a:solidFill>
+                <a:latin typeface="+mn-lt"/>
+                <a:ea typeface="+mn-ea"/>
+                <a:cs typeface="+mn-cs"/>
+              </a:defRPr>
+            </a:lvl6pPr>
+            <a:lvl7pPr marL="2971800" indent="-228600" algn="l" defTabSz="914400" rtl="0" eaLnBrk="1" latinLnBrk="1" hangingPunct="1">
+              <a:lnSpc>
+                <a:spcPct val="90000"/>
+              </a:lnSpc>
+              <a:spcBef>
+                <a:spcPts val="500"/>
+              </a:spcBef>
+              <a:buFont typeface="Arial" panose="020B0604020202020204" pitchFamily="34" charset="0"/>
+              <a:buChar char="•"/>
+              <a:defRPr sz="1800" kern="1200">
+                <a:solidFill>
+                  <a:schemeClr val="tx1"/>
+                </a:solidFill>
+                <a:latin typeface="+mn-lt"/>
+                <a:ea typeface="+mn-ea"/>
+                <a:cs typeface="+mn-cs"/>
+              </a:defRPr>
+            </a:lvl7pPr>
+            <a:lvl8pPr marL="3429000" indent="-228600" algn="l" defTabSz="914400" rtl="0" eaLnBrk="1" latinLnBrk="1" hangingPunct="1">
+              <a:lnSpc>
+                <a:spcPct val="90000"/>
+              </a:lnSpc>
+              <a:spcBef>
+                <a:spcPts val="500"/>
+              </a:spcBef>
+              <a:buFont typeface="Arial" panose="020B0604020202020204" pitchFamily="34" charset="0"/>
+              <a:buChar char="•"/>
+              <a:defRPr sz="1800" kern="1200">
+                <a:solidFill>
+                  <a:schemeClr val="tx1"/>
+                </a:solidFill>
+                <a:latin typeface="+mn-lt"/>
+                <a:ea typeface="+mn-ea"/>
+                <a:cs typeface="+mn-cs"/>
+              </a:defRPr>
+            </a:lvl8pPr>
+            <a:lvl9pPr marL="3886200" indent="-228600" algn="l" defTabSz="914400" rtl="0" eaLnBrk="1" latinLnBrk="1" hangingPunct="1">
+              <a:lnSpc>
+                <a:spcPct val="90000"/>
+              </a:lnSpc>
+              <a:spcBef>
+                <a:spcPts val="500"/>
+              </a:spcBef>
+              <a:buFont typeface="Arial" panose="020B0604020202020204" pitchFamily="34" charset="0"/>
+              <a:buChar char="•"/>
+              <a:defRPr sz="1800" kern="1200">
+                <a:solidFill>
+                  <a:schemeClr val="tx1"/>
+                </a:solidFill>
+                <a:latin typeface="+mn-lt"/>
+                <a:ea typeface="+mn-ea"/>
+                <a:cs typeface="+mn-cs"/>
+              </a:defRPr>
+            </a:lvl9pPr>
+          </a:lstStyle>
+          <a:p>
+            <a:pPr algn="ctr">
+              <a:lnSpc>
+                <a:spcPct val="130000"/>
+              </a:lnSpc>
+              <a:spcBef>
+                <a:spcPts val="0"/>
+              </a:spcBef>
+            </a:pPr>
+            <a:r>
+              <a:rPr lang="ko-KR" altLang="en-US" sz="900" dirty="0">
+                <a:latin typeface="피플폰트 Bold" panose="020B0600000101010101" pitchFamily="50" charset="-127"/>
+                <a:ea typeface="피플폰트 Bold" panose="020B0600000101010101" pitchFamily="50" charset="-127"/>
+              </a:rPr>
+              <a:t>부동산신탁</a:t>
+            </a:r>
+            <a:endParaRPr lang="en-US" altLang="ko-KR" sz="900" dirty="0">
+              <a:latin typeface="피플폰트 Bold" panose="020B0600000101010101" pitchFamily="50" charset="-127"/>
+              <a:ea typeface="피플폰트 Bold" panose="020B0600000101010101" pitchFamily="50" charset="-127"/>
+            </a:endParaRPr>
+          </a:p>
+        </p:txBody>
+      </p:sp>
+      <p:graphicFrame>
+        <p:nvGraphicFramePr>
+          <p:cNvPr id="60" name="표 4">
+            <a:extLst>
+              <a:ext uri="{FF2B5EF4-FFF2-40B4-BE49-F238E27FC236}">
+                <a16:creationId xmlns:a16="http://schemas.microsoft.com/office/drawing/2014/main" id="{040A2AA4-0CD0-4BEA-9B38-EBEBC9DBF669}"/>
+              </a:ext>
+            </a:extLst>
+          </p:cNvPr>
+          <p:cNvGraphicFramePr>
+            <a:graphicFrameLocks noGrp="1"/>
+          </p:cNvGraphicFramePr>
+          <p:nvPr>
+            <p:extLst>
+              <p:ext uri="{D42A27DB-BD31-4B8C-83A1-F6EECF244321}">
+                <p14:modId xmlns:p14="http://schemas.microsoft.com/office/powerpoint/2010/main" val="4050921184"/>
+              </p:ext>
+            </p:extLst>
+          </p:nvPr>
+        </p:nvGraphicFramePr>
+        <p:xfrm>
+          <a:off x="4837604" y="2234202"/>
+          <a:ext cx="1868120" cy="335202"/>
+        </p:xfrm>
+        <a:graphic>
+          <a:graphicData uri="http://schemas.openxmlformats.org/drawingml/2006/table">
+            <a:tbl>
+              <a:tblPr firstRow="1" bandRow="1">
+                <a:effectLst>
+                  <a:outerShdw blurRad="50800" dist="38100" dir="2700000" algn="tl" rotWithShape="0">
+                    <a:prstClr val="black">
+                      <a:alpha val="40000"/>
+                    </a:prstClr>
+                  </a:outerShdw>
+                </a:effectLst>
+                <a:tableStyleId>{D03447BB-5D67-496B-8E87-E561075AD55C}</a:tableStyleId>
+              </a:tblPr>
+              <a:tblGrid>
+                <a:gridCol w="1868120">
+                  <a:extLst>
+                    <a:ext uri="{9D8B030D-6E8A-4147-A177-3AD203B41FA5}">
+                      <a16:colId xmlns:a16="http://schemas.microsoft.com/office/drawing/2014/main" val="20000"/>
+                    </a:ext>
+                  </a:extLst>
+                </a:gridCol>
+              </a:tblGrid>
+              <a:tr h="335202">
+                <a:tc>
+                  <a:txBody>
+                    <a:bodyPr/>
+                    <a:lstStyle/>
+                    <a:p>
+                      <a:pPr algn="ctr" latinLnBrk="1">
+                        <a:defRPr/>
+                      </a:pPr>
+                      <a:r>
+                        <a:rPr lang="ko-KR" altLang="en-US" sz="1200" b="1" dirty="0">
+                          <a:solidFill>
+                            <a:schemeClr val="tx1"/>
+                          </a:solidFill>
+                          <a:latin typeface="피플폰트 Bold" panose="020B0600000101010101" pitchFamily="50" charset="-127"/>
+                          <a:ea typeface="피플폰트 Bold" panose="020B0600000101010101" pitchFamily="50" charset="-127"/>
+                        </a:rPr>
+                        <a:t>기타 </a:t>
+                      </a:r>
+                      <a:r>
+                        <a:rPr lang="ko-KR" altLang="en-US" sz="1200" b="1" dirty="0" err="1">
+                          <a:solidFill>
+                            <a:schemeClr val="tx1"/>
+                          </a:solidFill>
+                          <a:latin typeface="피플폰트 Bold" panose="020B0600000101010101" pitchFamily="50" charset="-127"/>
+                          <a:ea typeface="피플폰트 Bold" panose="020B0600000101010101" pitchFamily="50" charset="-127"/>
+                        </a:rPr>
+                        <a:t>Tr</a:t>
+                      </a:r>
+                      <a:r>
+                        <a:rPr lang="ko-KR" altLang="en-US" sz="1200" b="1" dirty="0">
+                          <a:solidFill>
+                            <a:schemeClr val="tx1"/>
+                          </a:solidFill>
+                          <a:latin typeface="피플폰트 Bold" panose="020B0600000101010101" pitchFamily="50" charset="-127"/>
+                          <a:ea typeface="피플폰트 Bold" panose="020B0600000101010101" pitchFamily="50" charset="-127"/>
+                        </a:rPr>
+                        <a:t>.</a:t>
+                      </a:r>
+                      <a:r>
+                        <a:rPr lang="en-US" altLang="ko-KR" sz="1200" b="1" dirty="0">
+                          <a:solidFill>
+                            <a:schemeClr val="tx1"/>
+                          </a:solidFill>
+                          <a:latin typeface="피플폰트 Bold" panose="020B0600000101010101" pitchFamily="50" charset="-127"/>
+                          <a:ea typeface="피플폰트 Bold" panose="020B0600000101010101" pitchFamily="50" charset="-127"/>
+                        </a:rPr>
+                        <a:t>A</a:t>
+                      </a:r>
+                      <a:r>
+                        <a:rPr lang="ko-KR" altLang="en-US" sz="1200" b="1" dirty="0">
+                          <a:solidFill>
+                            <a:schemeClr val="tx1"/>
+                          </a:solidFill>
+                          <a:latin typeface="피플폰트 Bold" panose="020B0600000101010101" pitchFamily="50" charset="-127"/>
+                          <a:ea typeface="피플폰트 Bold" panose="020B0600000101010101" pitchFamily="50" charset="-127"/>
+                        </a:rPr>
+                        <a:t> 대주</a:t>
+                      </a:r>
+                    </a:p>
+                  </a:txBody>
+                  <a:tcPr marL="0" marR="0" marT="72000" marB="0">
+                    <a:lnL w="28575" cap="flat" cmpd="sng" algn="ctr">
+                      <a:solidFill>
+                        <a:schemeClr val="bg1"/>
+                      </a:solidFill>
+                      <a:prstDash val="solid"/>
+                      <a:round/>
+                      <a:headEnd type="none" w="med" len="med"/>
+                      <a:tailEnd type="none" w="med" len="med"/>
+                    </a:lnL>
+                    <a:lnR w="28575" cap="flat" cmpd="sng" algn="ctr">
+                      <a:solidFill>
+                        <a:schemeClr val="bg1"/>
+                      </a:solidFill>
+                      <a:prstDash val="solid"/>
+                      <a:round/>
+                      <a:headEnd type="none" w="med" len="med"/>
+                      <a:tailEnd type="none" w="med" len="med"/>
+                    </a:lnR>
+                    <a:lnT w="28575" cap="flat" cmpd="sng" algn="ctr">
+                      <a:solidFill>
+                        <a:schemeClr val="bg1"/>
+                      </a:solidFill>
+                      <a:prstDash val="solid"/>
+                      <a:round/>
+                      <a:headEnd type="none" w="med" len="med"/>
+                      <a:tailEnd type="none" w="med" len="med"/>
+                    </a:lnT>
+                    <a:lnB w="28575" cap="flat" cmpd="sng" algn="ctr">
+                      <a:solidFill>
+                        <a:schemeClr val="bg1"/>
+                      </a:solidFill>
+                      <a:prstDash val="solid"/>
+                      <a:round/>
+                      <a:headEnd type="none" w="med" len="med"/>
+                      <a:tailEnd type="none" w="med" len="med"/>
+                    </a:lnB>
+                    <a:solidFill>
+                      <a:srgbClr val="D9D9D9"/>
+                    </a:solidFill>
+                  </a:tcPr>
+                </a:tc>
+                <a:extLst>
+                  <a:ext uri="{0D108BD9-81ED-4DB2-BD59-A6C34878D82A}">
+                    <a16:rowId xmlns:a16="http://schemas.microsoft.com/office/drawing/2014/main" val="10001"/>
+                  </a:ext>
+                </a:extLst>
+              </a:tr>
+            </a:tbl>
+          </a:graphicData>
+        </a:graphic>
+      </p:graphicFrame>
+      <p:graphicFrame>
+        <p:nvGraphicFramePr>
+          <p:cNvPr id="61" name="표 4">
+            <a:extLst>
+              <a:ext uri="{FF2B5EF4-FFF2-40B4-BE49-F238E27FC236}">
+                <a16:creationId xmlns:a16="http://schemas.microsoft.com/office/drawing/2014/main" id="{EF9A4B08-F378-4D68-91A1-D9AFAD5C79A5}"/>
+              </a:ext>
+            </a:extLst>
+          </p:cNvPr>
+          <p:cNvGraphicFramePr>
+            <a:graphicFrameLocks noGrp="1"/>
+          </p:cNvGraphicFramePr>
+          <p:nvPr>
+            <p:extLst>
+              <p:ext uri="{D42A27DB-BD31-4B8C-83A1-F6EECF244321}">
+                <p14:modId xmlns:p14="http://schemas.microsoft.com/office/powerpoint/2010/main" val="904813029"/>
+              </p:ext>
+            </p:extLst>
+          </p:nvPr>
+        </p:nvGraphicFramePr>
+        <p:xfrm>
+          <a:off x="4689649" y="5022177"/>
+          <a:ext cx="2130374" cy="923134"/>
+        </p:xfrm>
+        <a:graphic>
+          <a:graphicData uri="http://schemas.openxmlformats.org/drawingml/2006/table">
+            <a:tbl>
+              <a:tblPr firstRow="1" bandRow="1">
+                <a:effectLst>
+                  <a:outerShdw blurRad="50800" dist="38100" dir="2700000" algn="tl" rotWithShape="0">
+                    <a:prstClr val="black">
+                      <a:alpha val="40000"/>
+                    </a:prstClr>
+                  </a:outerShdw>
+                </a:effectLst>
+                <a:tableStyleId>{D03447BB-5D67-496B-8E87-E561075AD55C}</a:tableStyleId>
+              </a:tblPr>
+              <a:tblGrid>
+                <a:gridCol w="2130374">
+                  <a:extLst>
+                    <a:ext uri="{9D8B030D-6E8A-4147-A177-3AD203B41FA5}">
+                      <a16:colId xmlns:a16="http://schemas.microsoft.com/office/drawing/2014/main" val="20000"/>
+                    </a:ext>
+                  </a:extLst>
+                </a:gridCol>
+              </a:tblGrid>
+              <a:tr h="325499">
+                <a:tc>
+                  <a:txBody>
+                    <a:bodyPr/>
+                    <a:lstStyle/>
+                    <a:p>
+                      <a:pPr algn="ctr" latinLnBrk="1">
+                        <a:defRPr/>
+                      </a:pPr>
+                      <a:r>
+                        <a:rPr lang="en-US" altLang="ko-KR" sz="1000" dirty="0">
+                          <a:latin typeface="피플폰트 Bold" panose="020B0600000101010101" pitchFamily="50" charset="-127"/>
+                          <a:ea typeface="피플폰트 Bold" panose="020B0600000101010101" pitchFamily="50" charset="-127"/>
+                        </a:rPr>
+                        <a:t>Tr. C 1,000억원</a:t>
+                      </a:r>
+                      <a:endParaRPr lang="ko-KR" altLang="en-US" sz="1000" dirty="0">
+                        <a:latin typeface="피플폰트 Bold" panose="020B0600000101010101" pitchFamily="50" charset="-127"/>
+                        <a:ea typeface="피플폰트 Bold" panose="020B0600000101010101" pitchFamily="50" charset="-127"/>
+                      </a:endParaRPr>
+                    </a:p>
+                  </a:txBody>
+                  <a:tcPr marL="152842" marR="152842" marT="76421" marB="76421" anchor="ctr">
+                    <a:lnL w="28575" cap="flat" cmpd="sng" algn="ctr">
+                      <a:solidFill>
+                        <a:schemeClr val="bg1"/>
+                      </a:solidFill>
+                      <a:prstDash val="solid"/>
+                      <a:round/>
+                      <a:headEnd type="none" w="med" len="med"/>
+                      <a:tailEnd type="none" w="med" len="med"/>
+                    </a:lnL>
+                    <a:lnR w="28575" cap="flat" cmpd="sng" algn="ctr">
+                      <a:solidFill>
+                        <a:schemeClr val="bg1"/>
+                      </a:solidFill>
+                      <a:prstDash val="solid"/>
+                      <a:round/>
+                      <a:headEnd type="none" w="med" len="med"/>
+                      <a:tailEnd type="none" w="med" len="med"/>
+                    </a:lnR>
+                    <a:lnT w="28575" cap="flat" cmpd="sng" algn="ctr">
+                      <a:solidFill>
+                        <a:schemeClr val="bg1"/>
+                      </a:solidFill>
+                      <a:prstDash val="solid"/>
+                      <a:round/>
+                      <a:headEnd type="none" w="med" len="med"/>
+                      <a:tailEnd type="none" w="med" len="med"/>
+                    </a:lnT>
+                    <a:lnB w="28575" cap="flat" cmpd="sng" algn="ctr">
+                      <a:solidFill>
+                        <a:schemeClr val="bg1"/>
+                      </a:solidFill>
+                      <a:prstDash val="solid"/>
+                      <a:round/>
+                      <a:headEnd type="none" w="med" len="med"/>
+                      <a:tailEnd type="none" w="med" len="med"/>
+                    </a:lnB>
+                    <a:solidFill>
+                      <a:srgbClr val="08377C"/>
+                    </a:solidFill>
+                  </a:tcPr>
+                </a:tc>
+                <a:extLst>
+                  <a:ext uri="{0D108BD9-81ED-4DB2-BD59-A6C34878D82A}">
+                    <a16:rowId xmlns:a16="http://schemas.microsoft.com/office/drawing/2014/main" val="10000"/>
+                  </a:ext>
+                </a:extLst>
+              </a:tr>
+              <a:tr h="597635">
+                <a:tc>
+                  <a:txBody>
+                    <a:bodyPr/>
+                    <a:lstStyle/>
+                    <a:p>
+                      <a:pPr algn="ctr" latinLnBrk="1">
+                        <a:defRPr/>
+                      </a:pPr>
+                      <a:endParaRPr lang="en-US" altLang="ko-KR" sz="1200" b="1" dirty="0">
+                        <a:solidFill>
+                          <a:schemeClr val="tx1"/>
+                        </a:solidFill>
+                        <a:latin typeface="피플폰트 Bold" panose="020B0600000101010101" pitchFamily="50" charset="-127"/>
+                        <a:ea typeface="피플폰트 Bold" panose="020B0600000101010101" pitchFamily="50" charset="-127"/>
+                      </a:endParaRPr>
+                    </a:p>
+                    <a:p>
+                      <a:pPr algn="ctr" latinLnBrk="1">
+                        <a:defRPr/>
+                      </a:pPr>
+                      <a:endParaRPr lang="en-US" altLang="ko-KR" sz="1200" b="1" dirty="0">
+                        <a:solidFill>
+                          <a:schemeClr val="tx1"/>
+                        </a:solidFill>
+                        <a:latin typeface="피플폰트 Bold" panose="020B0600000101010101" pitchFamily="50" charset="-127"/>
+                        <a:ea typeface="피플폰트 Bold" panose="020B0600000101010101" pitchFamily="50" charset="-127"/>
+                      </a:endParaRPr>
+                    </a:p>
+                  </a:txBody>
+                  <a:tcPr marL="152842" marR="152842" marT="76421" marB="76421" anchor="ctr">
+                    <a:lnL w="28575" cap="flat" cmpd="sng" algn="ctr">
+                      <a:solidFill>
+                        <a:schemeClr val="bg1"/>
+                      </a:solidFill>
+                      <a:prstDash val="solid"/>
+                      <a:round/>
+                      <a:headEnd type="none" w="med" len="med"/>
+                      <a:tailEnd type="none" w="med" len="med"/>
+                    </a:lnL>
+                    <a:lnR w="28575" cap="flat" cmpd="sng" algn="ctr">
+                      <a:solidFill>
+                        <a:schemeClr val="bg1"/>
+                      </a:solidFill>
+                      <a:prstDash val="solid"/>
+                      <a:round/>
+                      <a:headEnd type="none" w="med" len="med"/>
+                      <a:tailEnd type="none" w="med" len="med"/>
+                    </a:lnR>
+                    <a:lnT w="28575" cap="flat" cmpd="sng" algn="ctr">
+                      <a:solidFill>
+                        <a:schemeClr val="bg1"/>
+                      </a:solidFill>
+                      <a:prstDash val="solid"/>
+                      <a:round/>
+                      <a:headEnd type="none" w="med" len="med"/>
+                      <a:tailEnd type="none" w="med" len="med"/>
+                    </a:lnT>
+                    <a:lnB w="28575" cap="flat" cmpd="sng" algn="ctr">
+                      <a:solidFill>
+                        <a:schemeClr val="bg1"/>
+                      </a:solidFill>
+                      <a:prstDash val="solid"/>
+                      <a:round/>
+                      <a:headEnd type="none" w="med" len="med"/>
+                      <a:tailEnd type="none" w="med" len="med"/>
+                    </a:lnB>
+                    <a:solidFill>
+                      <a:srgbClr val="D9D9D9"/>
+                    </a:solidFill>
+                  </a:tcPr>
+                </a:tc>
+                <a:extLst>
+                  <a:ext uri="{0D108BD9-81ED-4DB2-BD59-A6C34878D82A}">
+                    <a16:rowId xmlns:a16="http://schemas.microsoft.com/office/drawing/2014/main" val="10001"/>
+                  </a:ext>
+                </a:extLst>
+              </a:tr>
+            </a:tbl>
+          </a:graphicData>
+        </a:graphic>
+      </p:graphicFrame>
+      <p:graphicFrame>
+        <p:nvGraphicFramePr>
+          <p:cNvPr id="62" name="표 4">
+            <a:extLst>
+              <a:ext uri="{FF2B5EF4-FFF2-40B4-BE49-F238E27FC236}">
+                <a16:creationId xmlns:a16="http://schemas.microsoft.com/office/drawing/2014/main" id="{8BAEA511-6617-4EEB-A5EA-F4A383E1FBC0}"/>
+              </a:ext>
+            </a:extLst>
+          </p:cNvPr>
+          <p:cNvGraphicFramePr>
+            <a:graphicFrameLocks noGrp="1"/>
+          </p:cNvGraphicFramePr>
+          <p:nvPr>
+            <p:extLst>
+              <p:ext uri="{D42A27DB-BD31-4B8C-83A1-F6EECF244321}">
+                <p14:modId xmlns:p14="http://schemas.microsoft.com/office/powerpoint/2010/main" val="3919841128"/>
+              </p:ext>
+            </p:extLst>
+          </p:nvPr>
+        </p:nvGraphicFramePr>
+        <p:xfrm>
+          <a:off x="4764845" y="5423916"/>
+          <a:ext cx="1960205" cy="400446"/>
+        </p:xfrm>
+        <a:graphic>
+          <a:graphicData uri="http://schemas.openxmlformats.org/drawingml/2006/table">
+            <a:tbl>
+              <a:tblPr firstRow="1" bandRow="1">
+                <a:effectLst>
+                  <a:outerShdw blurRad="50800" dist="38100" dir="2700000" algn="tl" rotWithShape="0">
+                    <a:prstClr val="black">
+                      <a:alpha val="40000"/>
+                    </a:prstClr>
+                  </a:outerShdw>
+                </a:effectLst>
+                <a:tableStyleId>{D03447BB-5D67-496B-8E87-E561075AD55C}</a:tableStyleId>
+              </a:tblPr>
+              <a:tblGrid>
+                <a:gridCol w="1960205">
+                  <a:extLst>
+                    <a:ext uri="{9D8B030D-6E8A-4147-A177-3AD203B41FA5}">
+                      <a16:colId xmlns:a16="http://schemas.microsoft.com/office/drawing/2014/main" val="20000"/>
+                    </a:ext>
+                  </a:extLst>
+                </a:gridCol>
+              </a:tblGrid>
+              <a:tr h="400446">
+                <a:tc>
+                  <a:txBody>
+                    <a:bodyPr/>
+                    <a:lstStyle/>
+                    <a:p>
+                      <a:pPr algn="ctr" latinLnBrk="1">
+                        <a:defRPr/>
+                      </a:pPr>
+                      <a:r>
+                        <a:rPr lang="ko-KR" altLang="en-US" sz="1200" b="1" dirty="0" err="1">
+                          <a:solidFill>
+                            <a:schemeClr val="tx1"/>
+                          </a:solidFill>
+                          <a:latin typeface="피플폰트 Bold" panose="020B0600000101010101" pitchFamily="50" charset="-127"/>
+                          <a:ea typeface="피플폰트 Bold" panose="020B0600000101010101" pitchFamily="50" charset="-127"/>
+                        </a:rPr>
+                        <a:t>Tr</a:t>
+                      </a:r>
+                      <a:r>
+                        <a:rPr lang="ko-KR" altLang="en-US" sz="1200" b="1" dirty="0">
+                          <a:solidFill>
+                            <a:schemeClr val="tx1"/>
+                          </a:solidFill>
+                          <a:latin typeface="피플폰트 Bold" panose="020B0600000101010101" pitchFamily="50" charset="-127"/>
+                          <a:ea typeface="피플폰트 Bold" panose="020B0600000101010101" pitchFamily="50" charset="-127"/>
+                        </a:rPr>
+                        <a:t>.</a:t>
+                      </a:r>
+                      <a:r>
+                        <a:rPr lang="en-US" altLang="ko-KR" sz="1200" b="1" dirty="0">
+                          <a:solidFill>
+                            <a:schemeClr val="tx1"/>
+                          </a:solidFill>
+                          <a:latin typeface="피플폰트 Bold" panose="020B0600000101010101" pitchFamily="50" charset="-127"/>
+                          <a:ea typeface="피플폰트 Bold" panose="020B0600000101010101" pitchFamily="50" charset="-127"/>
+                        </a:rPr>
+                        <a:t>C</a:t>
+                      </a:r>
+                      <a:r>
+                        <a:rPr lang="ko-KR" altLang="en-US" sz="1200" b="1" dirty="0">
+                          <a:solidFill>
+                            <a:schemeClr val="tx1"/>
+                          </a:solidFill>
+                          <a:latin typeface="피플폰트 Bold" panose="020B0600000101010101" pitchFamily="50" charset="-127"/>
+                          <a:ea typeface="피플폰트 Bold" panose="020B0600000101010101" pitchFamily="50" charset="-127"/>
+                        </a:rPr>
+                        <a:t> 대주</a:t>
+                      </a:r>
+                    </a:p>
+                  </a:txBody>
+                  <a:tcPr marL="0" marR="0" marT="72000" marB="0" anchor="ctr">
+                    <a:lnL w="28575" cap="flat" cmpd="sng" algn="ctr">
+                      <a:solidFill>
+                        <a:schemeClr val="bg1"/>
+                      </a:solidFill>
+                      <a:prstDash val="solid"/>
+                      <a:round/>
+                      <a:headEnd type="none" w="med" len="med"/>
+                      <a:tailEnd type="none" w="med" len="med"/>
+                    </a:lnL>
+                    <a:lnR w="28575" cap="flat" cmpd="sng" algn="ctr">
+                      <a:solidFill>
+                        <a:schemeClr val="bg1"/>
+                      </a:solidFill>
+                      <a:prstDash val="solid"/>
+                      <a:round/>
+                      <a:headEnd type="none" w="med" len="med"/>
+                      <a:tailEnd type="none" w="med" len="med"/>
+                    </a:lnR>
+                    <a:lnT w="28575" cap="flat" cmpd="sng" algn="ctr">
+                      <a:solidFill>
+                        <a:schemeClr val="bg1"/>
+                      </a:solidFill>
+                      <a:prstDash val="solid"/>
+                      <a:round/>
+                      <a:headEnd type="none" w="med" len="med"/>
+                      <a:tailEnd type="none" w="med" len="med"/>
+                    </a:lnT>
+                    <a:lnB w="28575" cap="flat" cmpd="sng" algn="ctr">
+                      <a:solidFill>
+                        <a:schemeClr val="bg1"/>
+                      </a:solidFill>
+                      <a:prstDash val="solid"/>
+                      <a:round/>
+                      <a:headEnd type="none" w="med" len="med"/>
+                      <a:tailEnd type="none" w="med" len="med"/>
+                    </a:lnB>
+                    <a:solidFill>
+                      <a:srgbClr val="D9D9D9"/>
+                    </a:solidFill>
+                  </a:tcPr>
+                </a:tc>
+                <a:extLst>
+                  <a:ext uri="{0D108BD9-81ED-4DB2-BD59-A6C34878D82A}">
+                    <a16:rowId xmlns:a16="http://schemas.microsoft.com/office/drawing/2014/main" val="10001"/>
+                  </a:ext>
+                </a:extLst>
+              </a:tr>
+            </a:tbl>
+          </a:graphicData>
+        </a:graphic>
+      </p:graphicFrame>
+      <p:sp>
+        <p:nvSpPr>
+          <p:cNvPr id="63" name="직사각형 62">
+            <a:extLst>
+              <a:ext uri="{FF2B5EF4-FFF2-40B4-BE49-F238E27FC236}">
+                <a16:creationId xmlns:a16="http://schemas.microsoft.com/office/drawing/2014/main" id="{0795D27B-1871-413C-AF47-DA248EE19C30}"/>
+              </a:ext>
+            </a:extLst>
+          </p:cNvPr>
+          <p:cNvSpPr/>
+          <p:nvPr/>
+        </p:nvSpPr>
+        <p:spPr>
+          <a:xfrm>
+            <a:off x="4723893" y="2694780"/>
+            <a:ext cx="4565102" cy="988496"/>
+          </a:xfrm>
+          <a:prstGeom prst="rect">
+            <a:avLst/>
+          </a:prstGeom>
+          <a:solidFill>
+            <a:schemeClr val="bg1">
+              <a:lumMod val="95000"/>
+              <a:alpha val="74000"/>
+            </a:schemeClr>
+          </a:solidFill>
+          <a:ln w="12700">
+            <a:solidFill>
+              <a:srgbClr val="C00000"/>
+            </a:solidFill>
+            <a:prstDash val="sysDash"/>
+          </a:ln>
+        </p:spPr>
+        <p:style>
+          <a:lnRef idx="2">
+            <a:schemeClr val="accent1">
+              <a:shade val="50000"/>
+            </a:schemeClr>
+          </a:lnRef>
+          <a:fillRef idx="1">
+            <a:schemeClr val="accent1"/>
+          </a:fillRef>
+          <a:effectRef idx="0">
+            <a:schemeClr val="accent1"/>
+          </a:effectRef>
+          <a:fontRef idx="minor">
+            <a:schemeClr val="lt1"/>
+          </a:fontRef>
+        </p:style>
+        <p:txBody>
+          <a:bodyPr wrap="square" rtlCol="0" anchor="ctr">
+            <a:noAutofit/>
+          </a:bodyPr>
+          <a:lstStyle/>
+          <a:p>
+            <a:pPr algn="ctr"/>
+            <a:endParaRPr lang="ko-KR" altLang="en-US"/>
+          </a:p>
+        </p:txBody>
+      </p:sp>
+      <p:graphicFrame>
+        <p:nvGraphicFramePr>
+          <p:cNvPr id="64" name="표 4">
+            <a:extLst>
+              <a:ext uri="{FF2B5EF4-FFF2-40B4-BE49-F238E27FC236}">
+                <a16:creationId xmlns:a16="http://schemas.microsoft.com/office/drawing/2014/main" id="{7B5E06FA-08FB-41DD-8BA7-5661032BB977}"/>
+              </a:ext>
+            </a:extLst>
+          </p:cNvPr>
+          <p:cNvGraphicFramePr>
+            <a:graphicFrameLocks noGrp="1"/>
+          </p:cNvGraphicFramePr>
+          <p:nvPr>
+            <p:extLst>
+              <p:ext uri="{D42A27DB-BD31-4B8C-83A1-F6EECF244321}">
+                <p14:modId xmlns:p14="http://schemas.microsoft.com/office/powerpoint/2010/main" val="2594550105"/>
+              </p:ext>
+            </p:extLst>
+          </p:nvPr>
+        </p:nvGraphicFramePr>
+        <p:xfrm>
+          <a:off x="4847959" y="2821802"/>
+          <a:ext cx="1857764" cy="705983"/>
+        </p:xfrm>
+        <a:graphic>
+          <a:graphicData uri="http://schemas.openxmlformats.org/drawingml/2006/table">
+            <a:tbl>
+              <a:tblPr firstRow="1" bandRow="1">
+                <a:effectLst>
+                  <a:outerShdw blurRad="50800" dist="38100" dir="2700000" algn="tl" rotWithShape="0">
+                    <a:prstClr val="black">
+                      <a:alpha val="40000"/>
+                    </a:prstClr>
+                  </a:outerShdw>
+                </a:effectLst>
+                <a:tableStyleId>{D03447BB-5D67-496B-8E87-E561075AD55C}</a:tableStyleId>
+              </a:tblPr>
+              <a:tblGrid>
+                <a:gridCol w="1857764">
+                  <a:extLst>
+                    <a:ext uri="{9D8B030D-6E8A-4147-A177-3AD203B41FA5}">
+                      <a16:colId xmlns:a16="http://schemas.microsoft.com/office/drawing/2014/main" val="20000"/>
+                    </a:ext>
+                  </a:extLst>
+                </a:gridCol>
+              </a:tblGrid>
+              <a:tr h="0">
+                <a:tc>
+                  <a:txBody>
+                    <a:bodyPr/>
+                    <a:lstStyle/>
+                    <a:p>
+                      <a:pPr algn="ctr" latinLnBrk="1">
+                        <a:defRPr/>
+                      </a:pPr>
+                      <a:r>
+                        <a:rPr lang="ko-KR" altLang="en-US" sz="1100" dirty="0">
+                          <a:latin typeface="피플폰트 Bold" panose="020B0600000101010101" pitchFamily="50" charset="-127"/>
+                          <a:ea typeface="피플폰트 Bold" panose="020B0600000101010101" pitchFamily="50" charset="-127"/>
+                        </a:rPr>
+                        <a:t>신규 유동화 SPC</a:t>
+                      </a:r>
+                    </a:p>
+                  </a:txBody>
+                  <a:tcPr marL="127016" marR="127016" marT="63508" marB="63508" anchor="ctr">
+                    <a:lnL w="28575" cap="flat" cmpd="sng" algn="ctr">
+                      <a:solidFill>
+                        <a:schemeClr val="bg1"/>
+                      </a:solidFill>
+                      <a:prstDash val="solid"/>
+                      <a:round/>
+                      <a:headEnd type="none" w="med" len="med"/>
+                      <a:tailEnd type="none" w="med" len="med"/>
+                    </a:lnL>
+                    <a:lnR w="28575" cap="flat" cmpd="sng" algn="ctr">
+                      <a:solidFill>
+                        <a:schemeClr val="bg1"/>
+                      </a:solidFill>
+                      <a:prstDash val="solid"/>
+                      <a:round/>
+                      <a:headEnd type="none" w="med" len="med"/>
+                      <a:tailEnd type="none" w="med" len="med"/>
+                    </a:lnR>
+                    <a:lnT w="28575" cap="flat" cmpd="sng" algn="ctr">
+                      <a:solidFill>
+                        <a:schemeClr val="bg1"/>
+                      </a:solidFill>
+                      <a:prstDash val="solid"/>
+                      <a:round/>
+                      <a:headEnd type="none" w="med" len="med"/>
+                      <a:tailEnd type="none" w="med" len="med"/>
+                    </a:lnT>
+                    <a:lnB w="28575" cap="flat" cmpd="sng" algn="ctr">
+                      <a:solidFill>
+                        <a:schemeClr val="bg1"/>
+                      </a:solidFill>
+                      <a:prstDash val="solid"/>
+                      <a:round/>
+                      <a:headEnd type="none" w="med" len="med"/>
+                      <a:tailEnd type="none" w="med" len="med"/>
+                    </a:lnB>
+                    <a:solidFill>
+                      <a:srgbClr val="C00000"/>
+                    </a:solidFill>
+                  </a:tcPr>
+                </a:tc>
+                <a:extLst>
+                  <a:ext uri="{0D108BD9-81ED-4DB2-BD59-A6C34878D82A}">
+                    <a16:rowId xmlns:a16="http://schemas.microsoft.com/office/drawing/2014/main" val="10000"/>
+                  </a:ext>
+                </a:extLst>
+              </a:tr>
+              <a:tr h="411327">
+                <a:tc>
+                  <a:txBody>
+                    <a:bodyPr/>
+                    <a:lstStyle/>
+                    <a:p>
+                      <a:pPr algn="ctr" latinLnBrk="1">
+                        <a:defRPr/>
+                      </a:pPr>
+                      <a:r>
+                        <a:rPr lang="en-US" altLang="ko-KR" sz="1100" b="1" dirty="0">
+                          <a:solidFill>
+                            <a:schemeClr val="tx1"/>
+                          </a:solidFill>
+                          <a:latin typeface="피플폰트 Bold" panose="020B0600000101010101" pitchFamily="50" charset="-127"/>
+                          <a:ea typeface="피플폰트 Bold" panose="020B0600000101010101" pitchFamily="50" charset="-127"/>
+                        </a:rPr>
+                        <a:t>T.B.D. [*억 원]</a:t>
+                      </a:r>
+                    </a:p>
+                  </a:txBody>
+                  <a:tcPr marL="127016" marR="127016" marT="63508" marB="63508" anchor="ctr">
+                    <a:lnL w="28575" cap="flat" cmpd="sng" algn="ctr">
+                      <a:solidFill>
+                        <a:schemeClr val="bg1"/>
+                      </a:solidFill>
+                      <a:prstDash val="solid"/>
+                      <a:round/>
+                      <a:headEnd type="none" w="med" len="med"/>
+                      <a:tailEnd type="none" w="med" len="med"/>
+                    </a:lnL>
+                    <a:lnR w="28575" cap="flat" cmpd="sng" algn="ctr">
+                      <a:solidFill>
+                        <a:schemeClr val="bg1"/>
+                      </a:solidFill>
+                      <a:prstDash val="solid"/>
+                      <a:round/>
+                      <a:headEnd type="none" w="med" len="med"/>
+                      <a:tailEnd type="none" w="med" len="med"/>
+                    </a:lnR>
+                    <a:lnT w="28575" cap="flat" cmpd="sng" algn="ctr">
+                      <a:solidFill>
+                        <a:schemeClr val="bg1"/>
+                      </a:solidFill>
+                      <a:prstDash val="solid"/>
+                      <a:round/>
+                      <a:headEnd type="none" w="med" len="med"/>
+                      <a:tailEnd type="none" w="med" len="med"/>
+                    </a:lnT>
+                    <a:lnB w="28575" cap="flat" cmpd="sng" algn="ctr">
+                      <a:solidFill>
+                        <a:schemeClr val="bg1"/>
+                      </a:solidFill>
+                      <a:prstDash val="solid"/>
+                      <a:round/>
+                      <a:headEnd type="none" w="med" len="med"/>
+                      <a:tailEnd type="none" w="med" len="med"/>
+                    </a:lnB>
+                    <a:solidFill>
+                      <a:srgbClr val="D9D9D9"/>
+                    </a:solidFill>
+                  </a:tcPr>
+                </a:tc>
+                <a:extLst>
+                  <a:ext uri="{0D108BD9-81ED-4DB2-BD59-A6C34878D82A}">
+                    <a16:rowId xmlns:a16="http://schemas.microsoft.com/office/drawing/2014/main" val="10001"/>
+                  </a:ext>
+                </a:extLst>
+              </a:tr>
+            </a:tbl>
+          </a:graphicData>
+        </a:graphic>
+      </p:graphicFrame>
+      <p:graphicFrame>
+        <p:nvGraphicFramePr>
+          <p:cNvPr id="65" name="표 4">
+            <a:extLst>
+              <a:ext uri="{FF2B5EF4-FFF2-40B4-BE49-F238E27FC236}">
+                <a16:creationId xmlns:a16="http://schemas.microsoft.com/office/drawing/2014/main" id="{2709E1B2-C28D-4B46-9DC1-19E37FD3D678}"/>
+              </a:ext>
+            </a:extLst>
+          </p:cNvPr>
+          <p:cNvGraphicFramePr>
+            <a:graphicFrameLocks noGrp="1"/>
+          </p:cNvGraphicFramePr>
+          <p:nvPr>
+            <p:extLst>
+              <p:ext uri="{D42A27DB-BD31-4B8C-83A1-F6EECF244321}">
+                <p14:modId xmlns:p14="http://schemas.microsoft.com/office/powerpoint/2010/main" val="3872027256"/>
+              </p:ext>
+            </p:extLst>
+          </p:nvPr>
+        </p:nvGraphicFramePr>
+        <p:xfrm>
+          <a:off x="7878849" y="2852783"/>
+          <a:ext cx="1217353" cy="647648"/>
+        </p:xfrm>
+        <a:graphic>
+          <a:graphicData uri="http://schemas.openxmlformats.org/drawingml/2006/table">
+            <a:tbl>
+              <a:tblPr firstRow="1" bandRow="1">
+                <a:effectLst>
+                  <a:outerShdw blurRad="50800" dist="38100" dir="2700000" algn="tl" rotWithShape="0">
+                    <a:prstClr val="black">
+                      <a:alpha val="40000"/>
+                    </a:prstClr>
+                  </a:outerShdw>
+                </a:effectLst>
+                <a:tableStyleId>{D03447BB-5D67-496B-8E87-E561075AD55C}</a:tableStyleId>
+              </a:tblPr>
+              <a:tblGrid>
+                <a:gridCol w="1217353">
+                  <a:extLst>
+                    <a:ext uri="{9D8B030D-6E8A-4147-A177-3AD203B41FA5}">
+                      <a16:colId xmlns:a16="http://schemas.microsoft.com/office/drawing/2014/main" val="20000"/>
+                    </a:ext>
+                  </a:extLst>
+                </a:gridCol>
+              </a:tblGrid>
+              <a:tr h="0">
+                <a:tc>
+                  <a:txBody>
+                    <a:bodyPr/>
+                    <a:lstStyle/>
+                    <a:p>
+                      <a:pPr marL="0" algn="ctr" defTabSz="914400" rtl="0" eaLnBrk="1" latinLnBrk="1" hangingPunct="1">
+                        <a:defRPr/>
+                      </a:pPr>
+                      <a:r>
+                        <a:rPr lang="ko-KR" altLang="en-US" sz="1100" b="1" kern="1200" dirty="0">
+                          <a:solidFill>
+                            <a:schemeClr val="lt1"/>
+                          </a:solidFill>
+                          <a:latin typeface="피플폰트 Bold" panose="020B0600000101010101" pitchFamily="50" charset="-127"/>
+                          <a:ea typeface="피플폰트 Bold" panose="020B0600000101010101" pitchFamily="50" charset="-127"/>
+                          <a:cs typeface="+mn-cs"/>
+                        </a:rPr>
+                        <a:t>사채권자</a:t>
+                      </a:r>
+                    </a:p>
+                  </a:txBody>
+                  <a:tcPr marL="127016" marR="127016" marT="63508" marB="63508" anchor="ctr">
+                    <a:lnL w="28575" cap="flat" cmpd="sng" algn="ctr">
+                      <a:solidFill>
+                        <a:schemeClr val="bg1"/>
+                      </a:solidFill>
+                      <a:prstDash val="solid"/>
+                      <a:round/>
+                      <a:headEnd type="none" w="med" len="med"/>
+                      <a:tailEnd type="none" w="med" len="med"/>
+                    </a:lnL>
+                    <a:lnR w="28575" cap="flat" cmpd="sng" algn="ctr">
+                      <a:solidFill>
+                        <a:schemeClr val="bg1"/>
+                      </a:solidFill>
+                      <a:prstDash val="solid"/>
+                      <a:round/>
+                      <a:headEnd type="none" w="med" len="med"/>
+                      <a:tailEnd type="none" w="med" len="med"/>
+                    </a:lnR>
+                    <a:lnT w="28575" cap="flat" cmpd="sng" algn="ctr">
+                      <a:solidFill>
+                        <a:schemeClr val="bg1"/>
+                      </a:solidFill>
+                      <a:prstDash val="solid"/>
+                      <a:round/>
+                      <a:headEnd type="none" w="med" len="med"/>
+                      <a:tailEnd type="none" w="med" len="med"/>
+                    </a:lnT>
+                    <a:lnB w="28575" cap="flat" cmpd="sng" algn="ctr">
+                      <a:solidFill>
+                        <a:schemeClr val="bg1"/>
+                      </a:solidFill>
+                      <a:prstDash val="solid"/>
+                      <a:round/>
+                      <a:headEnd type="none" w="med" len="med"/>
+                      <a:tailEnd type="none" w="med" len="med"/>
+                    </a:lnB>
+                    <a:solidFill>
+                      <a:srgbClr val="C00000"/>
+                    </a:solidFill>
+                  </a:tcPr>
+                </a:tc>
+                <a:extLst>
+                  <a:ext uri="{0D108BD9-81ED-4DB2-BD59-A6C34878D82A}">
+                    <a16:rowId xmlns:a16="http://schemas.microsoft.com/office/drawing/2014/main" val="10000"/>
+                  </a:ext>
+                </a:extLst>
+              </a:tr>
+              <a:tr h="352992">
+                <a:tc>
+                  <a:txBody>
+                    <a:bodyPr/>
+                    <a:lstStyle/>
+                    <a:p>
+                      <a:pPr marL="0" algn="ctr" defTabSz="914400" rtl="0" eaLnBrk="1" latinLnBrk="1" hangingPunct="1">
+                        <a:defRPr/>
+                      </a:pPr>
+                      <a:r>
+                        <a:rPr lang="en-US" altLang="ko-KR" sz="1100" b="1" kern="1200" dirty="0">
+                          <a:solidFill>
+                            <a:schemeClr val="tx1"/>
+                          </a:solidFill>
+                          <a:latin typeface="피플폰트 Bold" panose="020B0600000101010101" pitchFamily="50" charset="-127"/>
+                          <a:ea typeface="피플폰트 Bold" panose="020B0600000101010101" pitchFamily="50" charset="-127"/>
+                          <a:cs typeface="+mn-cs"/>
+                        </a:rPr>
+                        <a:t>T.B.D. [*억 원]</a:t>
+                      </a:r>
+                    </a:p>
+                  </a:txBody>
+                  <a:tcPr marL="127016" marR="127016" marT="63508" marB="63508" anchor="ctr">
+                    <a:lnL w="28575" cap="flat" cmpd="sng" algn="ctr">
+                      <a:solidFill>
+                        <a:schemeClr val="bg1"/>
+                      </a:solidFill>
+                      <a:prstDash val="solid"/>
+                      <a:round/>
+                      <a:headEnd type="none" w="med" len="med"/>
+                      <a:tailEnd type="none" w="med" len="med"/>
+                    </a:lnL>
+                    <a:lnR w="28575" cap="flat" cmpd="sng" algn="ctr">
+                      <a:solidFill>
+                        <a:schemeClr val="bg1"/>
+                      </a:solidFill>
+                      <a:prstDash val="solid"/>
+                      <a:round/>
+                      <a:headEnd type="none" w="med" len="med"/>
+                      <a:tailEnd type="none" w="med" len="med"/>
+                    </a:lnR>
+                    <a:lnT w="28575" cap="flat" cmpd="sng" algn="ctr">
+                      <a:solidFill>
+                        <a:schemeClr val="bg1"/>
+                      </a:solidFill>
+                      <a:prstDash val="solid"/>
+                      <a:round/>
+                      <a:headEnd type="none" w="med" len="med"/>
+                      <a:tailEnd type="none" w="med" len="med"/>
+                    </a:lnT>
+                    <a:lnB w="28575" cap="flat" cmpd="sng" algn="ctr">
+                      <a:solidFill>
+                        <a:schemeClr val="bg1"/>
+                      </a:solidFill>
+                      <a:prstDash val="solid"/>
+                      <a:round/>
+                      <a:headEnd type="none" w="med" len="med"/>
+                      <a:tailEnd type="none" w="med" len="med"/>
+                    </a:lnB>
+                    <a:solidFill>
+                      <a:schemeClr val="accent4">
+                        <a:lumMod val="60000"/>
+                        <a:lumOff val="40000"/>
+                      </a:schemeClr>
+                    </a:solidFill>
+                  </a:tcPr>
+                </a:tc>
+                <a:extLst>
+                  <a:ext uri="{0D108BD9-81ED-4DB2-BD59-A6C34878D82A}">
+                    <a16:rowId xmlns:a16="http://schemas.microsoft.com/office/drawing/2014/main" val="10001"/>
+                  </a:ext>
+                </a:extLst>
+              </a:tr>
+            </a:tbl>
+          </a:graphicData>
+        </a:graphic>
+      </p:graphicFrame>
+      <p:cxnSp>
+        <p:nvCxnSpPr>
+          <p:cNvPr id="66" name="직선 화살표 연결선 65">
+            <a:extLst>
+              <a:ext uri="{FF2B5EF4-FFF2-40B4-BE49-F238E27FC236}">
+                <a16:creationId xmlns:a16="http://schemas.microsoft.com/office/drawing/2014/main" id="{3F665270-0C8C-4854-AAB1-EA6CDDADE706}"/>
+              </a:ext>
+            </a:extLst>
+          </p:cNvPr>
+          <p:cNvCxnSpPr>
+            <a:cxnSpLocks/>
+            <a:endCxn id="64" idx="3"/>
+          </p:cNvCxnSpPr>
+          <p:nvPr/>
+        </p:nvCxnSpPr>
+        <p:spPr>
+          <a:xfrm flipH="1">
+            <a:off x="6705723" y="3169107"/>
+            <a:ext cx="1193245" cy="5686"/>
+          </a:xfrm>
+          <a:prstGeom prst="straightConnector1">
+            <a:avLst/>
+          </a:prstGeom>
+          <a:solidFill>
+            <a:schemeClr val="accent1"/>
+          </a:solidFill>
+          <a:ln w="19050" cap="flat" cmpd="sng" algn="ctr">
+            <a:solidFill>
+              <a:schemeClr val="tx1"/>
+            </a:solidFill>
+            <a:prstDash val="solid"/>
+            <a:round/>
+            <a:headEnd type="triangle" w="sm" len="sm"/>
+            <a:tailEnd type="triangle" w="sm" len="sm"/>
+          </a:ln>
+          <a:effectLst/>
+        </p:spPr>
+      </p:cxnSp>
+      <p:sp>
+        <p:nvSpPr>
+          <p:cNvPr id="67" name="텍스트 개체 틀 2">
+            <a:extLst>
+              <a:ext uri="{FF2B5EF4-FFF2-40B4-BE49-F238E27FC236}">
+                <a16:creationId xmlns:a16="http://schemas.microsoft.com/office/drawing/2014/main" id="{85386CA8-E9E5-4D4D-B4D6-6CA950D66E25}"/>
+              </a:ext>
+            </a:extLst>
+          </p:cNvPr>
+          <p:cNvSpPr txBox="1">
+            <a:spLocks/>
+          </p:cNvSpPr>
+          <p:nvPr/>
+        </p:nvSpPr>
+        <p:spPr>
+          <a:xfrm>
+            <a:off x="6809045" y="2986014"/>
+            <a:ext cx="1060169" cy="349711"/>
+          </a:xfrm>
+          <a:prstGeom prst="rect">
+            <a:avLst/>
+          </a:prstGeom>
+        </p:spPr>
+        <p:txBody>
+          <a:bodyPr vert="horz" wrap="square" lIns="0" tIns="0" rIns="0" bIns="0" rtlCol="0" anchor="ctr">
+            <a:spAutoFit/>
+          </a:bodyPr>
+          <a:lstStyle>
+            <a:lvl1pPr marL="0" indent="0" algn="l" defTabSz="914400" rtl="0" eaLnBrk="1" latinLnBrk="1" hangingPunct="1">
+              <a:lnSpc>
+                <a:spcPct val="90000"/>
+              </a:lnSpc>
+              <a:spcBef>
+                <a:spcPts val="1000"/>
+              </a:spcBef>
+              <a:buFont typeface="Arial" panose="020B0604020202020204" pitchFamily="34" charset="0"/>
+              <a:buNone/>
+              <a:defRPr sz="1200" kern="1200">
+                <a:solidFill>
+                  <a:schemeClr val="tx1"/>
+                </a:solidFill>
+                <a:latin typeface="AppleSDGothicNeoM00" panose="02000503000000000000" pitchFamily="2" charset="-127"/>
+                <a:ea typeface="AppleSDGothicNeoM00" panose="02000503000000000000" pitchFamily="2" charset="-127"/>
+                <a:cs typeface="+mn-cs"/>
+              </a:defRPr>
+            </a:lvl1pPr>
+            <a:lvl2pPr marL="685800" indent="-228600" algn="l" defTabSz="914400" rtl="0" eaLnBrk="1" latinLnBrk="1" hangingPunct="1">
+              <a:lnSpc>
+                <a:spcPct val="90000"/>
+              </a:lnSpc>
+              <a:spcBef>
+                <a:spcPts val="500"/>
+              </a:spcBef>
+              <a:buFont typeface="Arial" panose="020B0604020202020204" pitchFamily="34" charset="0"/>
+              <a:buChar char="•"/>
+              <a:defRPr sz="2400" kern="1200">
+                <a:solidFill>
+                  <a:schemeClr val="tx1"/>
+                </a:solidFill>
+                <a:latin typeface="+mn-lt"/>
+                <a:ea typeface="+mn-ea"/>
+                <a:cs typeface="+mn-cs"/>
+              </a:defRPr>
+            </a:lvl2pPr>
+            <a:lvl3pPr marL="1143000" indent="-228600" algn="l" defTabSz="914400" rtl="0" eaLnBrk="1" latinLnBrk="1" hangingPunct="1">
+              <a:lnSpc>
+                <a:spcPct val="90000"/>
+              </a:lnSpc>
+              <a:spcBef>
+                <a:spcPts val="500"/>
+              </a:spcBef>
+              <a:buFont typeface="Arial" panose="020B0604020202020204" pitchFamily="34" charset="0"/>
+              <a:buChar char="•"/>
+              <a:defRPr sz="2000" kern="1200">
+                <a:solidFill>
+                  <a:schemeClr val="tx1"/>
+                </a:solidFill>
+                <a:latin typeface="+mn-lt"/>
+                <a:ea typeface="+mn-ea"/>
+                <a:cs typeface="+mn-cs"/>
+              </a:defRPr>
+            </a:lvl3pPr>
+            <a:lvl4pPr marL="1600200" indent="-228600" algn="l" defTabSz="914400" rtl="0" eaLnBrk="1" latinLnBrk="1" hangingPunct="1">
+              <a:lnSpc>
+                <a:spcPct val="90000"/>
+              </a:lnSpc>
+              <a:spcBef>
+                <a:spcPts val="500"/>
+              </a:spcBef>
+              <a:buFont typeface="Arial" panose="020B0604020202020204" pitchFamily="34" charset="0"/>
+              <a:buChar char="•"/>
+              <a:defRPr sz="1800" kern="1200">
+                <a:solidFill>
+                  <a:schemeClr val="tx1"/>
+                </a:solidFill>
+                <a:latin typeface="+mn-lt"/>
+                <a:ea typeface="+mn-ea"/>
+                <a:cs typeface="+mn-cs"/>
+              </a:defRPr>
+            </a:lvl4pPr>
+            <a:lvl5pPr marL="2057400" indent="-228600" algn="l" defTabSz="914400" rtl="0" eaLnBrk="1" latinLnBrk="1" hangingPunct="1">
+              <a:lnSpc>
+                <a:spcPct val="90000"/>
+              </a:lnSpc>
+              <a:spcBef>
+                <a:spcPts val="500"/>
+              </a:spcBef>
+              <a:buFont typeface="Arial" panose="020B0604020202020204" pitchFamily="34" charset="0"/>
+              <a:buChar char="•"/>
+              <a:defRPr sz="1800" kern="1200">
+                <a:solidFill>
+                  <a:schemeClr val="tx1"/>
+                </a:solidFill>
+                <a:latin typeface="+mn-lt"/>
+                <a:ea typeface="+mn-ea"/>
+                <a:cs typeface="+mn-cs"/>
+              </a:defRPr>
+            </a:lvl5pPr>
+            <a:lvl6pPr marL="2514600" indent="-228600" algn="l" defTabSz="914400" rtl="0" eaLnBrk="1" latinLnBrk="1" hangingPunct="1">
+              <a:lnSpc>
+                <a:spcPct val="90000"/>
+              </a:lnSpc>
+              <a:spcBef>
+                <a:spcPts val="500"/>
+              </a:spcBef>
+              <a:buFont typeface="Arial" panose="020B0604020202020204" pitchFamily="34" charset="0"/>
+              <a:buChar char="•"/>
+              <a:defRPr sz="1800" kern="1200">
+                <a:solidFill>
+                  <a:schemeClr val="tx1"/>
+                </a:solidFill>
+                <a:latin typeface="+mn-lt"/>
+                <a:ea typeface="+mn-ea"/>
+                <a:cs typeface="+mn-cs"/>
+              </a:defRPr>
+            </a:lvl6pPr>
+            <a:lvl7pPr marL="2971800" indent="-228600" algn="l" defTabSz="914400" rtl="0" eaLnBrk="1" latinLnBrk="1" hangingPunct="1">
+              <a:lnSpc>
+                <a:spcPct val="90000"/>
+              </a:lnSpc>
+              <a:spcBef>
+                <a:spcPts val="500"/>
+              </a:spcBef>
+              <a:buFont typeface="Arial" panose="020B0604020202020204" pitchFamily="34" charset="0"/>
+              <a:buChar char="•"/>
+              <a:defRPr sz="1800" kern="1200">
+                <a:solidFill>
+                  <a:schemeClr val="tx1"/>
+                </a:solidFill>
+                <a:latin typeface="+mn-lt"/>
+                <a:ea typeface="+mn-ea"/>
+                <a:cs typeface="+mn-cs"/>
+              </a:defRPr>
+            </a:lvl7pPr>
+            <a:lvl8pPr marL="3429000" indent="-228600" algn="l" defTabSz="914400" rtl="0" eaLnBrk="1" latinLnBrk="1" hangingPunct="1">
+              <a:lnSpc>
+                <a:spcPct val="90000"/>
+              </a:lnSpc>
+              <a:spcBef>
+                <a:spcPts val="500"/>
+              </a:spcBef>
+              <a:buFont typeface="Arial" panose="020B0604020202020204" pitchFamily="34" charset="0"/>
+              <a:buChar char="•"/>
+              <a:defRPr sz="1800" kern="1200">
+                <a:solidFill>
+                  <a:schemeClr val="tx1"/>
+                </a:solidFill>
+                <a:latin typeface="+mn-lt"/>
+                <a:ea typeface="+mn-ea"/>
+                <a:cs typeface="+mn-cs"/>
+              </a:defRPr>
+            </a:lvl8pPr>
+            <a:lvl9pPr marL="3886200" indent="-228600" algn="l" defTabSz="914400" rtl="0" eaLnBrk="1" latinLnBrk="1" hangingPunct="1">
+              <a:lnSpc>
+                <a:spcPct val="90000"/>
+              </a:lnSpc>
+              <a:spcBef>
+                <a:spcPts val="500"/>
+              </a:spcBef>
+              <a:buFont typeface="Arial" panose="020B0604020202020204" pitchFamily="34" charset="0"/>
+              <a:buChar char="•"/>
+              <a:defRPr sz="1800" kern="1200">
+                <a:solidFill>
+                  <a:schemeClr val="tx1"/>
+                </a:solidFill>
+                <a:latin typeface="+mn-lt"/>
+                <a:ea typeface="+mn-ea"/>
+                <a:cs typeface="+mn-cs"/>
+              </a:defRPr>
+            </a:lvl9pPr>
+          </a:lstStyle>
+          <a:p>
+            <a:pPr algn="ctr">
+              <a:lnSpc>
+                <a:spcPct val="130000"/>
+              </a:lnSpc>
+              <a:spcBef>
+                <a:spcPts val="0"/>
+              </a:spcBef>
+            </a:pPr>
+            <a:r>
+              <a:rPr lang="ko-KR" altLang="en-US" sz="900" dirty="0">
+                <a:latin typeface="피플폰트 Bold" panose="020B0600000101010101" pitchFamily="50" charset="-127"/>
+                <a:ea typeface="피플폰트 Bold" panose="020B0600000101010101" pitchFamily="50" charset="-127"/>
+              </a:rPr>
+              <a:t>사모사채</a:t>
+            </a:r>
+            <a:endParaRPr lang="en-US" altLang="ko-KR" sz="900" dirty="0">
+              <a:latin typeface="피플폰트 Bold" panose="020B0600000101010101" pitchFamily="50" charset="-127"/>
+              <a:ea typeface="피플폰트 Bold" panose="020B0600000101010101" pitchFamily="50" charset="-127"/>
+            </a:endParaRPr>
+          </a:p>
+          <a:p>
+            <a:pPr algn="ctr">
+              <a:lnSpc>
+                <a:spcPct val="130000"/>
+              </a:lnSpc>
+              <a:spcBef>
+                <a:spcPts val="0"/>
+              </a:spcBef>
+            </a:pPr>
+            <a:r>
+              <a:rPr lang="ko-KR" altLang="en-US" sz="900" dirty="0">
+                <a:latin typeface="피플폰트 Bold" panose="020B0600000101010101" pitchFamily="50" charset="-127"/>
+                <a:ea typeface="피플폰트 Bold" panose="020B0600000101010101" pitchFamily="50" charset="-127"/>
+              </a:rPr>
+              <a:t> 발행/인수</a:t>
+            </a:r>
+            <a:endParaRPr lang="en-US" altLang="ko-KR" sz="900" dirty="0">
+              <a:latin typeface="피플폰트 Bold" panose="020B0600000101010101" pitchFamily="50" charset="-127"/>
+              <a:ea typeface="피플폰트 Bold" panose="020B0600000101010101" pitchFamily="50" charset="-127"/>
+            </a:endParaRPr>
+          </a:p>
+        </p:txBody>
+      </p:sp>
+      <p:graphicFrame>
+        <p:nvGraphicFramePr>
+          <p:cNvPr id="68" name="표 4">
+            <a:extLst>
+              <a:ext uri="{FF2B5EF4-FFF2-40B4-BE49-F238E27FC236}">
+                <a16:creationId xmlns:a16="http://schemas.microsoft.com/office/drawing/2014/main" id="{107F3B78-D265-4694-A5C4-286DE926496F}"/>
+              </a:ext>
+            </a:extLst>
+          </p:cNvPr>
+          <p:cNvGraphicFramePr>
+            <a:graphicFrameLocks noGrp="1"/>
+          </p:cNvGraphicFramePr>
+          <p:nvPr>
+            <p:extLst>
+              <p:ext uri="{D42A27DB-BD31-4B8C-83A1-F6EECF244321}">
+                <p14:modId xmlns:p14="http://schemas.microsoft.com/office/powerpoint/2010/main" val="219670474"/>
+              </p:ext>
+            </p:extLst>
+          </p:nvPr>
+        </p:nvGraphicFramePr>
+        <p:xfrm>
+          <a:off x="4764845" y="4381335"/>
+          <a:ext cx="1960205" cy="424382"/>
+        </p:xfrm>
+        <a:graphic>
+          <a:graphicData uri="http://schemas.openxmlformats.org/drawingml/2006/table">
+            <a:tbl>
+              <a:tblPr firstRow="1" bandRow="1">
+                <a:effectLst>
+                  <a:outerShdw blurRad="50800" dist="38100" dir="2700000" algn="tl" rotWithShape="0">
+                    <a:prstClr val="black">
+                      <a:alpha val="40000"/>
+                    </a:prstClr>
+                  </a:outerShdw>
+                </a:effectLst>
+                <a:tableStyleId>{D03447BB-5D67-496B-8E87-E561075AD55C}</a:tableStyleId>
+              </a:tblPr>
+              <a:tblGrid>
+                <a:gridCol w="1960205">
+                  <a:extLst>
+                    <a:ext uri="{9D8B030D-6E8A-4147-A177-3AD203B41FA5}">
+                      <a16:colId xmlns:a16="http://schemas.microsoft.com/office/drawing/2014/main" val="20000"/>
+                    </a:ext>
+                  </a:extLst>
+                </a:gridCol>
+              </a:tblGrid>
+              <a:tr h="424382">
+                <a:tc>
+                  <a:txBody>
+                    <a:bodyPr/>
+                    <a:lstStyle/>
+                    <a:p>
+                      <a:pPr algn="ctr" latinLnBrk="1">
+                        <a:defRPr/>
+                      </a:pPr>
+                      <a:r>
+                        <a:rPr lang="ko-KR" altLang="en-US" sz="1200" b="1" dirty="0">
+                          <a:solidFill>
+                            <a:schemeClr val="tx1"/>
+                          </a:solidFill>
+                          <a:latin typeface="피플폰트 Bold" panose="020B0600000101010101" pitchFamily="50" charset="-127"/>
+                          <a:ea typeface="피플폰트 Bold" panose="020B0600000101010101" pitchFamily="50" charset="-127"/>
+                        </a:rPr>
+                        <a:t>기타 </a:t>
+                      </a:r>
+                      <a:r>
+                        <a:rPr lang="ko-KR" altLang="en-US" sz="1200" b="1" dirty="0" err="1">
+                          <a:solidFill>
+                            <a:schemeClr val="tx1"/>
+                          </a:solidFill>
+                          <a:latin typeface="피플폰트 Bold" panose="020B0600000101010101" pitchFamily="50" charset="-127"/>
+                          <a:ea typeface="피플폰트 Bold" panose="020B0600000101010101" pitchFamily="50" charset="-127"/>
+                        </a:rPr>
+                        <a:t>Tr</a:t>
+                      </a:r>
+                      <a:r>
+                        <a:rPr lang="ko-KR" altLang="en-US" sz="1200" b="1" dirty="0">
+                          <a:solidFill>
+                            <a:schemeClr val="tx1"/>
+                          </a:solidFill>
+                          <a:latin typeface="피플폰트 Bold" panose="020B0600000101010101" pitchFamily="50" charset="-127"/>
+                          <a:ea typeface="피플폰트 Bold" panose="020B0600000101010101" pitchFamily="50" charset="-127"/>
+                        </a:rPr>
+                        <a:t>.</a:t>
+                      </a:r>
+                      <a:r>
+                        <a:rPr lang="en-US" altLang="ko-KR" sz="1200" b="1" dirty="0">
+                          <a:solidFill>
+                            <a:schemeClr val="tx1"/>
+                          </a:solidFill>
+                          <a:latin typeface="피플폰트 Bold" panose="020B0600000101010101" pitchFamily="50" charset="-127"/>
+                          <a:ea typeface="피플폰트 Bold" panose="020B0600000101010101" pitchFamily="50" charset="-127"/>
+                        </a:rPr>
+                        <a:t>B</a:t>
+                      </a:r>
+                      <a:r>
+                        <a:rPr lang="ko-KR" altLang="en-US" sz="1200" b="1" dirty="0">
+                          <a:solidFill>
+                            <a:schemeClr val="tx1"/>
+                          </a:solidFill>
+                          <a:latin typeface="피플폰트 Bold" panose="020B0600000101010101" pitchFamily="50" charset="-127"/>
+                          <a:ea typeface="피플폰트 Bold" panose="020B0600000101010101" pitchFamily="50" charset="-127"/>
+                        </a:rPr>
+                        <a:t> 대주</a:t>
+                      </a:r>
+                    </a:p>
+                  </a:txBody>
+                  <a:tcPr marL="0" marR="0" marT="72000" marB="0" anchor="ctr">
+                    <a:lnL w="28575" cap="flat" cmpd="sng" algn="ctr">
+                      <a:solidFill>
+                        <a:schemeClr val="bg1"/>
+                      </a:solidFill>
+                      <a:prstDash val="solid"/>
+                      <a:round/>
+                      <a:headEnd type="none" w="med" len="med"/>
+                      <a:tailEnd type="none" w="med" len="med"/>
+                    </a:lnL>
+                    <a:lnR w="28575" cap="flat" cmpd="sng" algn="ctr">
+                      <a:solidFill>
+                        <a:schemeClr val="bg1"/>
+                      </a:solidFill>
+                      <a:prstDash val="solid"/>
+                      <a:round/>
+                      <a:headEnd type="none" w="med" len="med"/>
+                      <a:tailEnd type="none" w="med" len="med"/>
+                    </a:lnR>
+                    <a:lnT w="28575" cap="flat" cmpd="sng" algn="ctr">
+                      <a:solidFill>
+                        <a:schemeClr val="bg1"/>
+                      </a:solidFill>
+                      <a:prstDash val="solid"/>
+                      <a:round/>
+                      <a:headEnd type="none" w="med" len="med"/>
+                      <a:tailEnd type="none" w="med" len="med"/>
+                    </a:lnT>
+                    <a:lnB w="28575" cap="flat" cmpd="sng" algn="ctr">
+                      <a:solidFill>
+                        <a:schemeClr val="bg1"/>
+                      </a:solidFill>
+                      <a:prstDash val="solid"/>
+                      <a:round/>
+                      <a:headEnd type="none" w="med" len="med"/>
+                      <a:tailEnd type="none" w="med" len="med"/>
+                    </a:lnB>
+                    <a:solidFill>
+                      <a:srgbClr val="D9D9D9"/>
+                    </a:solidFill>
+                  </a:tcPr>
+                </a:tc>
+                <a:extLst>
+                  <a:ext uri="{0D108BD9-81ED-4DB2-BD59-A6C34878D82A}">
+                    <a16:rowId xmlns:a16="http://schemas.microsoft.com/office/drawing/2014/main" val="10001"/>
+                  </a:ext>
+                </a:extLst>
+              </a:tr>
+            </a:tbl>
+          </a:graphicData>
+        </a:graphic>
+      </p:graphicFrame>
+      <p:cxnSp>
+        <p:nvCxnSpPr>
+          <p:cNvPr id="69" name="연결선: 꺾임 68">
+            <a:extLst>
+              <a:ext uri="{FF2B5EF4-FFF2-40B4-BE49-F238E27FC236}">
+                <a16:creationId xmlns:a16="http://schemas.microsoft.com/office/drawing/2014/main" id="{5DD51625-F2B2-4654-9852-2D1E56E191E8}"/>
+              </a:ext>
+            </a:extLst>
+          </p:cNvPr>
+          <p:cNvCxnSpPr>
+            <a:cxnSpLocks/>
+            <a:stCxn id="31" idx="0"/>
+            <a:endCxn id="25" idx="0"/>
+          </p:cNvCxnSpPr>
+          <p:nvPr/>
+        </p:nvCxnSpPr>
+        <p:spPr>
+          <a:xfrm rot="16200000" flipH="1">
+            <a:off x="3782510" y="-436677"/>
+            <a:ext cx="16246" cy="3928407"/>
+          </a:xfrm>
+          <a:prstGeom prst="bentConnector3">
+            <a:avLst>
+              <a:gd name="adj1" fmla="val -1407116"/>
+            </a:avLst>
+          </a:prstGeom>
+          <a:solidFill>
+            <a:schemeClr val="accent1"/>
+          </a:solidFill>
+          <a:ln w="19050" cap="flat" cmpd="sng" algn="ctr">
+            <a:solidFill>
+              <a:schemeClr val="tx1"/>
+            </a:solidFill>
+            <a:prstDash val="solid"/>
+            <a:round/>
+            <a:headEnd type="triangle" w="sm" len="sm"/>
+            <a:tailEnd type="triangle" w="sm" len="sm"/>
+          </a:ln>
+          <a:effectLst/>
+        </p:spPr>
+      </p:cxnSp>
+      <p:sp>
+        <p:nvSpPr>
+          <p:cNvPr id="70" name="텍스트 개체 틀 2">
+            <a:extLst>
+              <a:ext uri="{FF2B5EF4-FFF2-40B4-BE49-F238E27FC236}">
+                <a16:creationId xmlns:a16="http://schemas.microsoft.com/office/drawing/2014/main" id="{1566B842-1B00-483C-8699-B14A9566BD04}"/>
+              </a:ext>
+            </a:extLst>
+          </p:cNvPr>
+          <p:cNvSpPr txBox="1">
+            <a:spLocks/>
+          </p:cNvSpPr>
+          <p:nvPr/>
+        </p:nvSpPr>
+        <p:spPr>
+          <a:xfrm>
+            <a:off x="3012884" y="1084838"/>
+            <a:ext cx="1940116" cy="169662"/>
+          </a:xfrm>
+          <a:prstGeom prst="rect">
+            <a:avLst/>
+          </a:prstGeom>
+        </p:spPr>
+        <p:txBody>
+          <a:bodyPr vert="horz" wrap="square" lIns="0" tIns="0" rIns="0" bIns="0" rtlCol="0" anchor="ctr">
+            <a:spAutoFit/>
+          </a:bodyPr>
+          <a:lstStyle>
+            <a:lvl1pPr marL="0" indent="0" algn="l" defTabSz="914400" rtl="0" eaLnBrk="1" latinLnBrk="1" hangingPunct="1">
+              <a:lnSpc>
+                <a:spcPct val="90000"/>
+              </a:lnSpc>
+              <a:spcBef>
+                <a:spcPts val="1000"/>
+              </a:spcBef>
+              <a:buFont typeface="Arial" panose="020B0604020202020204" pitchFamily="34" charset="0"/>
+              <a:buNone/>
+              <a:defRPr sz="1200" kern="1200">
+                <a:solidFill>
+                  <a:schemeClr val="tx1"/>
+                </a:solidFill>
+                <a:latin typeface="AppleSDGothicNeoM00" panose="02000503000000000000" pitchFamily="2" charset="-127"/>
+                <a:ea typeface="AppleSDGothicNeoM00" panose="02000503000000000000" pitchFamily="2" charset="-127"/>
+                <a:cs typeface="+mn-cs"/>
+              </a:defRPr>
+            </a:lvl1pPr>
+            <a:lvl2pPr marL="685800" indent="-228600" algn="l" defTabSz="914400" rtl="0" eaLnBrk="1" latinLnBrk="1" hangingPunct="1">
+              <a:lnSpc>
+                <a:spcPct val="90000"/>
+              </a:lnSpc>
+              <a:spcBef>
+                <a:spcPts val="500"/>
+              </a:spcBef>
+              <a:buFont typeface="Arial" panose="020B0604020202020204" pitchFamily="34" charset="0"/>
+              <a:buChar char="•"/>
+              <a:defRPr sz="2400" kern="1200">
+                <a:solidFill>
+                  <a:schemeClr val="tx1"/>
+                </a:solidFill>
+                <a:latin typeface="+mn-lt"/>
+                <a:ea typeface="+mn-ea"/>
+                <a:cs typeface="+mn-cs"/>
+              </a:defRPr>
+            </a:lvl2pPr>
+            <a:lvl3pPr marL="1143000" indent="-228600" algn="l" defTabSz="914400" rtl="0" eaLnBrk="1" latinLnBrk="1" hangingPunct="1">
+              <a:lnSpc>
+                <a:spcPct val="90000"/>
+              </a:lnSpc>
+              <a:spcBef>
+                <a:spcPts val="500"/>
+              </a:spcBef>
+              <a:buFont typeface="Arial" panose="020B0604020202020204" pitchFamily="34" charset="0"/>
+              <a:buChar char="•"/>
+              <a:defRPr sz="2000" kern="1200">
+                <a:solidFill>
+                  <a:schemeClr val="tx1"/>
+                </a:solidFill>
+                <a:latin typeface="+mn-lt"/>
+                <a:ea typeface="+mn-ea"/>
+                <a:cs typeface="+mn-cs"/>
+              </a:defRPr>
+            </a:lvl3pPr>
+            <a:lvl4pPr marL="1600200" indent="-228600" algn="l" defTabSz="914400" rtl="0" eaLnBrk="1" latinLnBrk="1" hangingPunct="1">
+              <a:lnSpc>
+                <a:spcPct val="90000"/>
+              </a:lnSpc>
+              <a:spcBef>
+                <a:spcPts val="500"/>
+              </a:spcBef>
+              <a:buFont typeface="Arial" panose="020B0604020202020204" pitchFamily="34" charset="0"/>
+              <a:buChar char="•"/>
+              <a:defRPr sz="1800" kern="1200">
+                <a:solidFill>
+                  <a:schemeClr val="tx1"/>
+                </a:solidFill>
+                <a:latin typeface="+mn-lt"/>
+                <a:ea typeface="+mn-ea"/>
+                <a:cs typeface="+mn-cs"/>
+              </a:defRPr>
+            </a:lvl4pPr>
+            <a:lvl5pPr marL="2057400" indent="-228600" algn="l" defTabSz="914400" rtl="0" eaLnBrk="1" latinLnBrk="1" hangingPunct="1">
+              <a:lnSpc>
+                <a:spcPct val="90000"/>
+              </a:lnSpc>
+              <a:spcBef>
+                <a:spcPts val="500"/>
+              </a:spcBef>
+              <a:buFont typeface="Arial" panose="020B0604020202020204" pitchFamily="34" charset="0"/>
+              <a:buChar char="•"/>
+              <a:defRPr sz="1800" kern="1200">
+                <a:solidFill>
+                  <a:schemeClr val="tx1"/>
+                </a:solidFill>
+                <a:latin typeface="+mn-lt"/>
+                <a:ea typeface="+mn-ea"/>
+                <a:cs typeface="+mn-cs"/>
+              </a:defRPr>
+            </a:lvl5pPr>
+            <a:lvl6pPr marL="2514600" indent="-228600" algn="l" defTabSz="914400" rtl="0" eaLnBrk="1" latinLnBrk="1" hangingPunct="1">
+              <a:lnSpc>
+                <a:spcPct val="90000"/>
+              </a:lnSpc>
+              <a:spcBef>
+                <a:spcPts val="500"/>
+              </a:spcBef>
+              <a:buFont typeface="Arial" panose="020B0604020202020204" pitchFamily="34" charset="0"/>
+              <a:buChar char="•"/>
+              <a:defRPr sz="1800" kern="1200">
+                <a:solidFill>
+                  <a:schemeClr val="tx1"/>
+                </a:solidFill>
+                <a:latin typeface="+mn-lt"/>
+                <a:ea typeface="+mn-ea"/>
+                <a:cs typeface="+mn-cs"/>
+              </a:defRPr>
+            </a:lvl6pPr>
+            <a:lvl7pPr marL="2971800" indent="-228600" algn="l" defTabSz="914400" rtl="0" eaLnBrk="1" latinLnBrk="1" hangingPunct="1">
+              <a:lnSpc>
+                <a:spcPct val="90000"/>
+              </a:lnSpc>
+              <a:spcBef>
+                <a:spcPts val="500"/>
+              </a:spcBef>
+              <a:buFont typeface="Arial" panose="020B0604020202020204" pitchFamily="34" charset="0"/>
+              <a:buChar char="•"/>
+              <a:defRPr sz="1800" kern="1200">
+                <a:solidFill>
+                  <a:schemeClr val="tx1"/>
+                </a:solidFill>
+                <a:latin typeface="+mn-lt"/>
+                <a:ea typeface="+mn-ea"/>
+                <a:cs typeface="+mn-cs"/>
+              </a:defRPr>
+            </a:lvl7pPr>
+            <a:lvl8pPr marL="3429000" indent="-228600" algn="l" defTabSz="914400" rtl="0" eaLnBrk="1" latinLnBrk="1" hangingPunct="1">
+              <a:lnSpc>
+                <a:spcPct val="90000"/>
+              </a:lnSpc>
+              <a:spcBef>
+                <a:spcPts val="500"/>
+              </a:spcBef>
+              <a:buFont typeface="Arial" panose="020B0604020202020204" pitchFamily="34" charset="0"/>
+              <a:buChar char="•"/>
+              <a:defRPr sz="1800" kern="1200">
+                <a:solidFill>
+                  <a:schemeClr val="tx1"/>
+                </a:solidFill>
+                <a:latin typeface="+mn-lt"/>
+                <a:ea typeface="+mn-ea"/>
+                <a:cs typeface="+mn-cs"/>
+              </a:defRPr>
+            </a:lvl8pPr>
+            <a:lvl9pPr marL="3886200" indent="-228600" algn="l" defTabSz="914400" rtl="0" eaLnBrk="1" latinLnBrk="1" hangingPunct="1">
+              <a:lnSpc>
+                <a:spcPct val="90000"/>
+              </a:lnSpc>
+              <a:spcBef>
+                <a:spcPts val="500"/>
+              </a:spcBef>
+              <a:buFont typeface="Arial" panose="020B0604020202020204" pitchFamily="34" charset="0"/>
+              <a:buChar char="•"/>
+              <a:defRPr sz="1800" kern="1200">
+                <a:solidFill>
+                  <a:schemeClr val="tx1"/>
+                </a:solidFill>
+                <a:latin typeface="+mn-lt"/>
+                <a:ea typeface="+mn-ea"/>
+                <a:cs typeface="+mn-cs"/>
+              </a:defRPr>
+            </a:lvl9pPr>
+          </a:lstStyle>
+          <a:p>
+            <a:pPr algn="ctr">
+              <a:lnSpc>
+                <a:spcPct val="130000"/>
+              </a:lnSpc>
+              <a:spcBef>
+                <a:spcPts val="0"/>
+              </a:spcBef>
+            </a:pPr>
+            <a:r>
+              <a:rPr lang="ko-KR" altLang="en-US" sz="900" dirty="0" err="1">
+                <a:latin typeface="피플폰트 Bold" panose="020B0600000101010101" pitchFamily="50" charset="-127"/>
+                <a:ea typeface="피플폰트 Bold" panose="020B0600000101010101" pitchFamily="50" charset="-127"/>
+              </a:rPr>
+              <a:t>책임준공확약</a:t>
+            </a:r>
+            <a:r>
+              <a:rPr lang="en-US" altLang="ko-KR" sz="900" dirty="0">
+                <a:latin typeface="피플폰트 Bold" panose="020B0600000101010101" pitchFamily="50" charset="-127"/>
+                <a:ea typeface="피플폰트 Bold" panose="020B0600000101010101" pitchFamily="50" charset="-127"/>
+              </a:rPr>
+              <a:t> / </a:t>
+            </a:r>
+            <a:r>
+              <a:rPr lang="ko-KR" altLang="en-US" sz="900" dirty="0">
+                <a:latin typeface="피플폰트 Bold" panose="020B0600000101010101" pitchFamily="50" charset="-127"/>
+                <a:ea typeface="피플폰트 Bold" panose="020B0600000101010101" pitchFamily="50" charset="-127"/>
+              </a:rPr>
+              <a:t>책임분양확약</a:t>
+            </a:r>
+            <a:endParaRPr lang="en-US" altLang="ko-KR" sz="900" dirty="0">
+              <a:latin typeface="피플폰트 Bold" panose="020B0600000101010101" pitchFamily="50" charset="-127"/>
+              <a:ea typeface="피플폰트 Bold" panose="020B0600000101010101" pitchFamily="50" charset="-127"/>
+            </a:endParaRPr>
+          </a:p>
+        </p:txBody>
+      </p:sp>
+      <p:graphicFrame>
+        <p:nvGraphicFramePr>
+          <p:cNvPr id="71" name="표 4">
+            <a:extLst>
+              <a:ext uri="{FF2B5EF4-FFF2-40B4-BE49-F238E27FC236}">
+                <a16:creationId xmlns:a16="http://schemas.microsoft.com/office/drawing/2014/main" id="{3F304EB7-DF0C-41D2-A81E-5895A6DA1068}"/>
+              </a:ext>
+            </a:extLst>
+          </p:cNvPr>
+          <p:cNvGraphicFramePr>
+            <a:graphicFrameLocks noGrp="1"/>
+          </p:cNvGraphicFramePr>
+          <p:nvPr>
+            <p:extLst>
+              <p:ext uri="{D42A27DB-BD31-4B8C-83A1-F6EECF244321}">
+                <p14:modId xmlns:p14="http://schemas.microsoft.com/office/powerpoint/2010/main" val="569187803"/>
+              </p:ext>
+            </p:extLst>
+          </p:nvPr>
+        </p:nvGraphicFramePr>
+        <p:xfrm>
+          <a:off x="894014" y="5344036"/>
+          <a:ext cx="1933676" cy="665618"/>
+        </p:xfrm>
+        <a:graphic>
+          <a:graphicData uri="http://schemas.openxmlformats.org/drawingml/2006/table">
+            <a:tbl>
+              <a:tblPr firstRow="1" bandRow="1">
+                <a:effectLst>
+                  <a:outerShdw blurRad="50800" dist="38100" dir="2700000" algn="tl" rotWithShape="0">
+                    <a:prstClr val="black">
+                      <a:alpha val="40000"/>
+                    </a:prstClr>
+                  </a:outerShdw>
+                </a:effectLst>
+                <a:tableStyleId>{D03447BB-5D67-496B-8E87-E561075AD55C}</a:tableStyleId>
+              </a:tblPr>
+              <a:tblGrid>
+                <a:gridCol w="1933676">
+                  <a:extLst>
+                    <a:ext uri="{9D8B030D-6E8A-4147-A177-3AD203B41FA5}">
+                      <a16:colId xmlns:a16="http://schemas.microsoft.com/office/drawing/2014/main" val="20000"/>
+                    </a:ext>
+                  </a:extLst>
+                </a:gridCol>
+              </a:tblGrid>
+              <a:tr h="0">
+                <a:tc>
+                  <a:txBody>
+                    <a:bodyPr/>
+                    <a:lstStyle/>
+                    <a:p>
+                      <a:pPr algn="ctr" latinLnBrk="1">
+                        <a:defRPr/>
+                      </a:pPr>
+                      <a:r>
+                        <a:rPr lang="ko-KR" altLang="en-US" sz="1200" dirty="0">
+                          <a:latin typeface="피플폰트 Bold" panose="020B0600000101010101" pitchFamily="50" charset="-127"/>
+                          <a:ea typeface="피플폰트 Bold" panose="020B0600000101010101" pitchFamily="50" charset="-127"/>
+                        </a:rPr>
+                        <a:t>물상보증인</a:t>
+                      </a:r>
+                      <a:r>
+                        <a:rPr lang="en-US" altLang="ko-KR" sz="1200" dirty="0">
+                          <a:latin typeface="피플폰트 Bold" panose="020B0600000101010101" pitchFamily="50" charset="-127"/>
+                          <a:ea typeface="피플폰트 Bold" panose="020B0600000101010101" pitchFamily="50" charset="-127"/>
+                        </a:rPr>
+                        <a:t>/</a:t>
+                      </a:r>
+                      <a:r>
+                        <a:rPr lang="ko-KR" altLang="en-US" sz="1200" dirty="0">
+                          <a:latin typeface="피플폰트 Bold" panose="020B0600000101010101" pitchFamily="50" charset="-127"/>
+                          <a:ea typeface="피플폰트 Bold" panose="020B0600000101010101" pitchFamily="50" charset="-127"/>
+                        </a:rPr>
+                        <a:t>연대보증인</a:t>
+                      </a:r>
+                    </a:p>
+                  </a:txBody>
+                  <a:tcPr marL="171674" marR="171674" marT="78033" marB="78033" anchor="ctr">
+                    <a:lnL w="28575" cap="flat" cmpd="sng" algn="ctr">
+                      <a:solidFill>
+                        <a:schemeClr val="bg1"/>
+                      </a:solidFill>
+                      <a:prstDash val="solid"/>
+                      <a:round/>
+                      <a:headEnd type="none" w="med" len="med"/>
+                      <a:tailEnd type="none" w="med" len="med"/>
+                    </a:lnL>
+                    <a:lnR w="28575" cap="flat" cmpd="sng" algn="ctr">
+                      <a:solidFill>
+                        <a:schemeClr val="bg1"/>
+                      </a:solidFill>
+                      <a:prstDash val="solid"/>
+                      <a:round/>
+                      <a:headEnd type="none" w="med" len="med"/>
+                      <a:tailEnd type="none" w="med" len="med"/>
+                    </a:lnR>
+                    <a:lnT w="28575" cap="flat" cmpd="sng" algn="ctr">
+                      <a:solidFill>
+                        <a:schemeClr val="bg1"/>
+                      </a:solidFill>
+                      <a:prstDash val="solid"/>
+                      <a:round/>
+                      <a:headEnd type="none" w="med" len="med"/>
+                      <a:tailEnd type="none" w="med" len="med"/>
+                    </a:lnT>
+                    <a:lnB w="28575" cap="flat" cmpd="sng" algn="ctr">
+                      <a:solidFill>
+                        <a:schemeClr val="bg1"/>
+                      </a:solidFill>
+                      <a:prstDash val="solid"/>
+                      <a:round/>
+                      <a:headEnd type="none" w="med" len="med"/>
+                      <a:tailEnd type="none" w="med" len="med"/>
+                    </a:lnB>
+                    <a:solidFill>
+                      <a:schemeClr val="tx1">
+                        <a:lumMod val="65000"/>
+                        <a:lumOff val="35000"/>
+                      </a:schemeClr>
+                    </a:solidFill>
+                  </a:tcPr>
+                </a:tc>
+                <a:extLst>
+                  <a:ext uri="{0D108BD9-81ED-4DB2-BD59-A6C34878D82A}">
+                    <a16:rowId xmlns:a16="http://schemas.microsoft.com/office/drawing/2014/main" val="10000"/>
+                  </a:ext>
+                </a:extLst>
+              </a:tr>
+              <a:tr h="326672">
+                <a:tc>
+                  <a:txBody>
+                    <a:bodyPr/>
+                    <a:lstStyle/>
+                    <a:p>
+                      <a:pPr algn="ctr" latinLnBrk="1">
+                        <a:defRPr/>
+                      </a:pPr>
+                      <a:r>
+                        <a:rPr lang="ko-KR" altLang="en-US" sz="1400" b="1" dirty="0">
+                          <a:solidFill>
+                            <a:schemeClr val="tx1"/>
+                          </a:solidFill>
+                          <a:latin typeface="피플폰트 Bold" panose="020B0600000101010101" pitchFamily="50" charset="-127"/>
+                          <a:ea typeface="피플폰트 Bold" panose="020B0600000101010101" pitchFamily="50" charset="-127"/>
+                        </a:rPr>
+                        <a:t>㈜</a:t>
+                      </a:r>
+                      <a:r>
+                        <a:rPr lang="ko-KR" altLang="en-US" sz="1400" b="1" dirty="0" err="1">
+                          <a:solidFill>
+                            <a:schemeClr val="tx1"/>
+                          </a:solidFill>
+                          <a:latin typeface="피플폰트 Bold" panose="020B0600000101010101" pitchFamily="50" charset="-127"/>
+                          <a:ea typeface="피플폰트 Bold" panose="020B0600000101010101" pitchFamily="50" charset="-127"/>
+                        </a:rPr>
+                        <a:t>어퍼하우스헌인</a:t>
+                      </a:r>
+                      <a:endParaRPr lang="ko-KR" altLang="en-US" sz="1600" b="1" dirty="0">
+                        <a:solidFill>
+                          <a:schemeClr val="tx1"/>
+                        </a:solidFill>
+                        <a:latin typeface="피플폰트 Bold" panose="020B0600000101010101" pitchFamily="50" charset="-127"/>
+                        <a:ea typeface="피플폰트 Bold" panose="020B0600000101010101" pitchFamily="50" charset="-127"/>
+                      </a:endParaRPr>
+                    </a:p>
+                  </a:txBody>
+                  <a:tcPr marL="0" marR="0" marT="72000" marB="0">
+                    <a:lnL w="28575" cap="flat" cmpd="sng" algn="ctr">
+                      <a:solidFill>
+                        <a:schemeClr val="bg1"/>
+                      </a:solidFill>
+                      <a:prstDash val="solid"/>
+                      <a:round/>
+                      <a:headEnd type="none" w="med" len="med"/>
+                      <a:tailEnd type="none" w="med" len="med"/>
+                    </a:lnL>
+                    <a:lnR w="28575" cap="flat" cmpd="sng" algn="ctr">
+                      <a:solidFill>
+                        <a:schemeClr val="bg1"/>
+                      </a:solidFill>
+                      <a:prstDash val="solid"/>
+                      <a:round/>
+                      <a:headEnd type="none" w="med" len="med"/>
+                      <a:tailEnd type="none" w="med" len="med"/>
+                    </a:lnR>
+                    <a:lnT w="28575" cap="flat" cmpd="sng" algn="ctr">
+                      <a:solidFill>
+                        <a:schemeClr val="bg1"/>
+                      </a:solidFill>
+                      <a:prstDash val="solid"/>
+                      <a:round/>
+                      <a:headEnd type="none" w="med" len="med"/>
+                      <a:tailEnd type="none" w="med" len="med"/>
+                    </a:lnT>
+                    <a:lnB w="28575" cap="flat" cmpd="sng" algn="ctr">
+                      <a:solidFill>
+                        <a:schemeClr val="bg1"/>
+                      </a:solidFill>
+                      <a:prstDash val="solid"/>
+                      <a:round/>
+                      <a:headEnd type="none" w="med" len="med"/>
+                      <a:tailEnd type="none" w="med" len="med"/>
+                    </a:lnB>
+                    <a:solidFill>
+                      <a:srgbClr val="D9D9D9"/>
+                    </a:solidFill>
+                  </a:tcPr>
+                </a:tc>
+                <a:extLst>
+                  <a:ext uri="{0D108BD9-81ED-4DB2-BD59-A6C34878D82A}">
+                    <a16:rowId xmlns:a16="http://schemas.microsoft.com/office/drawing/2014/main" val="10001"/>
+                  </a:ext>
+                </a:extLst>
+              </a:tr>
+            </a:tbl>
+          </a:graphicData>
+        </a:graphic>
+      </p:graphicFrame>
+      <p:cxnSp>
+        <p:nvCxnSpPr>
+          <p:cNvPr id="72" name="직선 화살표 연결선 71">
+            <a:extLst>
+              <a:ext uri="{FF2B5EF4-FFF2-40B4-BE49-F238E27FC236}">
+                <a16:creationId xmlns:a16="http://schemas.microsoft.com/office/drawing/2014/main" id="{95E48A0B-6016-4A91-ADDC-9D2AAA21D48B}"/>
+              </a:ext>
+            </a:extLst>
+          </p:cNvPr>
+          <p:cNvCxnSpPr>
+            <a:cxnSpLocks/>
+          </p:cNvCxnSpPr>
+          <p:nvPr/>
+        </p:nvCxnSpPr>
+        <p:spPr>
+          <a:xfrm flipH="1">
+            <a:off x="2898478" y="5679364"/>
+            <a:ext cx="1580907" cy="8572"/>
+          </a:xfrm>
+          <a:prstGeom prst="straightConnector1">
+            <a:avLst/>
+          </a:prstGeom>
+          <a:solidFill>
+            <a:schemeClr val="accent1"/>
+          </a:solidFill>
+          <a:ln w="19050" cap="flat" cmpd="sng" algn="ctr">
+            <a:solidFill>
+              <a:schemeClr val="tx1"/>
+            </a:solidFill>
+            <a:prstDash val="solid"/>
+            <a:round/>
+            <a:headEnd type="triangle" w="sm" len="sm"/>
+            <a:tailEnd type="none" w="sm" len="sm"/>
+          </a:ln>
+          <a:effectLst/>
+        </p:spPr>
+      </p:cxnSp>
+      <p:sp>
+        <p:nvSpPr>
+          <p:cNvPr id="73" name="텍스트 개체 틀 2">
+            <a:extLst>
+              <a:ext uri="{FF2B5EF4-FFF2-40B4-BE49-F238E27FC236}">
+                <a16:creationId xmlns:a16="http://schemas.microsoft.com/office/drawing/2014/main" id="{7D4CE51C-5A02-43BF-AFAF-46C86D05611B}"/>
+              </a:ext>
+            </a:extLst>
+          </p:cNvPr>
+          <p:cNvSpPr txBox="1">
+            <a:spLocks/>
+          </p:cNvSpPr>
+          <p:nvPr/>
+        </p:nvSpPr>
+        <p:spPr>
+          <a:xfrm>
+            <a:off x="3204385" y="5454477"/>
+            <a:ext cx="1060169" cy="169662"/>
+          </a:xfrm>
+          <a:prstGeom prst="rect">
+            <a:avLst/>
+          </a:prstGeom>
+        </p:spPr>
+        <p:txBody>
+          <a:bodyPr vert="horz" wrap="square" lIns="0" tIns="0" rIns="0" bIns="0" rtlCol="0" anchor="ctr">
+            <a:spAutoFit/>
+          </a:bodyPr>
+          <a:lstStyle>
+            <a:lvl1pPr marL="0" indent="0" algn="l" defTabSz="914400" rtl="0" eaLnBrk="1" latinLnBrk="1" hangingPunct="1">
+              <a:lnSpc>
+                <a:spcPct val="90000"/>
+              </a:lnSpc>
+              <a:spcBef>
+                <a:spcPts val="1000"/>
+              </a:spcBef>
+              <a:buFont typeface="Arial" panose="020B0604020202020204" pitchFamily="34" charset="0"/>
+              <a:buNone/>
+              <a:defRPr sz="1200" kern="1200">
+                <a:solidFill>
+                  <a:schemeClr val="tx1"/>
+                </a:solidFill>
+                <a:latin typeface="AppleSDGothicNeoM00" panose="02000503000000000000" pitchFamily="2" charset="-127"/>
+                <a:ea typeface="AppleSDGothicNeoM00" panose="02000503000000000000" pitchFamily="2" charset="-127"/>
+                <a:cs typeface="+mn-cs"/>
+              </a:defRPr>
+            </a:lvl1pPr>
+            <a:lvl2pPr marL="685800" indent="-228600" algn="l" defTabSz="914400" rtl="0" eaLnBrk="1" latinLnBrk="1" hangingPunct="1">
+              <a:lnSpc>
+                <a:spcPct val="90000"/>
+              </a:lnSpc>
+              <a:spcBef>
+                <a:spcPts val="500"/>
+              </a:spcBef>
+              <a:buFont typeface="Arial" panose="020B0604020202020204" pitchFamily="34" charset="0"/>
+              <a:buChar char="•"/>
+              <a:defRPr sz="2400" kern="1200">
+                <a:solidFill>
+                  <a:schemeClr val="tx1"/>
+                </a:solidFill>
+                <a:latin typeface="+mn-lt"/>
+                <a:ea typeface="+mn-ea"/>
+                <a:cs typeface="+mn-cs"/>
+              </a:defRPr>
+            </a:lvl2pPr>
+            <a:lvl3pPr marL="1143000" indent="-228600" algn="l" defTabSz="914400" rtl="0" eaLnBrk="1" latinLnBrk="1" hangingPunct="1">
+              <a:lnSpc>
+                <a:spcPct val="90000"/>
+              </a:lnSpc>
+              <a:spcBef>
+                <a:spcPts val="500"/>
+              </a:spcBef>
+              <a:buFont typeface="Arial" panose="020B0604020202020204" pitchFamily="34" charset="0"/>
+              <a:buChar char="•"/>
+              <a:defRPr sz="2000" kern="1200">
+                <a:solidFill>
+                  <a:schemeClr val="tx1"/>
+                </a:solidFill>
+                <a:latin typeface="+mn-lt"/>
+                <a:ea typeface="+mn-ea"/>
+                <a:cs typeface="+mn-cs"/>
+              </a:defRPr>
+            </a:lvl3pPr>
+            <a:lvl4pPr marL="1600200" indent="-228600" algn="l" defTabSz="914400" rtl="0" eaLnBrk="1" latinLnBrk="1" hangingPunct="1">
+              <a:lnSpc>
+                <a:spcPct val="90000"/>
+              </a:lnSpc>
+              <a:spcBef>
+                <a:spcPts val="500"/>
+              </a:spcBef>
+              <a:buFont typeface="Arial" panose="020B0604020202020204" pitchFamily="34" charset="0"/>
+              <a:buChar char="•"/>
+              <a:defRPr sz="1800" kern="1200">
+                <a:solidFill>
+                  <a:schemeClr val="tx1"/>
+                </a:solidFill>
+                <a:latin typeface="+mn-lt"/>
+                <a:ea typeface="+mn-ea"/>
+                <a:cs typeface="+mn-cs"/>
+              </a:defRPr>
+            </a:lvl4pPr>
+            <a:lvl5pPr marL="2057400" indent="-228600" algn="l" defTabSz="914400" rtl="0" eaLnBrk="1" latinLnBrk="1" hangingPunct="1">
+              <a:lnSpc>
+                <a:spcPct val="90000"/>
+              </a:lnSpc>
+              <a:spcBef>
+                <a:spcPts val="500"/>
+              </a:spcBef>
+              <a:buFont typeface="Arial" panose="020B0604020202020204" pitchFamily="34" charset="0"/>
+              <a:buChar char="•"/>
+              <a:defRPr sz="1800" kern="1200">
+                <a:solidFill>
+                  <a:schemeClr val="tx1"/>
+                </a:solidFill>
+                <a:latin typeface="+mn-lt"/>
+                <a:ea typeface="+mn-ea"/>
+                <a:cs typeface="+mn-cs"/>
+              </a:defRPr>
+            </a:lvl5pPr>
+            <a:lvl6pPr marL="2514600" indent="-228600" algn="l" defTabSz="914400" rtl="0" eaLnBrk="1" latinLnBrk="1" hangingPunct="1">
+              <a:lnSpc>
+                <a:spcPct val="90000"/>
+              </a:lnSpc>
+              <a:spcBef>
+                <a:spcPts val="500"/>
+              </a:spcBef>
+              <a:buFont typeface="Arial" panose="020B0604020202020204" pitchFamily="34" charset="0"/>
+              <a:buChar char="•"/>
+              <a:defRPr sz="1800" kern="1200">
+                <a:solidFill>
+                  <a:schemeClr val="tx1"/>
+                </a:solidFill>
+                <a:latin typeface="+mn-lt"/>
+                <a:ea typeface="+mn-ea"/>
+                <a:cs typeface="+mn-cs"/>
+              </a:defRPr>
+            </a:lvl6pPr>
+            <a:lvl7pPr marL="2971800" indent="-228600" algn="l" defTabSz="914400" rtl="0" eaLnBrk="1" latinLnBrk="1" hangingPunct="1">
+              <a:lnSpc>
+                <a:spcPct val="90000"/>
+              </a:lnSpc>
+              <a:spcBef>
+                <a:spcPts val="500"/>
+              </a:spcBef>
+              <a:buFont typeface="Arial" panose="020B0604020202020204" pitchFamily="34" charset="0"/>
+              <a:buChar char="•"/>
+              <a:defRPr sz="1800" kern="1200">
+                <a:solidFill>
+                  <a:schemeClr val="tx1"/>
+                </a:solidFill>
+                <a:latin typeface="+mn-lt"/>
+                <a:ea typeface="+mn-ea"/>
+                <a:cs typeface="+mn-cs"/>
+              </a:defRPr>
+            </a:lvl7pPr>
+            <a:lvl8pPr marL="3429000" indent="-228600" algn="l" defTabSz="914400" rtl="0" eaLnBrk="1" latinLnBrk="1" hangingPunct="1">
+              <a:lnSpc>
+                <a:spcPct val="90000"/>
+              </a:lnSpc>
+              <a:spcBef>
+                <a:spcPts val="500"/>
+              </a:spcBef>
+              <a:buFont typeface="Arial" panose="020B0604020202020204" pitchFamily="34" charset="0"/>
+              <a:buChar char="•"/>
+              <a:defRPr sz="1800" kern="1200">
+                <a:solidFill>
+                  <a:schemeClr val="tx1"/>
+                </a:solidFill>
+                <a:latin typeface="+mn-lt"/>
+                <a:ea typeface="+mn-ea"/>
+                <a:cs typeface="+mn-cs"/>
+              </a:defRPr>
+            </a:lvl8pPr>
+            <a:lvl9pPr marL="3886200" indent="-228600" algn="l" defTabSz="914400" rtl="0" eaLnBrk="1" latinLnBrk="1" hangingPunct="1">
+              <a:lnSpc>
+                <a:spcPct val="90000"/>
+              </a:lnSpc>
+              <a:spcBef>
+                <a:spcPts val="500"/>
+              </a:spcBef>
+              <a:buFont typeface="Arial" panose="020B0604020202020204" pitchFamily="34" charset="0"/>
+              <a:buChar char="•"/>
+              <a:defRPr sz="1800" kern="1200">
+                <a:solidFill>
+                  <a:schemeClr val="tx1"/>
+                </a:solidFill>
+                <a:latin typeface="+mn-lt"/>
+                <a:ea typeface="+mn-ea"/>
+                <a:cs typeface="+mn-cs"/>
+              </a:defRPr>
+            </a:lvl9pPr>
+          </a:lstStyle>
+          <a:p>
+            <a:pPr algn="ctr">
+              <a:lnSpc>
+                <a:spcPct val="130000"/>
+              </a:lnSpc>
+              <a:spcBef>
+                <a:spcPts val="0"/>
+              </a:spcBef>
+            </a:pPr>
+            <a:r>
+              <a:rPr lang="ko-KR" altLang="en-US" sz="900" dirty="0">
+                <a:latin typeface="피플폰트 Bold" panose="020B0600000101010101" pitchFamily="50" charset="-127"/>
+                <a:ea typeface="피플폰트 Bold" panose="020B0600000101010101" pitchFamily="50" charset="-127"/>
+              </a:rPr>
+              <a:t>담보제공</a:t>
+            </a:r>
+            <a:r>
+              <a:rPr lang="en-US" altLang="ko-KR" sz="900" dirty="0">
+                <a:latin typeface="피플폰트 Bold" panose="020B0600000101010101" pitchFamily="50" charset="-127"/>
+                <a:ea typeface="피플폰트 Bold" panose="020B0600000101010101" pitchFamily="50" charset="-127"/>
+              </a:rPr>
+              <a:t>/</a:t>
+            </a:r>
+            <a:r>
+              <a:rPr lang="ko-KR" altLang="en-US" sz="900" dirty="0">
+                <a:latin typeface="피플폰트 Bold" panose="020B0600000101010101" pitchFamily="50" charset="-127"/>
+                <a:ea typeface="피플폰트 Bold" panose="020B0600000101010101" pitchFamily="50" charset="-127"/>
+              </a:rPr>
+              <a:t>연대보증</a:t>
+            </a:r>
+            <a:endParaRPr lang="en-US" altLang="ko-KR" sz="900" dirty="0">
+              <a:latin typeface="피플폰트 Bold" panose="020B0600000101010101" pitchFamily="50" charset="-127"/>
+              <a:ea typeface="피플폰트 Bold" panose="020B0600000101010101" pitchFamily="50" charset="-127"/>
+            </a:endParaRPr>
+          </a:p>
+        </p:txBody>
+      </p:sp>
+      <p:graphicFrame>
+        <p:nvGraphicFramePr>
+          <p:cNvPr id="37" name="표 4">
+            <a:extLst>
+              <a:ext uri="{FF2B5EF4-FFF2-40B4-BE49-F238E27FC236}">
+                <a16:creationId xmlns:a16="http://schemas.microsoft.com/office/drawing/2014/main" id="{6DE53DF8-D003-44C3-AA01-12257B1C7FE6}"/>
+              </a:ext>
+            </a:extLst>
+          </p:cNvPr>
+          <p:cNvGraphicFramePr>
+            <a:graphicFrameLocks noGrp="1"/>
+          </p:cNvGraphicFramePr>
+          <p:nvPr>
+            <p:extLst>
+              <p:ext uri="{D42A27DB-BD31-4B8C-83A1-F6EECF244321}">
+                <p14:modId xmlns:p14="http://schemas.microsoft.com/office/powerpoint/2010/main" val="603229329"/>
+              </p:ext>
+            </p:extLst>
+          </p:nvPr>
+        </p:nvGraphicFramePr>
+        <p:xfrm>
+          <a:off x="988148" y="4141925"/>
+          <a:ext cx="1670189" cy="925440"/>
+        </p:xfrm>
+        <a:graphic>
+          <a:graphicData uri="http://schemas.openxmlformats.org/drawingml/2006/table">
+            <a:tbl>
+              <a:tblPr firstRow="1" bandRow="1">
+                <a:effectLst>
+                  <a:outerShdw blurRad="50800" dist="38100" dir="2700000" algn="tl" rotWithShape="0">
+                    <a:prstClr val="black">
+                      <a:alpha val="40000"/>
+                    </a:prstClr>
+                  </a:outerShdw>
+                </a:effectLst>
+                <a:tableStyleId>{D03447BB-5D67-496B-8E87-E561075AD55C}</a:tableStyleId>
+              </a:tblPr>
+              <a:tblGrid>
+                <a:gridCol w="1670189">
+                  <a:extLst>
+                    <a:ext uri="{9D8B030D-6E8A-4147-A177-3AD203B41FA5}">
+                      <a16:colId xmlns:a16="http://schemas.microsoft.com/office/drawing/2014/main" val="20000"/>
+                    </a:ext>
+                  </a:extLst>
+                </a:gridCol>
+              </a:tblGrid>
+              <a:tr h="866622">
+                <a:tc>
+                  <a:txBody>
+                    <a:bodyPr/>
+                    <a:lstStyle/>
+                    <a:p>
+                      <a:pPr algn="ctr" latinLnBrk="1">
+                        <a:defRPr/>
+                      </a:pPr>
+                      <a:r>
+                        <a:rPr lang="ko-KR" altLang="en-US" sz="1200" b="1" dirty="0">
+                          <a:solidFill>
+                            <a:schemeClr val="tx1"/>
+                          </a:solidFill>
+                          <a:latin typeface="피플폰트 Bold" panose="020B0600000101010101" pitchFamily="50" charset="-127"/>
+                          <a:ea typeface="피플폰트 Bold" panose="020B0600000101010101" pitchFamily="50" charset="-127"/>
+                        </a:rPr>
+                        <a:t>한국토지신탁</a:t>
+                      </a:r>
+                      <a:endParaRPr lang="en-US" altLang="ko-KR" sz="1200" b="1" dirty="0">
+                        <a:solidFill>
+                          <a:schemeClr val="tx1"/>
+                        </a:solidFill>
+                        <a:latin typeface="피플폰트 Bold" panose="020B0600000101010101" pitchFamily="50" charset="-127"/>
+                        <a:ea typeface="피플폰트 Bold" panose="020B0600000101010101" pitchFamily="50" charset="-127"/>
+                      </a:endParaRPr>
+                    </a:p>
+                    <a:p>
+                      <a:pPr marL="0" marR="0" lvl="0" indent="0" algn="ctr" defTabSz="914400" rtl="0" eaLnBrk="1" fontAlgn="auto" latinLnBrk="1" hangingPunct="1">
+                        <a:lnSpc>
+                          <a:spcPct val="100000"/>
+                        </a:lnSpc>
+                        <a:spcBef>
+                          <a:spcPts val="0"/>
+                        </a:spcBef>
+                        <a:spcAft>
+                          <a:spcPts val="0"/>
+                        </a:spcAft>
+                        <a:buClrTx/>
+                        <a:buSzTx/>
+                        <a:buFontTx/>
+                        <a:buNone/>
+                        <a:tabLst/>
+                        <a:defRPr/>
+                      </a:pPr>
+                      <a:r>
+                        <a:rPr lang="ko-KR" altLang="en-US" sz="1200" b="1" dirty="0">
+                          <a:solidFill>
+                            <a:schemeClr val="tx1"/>
+                          </a:solidFill>
+                          <a:latin typeface="피플폰트 Bold" panose="020B0600000101010101" pitchFamily="50" charset="-127"/>
+                          <a:ea typeface="피플폰트 Bold" panose="020B0600000101010101" pitchFamily="50" charset="-127"/>
+                        </a:rPr>
+                        <a:t>신영부동산신탁</a:t>
+                      </a:r>
+                    </a:p>
+                    <a:p>
+                      <a:pPr algn="ctr" latinLnBrk="1">
+                        <a:defRPr/>
+                      </a:pPr>
+                      <a:r>
+                        <a:rPr lang="ko-KR" altLang="en-US" sz="1200" b="1" dirty="0">
+                          <a:solidFill>
+                            <a:schemeClr val="tx1"/>
+                          </a:solidFill>
+                          <a:latin typeface="피플폰트 Bold" panose="020B0600000101010101" pitchFamily="50" charset="-127"/>
+                          <a:ea typeface="피플폰트 Bold" panose="020B0600000101010101" pitchFamily="50" charset="-127"/>
+                        </a:rPr>
+                        <a:t>대신자산신탁</a:t>
+                      </a:r>
+                      <a:endParaRPr lang="en-US" altLang="ko-KR" sz="1200" b="1" dirty="0">
+                        <a:solidFill>
+                          <a:schemeClr val="tx1"/>
+                        </a:solidFill>
+                        <a:latin typeface="피플폰트 Bold" panose="020B0600000101010101" pitchFamily="50" charset="-127"/>
+                        <a:ea typeface="피플폰트 Bold" panose="020B0600000101010101" pitchFamily="50" charset="-127"/>
+                      </a:endParaRPr>
+                    </a:p>
+                    <a:p>
+                      <a:pPr marL="0" marR="0" lvl="0" indent="0" algn="ctr" defTabSz="914400" rtl="0" eaLnBrk="1" fontAlgn="auto" latinLnBrk="1" hangingPunct="1">
+                        <a:lnSpc>
+                          <a:spcPct val="100000"/>
+                        </a:lnSpc>
+                        <a:spcBef>
+                          <a:spcPts val="0"/>
+                        </a:spcBef>
+                        <a:spcAft>
+                          <a:spcPts val="0"/>
+                        </a:spcAft>
+                        <a:buClrTx/>
+                        <a:buSzTx/>
+                        <a:buFontTx/>
+                        <a:buNone/>
+                        <a:tabLst/>
+                        <a:defRPr/>
+                      </a:pPr>
+                      <a:r>
+                        <a:rPr lang="ko-KR" altLang="en-US" sz="1200" b="1" dirty="0" err="1">
+                          <a:solidFill>
+                            <a:schemeClr val="tx1"/>
+                          </a:solidFill>
+                          <a:latin typeface="피플폰트 Bold" panose="020B0600000101010101" pitchFamily="50" charset="-127"/>
+                          <a:ea typeface="피플폰트 Bold" panose="020B0600000101010101" pitchFamily="50" charset="-127"/>
+                        </a:rPr>
+                        <a:t>코람코자산신탁</a:t>
+                      </a:r>
+                      <a:r>
+                        <a:rPr lang="ko-KR" altLang="en-US" sz="1200" b="1" dirty="0">
+                          <a:solidFill>
+                            <a:schemeClr val="tx1"/>
+                          </a:solidFill>
+                          <a:latin typeface="피플폰트 Bold" panose="020B0600000101010101" pitchFamily="50" charset="-127"/>
+                          <a:ea typeface="피플폰트 Bold" panose="020B0600000101010101" pitchFamily="50" charset="-127"/>
+                        </a:rPr>
+                        <a:t>(처분신탁)</a:t>
+                      </a:r>
+                      <a:endParaRPr lang="en-US" altLang="ko-KR" sz="1200" b="1" dirty="0">
+                        <a:solidFill>
+                          <a:schemeClr val="tx1"/>
+                        </a:solidFill>
+                        <a:latin typeface="피플폰트 Bold" panose="020B0600000101010101" pitchFamily="50" charset="-127"/>
+                        <a:ea typeface="피플폰트 Bold" panose="020B0600000101010101" pitchFamily="50" charset="-127"/>
+                      </a:endParaRPr>
+                    </a:p>
+                    <a:p>
+                      <a:pPr marL="0" marR="0" lvl="0" indent="0" algn="ctr" defTabSz="914400" rtl="0" eaLnBrk="1" fontAlgn="auto" latinLnBrk="1" hangingPunct="1">
+                        <a:lnSpc>
+                          <a:spcPct val="100000"/>
+                        </a:lnSpc>
+                        <a:spcBef>
+                          <a:spcPts val="0"/>
+                        </a:spcBef>
+                        <a:spcAft>
+                          <a:spcPts val="0"/>
+                        </a:spcAft>
+                        <a:buClrTx/>
+                        <a:buSzTx/>
+                        <a:buFontTx/>
+                        <a:buNone/>
+                        <a:tabLst/>
+                        <a:defRPr/>
+                      </a:pPr>
+                      <a:endParaRPr lang="ko-KR" altLang="en-US" sz="800" b="1" dirty="0">
+                        <a:solidFill>
+                          <a:schemeClr val="tx1"/>
+                        </a:solidFill>
+                        <a:latin typeface="피플폰트 Bold" panose="020B0600000101010101" pitchFamily="50" charset="-127"/>
+                        <a:ea typeface="피플폰트 Bold" panose="020B0600000101010101" pitchFamily="50" charset="-127"/>
+                      </a:endParaRPr>
+                    </a:p>
+                  </a:txBody>
+                  <a:tcPr marL="0" marR="0" marT="72000" marB="0" anchor="ctr">
+                    <a:lnL w="28575" cap="flat" cmpd="sng" algn="ctr">
+                      <a:solidFill>
+                        <a:schemeClr val="bg1"/>
+                      </a:solidFill>
+                      <a:prstDash val="solid"/>
+                      <a:round/>
+                      <a:headEnd type="none" w="med" len="med"/>
+                      <a:tailEnd type="none" w="med" len="med"/>
+                    </a:lnL>
+                    <a:lnR w="28575" cap="flat" cmpd="sng" algn="ctr">
+                      <a:solidFill>
+                        <a:schemeClr val="bg1"/>
+                      </a:solidFill>
+                      <a:prstDash val="solid"/>
+                      <a:round/>
+                      <a:headEnd type="none" w="med" len="med"/>
+                      <a:tailEnd type="none" w="med" len="med"/>
+                    </a:lnR>
+                    <a:lnT w="28575" cap="flat" cmpd="sng" algn="ctr">
+                      <a:solidFill>
+                        <a:schemeClr val="bg1"/>
+                      </a:solidFill>
+                      <a:prstDash val="solid"/>
+                      <a:round/>
+                      <a:headEnd type="none" w="med" len="med"/>
+                      <a:tailEnd type="none" w="med" len="med"/>
+                    </a:lnT>
+                    <a:lnB w="28575" cap="flat" cmpd="sng" algn="ctr">
+                      <a:solidFill>
+                        <a:schemeClr val="bg1"/>
+                      </a:solidFill>
+                      <a:prstDash val="solid"/>
+                      <a:round/>
+                      <a:headEnd type="none" w="med" len="med"/>
+                      <a:tailEnd type="none" w="med" len="med"/>
+                    </a:lnB>
+                    <a:solidFill>
+                      <a:srgbClr val="D9D9D9"/>
+                    </a:solidFill>
+                  </a:tcPr>
+                </a:tc>
+                <a:extLst>
+                  <a:ext uri="{0D108BD9-81ED-4DB2-BD59-A6C34878D82A}">
+                    <a16:rowId xmlns:a16="http://schemas.microsoft.com/office/drawing/2014/main" val="10001"/>
+                  </a:ext>
+                </a:extLst>
+              </a:tr>
+            </a:tbl>
+          </a:graphicData>
+        </a:graphic>
+      </p:graphicFrame>
+      <p:cxnSp>
+        <p:nvCxnSpPr>
+          <p:cNvPr id="43" name="직선 화살표 연결선 42">
+            <a:extLst>
+              <a:ext uri="{FF2B5EF4-FFF2-40B4-BE49-F238E27FC236}">
+                <a16:creationId xmlns:a16="http://schemas.microsoft.com/office/drawing/2014/main" id="{7DB77A26-6A86-4B62-BC30-6434DE581D11}"/>
+              </a:ext>
+            </a:extLst>
+          </p:cNvPr>
+          <p:cNvCxnSpPr>
+            <a:cxnSpLocks/>
+            <a:stCxn id="30" idx="0"/>
+            <a:endCxn id="27" idx="2"/>
+          </p:cNvCxnSpPr>
+          <p:nvPr/>
+        </p:nvCxnSpPr>
+        <p:spPr>
+          <a:xfrm flipV="1">
+            <a:off x="1823209" y="3295189"/>
+            <a:ext cx="3221" cy="432747"/>
+          </a:xfrm>
+          <a:prstGeom prst="straightConnector1">
+            <a:avLst/>
+          </a:prstGeom>
+          <a:solidFill>
+            <a:schemeClr val="accent1"/>
+          </a:solidFill>
+          <a:ln w="19050" cap="flat" cmpd="sng" algn="ctr">
+            <a:solidFill>
+              <a:schemeClr val="tx1"/>
+            </a:solidFill>
+            <a:prstDash val="solid"/>
+            <a:round/>
+            <a:headEnd type="triangle" w="sm" len="sm"/>
+            <a:tailEnd type="triangle" w="sm" len="sm"/>
+          </a:ln>
+          <a:effectLst/>
+        </p:spPr>
+      </p:cxnSp>
+    </p:spTree>
+    <p:extLst>
+      <p:ext uri="{BB962C8B-B14F-4D97-AF65-F5344CB8AC3E}">
+        <p14:creationId xmlns:p14="http://schemas.microsoft.com/office/powerpoint/2010/main" val="1140772531"/>
       </p:ext>
     </p:extLst>
   </p:cSld>
